--- a/it/slides/24-Architettura_dei_Calcolatori-Superscalari_HPC_GPU_FPGA.pptx
+++ b/it/slides/24-Architettura_dei_Calcolatori-Superscalari_HPC_GPU_FPGA.pptx
@@ -126,47 +126,47 @@
   <p:extLst>
     <p:ext uri="{521415D9-36F7-43E2-AB2F-B90AF26B5E84}">
       <p14:sectionLst xmlns:p14="http://schemas.microsoft.com/office/powerpoint/2010/main">
-        <p14:section name="Apertura" id="{9ae977d3-23a8-6aaa-31f0-08c2f98dfe8d}">
+        <p14:section name="Apertura" id="{ebf96490-1493-d217-10dd-c1cd2bd026f0}">
           <p14:sldIdLst>
             <p14:sldId id="256"/>
             <p14:sldId id="257"/>
           </p14:sldIdLst>
         </p14:section>
-        <p14:section name="Riscaldamento sulla macchina" id="{25b4a12a-d93e-b997-9689-b2b291c17a8d}">
+        <p14:section name="Riscaldamento sulla macchina" id="{652c86b6-9ba9-3c3e-c742-2d3244004034}">
           <p14:sldIdLst>
             <p14:sldId id="258"/>
             <p14:sldId id="259"/>
           </p14:sldIdLst>
         </p14:section>
-        <p14:section name="Processori superscalari" id="{a44df114-a474-2d76-07c5-864a8829bc09}">
+        <p14:section name="Processori superscalari" id="{0b7a2afc-dc11-dcf8-1918-f510524b3b10}">
           <p14:sldIdLst>
             <p14:sldId id="260"/>
             <p14:sldId id="261"/>
             <p14:sldId id="262"/>
             <p14:sldId id="263"/>
+            <p14:sldId id="264"/>
           </p14:sldIdLst>
         </p14:section>
-        <p14:section name="Calcolo ad alte prestazioni" id="{19f11a4d-9ca9-2709-f690-b8273f896ed0}">
+        <p14:section name="Calcolo ad alte prestazioni" id="{b117b54d-c2a2-c0f3-e373-d4a377822898}">
           <p14:sldIdLst>
-            <p14:sldId id="264"/>
             <p14:sldId id="265"/>
             <p14:sldId id="266"/>
             <p14:sldId id="267"/>
-          </p14:sldIdLst>
-        </p14:section>
-        <p14:section name="Acceleratori GPU" id="{b9cd64ab-c5a8-8b18-30ba-d136b59637c6}">
-          <p14:sldIdLst>
             <p14:sldId id="268"/>
           </p14:sldIdLst>
         </p14:section>
-        <p14:section name="Acceleratori FPGA" id="{d3909730-f667-e549-e585-12db0f1edc14}">
+        <p14:section name="Acceleratori GPU" id="{9361159d-e245-4a1a-7d4a-7ac0e99744c5}">
           <p14:sldIdLst>
             <p14:sldId id="269"/>
+          </p14:sldIdLst>
+        </p14:section>
+        <p14:section name="Acceleratori FPGA" id="{1bf7dd9f-c2d2-10fe-7350-e8012aebd055}">
+          <p14:sldIdLst>
             <p14:sldId id="270"/>
             <p14:sldId id="271"/>
           </p14:sldIdLst>
         </p14:section>
-        <p14:section name="Ritorno alla macchina" id="{699f8ca7-29a4-01ab-d2c5-b18a6b2231e8}">
+        <p14:section name="Ritorno alla macchina" id="{933448f8-7594-e9b4-f518-e8891a3c170c}">
           <p14:sldIdLst>
             <p14:sldId id="272"/>
             <p14:sldId id="273"/>
@@ -667,8 +667,8 @@
           <a:p>
             <a:r>
               <a:rPr lang="en-US" dirty="0"/>
-              <a:t>La legge di Amdahl dice quanto può dare il parallelismo. Se una frazione p del lavoro si può svolgere in parallelo e il resto no, con n processori lo speed-up è 1 diviso la parte seriale più la parte parallela divisa per n. La parte seriale non si riduce per quanti processori si aggiungano. Con p uguale a 0,9 lo speed-up non può mai superare 10. La lezione pratica: prima di comprare processori, misurate p.
-Per il docente: Gene Amdahl, 1967. La stessa legge vale per ogni miglioramento che si applica solo a una parte del lavoro: una GPU più veloce non aiuta la parte che gira sulla CPU.</a:t>
+              <a:t>Un supercalcolatore non è un unico processore enorme: sono migliaia di calcolatori normali, i nodi, che lavorano allo stesso problema. Ogni nodo ha uno o due processori con decine di core, spesso più GPU, e molta memoria. Una rete molto veloce unisce i nodi, e un file system parallelo li serve tutti. La velocità si misura in operazioni in virgola mobile al secondo su un problema standard, e la lista TOP500 classifica le macchine più veloci dal 1993. La foto mostra armadi di nodi delle Research Computing Facilities dell'Ateneo.
+Per il docente: Il benchmark è HPL, High-Performance Linpack.</a:t>
             </a:r>
             <a:endParaRPr lang="en-US" dirty="0"/>
           </a:p>
@@ -756,8 +756,8 @@
           <a:p>
             <a:r>
               <a:rPr lang="en-US" dirty="0"/>
-              <a:t>Due modi di dividere il lavoro. Con la memoria condivisa, più core dello stesso nodo vedono la stessa memoria, e il programma gira come thread che leggono e scrivono le stesse variabili; è facile cominciare, e il pericolo sono due thread che scrivono la stessa variabile. Con la memoria distribuita ogni nodo ha la propria memoria, e il programma gira come processi che si scambiano messaggi, con lo standard MPI; scala fino a un milione di core, a spese del programmatore. Le applicazioni reali usano entrambi.
-Per il docente: Le applicazioni reali usano entrambi: MPI tra i nodi, thread e GPU dentro ogni nodo. I modelli meteorologici e marini del Dipartimento funzionano così.</a:t>
+              <a:t>La legge di Amdahl dice quanto può dare il parallelismo. Se una frazione p del lavoro si può svolgere in parallelo e il resto no, con n processori lo speed-up è 1 diviso la parte seriale più la parte parallela divisa per n. La parte seriale non si riduce per quanti processori si aggiungano. Con p uguale a 0,9 lo speed-up non può mai superare 10. La lezione pratica: prima di comprare processori, misurate p.
+Per il docente: Gene Amdahl, 1967. La stessa legge vale per ogni miglioramento che si applica solo a una parte del lavoro: una GPU più veloce non aiuta la parte che gira sulla CPU.</a:t>
             </a:r>
             <a:endParaRPr lang="en-US" dirty="0"/>
           </a:p>
@@ -845,8 +845,8 @@
           <a:p>
             <a:r>
               <a:rPr lang="en-US" dirty="0"/>
-              <a:t>Il limite è l'energia. Una macchina exascale assorbe circa venti megawatt, il consumo di una piccola città, e l'elettricità della sua vita utile costa quanto la macchina. Quindi la cifra che conta sono le operazioni per watt, che hanno una classifica propria, la Green500. La guida l'hardware specializzato, perché fa di più con ogni joule. La stessa ragione, all'altro estremo della scala, mette un piccolo core RISC-V nel vostro kit.
-Per il docente: Frontier ha raggiunto il suo exaflop a circa 21 megawatt. L'efficienza energetica è il filo che lega un microcontrollore a un supercalcolatore.</a:t>
+              <a:t>Due modi di dividere il lavoro. Con la memoria condivisa, più core dello stesso nodo vedono la stessa memoria, e il programma gira come thread che leggono e scrivono le stesse variabili; è facile cominciare, e il pericolo sono due thread che scrivono la stessa variabile. Con la memoria distribuita ogni nodo ha la propria memoria, e il programma gira come processi che si scambiano messaggi, con lo standard MPI; scala fino a un milione di core, a spese del programmatore. Le applicazioni reali usano entrambi.
+Per il docente: Le applicazioni reali usano entrambi: MPI tra i nodi, thread e GPU dentro ogni nodo. I modelli meteorologici e marini del Dipartimento funzionano così.</a:t>
             </a:r>
             <a:endParaRPr lang="en-US" dirty="0"/>
           </a:p>
@@ -934,8 +934,8 @@
           <a:p>
             <a:r>
               <a:rPr lang="en-US" dirty="0"/>
-              <a:t>Due modi di spendere gli stessi transistor. Una CPU ha pochi core grandi, ciascuno fuori ordine, con predittori e grandi cache: è costruita per finire un compito il prima possibile, ed è a suo agio con salti e dati irregolari. Una GPU ha migliaia di core piccoli e semplici che eseguono lo stesso codice su dati diversi: è costruita per finire moltissimi compiti al secondo, ed è a suo agio con array regolari. Buoi e polli: la risposta dipende dal campo.
-Per il docente: La Lezione 20 ha raccontato la storia dalla scheda video al GPGPU. I buoi e i polli di Cray: la risposta dipende dal campo. La GPU non è più veloce in nessuna singola cosa; fa più cose insieme.</a:t>
+              <a:t>Il limite è l'energia. Una macchina exascale assorbe circa venti megawatt, il consumo di una piccola città, e l'elettricità della sua vita utile costa quanto la macchina. Quindi la cifra che conta sono le operazioni per watt, che hanno una classifica propria, la Green500. La guida l'hardware specializzato, perché fa di più con ogni joule. La stessa ragione, all'altro estremo della scala, mette un piccolo core RISC-V nel vostro kit.
+Per il docente: Frontier ha raggiunto il suo exaflop a circa 21 megawatt. L'efficienza energetica è il filo che lega un microcontrollore a un supercalcolatore.</a:t>
             </a:r>
             <a:endParaRPr lang="en-US" dirty="0"/>
           </a:p>
@@ -1023,8 +1023,8 @@
           <a:p>
             <a:r>
               <a:rPr lang="en-US" dirty="0"/>
-              <a:t>Una FPGA, field-programmable gate array, è un chip che diventa il circuito che descrivete. Dentro c'è un mare di piccoli blocchi: tabelle di look-up, ciascuna capace di essere qualunque funzione di pochi ingressi; un flip-flop accanto a ogni tabella; e fili con interruttori che possono collegare ogni blocco a ogni altro. Un file di configurazione, il bitstream, imposta ogni tabella e ogni interruttore. Caricate un altro bitstream e lo stesso chip è un circuito diverso. Non esegue un programma: è un circuito.
-Per il docente: Lo Xilinx XC2064, 1985. Una FPGA non esegue un programma: diventa un circuito. Nulla viene prelevato o decodificato; tutte le porte lavorano nello stesso momento.</a:t>
+              <a:t>Due modi di spendere gli stessi transistor. Una CPU ha pochi core grandi, ciascuno fuori ordine, con predittori e grandi cache: è costruita per finire un compito il prima possibile, ed è a suo agio con salti e dati irregolari. Una GPU ha migliaia di core piccoli e semplici che eseguono lo stesso codice su dati diversi: è costruita per finire moltissimi compiti al secondo, ed è a suo agio con array regolari. Buoi e polli: la risposta dipende dal campo.
+Per il docente: La Lezione 20 ha raccontato la storia dalla scheda video al GPGPU. I buoi e i polli di Cray: la risposta dipende dal campo. La GPU non è più veloce in nessuna singola cosa; fa più cose insieme.</a:t>
             </a:r>
             <a:endParaRPr lang="en-US" dirty="0"/>
           </a:p>
@@ -1112,8 +1112,9 @@
           <a:p>
             <a:r>
               <a:rPr lang="en-US" dirty="0"/>
-              <a:t>Una tabella di look-up è una tabella di verità tenuta in memoria. Gli ingressi a e b sono l'indirizzo; i bit memorizzati sono le uscite. Leggete le tre colonne di destra: con i bit 0, 0, 0, 1 la tabella è una AND; con 0, 1, 1, 0 una XOR; con 1, 1, 0, 0 è NOT a. Cambiare i bit memorizzati cambia la porta. È la ROM che realizza qualunque funzione, dalla Lezione 11, in miniatura.
-Per il docente: La Lezione 08 ha detto che una tabella di verità definisce una funzione; la Lezione 11 che una ROM indirizzata dagli ingressi realizza qualunque funzione. Una LUT è quella ROM, con quattro-sei ingressi, da sedici a sessantaquattro bit. Il flip-flop accanto è quello della Lezione 13. Una FPGA è questo corso, ripetuto centomila volte su un chip.</a:t>
+              <a:t>Una FPGA, field-programmable gate array, è un chip che diventa il circuito che descrivete. Dentro c'è un mare di piccoli blocchi: tabelle di look-up, ciascuna capace di essere qualunque funzione di pochi ingressi; un flip-flop accanto a ogni tabella; e fili con interruttori che possono collegare ogni blocco a ogni altro. Un file di configurazione, il bitstream, imposta ogni tabella e ogni interruttore. Caricate un altro bitstream e lo stesso chip è un circuito diverso. Non esegue un programma: è un circuito.
+Per il docente: Lo Xilinx XC2064, 1985. Una FPGA non esegue un programma: diventa un circuito. Nulla viene prelevato o decodificato; tutte le porte lavorano nello stesso momento.
+Immagini: Mojo v3 FPGA Development Board (9303578174).jpg, SparkFun Electronics, CC BY 2.0, Wikimedia Commons.</a:t>
             </a:r>
             <a:endParaRPr lang="en-US" dirty="0"/>
           </a:p>
@@ -1738,7 +1739,7 @@
             <a:r>
               <a:rPr lang="en-US" dirty="0"/>
               <a:t>Il tempo impiegato da un programma è il prodotto di tre numeri: le istruzioni eseguite, i cicli di clock che ciascuna richiede in media, e la durata di un ciclo. Ogni fattore si può attaccare. Meno istruzioni: algoritmi migliori, istruzioni più ricche, vettori. Meno cicli per istruzione: pipeline ed esecuzione superscalare. Un ciclo più corto: transistor più veloci. E quando un processore non basta, più processori. Tenete d'occhio questa equazione: ogni macchina della lezione ne è una risposta diversa.
-Per il docente: L'equazione delle prestazioni di Patterson e Hennessy. Per il ciclo della slide precedente sul kit: 3 840 istruzioni, circa 1 ciclo ciascuna, 6,25 nanosecondi per ciclo.</a:t>
+Per il docente: L'equazione delle prestazioni di Patterson e Hennessy. Per il ciclo del riscaldamento (presentazione del codice) sul kit: 3 840 istruzioni, circa 1 ciclo ciascuna, 6,25 nanosecondi per ciclo.</a:t>
             </a:r>
             <a:endParaRPr lang="en-US" dirty="0"/>
           </a:p>
@@ -2182,8 +2183,8 @@
           <a:p>
             <a:r>
               <a:rPr lang="en-US" dirty="0"/>
-              <a:t>Una distinzione che organizza l'intero corso. L'architettura è il contratto: le istruzioni, i registri, che cosa fa ogni istruzione. La microarchitettura è un modo di rispettare il contratto: stadi, larghezza, predittori, cache. La add che avete scritto per un microcontrollore è la stessa add di un core da server. Verm1 girerebbe senza modifiche su qualunque core della slide precedente. Per questo un insieme di istruzioni, una volta imparato, è una conoscenza che dura.
-Per il docente: La distinzione che organizza l'intero corso: le Lezioni dalla 02 alla 22 hanno insegnato l'architettura; il kit è una piccola microarchitettura.</a:t>
+              <a:t>Processori RISC-V di questo tipo esistono. La prima riga è il core del vostro kit: in ordine, un'istruzione per ciclo. Gli altri sono core fuori ordine: BOOM di Berkeley e XiangShan dell'Accademia Cinese delle Scienze, entrambi open source; il C910, il P550, Veyron, di aziende. Poiché l'insieme di istruzioni è aperto, chiunque può costruire un core simile, e alcuni sono pubblicati come codice sorgente che potreste leggere.
+Per il docente: BOOM è la Berkeley Out-of-Order Machine. Poiché l'insieme di istruzioni è aperto, chiunque può costruire un core simile, e parecchi sono pubblicati come codice sorgente che uno studente può leggere: non ha precedenti tra le architetture commerciali. L'elenco invecchia in fretta: aggiornatelo.</a:t>
             </a:r>
             <a:endParaRPr lang="en-US" dirty="0"/>
           </a:p>
@@ -2271,8 +2272,8 @@
           <a:p>
             <a:r>
               <a:rPr lang="en-US" dirty="0"/>
-              <a:t>Un supercalcolatore non è un unico processore enorme: sono migliaia di calcolatori normali, i nodi, che lavorano allo stesso problema. Ogni nodo ha uno o due processori con decine di core, spesso più GPU, e molta memoria. Una rete molto veloce unisce i nodi, e un file system parallelo li serve tutti. La velocità si misura in operazioni in virgola mobile al secondo su un problema standard, e la lista TOP500 classifica le macchine più veloci dal 1993. La foto è un piccolo cluster con la stessa struttura.
-Per il docente: Il benchmark è HPL, High-Performance Linpack. La foto è il cluster didattico mostrato nella Lezione 03: la stessa struttura, in piccolo.</a:t>
+              <a:t>Una distinzione che organizza l'intero corso. L'architettura è il contratto: le istruzioni, i registri, che cosa fa ogni istruzione. La microarchitettura è un modo di rispettare il contratto: stadi, larghezza, predittori, cache. La add che avete scritto per un microcontrollore è la stessa add di un core da server. Verm1 girerebbe senza modifiche su qualunque core della slide precedente. Per questo un insieme di istruzioni, una volta imparato, è una conoscenza che dura.
+Per il docente: La distinzione che organizza l'intero corso: le Lezioni dalla 02 alla 22 hanno insegnato l'architettura; il kit è una piccola microarchitettura.</a:t>
             </a:r>
             <a:endParaRPr lang="en-US" dirty="0"/>
           </a:p>
@@ -3126,7 +3127,7 @@
                 <a:ea typeface="Cambria" pitchFamily="34" charset="-122"/>
                 <a:cs typeface="Cambria" pitchFamily="34" charset="-120"/>
               </a:rPr>
-              <a:t>Oltre un solo core: RISC-V superscalare, HPC, GPU e FPGA</a:t>
+              <a:t>Oltre un solo core: RISC‑V superscalare, HPC, GPU e FPGA</a:t>
             </a:r>
             <a:endParaRPr lang="en-US" sz="4800" dirty="0"/>
           </a:p>
@@ -3302,7 +3303,63 @@
       </p:sp>
       <p:sp>
         <p:nvSpPr>
-          <p:cNvPr id="12" name="Shape 10"/>
+          <p:cNvPr id="12" name="Text 10"/>
+          <p:cNvSpPr txBox="1"/>
+          <p:nvPr/>
+        </p:nvSpPr>
+        <p:spPr>
+          <a:xfrm>
+            <a:off x="4693615" y="566928"/>
+            <a:ext cx="6949440" cy="640080"/>
+          </a:xfrm>
+          <a:prstGeom prst="rect">
+            <a:avLst/>
+          </a:prstGeom>
+          <a:noFill/>
+          <a:ln/>
+        </p:spPr>
+        <p:txBody>
+          <a:bodyPr wrap="square" lIns="0" tIns="0" rIns="0" bIns="0" rtlCol="0" anchor="t"/>
+          <a:lstStyle/>
+          <a:p>
+            <a:pPr algn="r" indent="0" marL="0">
+              <a:buNone/>
+            </a:pPr>
+            <a:r>
+              <a:rPr lang="en-US" sz="1300" dirty="0">
+                <a:solidFill>
+                  <a:srgbClr val="CFE3EA"/>
+                </a:solidFill>
+                <a:latin typeface="Calibri" pitchFamily="34" charset="0"/>
+                <a:ea typeface="Calibri" pitchFamily="34" charset="-122"/>
+                <a:cs typeface="Calibri" pitchFamily="34" charset="-120"/>
+              </a:rPr>
+              <a:t>Presentazione della lezione. I listati, il programma completo e come provarlo sono nella presentazione del codice:</a:t>
+            </a:r>
+            <a:endParaRPr lang="en-US" sz="1300" dirty="0"/>
+          </a:p>
+          <a:p>
+            <a:pPr algn="r" indent="0" marL="0">
+              <a:buNone/>
+            </a:pPr>
+            <a:r>
+              <a:rPr lang="en-US" sz="1300" dirty="0">
+                <a:solidFill>
+                  <a:srgbClr val="CFE3EA"/>
+                </a:solidFill>
+                <a:latin typeface="Calibri" pitchFamily="34" charset="0"/>
+                <a:ea typeface="Calibri" pitchFamily="34" charset="-122"/>
+                <a:cs typeface="Calibri" pitchFamily="34" charset="-120"/>
+              </a:rPr>
+              <a:t>24-Architettura_dei_Calcolatori-Superscalari_HPC_GPU_FPGA-Codice.pptx</a:t>
+            </a:r>
+            <a:endParaRPr lang="en-US" sz="1300" dirty="0"/>
+          </a:p>
+        </p:txBody>
+      </p:sp>
+      <p:sp>
+        <p:nvSpPr>
+          <p:cNvPr id="13" name="Shape 11"/>
           <p:cNvSpPr/>
           <p:nvPr/>
         </p:nvSpPr>
@@ -3329,7 +3386,7 @@
       </p:sp>
       <p:pic>
         <p:nvPicPr>
-          <p:cNvPr id="13" name="Image 0" descr="/Users/raffaelemontella/devel/riscv-prg32/computer-architecture-with-prg32/tools/assets/cluster_1.jpg">    </p:cNvPr>
+          <p:cNvPr id="14" name="Image 0" descr="/Users/raffaelemontella/devel/riscv-prg32/computer-architecture-with-prg32/tools/assets/rcf_cluster.jpg">    </p:cNvPr>
           <p:cNvPicPr>
             <a:picLocks noChangeAspect="1"/>
           </p:cNvPicPr>
@@ -3343,8 +3400,8 @@
         </p:blipFill>
         <p:spPr>
           <a:xfrm>
-            <a:off x="8915095" y="4251960"/>
-            <a:ext cx="2438400" cy="1828800"/>
+            <a:off x="8716975" y="4686243"/>
+            <a:ext cx="2834640" cy="960234"/>
           </a:xfrm>
           <a:prstGeom prst="rect">
             <a:avLst/>
@@ -3459,7 +3516,7 @@
                 <a:ea typeface="Cambria" pitchFamily="34" charset="-122"/>
                 <a:cs typeface="Cambria" pitchFamily="34" charset="-120"/>
               </a:rPr>
-              <a:t>La legge di Amdahl</a:t>
+              <a:t>Che cos'è un supercalcolatore?</a:t>
             </a:r>
             <a:endParaRPr lang="en-US" sz="3200" dirty="0"/>
           </a:p>
@@ -3473,112 +3530,7 @@
         </p:nvSpPr>
         <p:spPr>
           <a:xfrm>
-            <a:off x="548640" y="1417320"/>
-            <a:ext cx="11094415" cy="1596136"/>
-          </a:xfrm>
-          <a:prstGeom prst="roundRect">
-            <a:avLst>
-              <a:gd name="adj" fmla="val 4583"/>
-            </a:avLst>
-          </a:prstGeom>
-          <a:solidFill>
-            <a:srgbClr val="F6E7D2"/>
-          </a:solidFill>
-          <a:ln w="12700">
-            <a:solidFill>
-              <a:srgbClr val="F6E7D2"/>
-            </a:solidFill>
-            <a:prstDash val="solid"/>
-          </a:ln>
-        </p:spPr>
-      </p:sp>
-      <p:sp>
-        <p:nvSpPr>
-          <p:cNvPr id="4" name="Text 2"/>
-          <p:cNvSpPr txBox="1"/>
-          <p:nvPr/>
-        </p:nvSpPr>
-        <p:spPr>
-          <a:xfrm>
-            <a:off x="914400" y="1600200"/>
-            <a:ext cx="10362895" cy="411480"/>
-          </a:xfrm>
-          <a:prstGeom prst="rect">
-            <a:avLst/>
-          </a:prstGeom>
-          <a:noFill/>
-          <a:ln/>
-        </p:spPr>
-        <p:txBody>
-          <a:bodyPr wrap="square" lIns="0" tIns="0" rIns="0" bIns="0" rtlCol="0" anchor="ctr"/>
-          <a:lstStyle/>
-          <a:p>
-            <a:pPr indent="0" marL="0">
-              <a:buNone/>
-            </a:pPr>
-            <a:r>
-              <a:rPr lang="en-US" sz="1600" b="1" dirty="0">
-                <a:solidFill>
-                  <a:srgbClr val="C7791B"/>
-                </a:solidFill>
-                <a:latin typeface="Calibri" pitchFamily="34" charset="0"/>
-                <a:ea typeface="Calibri" pitchFamily="34" charset="-122"/>
-                <a:cs typeface="Calibri" pitchFamily="34" charset="-120"/>
-              </a:rPr>
-              <a:t>Speed-up con n processori</a:t>
-            </a:r>
-            <a:endParaRPr lang="en-US" sz="1600" dirty="0"/>
-          </a:p>
-        </p:txBody>
-      </p:sp>
-      <p:sp>
-        <p:nvSpPr>
-          <p:cNvPr id="5" name="Text 3"/>
-          <p:cNvSpPr txBox="1"/>
-          <p:nvPr/>
-        </p:nvSpPr>
-        <p:spPr>
-          <a:xfrm>
-            <a:off x="914400" y="2057400"/>
-            <a:ext cx="10362895" cy="773176"/>
-          </a:xfrm>
-          <a:prstGeom prst="rect">
-            <a:avLst/>
-          </a:prstGeom>
-          <a:noFill/>
-          <a:ln/>
-        </p:spPr>
-        <p:txBody>
-          <a:bodyPr wrap="square" lIns="0" tIns="0" rIns="0" bIns="0" rtlCol="0" anchor="ctr"/>
-          <a:lstStyle/>
-          <a:p>
-            <a:pPr indent="0" marL="0">
-              <a:buNone/>
-            </a:pPr>
-            <a:r>
-              <a:rPr lang="en-US" sz="2400" i="1" dirty="0">
-                <a:solidFill>
-                  <a:srgbClr val="1B2530"/>
-                </a:solidFill>
-                <a:latin typeface="Cambria" pitchFamily="34" charset="0"/>
-                <a:ea typeface="Cambria" pitchFamily="34" charset="-122"/>
-                <a:cs typeface="Cambria" pitchFamily="34" charset="-120"/>
-              </a:rPr>
-              <a:t>S = 1 / ((1 - p) + p / n), dove p è la frazione del lavoro che si può svolgere in parallelo.</a:t>
-            </a:r>
-            <a:endParaRPr lang="en-US" sz="2400" dirty="0"/>
-          </a:p>
-        </p:txBody>
-      </p:sp>
-      <p:sp>
-        <p:nvSpPr>
-          <p:cNvPr id="6" name="Shape 4"/>
-          <p:cNvSpPr/>
-          <p:nvPr/>
-        </p:nvSpPr>
-        <p:spPr>
-          <a:xfrm>
-            <a:off x="548640" y="3487928"/>
+            <a:off x="548640" y="1500505"/>
             <a:ext cx="146304" cy="146304"/>
           </a:xfrm>
           <a:prstGeom prst="rect">
@@ -3597,14 +3549,14 @@
       </p:sp>
       <p:sp>
         <p:nvSpPr>
-          <p:cNvPr id="7" name="Text 5"/>
+          <p:cNvPr id="4" name="Text 2"/>
           <p:cNvSpPr txBox="1"/>
           <p:nvPr/>
         </p:nvSpPr>
         <p:spPr>
           <a:xfrm>
-            <a:off x="932688" y="3366008"/>
-            <a:ext cx="10710367" cy="743712"/>
+            <a:off x="932688" y="1417320"/>
+            <a:ext cx="6565392" cy="883158"/>
           </a:xfrm>
           <a:prstGeom prst="rect">
             <a:avLst/>
@@ -3623,7 +3575,7 @@
               <a:buNone/>
             </a:pPr>
             <a:r>
-              <a:rPr lang="en-US" sz="2400" dirty="0">
+              <a:rPr lang="en-US" sz="1900" dirty="0">
                 <a:solidFill>
                   <a:srgbClr val="1B2530"/>
                 </a:solidFill>
@@ -3631,21 +3583,21 @@
                 <a:ea typeface="Calibri" pitchFamily="34" charset="-122"/>
                 <a:cs typeface="Calibri" pitchFamily="34" charset="-120"/>
               </a:rPr>
-              <a:t>La frazione seriale, 1 - p, non si riduce per quanti processori si aggiungano</a:t>
+              <a:t>Non un unico processore enorme: migliaia di calcolatori normali, i nodi, che lavorano allo stesso problema</a:t>
             </a:r>
-            <a:endParaRPr lang="en-US" sz="2400" dirty="0"/>
-          </a:p>
-        </p:txBody>
-      </p:sp>
-      <p:sp>
-        <p:nvSpPr>
-          <p:cNvPr id="8" name="Shape 6"/>
+            <a:endParaRPr lang="en-US" sz="1900" dirty="0"/>
+          </a:p>
+        </p:txBody>
+      </p:sp>
+      <p:sp>
+        <p:nvSpPr>
+          <p:cNvPr id="5" name="Shape 3"/>
           <p:cNvSpPr/>
           <p:nvPr/>
         </p:nvSpPr>
         <p:spPr>
           <a:xfrm>
-            <a:off x="548640" y="4688840"/>
+            <a:off x="548640" y="2549462"/>
             <a:ext cx="146304" cy="146304"/>
           </a:xfrm>
           <a:prstGeom prst="rect">
@@ -3664,14 +3616,14 @@
       </p:sp>
       <p:sp>
         <p:nvSpPr>
-          <p:cNvPr id="9" name="Text 7"/>
+          <p:cNvPr id="6" name="Text 4"/>
           <p:cNvSpPr txBox="1"/>
           <p:nvPr/>
         </p:nvSpPr>
         <p:spPr>
           <a:xfrm>
-            <a:off x="932688" y="4566920"/>
-            <a:ext cx="10710367" cy="743712"/>
+            <a:off x="932688" y="2466277"/>
+            <a:ext cx="6565392" cy="1147826"/>
           </a:xfrm>
           <a:prstGeom prst="rect">
             <a:avLst/>
@@ -3690,7 +3642,7 @@
               <a:buNone/>
             </a:pPr>
             <a:r>
-              <a:rPr lang="en-US" sz="2400" dirty="0">
+              <a:rPr lang="en-US" sz="1900" dirty="0">
                 <a:solidFill>
                   <a:srgbClr val="1B2530"/>
                 </a:solidFill>
@@ -3698,21 +3650,81 @@
                 <a:ea typeface="Calibri" pitchFamily="34" charset="-122"/>
                 <a:cs typeface="Calibri" pitchFamily="34" charset="-120"/>
               </a:rPr>
-              <a:t>Con p = 0,9 lo speed-up non può mai superare 10, nemmeno con un milione di processori</a:t>
+              <a:t>Ogni nodo ha</a:t>
             </a:r>
-            <a:endParaRPr lang="en-US" sz="2400" dirty="0"/>
-          </a:p>
-        </p:txBody>
-      </p:sp>
-      <p:sp>
-        <p:nvSpPr>
-          <p:cNvPr id="10" name="Shape 8"/>
+            <a:endParaRPr lang="en-US" sz="1900" dirty="0"/>
+          </a:p>
+          <a:p>
+            <a:pPr indent="0" marL="0">
+              <a:spcAft>
+                <a:spcPts val="200"/>
+              </a:spcAft>
+              <a:buNone/>
+            </a:pPr>
+            <a:r>
+              <a:rPr lang="en-US" sz="1600" dirty="0">
+                <a:solidFill>
+                  <a:srgbClr val="5B6B78"/>
+                </a:solidFill>
+                <a:latin typeface="Calibri" pitchFamily="34" charset="0"/>
+                <a:ea typeface="Calibri" pitchFamily="34" charset="-122"/>
+                <a:cs typeface="Calibri" pitchFamily="34" charset="-120"/>
+              </a:rPr>
+              <a:t>– uno o due processori con decine di core</a:t>
+            </a:r>
+            <a:endParaRPr lang="en-US" sz="1900" dirty="0"/>
+          </a:p>
+          <a:p>
+            <a:pPr indent="0" marL="0">
+              <a:spcAft>
+                <a:spcPts val="200"/>
+              </a:spcAft>
+              <a:buNone/>
+            </a:pPr>
+            <a:r>
+              <a:rPr lang="en-US" sz="1600" dirty="0">
+                <a:solidFill>
+                  <a:srgbClr val="5B6B78"/>
+                </a:solidFill>
+                <a:latin typeface="Calibri" pitchFamily="34" charset="0"/>
+                <a:ea typeface="Calibri" pitchFamily="34" charset="-122"/>
+                <a:cs typeface="Calibri" pitchFamily="34" charset="-120"/>
+              </a:rPr>
+              <a:t>– spesso più GPU</a:t>
+            </a:r>
+            <a:endParaRPr lang="en-US" sz="1900" dirty="0"/>
+          </a:p>
+          <a:p>
+            <a:pPr indent="0" marL="0">
+              <a:spcAft>
+                <a:spcPts val="200"/>
+              </a:spcAft>
+              <a:buNone/>
+            </a:pPr>
+            <a:r>
+              <a:rPr lang="en-US" sz="1600" dirty="0">
+                <a:solidFill>
+                  <a:srgbClr val="5B6B78"/>
+                </a:solidFill>
+                <a:latin typeface="Calibri" pitchFamily="34" charset="0"/>
+                <a:ea typeface="Calibri" pitchFamily="34" charset="-122"/>
+                <a:cs typeface="Calibri" pitchFamily="34" charset="-120"/>
+              </a:rPr>
+              <a:t>– moltissima memoria</a:t>
+            </a:r>
+            <a:endParaRPr lang="en-US" sz="1900" dirty="0"/>
+          </a:p>
+        </p:txBody>
+      </p:sp>
+      <p:sp>
+        <p:nvSpPr>
+          <p:cNvPr id="7" name="Shape 5"/>
           <p:cNvSpPr/>
           <p:nvPr/>
         </p:nvSpPr>
         <p:spPr>
           <a:xfrm>
-            <a:off x="548640" y="5889752"/>
+            <a:off x="548640" y="3863086"/>
             <a:ext cx="146304" cy="146304"/>
           </a:xfrm>
           <a:prstGeom prst="rect">
@@ -3731,14 +3743,14 @@
       </p:sp>
       <p:sp>
         <p:nvSpPr>
-          <p:cNvPr id="11" name="Text 9"/>
+          <p:cNvPr id="8" name="Text 6"/>
           <p:cNvSpPr txBox="1"/>
           <p:nvPr/>
         </p:nvSpPr>
         <p:spPr>
           <a:xfrm>
-            <a:off x="932688" y="5767832"/>
-            <a:ext cx="10710367" cy="371856"/>
+            <a:off x="932688" y="3779901"/>
+            <a:ext cx="6565392" cy="588772"/>
           </a:xfrm>
           <a:prstGeom prst="rect">
             <a:avLst/>
@@ -3757,7 +3769,7 @@
               <a:buNone/>
             </a:pPr>
             <a:r>
-              <a:rPr lang="en-US" sz="2400" dirty="0">
+              <a:rPr lang="en-US" sz="1900" dirty="0">
                 <a:solidFill>
                   <a:srgbClr val="1B2530"/>
                 </a:solidFill>
@@ -3765,9 +3777,206 @@
                 <a:ea typeface="Calibri" pitchFamily="34" charset="-122"/>
                 <a:cs typeface="Calibri" pitchFamily="34" charset="-120"/>
               </a:rPr>
-              <a:t>Prima di comprare processori, misurate p</a:t>
+              <a:t>Una rete molto veloce unisce i nodi, e un file system parallelo li serve tutti</a:t>
             </a:r>
-            <a:endParaRPr lang="en-US" sz="2400" dirty="0"/>
+            <a:endParaRPr lang="en-US" sz="1900" dirty="0"/>
+          </a:p>
+        </p:txBody>
+      </p:sp>
+      <p:sp>
+        <p:nvSpPr>
+          <p:cNvPr id="9" name="Shape 7"/>
+          <p:cNvSpPr/>
+          <p:nvPr/>
+        </p:nvSpPr>
+        <p:spPr>
+          <a:xfrm>
+            <a:off x="548640" y="4617657"/>
+            <a:ext cx="146304" cy="146304"/>
+          </a:xfrm>
+          <a:prstGeom prst="rect">
+            <a:avLst/>
+          </a:prstGeom>
+          <a:solidFill>
+            <a:srgbClr val="C7791B"/>
+          </a:solidFill>
+          <a:ln w="12700">
+            <a:solidFill>
+              <a:srgbClr val="C7791B"/>
+            </a:solidFill>
+            <a:prstDash val="solid"/>
+          </a:ln>
+        </p:spPr>
+      </p:sp>
+      <p:sp>
+        <p:nvSpPr>
+          <p:cNvPr id="10" name="Text 8"/>
+          <p:cNvSpPr txBox="1"/>
+          <p:nvPr/>
+        </p:nvSpPr>
+        <p:spPr>
+          <a:xfrm>
+            <a:off x="932688" y="4534472"/>
+            <a:ext cx="6565392" cy="883158"/>
+          </a:xfrm>
+          <a:prstGeom prst="rect">
+            <a:avLst/>
+          </a:prstGeom>
+          <a:noFill/>
+          <a:ln/>
+        </p:spPr>
+        <p:txBody>
+          <a:bodyPr wrap="square" lIns="0" tIns="0" rIns="0" bIns="0" rtlCol="0" anchor="t"/>
+          <a:lstStyle/>
+          <a:p>
+            <a:pPr indent="0" marL="0">
+              <a:spcAft>
+                <a:spcPts val="200"/>
+              </a:spcAft>
+              <a:buNone/>
+            </a:pPr>
+            <a:r>
+              <a:rPr lang="en-US" sz="1900" dirty="0">
+                <a:solidFill>
+                  <a:srgbClr val="1B2530"/>
+                </a:solidFill>
+                <a:latin typeface="Calibri" pitchFamily="34" charset="0"/>
+                <a:ea typeface="Calibri" pitchFamily="34" charset="-122"/>
+                <a:cs typeface="Calibri" pitchFamily="34" charset="-120"/>
+              </a:rPr>
+              <a:t>La velocità si misura in operazioni in virgola mobile al secondo, FLOPS, su un problema standard: un enorme sistema di equazioni lineari</a:t>
+            </a:r>
+            <a:endParaRPr lang="en-US" sz="1900" dirty="0"/>
+          </a:p>
+        </p:txBody>
+      </p:sp>
+      <p:sp>
+        <p:nvSpPr>
+          <p:cNvPr id="11" name="Shape 9"/>
+          <p:cNvSpPr/>
+          <p:nvPr/>
+        </p:nvSpPr>
+        <p:spPr>
+          <a:xfrm>
+            <a:off x="548640" y="5666613"/>
+            <a:ext cx="146304" cy="146304"/>
+          </a:xfrm>
+          <a:prstGeom prst="rect">
+            <a:avLst/>
+          </a:prstGeom>
+          <a:solidFill>
+            <a:srgbClr val="0E7C86"/>
+          </a:solidFill>
+          <a:ln w="12700">
+            <a:solidFill>
+              <a:srgbClr val="0E7C86"/>
+            </a:solidFill>
+            <a:prstDash val="solid"/>
+          </a:ln>
+        </p:spPr>
+      </p:sp>
+      <p:sp>
+        <p:nvSpPr>
+          <p:cNvPr id="12" name="Text 10"/>
+          <p:cNvSpPr txBox="1"/>
+          <p:nvPr/>
+        </p:nvSpPr>
+        <p:spPr>
+          <a:xfrm>
+            <a:off x="932688" y="5583428"/>
+            <a:ext cx="6565392" cy="588772"/>
+          </a:xfrm>
+          <a:prstGeom prst="rect">
+            <a:avLst/>
+          </a:prstGeom>
+          <a:noFill/>
+          <a:ln/>
+        </p:spPr>
+        <p:txBody>
+          <a:bodyPr wrap="square" lIns="0" tIns="0" rIns="0" bIns="0" rtlCol="0" anchor="t"/>
+          <a:lstStyle/>
+          <a:p>
+            <a:pPr indent="0" marL="0">
+              <a:spcAft>
+                <a:spcPts val="200"/>
+              </a:spcAft>
+              <a:buNone/>
+            </a:pPr>
+            <a:r>
+              <a:rPr lang="en-US" sz="1900" dirty="0">
+                <a:solidFill>
+                  <a:srgbClr val="1B2530"/>
+                </a:solidFill>
+                <a:latin typeface="Calibri" pitchFamily="34" charset="0"/>
+                <a:ea typeface="Calibri" pitchFamily="34" charset="-122"/>
+                <a:cs typeface="Calibri" pitchFamily="34" charset="-120"/>
+              </a:rPr>
+              <a:t>La lista TOP500 classifica le macchine più veloci due volte l'anno dal 1993</a:t>
+            </a:r>
+            <a:endParaRPr lang="en-US" sz="1900" dirty="0"/>
+          </a:p>
+        </p:txBody>
+      </p:sp>
+      <p:pic>
+        <p:nvPicPr>
+          <p:cNvPr id="13" name="Image 0" descr="/Users/raffaelemontella/devel/riscv-prg32/computer-architecture-with-prg32/tools/assets/rcf_cluster.jpg">    </p:cNvPr>
+          <p:cNvPicPr>
+            <a:picLocks noChangeAspect="1"/>
+          </p:cNvPicPr>
+          <p:nvPr/>
+        </p:nvPicPr>
+        <p:blipFill>
+          <a:blip r:embed="rId1"/>
+          <a:stretch>
+            <a:fillRect/>
+          </a:stretch>
+        </p:blipFill>
+        <p:spPr>
+          <a:xfrm>
+            <a:off x="7863840" y="2926055"/>
+            <a:ext cx="3779215" cy="1280209"/>
+          </a:xfrm>
+          <a:prstGeom prst="rect">
+            <a:avLst/>
+          </a:prstGeom>
+        </p:spPr>
+      </p:pic>
+      <p:sp>
+        <p:nvSpPr>
+          <p:cNvPr id="14" name="Text 11"/>
+          <p:cNvSpPr txBox="1"/>
+          <p:nvPr/>
+        </p:nvSpPr>
+        <p:spPr>
+          <a:xfrm>
+            <a:off x="7863840" y="5788152"/>
+            <a:ext cx="3779215" cy="384048"/>
+          </a:xfrm>
+          <a:prstGeom prst="rect">
+            <a:avLst/>
+          </a:prstGeom>
+          <a:noFill/>
+          <a:ln/>
+        </p:spPr>
+        <p:txBody>
+          <a:bodyPr wrap="square" lIns="0" tIns="0" rIns="0" bIns="0" rtlCol="0" anchor="ctr"/>
+          <a:lstStyle/>
+          <a:p>
+            <a:pPr algn="ctr" indent="0" marL="0">
+              <a:buNone/>
+            </a:pPr>
+            <a:r>
+              <a:rPr lang="en-US" sz="1200" i="1" dirty="0">
+                <a:solidFill>
+                  <a:srgbClr val="5B6B78"/>
+                </a:solidFill>
+                <a:latin typeface="Calibri" pitchFamily="34" charset="0"/>
+                <a:ea typeface="Calibri" pitchFamily="34" charset="-122"/>
+                <a:cs typeface="Calibri" pitchFamily="34" charset="-120"/>
+              </a:rPr>
+              <a:t>Armadi di nodi: le Research Computing Facilities dell'Ateneo</a:t>
+            </a:r>
+            <a:endParaRPr lang="en-US" sz="1200" dirty="0"/>
           </a:p>
         </p:txBody>
       </p:sp>
@@ -3879,7 +4088,7 @@
                 <a:ea typeface="Cambria" pitchFamily="34" charset="-122"/>
                 <a:cs typeface="Cambria" pitchFamily="34" charset="-120"/>
               </a:rPr>
-              <a:t>Due modi di dividere il lavoro</a:t>
+              <a:t>La legge di Amdahl</a:t>
             </a:r>
             <a:endParaRPr lang="en-US" sz="3200" dirty="0"/>
           </a:p>
@@ -3894,19 +4103,19 @@
         <p:spPr>
           <a:xfrm>
             <a:off x="548640" y="1417320"/>
-            <a:ext cx="5364328" cy="4754880"/>
+            <a:ext cx="11094415" cy="1596136"/>
           </a:xfrm>
           <a:prstGeom prst="roundRect">
             <a:avLst>
-              <a:gd name="adj" fmla="val 1538"/>
+              <a:gd name="adj" fmla="val 4583"/>
             </a:avLst>
           </a:prstGeom>
           <a:solidFill>
-            <a:srgbClr val="EEF2F4"/>
+            <a:srgbClr val="F6E7D2"/>
           </a:solidFill>
           <a:ln w="12700">
             <a:solidFill>
-              <a:srgbClr val="EEF2F4"/>
+              <a:srgbClr val="F6E7D2"/>
             </a:solidFill>
             <a:prstDash val="solid"/>
           </a:ln>
@@ -3920,42 +4129,34 @@
         </p:nvSpPr>
         <p:spPr>
           <a:xfrm>
-            <a:off x="822960" y="1645920"/>
-            <a:ext cx="4815688" cy="548640"/>
-          </a:xfrm>
-          <a:prstGeom prst="roundRect">
-            <a:avLst>
-              <a:gd name="adj" fmla="val 13333"/>
-            </a:avLst>
-          </a:prstGeom>
-          <a:solidFill>
-            <a:srgbClr val="0E7C86"/>
-          </a:solidFill>
-          <a:ln>
-            <a:solidFill>
-              <a:srgbClr val="0E7C86"/>
-            </a:solidFill>
-          </a:ln>
+            <a:off x="914400" y="1600200"/>
+            <a:ext cx="10362895" cy="411480"/>
+          </a:xfrm>
+          <a:prstGeom prst="rect">
+            <a:avLst/>
+          </a:prstGeom>
+          <a:noFill/>
+          <a:ln/>
         </p:spPr>
         <p:txBody>
           <a:bodyPr wrap="square" lIns="0" tIns="0" rIns="0" bIns="0" rtlCol="0" anchor="ctr"/>
           <a:lstStyle/>
           <a:p>
-            <a:pPr algn="ctr" indent="0" marL="0">
+            <a:pPr indent="0" marL="0">
               <a:buNone/>
             </a:pPr>
             <a:r>
-              <a:rPr lang="en-US" sz="1900" b="1" dirty="0">
+              <a:rPr lang="en-US" sz="1600" b="1" dirty="0">
                 <a:solidFill>
-                  <a:srgbClr val="FFFFFF"/>
+                  <a:srgbClr val="C7791B"/>
                 </a:solidFill>
                 <a:latin typeface="Calibri" pitchFamily="34" charset="0"/>
                 <a:ea typeface="Calibri" pitchFamily="34" charset="-122"/>
                 <a:cs typeface="Calibri" pitchFamily="34" charset="-120"/>
               </a:rPr>
-              <a:t>Memoria condivisa</a:t>
+              <a:t>Speed-up con n processori</a:t>
             </a:r>
-            <a:endParaRPr lang="en-US" sz="1900" dirty="0"/>
+            <a:endParaRPr lang="en-US" sz="1600" dirty="0"/>
           </a:p>
         </p:txBody>
       </p:sp>
@@ -3967,8 +4168,8 @@
         </p:nvSpPr>
         <p:spPr>
           <a:xfrm>
-            <a:off x="868680" y="2423160"/>
-            <a:ext cx="4724248" cy="3566160"/>
+            <a:off x="914400" y="2057400"/>
+            <a:ext cx="10362895" cy="773176"/>
           </a:xfrm>
           <a:prstGeom prst="rect">
             <a:avLst/>
@@ -3977,18 +4178,81 @@
           <a:ln/>
         </p:spPr>
         <p:txBody>
+          <a:bodyPr wrap="square" lIns="0" tIns="0" rIns="0" bIns="0" rtlCol="0" anchor="ctr"/>
+          <a:lstStyle/>
+          <a:p>
+            <a:pPr indent="0" marL="0">
+              <a:buNone/>
+            </a:pPr>
+            <a:r>
+              <a:rPr lang="en-US" sz="2400" i="1" dirty="0">
+                <a:solidFill>
+                  <a:srgbClr val="1B2530"/>
+                </a:solidFill>
+                <a:latin typeface="Cambria" pitchFamily="34" charset="0"/>
+                <a:ea typeface="Cambria" pitchFamily="34" charset="-122"/>
+                <a:cs typeface="Cambria" pitchFamily="34" charset="-120"/>
+              </a:rPr>
+              <a:t>S = 1 / ((1 - p) + p / n), dove p è la frazione del lavoro che si può svolgere in parallelo.</a:t>
+            </a:r>
+            <a:endParaRPr lang="en-US" sz="2400" dirty="0"/>
+          </a:p>
+        </p:txBody>
+      </p:sp>
+      <p:sp>
+        <p:nvSpPr>
+          <p:cNvPr id="6" name="Shape 4"/>
+          <p:cNvSpPr/>
+          <p:nvPr/>
+        </p:nvSpPr>
+        <p:spPr>
+          <a:xfrm>
+            <a:off x="548640" y="3487928"/>
+            <a:ext cx="146304" cy="146304"/>
+          </a:xfrm>
+          <a:prstGeom prst="rect">
+            <a:avLst/>
+          </a:prstGeom>
+          <a:solidFill>
+            <a:srgbClr val="0E7C86"/>
+          </a:solidFill>
+          <a:ln w="12700">
+            <a:solidFill>
+              <a:srgbClr val="0E7C86"/>
+            </a:solidFill>
+            <a:prstDash val="solid"/>
+          </a:ln>
+        </p:spPr>
+      </p:sp>
+      <p:sp>
+        <p:nvSpPr>
+          <p:cNvPr id="7" name="Text 5"/>
+          <p:cNvSpPr txBox="1"/>
+          <p:nvPr/>
+        </p:nvSpPr>
+        <p:spPr>
+          <a:xfrm>
+            <a:off x="932688" y="3366008"/>
+            <a:ext cx="10710367" cy="743712"/>
+          </a:xfrm>
+          <a:prstGeom prst="rect">
+            <a:avLst/>
+          </a:prstGeom>
+          <a:noFill/>
+          <a:ln/>
+        </p:spPr>
+        <p:txBody>
           <a:bodyPr wrap="square" lIns="0" tIns="0" rIns="0" bIns="0" rtlCol="0" anchor="t"/>
           <a:lstStyle/>
           <a:p>
-            <a:pPr marL="203200" indent="-203200">
+            <a:pPr indent="0" marL="0">
               <a:spcAft>
-                <a:spcPts val="800"/>
+                <a:spcPts val="200"/>
               </a:spcAft>
-              <a:buSzPct val="100000"/>
-              <a:buChar char="•"/>
+              <a:buNone/>
             </a:pPr>
             <a:r>
-              <a:rPr lang="en-US" sz="2100" dirty="0">
+              <a:rPr lang="en-US" sz="2400" dirty="0">
                 <a:solidFill>
                   <a:srgbClr val="1B2530"/>
                 </a:solidFill>
@@ -3996,20 +4260,66 @@
                 <a:ea typeface="Calibri" pitchFamily="34" charset="-122"/>
                 <a:cs typeface="Calibri" pitchFamily="34" charset="-120"/>
               </a:rPr>
-              <a:t>Più core di un nodo vedono la stessa memoria</a:t>
+              <a:t>La frazione seriale, 1 - p, non si riduce per quanti processori si aggiungano</a:t>
             </a:r>
-            <a:endParaRPr lang="en-US" sz="2100" dirty="0"/>
-          </a:p>
-          <a:p>
-            <a:pPr marL="203200" indent="-203200">
+            <a:endParaRPr lang="en-US" sz="2400" dirty="0"/>
+          </a:p>
+        </p:txBody>
+      </p:sp>
+      <p:sp>
+        <p:nvSpPr>
+          <p:cNvPr id="8" name="Shape 6"/>
+          <p:cNvSpPr/>
+          <p:nvPr/>
+        </p:nvSpPr>
+        <p:spPr>
+          <a:xfrm>
+            <a:off x="548640" y="4688840"/>
+            <a:ext cx="146304" cy="146304"/>
+          </a:xfrm>
+          <a:prstGeom prst="rect">
+            <a:avLst/>
+          </a:prstGeom>
+          <a:solidFill>
+            <a:srgbClr val="C7791B"/>
+          </a:solidFill>
+          <a:ln w="12700">
+            <a:solidFill>
+              <a:srgbClr val="C7791B"/>
+            </a:solidFill>
+            <a:prstDash val="solid"/>
+          </a:ln>
+        </p:spPr>
+      </p:sp>
+      <p:sp>
+        <p:nvSpPr>
+          <p:cNvPr id="9" name="Text 7"/>
+          <p:cNvSpPr txBox="1"/>
+          <p:nvPr/>
+        </p:nvSpPr>
+        <p:spPr>
+          <a:xfrm>
+            <a:off x="932688" y="4566920"/>
+            <a:ext cx="10710367" cy="743712"/>
+          </a:xfrm>
+          <a:prstGeom prst="rect">
+            <a:avLst/>
+          </a:prstGeom>
+          <a:noFill/>
+          <a:ln/>
+        </p:spPr>
+        <p:txBody>
+          <a:bodyPr wrap="square" lIns="0" tIns="0" rIns="0" bIns="0" rtlCol="0" anchor="t"/>
+          <a:lstStyle/>
+          <a:p>
+            <a:pPr indent="0" marL="0">
               <a:spcAft>
-                <a:spcPts val="800"/>
+                <a:spcPts val="200"/>
               </a:spcAft>
-              <a:buSzPct val="100000"/>
-              <a:buChar char="•"/>
+              <a:buNone/>
             </a:pPr>
             <a:r>
-              <a:rPr lang="en-US" sz="2100" dirty="0">
+              <a:rPr lang="en-US" sz="2400" dirty="0">
                 <a:solidFill>
                   <a:srgbClr val="1B2530"/>
                 </a:solidFill>
@@ -4017,20 +4327,66 @@
                 <a:ea typeface="Calibri" pitchFamily="34" charset="-122"/>
                 <a:cs typeface="Calibri" pitchFamily="34" charset="-120"/>
               </a:rPr>
-              <a:t>Il programma gira come thread che leggono e scrivono le stesse variabili</a:t>
+              <a:t>Con p = 0,9 lo speed-up non può mai superare 10, nemmeno con un milione di processori</a:t>
             </a:r>
-            <a:endParaRPr lang="en-US" sz="2100" dirty="0"/>
-          </a:p>
-          <a:p>
-            <a:pPr marL="203200" indent="-203200">
+            <a:endParaRPr lang="en-US" sz="2400" dirty="0"/>
+          </a:p>
+        </p:txBody>
+      </p:sp>
+      <p:sp>
+        <p:nvSpPr>
+          <p:cNvPr id="10" name="Shape 8"/>
+          <p:cNvSpPr/>
+          <p:nvPr/>
+        </p:nvSpPr>
+        <p:spPr>
+          <a:xfrm>
+            <a:off x="548640" y="5889752"/>
+            <a:ext cx="146304" cy="146304"/>
+          </a:xfrm>
+          <a:prstGeom prst="rect">
+            <a:avLst/>
+          </a:prstGeom>
+          <a:solidFill>
+            <a:srgbClr val="0E7C86"/>
+          </a:solidFill>
+          <a:ln w="12700">
+            <a:solidFill>
+              <a:srgbClr val="0E7C86"/>
+            </a:solidFill>
+            <a:prstDash val="solid"/>
+          </a:ln>
+        </p:spPr>
+      </p:sp>
+      <p:sp>
+        <p:nvSpPr>
+          <p:cNvPr id="11" name="Text 9"/>
+          <p:cNvSpPr txBox="1"/>
+          <p:nvPr/>
+        </p:nvSpPr>
+        <p:spPr>
+          <a:xfrm>
+            <a:off x="932688" y="5767832"/>
+            <a:ext cx="10710367" cy="371856"/>
+          </a:xfrm>
+          <a:prstGeom prst="rect">
+            <a:avLst/>
+          </a:prstGeom>
+          <a:noFill/>
+          <a:ln/>
+        </p:spPr>
+        <p:txBody>
+          <a:bodyPr wrap="square" lIns="0" tIns="0" rIns="0" bIns="0" rtlCol="0" anchor="t"/>
+          <a:lstStyle/>
+          <a:p>
+            <a:pPr indent="0" marL="0">
               <a:spcAft>
-                <a:spcPts val="800"/>
+                <a:spcPts val="200"/>
               </a:spcAft>
-              <a:buSzPct val="100000"/>
-              <a:buChar char="•"/>
+              <a:buNone/>
             </a:pPr>
             <a:r>
-              <a:rPr lang="en-US" sz="2100" dirty="0">
+              <a:rPr lang="en-US" sz="2400" dirty="0">
                 <a:solidFill>
                   <a:srgbClr val="1B2530"/>
                 </a:solidFill>
@@ -4038,210 +4394,9 @@
                 <a:ea typeface="Calibri" pitchFamily="34" charset="-122"/>
                 <a:cs typeface="Calibri" pitchFamily="34" charset="-120"/>
               </a:rPr>
-              <a:t>Facile cominciare: OpenMP aggiunge una riga sopra un ciclo</a:t>
+              <a:t>Prima di comprare processori, misurate p</a:t>
             </a:r>
-            <a:endParaRPr lang="en-US" sz="2100" dirty="0"/>
-          </a:p>
-          <a:p>
-            <a:pPr marL="203200" indent="-203200">
-              <a:spcAft>
-                <a:spcPts val="800"/>
-              </a:spcAft>
-              <a:buSzPct val="100000"/>
-              <a:buChar char="•"/>
-            </a:pPr>
-            <a:r>
-              <a:rPr lang="en-US" sz="2100" dirty="0">
-                <a:solidFill>
-                  <a:srgbClr val="1B2530"/>
-                </a:solidFill>
-                <a:latin typeface="Calibri" pitchFamily="34" charset="0"/>
-                <a:ea typeface="Calibri" pitchFamily="34" charset="-122"/>
-                <a:cs typeface="Calibri" pitchFamily="34" charset="-120"/>
-              </a:rPr>
-              <a:t>Il pericolo: due thread che scrivono la stessa variabile</a:t>
-            </a:r>
-            <a:endParaRPr lang="en-US" sz="2100" dirty="0"/>
-          </a:p>
-        </p:txBody>
-      </p:sp>
-      <p:sp>
-        <p:nvSpPr>
-          <p:cNvPr id="6" name="Shape 4"/>
-          <p:cNvSpPr/>
-          <p:nvPr/>
-        </p:nvSpPr>
-        <p:spPr>
-          <a:xfrm>
-            <a:off x="6278728" y="1417320"/>
-            <a:ext cx="5364328" cy="4754880"/>
-          </a:xfrm>
-          <a:prstGeom prst="roundRect">
-            <a:avLst>
-              <a:gd name="adj" fmla="val 1538"/>
-            </a:avLst>
-          </a:prstGeom>
-          <a:solidFill>
-            <a:srgbClr val="EEF2F4"/>
-          </a:solidFill>
-          <a:ln w="12700">
-            <a:solidFill>
-              <a:srgbClr val="EEF2F4"/>
-            </a:solidFill>
-            <a:prstDash val="solid"/>
-          </a:ln>
-        </p:spPr>
-      </p:sp>
-      <p:sp>
-        <p:nvSpPr>
-          <p:cNvPr id="7" name="Text 5"/>
-          <p:cNvSpPr txBox="1"/>
-          <p:nvPr/>
-        </p:nvSpPr>
-        <p:spPr>
-          <a:xfrm>
-            <a:off x="6553048" y="1645920"/>
-            <a:ext cx="4815688" cy="548640"/>
-          </a:xfrm>
-          <a:prstGeom prst="roundRect">
-            <a:avLst>
-              <a:gd name="adj" fmla="val 13333"/>
-            </a:avLst>
-          </a:prstGeom>
-          <a:solidFill>
-            <a:srgbClr val="C7791B"/>
-          </a:solidFill>
-          <a:ln>
-            <a:solidFill>
-              <a:srgbClr val="C7791B"/>
-            </a:solidFill>
-          </a:ln>
-        </p:spPr>
-        <p:txBody>
-          <a:bodyPr wrap="square" lIns="0" tIns="0" rIns="0" bIns="0" rtlCol="0" anchor="ctr"/>
-          <a:lstStyle/>
-          <a:p>
-            <a:pPr algn="ctr" indent="0" marL="0">
-              <a:buNone/>
-            </a:pPr>
-            <a:r>
-              <a:rPr lang="en-US" sz="1900" b="1" dirty="0">
-                <a:solidFill>
-                  <a:srgbClr val="FFFFFF"/>
-                </a:solidFill>
-                <a:latin typeface="Calibri" pitchFamily="34" charset="0"/>
-                <a:ea typeface="Calibri" pitchFamily="34" charset="-122"/>
-                <a:cs typeface="Calibri" pitchFamily="34" charset="-120"/>
-              </a:rPr>
-              <a:t>Memoria distribuita</a:t>
-            </a:r>
-            <a:endParaRPr lang="en-US" sz="1900" dirty="0"/>
-          </a:p>
-        </p:txBody>
-      </p:sp>
-      <p:sp>
-        <p:nvSpPr>
-          <p:cNvPr id="8" name="Text 6"/>
-          <p:cNvSpPr txBox="1"/>
-          <p:nvPr/>
-        </p:nvSpPr>
-        <p:spPr>
-          <a:xfrm>
-            <a:off x="6598768" y="2423160"/>
-            <a:ext cx="4724248" cy="3566160"/>
-          </a:xfrm>
-          <a:prstGeom prst="rect">
-            <a:avLst/>
-          </a:prstGeom>
-          <a:noFill/>
-          <a:ln/>
-        </p:spPr>
-        <p:txBody>
-          <a:bodyPr wrap="square" lIns="0" tIns="0" rIns="0" bIns="0" rtlCol="0" anchor="t"/>
-          <a:lstStyle/>
-          <a:p>
-            <a:pPr marL="203200" indent="-203200">
-              <a:spcAft>
-                <a:spcPts val="800"/>
-              </a:spcAft>
-              <a:buSzPct val="100000"/>
-              <a:buChar char="•"/>
-            </a:pPr>
-            <a:r>
-              <a:rPr lang="en-US" sz="2100" dirty="0">
-                <a:solidFill>
-                  <a:srgbClr val="1B2530"/>
-                </a:solidFill>
-                <a:latin typeface="Calibri" pitchFamily="34" charset="0"/>
-                <a:ea typeface="Calibri" pitchFamily="34" charset="-122"/>
-                <a:cs typeface="Calibri" pitchFamily="34" charset="-120"/>
-              </a:rPr>
-              <a:t>Ogni nodo ha la propria memoria; nulla è condiviso</a:t>
-            </a:r>
-            <a:endParaRPr lang="en-US" sz="2100" dirty="0"/>
-          </a:p>
-          <a:p>
-            <a:pPr marL="203200" indent="-203200">
-              <a:spcAft>
-                <a:spcPts val="800"/>
-              </a:spcAft>
-              <a:buSzPct val="100000"/>
-              <a:buChar char="•"/>
-            </a:pPr>
-            <a:r>
-              <a:rPr lang="en-US" sz="2100" dirty="0">
-                <a:solidFill>
-                  <a:srgbClr val="1B2530"/>
-                </a:solidFill>
-                <a:latin typeface="Calibri" pitchFamily="34" charset="0"/>
-                <a:ea typeface="Calibri" pitchFamily="34" charset="-122"/>
-                <a:cs typeface="Calibri" pitchFamily="34" charset="-120"/>
-              </a:rPr>
-              <a:t>Il programma gira come processi che si scambiano messaggi</a:t>
-            </a:r>
-            <a:endParaRPr lang="en-US" sz="2100" dirty="0"/>
-          </a:p>
-          <a:p>
-            <a:pPr marL="203200" indent="-203200">
-              <a:spcAft>
-                <a:spcPts val="800"/>
-              </a:spcAft>
-              <a:buSzPct val="100000"/>
-              <a:buChar char="•"/>
-            </a:pPr>
-            <a:r>
-              <a:rPr lang="en-US" sz="2100" dirty="0">
-                <a:solidFill>
-                  <a:srgbClr val="1B2530"/>
-                </a:solidFill>
-                <a:latin typeface="Calibri" pitchFamily="34" charset="0"/>
-                <a:ea typeface="Calibri" pitchFamily="34" charset="-122"/>
-                <a:cs typeface="Calibri" pitchFamily="34" charset="-120"/>
-              </a:rPr>
-              <a:t>MPI, Message Passing Interface, è lo standard</a:t>
-            </a:r>
-            <a:endParaRPr lang="en-US" sz="2100" dirty="0"/>
-          </a:p>
-          <a:p>
-            <a:pPr marL="203200" indent="-203200">
-              <a:spcAft>
-                <a:spcPts val="800"/>
-              </a:spcAft>
-              <a:buSzPct val="100000"/>
-              <a:buChar char="•"/>
-            </a:pPr>
-            <a:r>
-              <a:rPr lang="en-US" sz="2100" dirty="0">
-                <a:solidFill>
-                  <a:srgbClr val="1B2530"/>
-                </a:solidFill>
-                <a:latin typeface="Calibri" pitchFamily="34" charset="0"/>
-                <a:ea typeface="Calibri" pitchFamily="34" charset="-122"/>
-                <a:cs typeface="Calibri" pitchFamily="34" charset="-120"/>
-              </a:rPr>
-              <a:t>Scala fino a un milione di core, e lo paga il programmatore</a:t>
-            </a:r>
-            <a:endParaRPr lang="en-US" sz="2100" dirty="0"/>
+            <a:endParaRPr lang="en-US" sz="2400" dirty="0"/>
           </a:p>
         </p:txBody>
       </p:sp>
@@ -4353,7 +4508,7 @@
                 <a:ea typeface="Cambria" pitchFamily="34" charset="-122"/>
                 <a:cs typeface="Cambria" pitchFamily="34" charset="-120"/>
               </a:rPr>
-              <a:t>Il limite è l'energia</a:t>
+              <a:t>Due modi di dividere il lavoro</a:t>
             </a:r>
             <a:endParaRPr lang="en-US" sz="3200" dirty="0"/>
           </a:p>
@@ -4367,52 +4522,102 @@
         </p:nvSpPr>
         <p:spPr>
           <a:xfrm>
-            <a:off x="548640" y="1523746"/>
-            <a:ext cx="146304" cy="146304"/>
-          </a:xfrm>
-          <a:prstGeom prst="rect">
-            <a:avLst/>
+            <a:off x="548640" y="1417320"/>
+            <a:ext cx="5364328" cy="4754880"/>
+          </a:xfrm>
+          <a:prstGeom prst="roundRect">
+            <a:avLst>
+              <a:gd name="adj" fmla="val 1538"/>
+            </a:avLst>
+          </a:prstGeom>
+          <a:solidFill>
+            <a:srgbClr val="EEF2F4"/>
+          </a:solidFill>
+          <a:ln w="12700">
+            <a:solidFill>
+              <a:srgbClr val="EEF2F4"/>
+            </a:solidFill>
+            <a:prstDash val="solid"/>
+          </a:ln>
+        </p:spPr>
+      </p:sp>
+      <p:sp>
+        <p:nvSpPr>
+          <p:cNvPr id="4" name="Text 2"/>
+          <p:cNvSpPr txBox="1"/>
+          <p:nvPr/>
+        </p:nvSpPr>
+        <p:spPr>
+          <a:xfrm>
+            <a:off x="822960" y="1645920"/>
+            <a:ext cx="4815688" cy="548640"/>
+          </a:xfrm>
+          <a:prstGeom prst="roundRect">
+            <a:avLst>
+              <a:gd name="adj" fmla="val 13333"/>
+            </a:avLst>
           </a:prstGeom>
           <a:solidFill>
             <a:srgbClr val="0E7C86"/>
           </a:solidFill>
-          <a:ln w="12700">
+          <a:ln>
             <a:solidFill>
               <a:srgbClr val="0E7C86"/>
             </a:solidFill>
-            <a:prstDash val="solid"/>
           </a:ln>
         </p:spPr>
-      </p:sp>
-      <p:sp>
-        <p:nvSpPr>
-          <p:cNvPr id="4" name="Text 2"/>
-          <p:cNvSpPr txBox="1"/>
-          <p:nvPr/>
-        </p:nvSpPr>
-        <p:spPr>
-          <a:xfrm>
-            <a:off x="932688" y="1417320"/>
-            <a:ext cx="6565392" cy="681736"/>
-          </a:xfrm>
-          <a:prstGeom prst="rect">
-            <a:avLst/>
-          </a:prstGeom>
-          <a:noFill/>
-          <a:ln/>
-        </p:spPr>
-        <p:txBody>
-          <a:bodyPr wrap="square" lIns="0" tIns="0" rIns="0" bIns="0" rtlCol="0" anchor="t"/>
+        <p:txBody>
+          <a:bodyPr wrap="square" lIns="0" tIns="0" rIns="0" bIns="0" rtlCol="0" anchor="ctr"/>
           <a:lstStyle/>
           <a:p>
-            <a:pPr indent="0" marL="0">
-              <a:spcAft>
-                <a:spcPts val="200"/>
-              </a:spcAft>
+            <a:pPr algn="ctr" indent="0" marL="0">
               <a:buNone/>
             </a:pPr>
             <a:r>
-              <a:rPr lang="en-US" sz="2200" dirty="0">
+              <a:rPr lang="en-US" sz="1900" b="1" dirty="0">
+                <a:solidFill>
+                  <a:srgbClr val="FFFFFF"/>
+                </a:solidFill>
+                <a:latin typeface="Calibri" pitchFamily="34" charset="0"/>
+                <a:ea typeface="Calibri" pitchFamily="34" charset="-122"/>
+                <a:cs typeface="Calibri" pitchFamily="34" charset="-120"/>
+              </a:rPr>
+              <a:t>Memoria condivisa</a:t>
+            </a:r>
+            <a:endParaRPr lang="en-US" sz="1900" dirty="0"/>
+          </a:p>
+        </p:txBody>
+      </p:sp>
+      <p:sp>
+        <p:nvSpPr>
+          <p:cNvPr id="5" name="Text 3"/>
+          <p:cNvSpPr txBox="1"/>
+          <p:nvPr/>
+        </p:nvSpPr>
+        <p:spPr>
+          <a:xfrm>
+            <a:off x="868680" y="2423160"/>
+            <a:ext cx="4724248" cy="3566160"/>
+          </a:xfrm>
+          <a:prstGeom prst="rect">
+            <a:avLst/>
+          </a:prstGeom>
+          <a:noFill/>
+          <a:ln/>
+        </p:spPr>
+        <p:txBody>
+          <a:bodyPr wrap="square" lIns="0" tIns="0" rIns="0" bIns="0" rtlCol="0" anchor="t"/>
+          <a:lstStyle/>
+          <a:p>
+            <a:pPr marL="203200" indent="-203200">
+              <a:spcAft>
+                <a:spcPts val="800"/>
+              </a:spcAft>
+              <a:buSzPct val="100000"/>
+              <a:buChar char="•"/>
+            </a:pPr>
+            <a:r>
+              <a:rPr lang="en-US" sz="2100" dirty="0">
                 <a:solidFill>
                   <a:srgbClr val="1B2530"/>
                 </a:solidFill>
@@ -4420,66 +4625,20 @@
                 <a:ea typeface="Calibri" pitchFamily="34" charset="-122"/>
                 <a:cs typeface="Calibri" pitchFamily="34" charset="-120"/>
               </a:rPr>
-              <a:t>Una macchina exascale assorbe circa venti megawatt: il consumo di una piccola città</a:t>
+              <a:t>Più core di un nodo vedono la stessa memoria</a:t>
             </a:r>
-            <a:endParaRPr lang="en-US" sz="2200" dirty="0"/>
-          </a:p>
-        </p:txBody>
-      </p:sp>
-      <p:sp>
-        <p:nvSpPr>
-          <p:cNvPr id="5" name="Shape 3"/>
-          <p:cNvSpPr/>
-          <p:nvPr/>
-        </p:nvSpPr>
-        <p:spPr>
-          <a:xfrm>
-            <a:off x="548640" y="2456815"/>
-            <a:ext cx="146304" cy="146304"/>
-          </a:xfrm>
-          <a:prstGeom prst="rect">
-            <a:avLst/>
-          </a:prstGeom>
-          <a:solidFill>
-            <a:srgbClr val="C7791B"/>
-          </a:solidFill>
-          <a:ln w="12700">
-            <a:solidFill>
-              <a:srgbClr val="C7791B"/>
-            </a:solidFill>
-            <a:prstDash val="solid"/>
-          </a:ln>
-        </p:spPr>
-      </p:sp>
-      <p:sp>
-        <p:nvSpPr>
-          <p:cNvPr id="6" name="Text 4"/>
-          <p:cNvSpPr txBox="1"/>
-          <p:nvPr/>
-        </p:nvSpPr>
-        <p:spPr>
-          <a:xfrm>
-            <a:off x="932688" y="2350389"/>
-            <a:ext cx="6565392" cy="681736"/>
-          </a:xfrm>
-          <a:prstGeom prst="rect">
-            <a:avLst/>
-          </a:prstGeom>
-          <a:noFill/>
-          <a:ln/>
-        </p:spPr>
-        <p:txBody>
-          <a:bodyPr wrap="square" lIns="0" tIns="0" rIns="0" bIns="0" rtlCol="0" anchor="t"/>
-          <a:lstStyle/>
-          <a:p>
-            <a:pPr indent="0" marL="0">
+            <a:endParaRPr lang="en-US" sz="2100" dirty="0"/>
+          </a:p>
+          <a:p>
+            <a:pPr marL="203200" indent="-203200">
               <a:spcAft>
-                <a:spcPts val="200"/>
+                <a:spcPts val="800"/>
               </a:spcAft>
-              <a:buNone/>
+              <a:buSzPct val="100000"/>
+              <a:buChar char="•"/>
             </a:pPr>
             <a:r>
-              <a:rPr lang="en-US" sz="2200" dirty="0">
+              <a:rPr lang="en-US" sz="2100" dirty="0">
                 <a:solidFill>
                   <a:srgbClr val="1B2530"/>
                 </a:solidFill>
@@ -4487,66 +4646,20 @@
                 <a:ea typeface="Calibri" pitchFamily="34" charset="-122"/>
                 <a:cs typeface="Calibri" pitchFamily="34" charset="-120"/>
               </a:rPr>
-              <a:t>L'elettricità della sua vita utile costa quanto la macchina</a:t>
+              <a:t>Il programma gira come thread che leggono e scrivono le stesse variabili</a:t>
             </a:r>
-            <a:endParaRPr lang="en-US" sz="2200" dirty="0"/>
-          </a:p>
-        </p:txBody>
-      </p:sp>
-      <p:sp>
-        <p:nvSpPr>
-          <p:cNvPr id="7" name="Shape 5"/>
-          <p:cNvSpPr/>
-          <p:nvPr/>
-        </p:nvSpPr>
-        <p:spPr>
-          <a:xfrm>
-            <a:off x="548640" y="3389884"/>
-            <a:ext cx="146304" cy="146304"/>
-          </a:xfrm>
-          <a:prstGeom prst="rect">
-            <a:avLst/>
-          </a:prstGeom>
-          <a:solidFill>
-            <a:srgbClr val="0E7C86"/>
-          </a:solidFill>
-          <a:ln w="12700">
-            <a:solidFill>
-              <a:srgbClr val="0E7C86"/>
-            </a:solidFill>
-            <a:prstDash val="solid"/>
-          </a:ln>
-        </p:spPr>
-      </p:sp>
-      <p:sp>
-        <p:nvSpPr>
-          <p:cNvPr id="8" name="Text 6"/>
-          <p:cNvSpPr txBox="1"/>
-          <p:nvPr/>
-        </p:nvSpPr>
-        <p:spPr>
-          <a:xfrm>
-            <a:off x="932688" y="3283458"/>
-            <a:ext cx="6565392" cy="681736"/>
-          </a:xfrm>
-          <a:prstGeom prst="rect">
-            <a:avLst/>
-          </a:prstGeom>
-          <a:noFill/>
-          <a:ln/>
-        </p:spPr>
-        <p:txBody>
-          <a:bodyPr wrap="square" lIns="0" tIns="0" rIns="0" bIns="0" rtlCol="0" anchor="t"/>
-          <a:lstStyle/>
-          <a:p>
-            <a:pPr indent="0" marL="0">
+            <a:endParaRPr lang="en-US" sz="2100" dirty="0"/>
+          </a:p>
+          <a:p>
+            <a:pPr marL="203200" indent="-203200">
               <a:spcAft>
-                <a:spcPts val="200"/>
+                <a:spcPts val="800"/>
               </a:spcAft>
-              <a:buNone/>
+              <a:buSzPct val="100000"/>
+              <a:buChar char="•"/>
             </a:pPr>
             <a:r>
-              <a:rPr lang="en-US" sz="2200" dirty="0">
+              <a:rPr lang="en-US" sz="2100" dirty="0">
                 <a:solidFill>
                   <a:srgbClr val="1B2530"/>
                 </a:solidFill>
@@ -4554,66 +4667,20 @@
                 <a:ea typeface="Calibri" pitchFamily="34" charset="-122"/>
                 <a:cs typeface="Calibri" pitchFamily="34" charset="-120"/>
               </a:rPr>
-              <a:t>Quindi la cifra che conta sono le operazioni per watt, e ha una classifica sua: la Green500</a:t>
+              <a:t>Facile cominciare: OpenMP aggiunge una riga sopra un ciclo</a:t>
             </a:r>
-            <a:endParaRPr lang="en-US" sz="2200" dirty="0"/>
-          </a:p>
-        </p:txBody>
-      </p:sp>
-      <p:sp>
-        <p:nvSpPr>
-          <p:cNvPr id="9" name="Shape 7"/>
-          <p:cNvSpPr/>
-          <p:nvPr/>
-        </p:nvSpPr>
-        <p:spPr>
-          <a:xfrm>
-            <a:off x="548640" y="4322953"/>
-            <a:ext cx="146304" cy="146304"/>
-          </a:xfrm>
-          <a:prstGeom prst="rect">
-            <a:avLst/>
-          </a:prstGeom>
-          <a:solidFill>
-            <a:srgbClr val="C7791B"/>
-          </a:solidFill>
-          <a:ln w="12700">
-            <a:solidFill>
-              <a:srgbClr val="C7791B"/>
-            </a:solidFill>
-            <a:prstDash val="solid"/>
-          </a:ln>
-        </p:spPr>
-      </p:sp>
-      <p:sp>
-        <p:nvSpPr>
-          <p:cNvPr id="10" name="Text 8"/>
-          <p:cNvSpPr txBox="1"/>
-          <p:nvPr/>
-        </p:nvSpPr>
-        <p:spPr>
-          <a:xfrm>
-            <a:off x="932688" y="4216527"/>
-            <a:ext cx="6565392" cy="1022604"/>
-          </a:xfrm>
-          <a:prstGeom prst="rect">
-            <a:avLst/>
-          </a:prstGeom>
-          <a:noFill/>
-          <a:ln/>
-        </p:spPr>
-        <p:txBody>
-          <a:bodyPr wrap="square" lIns="0" tIns="0" rIns="0" bIns="0" rtlCol="0" anchor="t"/>
-          <a:lstStyle/>
-          <a:p>
-            <a:pPr indent="0" marL="0">
+            <a:endParaRPr lang="en-US" sz="2100" dirty="0"/>
+          </a:p>
+          <a:p>
+            <a:pPr marL="203200" indent="-203200">
               <a:spcAft>
-                <a:spcPts val="200"/>
+                <a:spcPts val="800"/>
               </a:spcAft>
-              <a:buNone/>
+              <a:buSzPct val="100000"/>
+              <a:buChar char="•"/>
             </a:pPr>
             <a:r>
-              <a:rPr lang="en-US" sz="2200" dirty="0">
+              <a:rPr lang="en-US" sz="2100" dirty="0">
                 <a:solidFill>
                   <a:srgbClr val="1B2530"/>
                 </a:solidFill>
@@ -4621,32 +4688,34 @@
                 <a:ea typeface="Calibri" pitchFamily="34" charset="-122"/>
                 <a:cs typeface="Calibri" pitchFamily="34" charset="-120"/>
               </a:rPr>
-              <a:t>La guidano GPU e altri acceleratori: l'hardware specializzato fa di più con ogni joule</a:t>
+              <a:t>Il pericolo: due thread che scrivono la stessa variabile</a:t>
             </a:r>
-            <a:endParaRPr lang="en-US" sz="2200" dirty="0"/>
-          </a:p>
-        </p:txBody>
-      </p:sp>
-      <p:sp>
-        <p:nvSpPr>
-          <p:cNvPr id="11" name="Shape 9"/>
+            <a:endParaRPr lang="en-US" sz="2100" dirty="0"/>
+          </a:p>
+        </p:txBody>
+      </p:sp>
+      <p:sp>
+        <p:nvSpPr>
+          <p:cNvPr id="6" name="Shape 4"/>
           <p:cNvSpPr/>
           <p:nvPr/>
         </p:nvSpPr>
         <p:spPr>
           <a:xfrm>
-            <a:off x="548640" y="5596890"/>
-            <a:ext cx="146304" cy="146304"/>
-          </a:xfrm>
-          <a:prstGeom prst="rect">
-            <a:avLst/>
+            <a:off x="6278728" y="1417320"/>
+            <a:ext cx="5364328" cy="4754880"/>
+          </a:xfrm>
+          <a:prstGeom prst="roundRect">
+            <a:avLst>
+              <a:gd name="adj" fmla="val 1538"/>
+            </a:avLst>
           </a:prstGeom>
           <a:solidFill>
-            <a:srgbClr val="0E7C86"/>
+            <a:srgbClr val="EEF2F4"/>
           </a:solidFill>
           <a:ln w="12700">
             <a:solidFill>
-              <a:srgbClr val="0E7C86"/>
+              <a:srgbClr val="EEF2F4"/>
             </a:solidFill>
             <a:prstDash val="solid"/>
           </a:ln>
@@ -4654,33 +4723,81 @@
       </p:sp>
       <p:sp>
         <p:nvSpPr>
-          <p:cNvPr id="12" name="Text 10"/>
+          <p:cNvPr id="7" name="Text 5"/>
           <p:cNvSpPr txBox="1"/>
           <p:nvPr/>
         </p:nvSpPr>
         <p:spPr>
           <a:xfrm>
-            <a:off x="932688" y="5490464"/>
-            <a:ext cx="6565392" cy="681736"/>
-          </a:xfrm>
-          <a:prstGeom prst="rect">
-            <a:avLst/>
-          </a:prstGeom>
-          <a:noFill/>
-          <a:ln/>
-        </p:spPr>
-        <p:txBody>
-          <a:bodyPr wrap="square" lIns="0" tIns="0" rIns="0" bIns="0" rtlCol="0" anchor="t"/>
+            <a:off x="6553048" y="1645920"/>
+            <a:ext cx="4815688" cy="548640"/>
+          </a:xfrm>
+          <a:prstGeom prst="roundRect">
+            <a:avLst>
+              <a:gd name="adj" fmla="val 13333"/>
+            </a:avLst>
+          </a:prstGeom>
+          <a:solidFill>
+            <a:srgbClr val="C7791B"/>
+          </a:solidFill>
+          <a:ln>
+            <a:solidFill>
+              <a:srgbClr val="C7791B"/>
+            </a:solidFill>
+          </a:ln>
+        </p:spPr>
+        <p:txBody>
+          <a:bodyPr wrap="square" lIns="0" tIns="0" rIns="0" bIns="0" rtlCol="0" anchor="ctr"/>
           <a:lstStyle/>
           <a:p>
-            <a:pPr indent="0" marL="0">
-              <a:spcAft>
-                <a:spcPts val="200"/>
-              </a:spcAft>
+            <a:pPr algn="ctr" indent="0" marL="0">
               <a:buNone/>
             </a:pPr>
             <a:r>
-              <a:rPr lang="en-US" sz="2200" dirty="0">
+              <a:rPr lang="en-US" sz="1900" b="1" dirty="0">
+                <a:solidFill>
+                  <a:srgbClr val="FFFFFF"/>
+                </a:solidFill>
+                <a:latin typeface="Calibri" pitchFamily="34" charset="0"/>
+                <a:ea typeface="Calibri" pitchFamily="34" charset="-122"/>
+                <a:cs typeface="Calibri" pitchFamily="34" charset="-120"/>
+              </a:rPr>
+              <a:t>Memoria distribuita</a:t>
+            </a:r>
+            <a:endParaRPr lang="en-US" sz="1900" dirty="0"/>
+          </a:p>
+        </p:txBody>
+      </p:sp>
+      <p:sp>
+        <p:nvSpPr>
+          <p:cNvPr id="8" name="Text 6"/>
+          <p:cNvSpPr txBox="1"/>
+          <p:nvPr/>
+        </p:nvSpPr>
+        <p:spPr>
+          <a:xfrm>
+            <a:off x="6598768" y="2423160"/>
+            <a:ext cx="4724248" cy="3566160"/>
+          </a:xfrm>
+          <a:prstGeom prst="rect">
+            <a:avLst/>
+          </a:prstGeom>
+          <a:noFill/>
+          <a:ln/>
+        </p:spPr>
+        <p:txBody>
+          <a:bodyPr wrap="square" lIns="0" tIns="0" rIns="0" bIns="0" rtlCol="0" anchor="t"/>
+          <a:lstStyle/>
+          <a:p>
+            <a:pPr marL="203200" indent="-203200">
+              <a:spcAft>
+                <a:spcPts val="800"/>
+              </a:spcAft>
+              <a:buSzPct val="100000"/>
+              <a:buChar char="•"/>
+            </a:pPr>
+            <a:r>
+              <a:rPr lang="en-US" sz="2100" dirty="0">
                 <a:solidFill>
                   <a:srgbClr val="1B2530"/>
                 </a:solidFill>
@@ -4688,114 +4805,72 @@
                 <a:ea typeface="Calibri" pitchFamily="34" charset="-122"/>
                 <a:cs typeface="Calibri" pitchFamily="34" charset="-120"/>
               </a:rPr>
-              <a:t>Per la stessa ragione nel vostro kit c'è un piccolo core RISC-V: milliwatt</a:t>
+              <a:t>Ogni nodo ha la propria memoria; nulla è condiviso</a:t>
             </a:r>
-            <a:endParaRPr lang="en-US" sz="2200" dirty="0"/>
-          </a:p>
-        </p:txBody>
-      </p:sp>
-      <p:sp>
-        <p:nvSpPr>
-          <p:cNvPr id="13" name="Shape 11"/>
-          <p:cNvSpPr/>
-          <p:nvPr/>
-        </p:nvSpPr>
-        <p:spPr>
-          <a:xfrm>
-            <a:off x="7863840" y="1417320"/>
-            <a:ext cx="3779215" cy="4754880"/>
-          </a:xfrm>
-          <a:prstGeom prst="roundRect">
-            <a:avLst>
-              <a:gd name="adj" fmla="val 1936"/>
-            </a:avLst>
-          </a:prstGeom>
-          <a:solidFill>
-            <a:srgbClr val="1B2530"/>
-          </a:solidFill>
-          <a:ln w="12700">
-            <a:solidFill>
-              <a:srgbClr val="1B2530"/>
-            </a:solidFill>
-            <a:prstDash val="solid"/>
-          </a:ln>
-        </p:spPr>
-      </p:sp>
-      <p:sp>
-        <p:nvSpPr>
-          <p:cNvPr id="14" name="Text 12"/>
-          <p:cNvSpPr txBox="1"/>
-          <p:nvPr/>
-        </p:nvSpPr>
-        <p:spPr>
-          <a:xfrm>
-            <a:off x="8046720" y="2148840"/>
-            <a:ext cx="3413455" cy="1828800"/>
-          </a:xfrm>
-          <a:prstGeom prst="rect">
-            <a:avLst/>
-          </a:prstGeom>
-          <a:noFill/>
-          <a:ln/>
-        </p:spPr>
-        <p:txBody>
-          <a:bodyPr wrap="square" lIns="0" tIns="0" rIns="0" bIns="0" rtlCol="0" anchor="ctr"/>
-          <a:lstStyle/>
-          <a:p>
-            <a:pPr algn="ctr" indent="0" marL="0">
-              <a:buNone/>
+            <a:endParaRPr lang="en-US" sz="2100" dirty="0"/>
+          </a:p>
+          <a:p>
+            <a:pPr marL="203200" indent="-203200">
+              <a:spcAft>
+                <a:spcPts val="800"/>
+              </a:spcAft>
+              <a:buSzPct val="100000"/>
+              <a:buChar char="•"/>
             </a:pPr>
             <a:r>
-              <a:rPr lang="en-US" sz="6000" b="1" dirty="0">
+              <a:rPr lang="en-US" sz="2100" dirty="0">
                 <a:solidFill>
-                  <a:srgbClr val="FFFFFF"/>
-                </a:solidFill>
-                <a:latin typeface="Cambria" pitchFamily="34" charset="0"/>
-                <a:ea typeface="Cambria" pitchFamily="34" charset="-122"/>
-                <a:cs typeface="Cambria" pitchFamily="34" charset="-120"/>
-              </a:rPr>
-              <a:t>~20 MW</a:t>
-            </a:r>
-            <a:endParaRPr lang="en-US" sz="6000" dirty="0"/>
-          </a:p>
-        </p:txBody>
-      </p:sp>
-      <p:sp>
-        <p:nvSpPr>
-          <p:cNvPr id="15" name="Text 13"/>
-          <p:cNvSpPr txBox="1"/>
-          <p:nvPr/>
-        </p:nvSpPr>
-        <p:spPr>
-          <a:xfrm>
-            <a:off x="8138160" y="4160520"/>
-            <a:ext cx="3230575" cy="1554480"/>
-          </a:xfrm>
-          <a:prstGeom prst="rect">
-            <a:avLst/>
-          </a:prstGeom>
-          <a:noFill/>
-          <a:ln/>
-        </p:spPr>
-        <p:txBody>
-          <a:bodyPr wrap="square" lIns="0" tIns="0" rIns="0" bIns="0" rtlCol="0" anchor="t"/>
-          <a:lstStyle/>
-          <a:p>
-            <a:pPr algn="ctr" indent="0" marL="0">
-              <a:buNone/>
-            </a:pPr>
-            <a:r>
-              <a:rPr lang="en-US" sz="1900" dirty="0">
-                <a:solidFill>
-                  <a:srgbClr val="CFE3EA"/>
+                  <a:srgbClr val="1B2530"/>
                 </a:solidFill>
                 <a:latin typeface="Calibri" pitchFamily="34" charset="0"/>
                 <a:ea typeface="Calibri" pitchFamily="34" charset="-122"/>
                 <a:cs typeface="Calibri" pitchFamily="34" charset="-120"/>
               </a:rPr>
-              <a:t>per 10^18 operazioni al secondo: circa 50 miliardi di operazioni per joule</a:t>
+              <a:t>Il programma gira come processi che si scambiano messaggi</a:t>
             </a:r>
-            <a:endParaRPr lang="en-US" sz="1900" dirty="0"/>
+            <a:endParaRPr lang="en-US" sz="2100" dirty="0"/>
+          </a:p>
+          <a:p>
+            <a:pPr marL="203200" indent="-203200">
+              <a:spcAft>
+                <a:spcPts val="800"/>
+              </a:spcAft>
+              <a:buSzPct val="100000"/>
+              <a:buChar char="•"/>
+            </a:pPr>
+            <a:r>
+              <a:rPr lang="en-US" sz="2100" dirty="0">
+                <a:solidFill>
+                  <a:srgbClr val="1B2530"/>
+                </a:solidFill>
+                <a:latin typeface="Calibri" pitchFamily="34" charset="0"/>
+                <a:ea typeface="Calibri" pitchFamily="34" charset="-122"/>
+                <a:cs typeface="Calibri" pitchFamily="34" charset="-120"/>
+              </a:rPr>
+              <a:t>MPI, Message Passing Interface, è lo standard</a:t>
+            </a:r>
+            <a:endParaRPr lang="en-US" sz="2100" dirty="0"/>
+          </a:p>
+          <a:p>
+            <a:pPr marL="203200" indent="-203200">
+              <a:spcAft>
+                <a:spcPts val="800"/>
+              </a:spcAft>
+              <a:buSzPct val="100000"/>
+              <a:buChar char="•"/>
+            </a:pPr>
+            <a:r>
+              <a:rPr lang="en-US" sz="2100" dirty="0">
+                <a:solidFill>
+                  <a:srgbClr val="1B2530"/>
+                </a:solidFill>
+                <a:latin typeface="Calibri" pitchFamily="34" charset="0"/>
+                <a:ea typeface="Calibri" pitchFamily="34" charset="-122"/>
+                <a:cs typeface="Calibri" pitchFamily="34" charset="-120"/>
+              </a:rPr>
+              <a:t>Scala fino a un milione di core, e lo paga il programmatore</a:t>
+            </a:r>
+            <a:endParaRPr lang="en-US" sz="2100" dirty="0"/>
           </a:p>
         </p:txBody>
       </p:sp>
@@ -4907,7 +4982,7 @@
                 <a:ea typeface="Cambria" pitchFamily="34" charset="-122"/>
                 <a:cs typeface="Cambria" pitchFamily="34" charset="-120"/>
               </a:rPr>
-              <a:t>Due modi di spendere i transistor</a:t>
+              <a:t>Il limite è l'energia</a:t>
             </a:r>
             <a:endParaRPr lang="en-US" sz="3200" dirty="0"/>
           </a:p>
@@ -4921,20 +4996,18 @@
         </p:nvSpPr>
         <p:spPr>
           <a:xfrm>
-            <a:off x="548640" y="1417320"/>
-            <a:ext cx="5364328" cy="4754880"/>
-          </a:xfrm>
-          <a:prstGeom prst="roundRect">
-            <a:avLst>
-              <a:gd name="adj" fmla="val 1538"/>
-            </a:avLst>
+            <a:off x="548640" y="1523746"/>
+            <a:ext cx="146304" cy="146304"/>
+          </a:xfrm>
+          <a:prstGeom prst="rect">
+            <a:avLst/>
           </a:prstGeom>
           <a:solidFill>
-            <a:srgbClr val="EEF2F4"/>
+            <a:srgbClr val="0E7C86"/>
           </a:solidFill>
           <a:ln w="12700">
             <a:solidFill>
-              <a:srgbClr val="EEF2F4"/>
+              <a:srgbClr val="0E7C86"/>
             </a:solidFill>
             <a:prstDash val="solid"/>
           </a:ln>
@@ -4948,75 +5021,27 @@
         </p:nvSpPr>
         <p:spPr>
           <a:xfrm>
-            <a:off x="822960" y="1645920"/>
-            <a:ext cx="4815688" cy="548640"/>
-          </a:xfrm>
-          <a:prstGeom prst="roundRect">
-            <a:avLst>
-              <a:gd name="adj" fmla="val 13333"/>
-            </a:avLst>
-          </a:prstGeom>
-          <a:solidFill>
-            <a:srgbClr val="0E7C86"/>
-          </a:solidFill>
-          <a:ln>
-            <a:solidFill>
-              <a:srgbClr val="0E7C86"/>
-            </a:solidFill>
-          </a:ln>
-        </p:spPr>
-        <p:txBody>
-          <a:bodyPr wrap="square" lIns="0" tIns="0" rIns="0" bIns="0" rtlCol="0" anchor="ctr"/>
+            <a:off x="932688" y="1417320"/>
+            <a:ext cx="6565392" cy="681736"/>
+          </a:xfrm>
+          <a:prstGeom prst="rect">
+            <a:avLst/>
+          </a:prstGeom>
+          <a:noFill/>
+          <a:ln/>
+        </p:spPr>
+        <p:txBody>
+          <a:bodyPr wrap="square" lIns="0" tIns="0" rIns="0" bIns="0" rtlCol="0" anchor="t"/>
           <a:lstStyle/>
           <a:p>
-            <a:pPr algn="ctr" indent="0" marL="0">
+            <a:pPr indent="0" marL="0">
+              <a:spcAft>
+                <a:spcPts val="200"/>
+              </a:spcAft>
               <a:buNone/>
             </a:pPr>
             <a:r>
-              <a:rPr lang="en-US" sz="1900" b="1" dirty="0">
-                <a:solidFill>
-                  <a:srgbClr val="FFFFFF"/>
-                </a:solidFill>
-                <a:latin typeface="Calibri" pitchFamily="34" charset="0"/>
-                <a:ea typeface="Calibri" pitchFamily="34" charset="-122"/>
-                <a:cs typeface="Calibri" pitchFamily="34" charset="-120"/>
-              </a:rPr>
-              <a:t>Una CPU</a:t>
-            </a:r>
-            <a:endParaRPr lang="en-US" sz="1900" dirty="0"/>
-          </a:p>
-        </p:txBody>
-      </p:sp>
-      <p:sp>
-        <p:nvSpPr>
-          <p:cNvPr id="5" name="Text 3"/>
-          <p:cNvSpPr txBox="1"/>
-          <p:nvPr/>
-        </p:nvSpPr>
-        <p:spPr>
-          <a:xfrm>
-            <a:off x="868680" y="2423160"/>
-            <a:ext cx="4724248" cy="3566160"/>
-          </a:xfrm>
-          <a:prstGeom prst="rect">
-            <a:avLst/>
-          </a:prstGeom>
-          <a:noFill/>
-          <a:ln/>
-        </p:spPr>
-        <p:txBody>
-          <a:bodyPr wrap="square" lIns="0" tIns="0" rIns="0" bIns="0" rtlCol="0" anchor="t"/>
-          <a:lstStyle/>
-          <a:p>
-            <a:pPr marL="203200" indent="-203200">
-              <a:spcAft>
-                <a:spcPts val="800"/>
-              </a:spcAft>
-              <a:buSzPct val="100000"/>
-              <a:buChar char="•"/>
-            </a:pPr>
-            <a:r>
-              <a:rPr lang="en-US" sz="2100" dirty="0">
+              <a:rPr lang="en-US" sz="2200" dirty="0">
                 <a:solidFill>
                   <a:srgbClr val="1B2530"/>
                 </a:solidFill>
@@ -5024,20 +5049,66 @@
                 <a:ea typeface="Calibri" pitchFamily="34" charset="-122"/>
                 <a:cs typeface="Calibri" pitchFamily="34" charset="-120"/>
               </a:rPr>
-              <a:t>Pochi core grandi: decine</a:t>
+              <a:t>Una macchina exascale assorbe circa venti megawatt: il consumo di una piccola città</a:t>
             </a:r>
-            <a:endParaRPr lang="en-US" sz="2100" dirty="0"/>
-          </a:p>
-          <a:p>
-            <a:pPr marL="203200" indent="-203200">
+            <a:endParaRPr lang="en-US" sz="2200" dirty="0"/>
+          </a:p>
+        </p:txBody>
+      </p:sp>
+      <p:sp>
+        <p:nvSpPr>
+          <p:cNvPr id="5" name="Shape 3"/>
+          <p:cNvSpPr/>
+          <p:nvPr/>
+        </p:nvSpPr>
+        <p:spPr>
+          <a:xfrm>
+            <a:off x="548640" y="2456815"/>
+            <a:ext cx="146304" cy="146304"/>
+          </a:xfrm>
+          <a:prstGeom prst="rect">
+            <a:avLst/>
+          </a:prstGeom>
+          <a:solidFill>
+            <a:srgbClr val="C7791B"/>
+          </a:solidFill>
+          <a:ln w="12700">
+            <a:solidFill>
+              <a:srgbClr val="C7791B"/>
+            </a:solidFill>
+            <a:prstDash val="solid"/>
+          </a:ln>
+        </p:spPr>
+      </p:sp>
+      <p:sp>
+        <p:nvSpPr>
+          <p:cNvPr id="6" name="Text 4"/>
+          <p:cNvSpPr txBox="1"/>
+          <p:nvPr/>
+        </p:nvSpPr>
+        <p:spPr>
+          <a:xfrm>
+            <a:off x="932688" y="2350389"/>
+            <a:ext cx="6565392" cy="681736"/>
+          </a:xfrm>
+          <a:prstGeom prst="rect">
+            <a:avLst/>
+          </a:prstGeom>
+          <a:noFill/>
+          <a:ln/>
+        </p:spPr>
+        <p:txBody>
+          <a:bodyPr wrap="square" lIns="0" tIns="0" rIns="0" bIns="0" rtlCol="0" anchor="t"/>
+          <a:lstStyle/>
+          <a:p>
+            <a:pPr indent="0" marL="0">
               <a:spcAft>
-                <a:spcPts val="800"/>
+                <a:spcPts val="200"/>
               </a:spcAft>
-              <a:buSzPct val="100000"/>
-              <a:buChar char="•"/>
+              <a:buNone/>
             </a:pPr>
             <a:r>
-              <a:rPr lang="en-US" sz="2100" dirty="0">
+              <a:rPr lang="en-US" sz="2200" dirty="0">
                 <a:solidFill>
                   <a:srgbClr val="1B2530"/>
                 </a:solidFill>
@@ -5045,20 +5116,66 @@
                 <a:ea typeface="Calibri" pitchFamily="34" charset="-122"/>
                 <a:cs typeface="Calibri" pitchFamily="34" charset="-120"/>
               </a:rPr>
-              <a:t>Ciascuno fuori ordine, con predittori e grandi cache</a:t>
+              <a:t>L'elettricità della sua vita utile costa quanto la macchina</a:t>
             </a:r>
-            <a:endParaRPr lang="en-US" sz="2100" dirty="0"/>
-          </a:p>
-          <a:p>
-            <a:pPr marL="203200" indent="-203200">
+            <a:endParaRPr lang="en-US" sz="2200" dirty="0"/>
+          </a:p>
+        </p:txBody>
+      </p:sp>
+      <p:sp>
+        <p:nvSpPr>
+          <p:cNvPr id="7" name="Shape 5"/>
+          <p:cNvSpPr/>
+          <p:nvPr/>
+        </p:nvSpPr>
+        <p:spPr>
+          <a:xfrm>
+            <a:off x="548640" y="3389884"/>
+            <a:ext cx="146304" cy="146304"/>
+          </a:xfrm>
+          <a:prstGeom prst="rect">
+            <a:avLst/>
+          </a:prstGeom>
+          <a:solidFill>
+            <a:srgbClr val="0E7C86"/>
+          </a:solidFill>
+          <a:ln w="12700">
+            <a:solidFill>
+              <a:srgbClr val="0E7C86"/>
+            </a:solidFill>
+            <a:prstDash val="solid"/>
+          </a:ln>
+        </p:spPr>
+      </p:sp>
+      <p:sp>
+        <p:nvSpPr>
+          <p:cNvPr id="8" name="Text 6"/>
+          <p:cNvSpPr txBox="1"/>
+          <p:nvPr/>
+        </p:nvSpPr>
+        <p:spPr>
+          <a:xfrm>
+            <a:off x="932688" y="3283458"/>
+            <a:ext cx="6565392" cy="681736"/>
+          </a:xfrm>
+          <a:prstGeom prst="rect">
+            <a:avLst/>
+          </a:prstGeom>
+          <a:noFill/>
+          <a:ln/>
+        </p:spPr>
+        <p:txBody>
+          <a:bodyPr wrap="square" lIns="0" tIns="0" rIns="0" bIns="0" rtlCol="0" anchor="t"/>
+          <a:lstStyle/>
+          <a:p>
+            <a:pPr indent="0" marL="0">
               <a:spcAft>
-                <a:spcPts val="800"/>
+                <a:spcPts val="200"/>
               </a:spcAft>
-              <a:buSzPct val="100000"/>
-              <a:buChar char="•"/>
+              <a:buNone/>
             </a:pPr>
             <a:r>
-              <a:rPr lang="en-US" sz="2100" dirty="0">
+              <a:rPr lang="en-US" sz="2200" dirty="0">
                 <a:solidFill>
                   <a:srgbClr val="1B2530"/>
                 </a:solidFill>
@@ -5066,20 +5183,66 @@
                 <a:ea typeface="Calibri" pitchFamily="34" charset="-122"/>
                 <a:cs typeface="Calibri" pitchFamily="34" charset="-120"/>
               </a:rPr>
-              <a:t>Costruita per finire un compito il prima possibile</a:t>
+              <a:t>Quindi la cifra che conta sono le operazioni per watt, e ha una classifica sua: la Green500</a:t>
             </a:r>
-            <a:endParaRPr lang="en-US" sz="2100" dirty="0"/>
-          </a:p>
-          <a:p>
-            <a:pPr marL="203200" indent="-203200">
+            <a:endParaRPr lang="en-US" sz="2200" dirty="0"/>
+          </a:p>
+        </p:txBody>
+      </p:sp>
+      <p:sp>
+        <p:nvSpPr>
+          <p:cNvPr id="9" name="Shape 7"/>
+          <p:cNvSpPr/>
+          <p:nvPr/>
+        </p:nvSpPr>
+        <p:spPr>
+          <a:xfrm>
+            <a:off x="548640" y="4322953"/>
+            <a:ext cx="146304" cy="146304"/>
+          </a:xfrm>
+          <a:prstGeom prst="rect">
+            <a:avLst/>
+          </a:prstGeom>
+          <a:solidFill>
+            <a:srgbClr val="C7791B"/>
+          </a:solidFill>
+          <a:ln w="12700">
+            <a:solidFill>
+              <a:srgbClr val="C7791B"/>
+            </a:solidFill>
+            <a:prstDash val="solid"/>
+          </a:ln>
+        </p:spPr>
+      </p:sp>
+      <p:sp>
+        <p:nvSpPr>
+          <p:cNvPr id="10" name="Text 8"/>
+          <p:cNvSpPr txBox="1"/>
+          <p:nvPr/>
+        </p:nvSpPr>
+        <p:spPr>
+          <a:xfrm>
+            <a:off x="932688" y="4216527"/>
+            <a:ext cx="6565392" cy="1022604"/>
+          </a:xfrm>
+          <a:prstGeom prst="rect">
+            <a:avLst/>
+          </a:prstGeom>
+          <a:noFill/>
+          <a:ln/>
+        </p:spPr>
+        <p:txBody>
+          <a:bodyPr wrap="square" lIns="0" tIns="0" rIns="0" bIns="0" rtlCol="0" anchor="t"/>
+          <a:lstStyle/>
+          <a:p>
+            <a:pPr indent="0" marL="0">
               <a:spcAft>
-                <a:spcPts val="800"/>
+                <a:spcPts val="200"/>
               </a:spcAft>
-              <a:buSzPct val="100000"/>
-              <a:buChar char="•"/>
+              <a:buNone/>
             </a:pPr>
             <a:r>
-              <a:rPr lang="en-US" sz="2100" dirty="0">
+              <a:rPr lang="en-US" sz="2200" dirty="0">
                 <a:solidFill>
                   <a:srgbClr val="1B2530"/>
                 </a:solidFill>
@@ -5087,34 +5250,32 @@
                 <a:ea typeface="Calibri" pitchFamily="34" charset="-122"/>
                 <a:cs typeface="Calibri" pitchFamily="34" charset="-120"/>
               </a:rPr>
-              <a:t>A suo agio con salti e dati irregolari</a:t>
+              <a:t>La guidano GPU e altri acceleratori: l'hardware specializzato fa di più con ogni joule</a:t>
             </a:r>
-            <a:endParaRPr lang="en-US" sz="2100" dirty="0"/>
-          </a:p>
-        </p:txBody>
-      </p:sp>
-      <p:sp>
-        <p:nvSpPr>
-          <p:cNvPr id="6" name="Shape 4"/>
+            <a:endParaRPr lang="en-US" sz="2200" dirty="0"/>
+          </a:p>
+        </p:txBody>
+      </p:sp>
+      <p:sp>
+        <p:nvSpPr>
+          <p:cNvPr id="11" name="Shape 9"/>
           <p:cNvSpPr/>
           <p:nvPr/>
         </p:nvSpPr>
         <p:spPr>
           <a:xfrm>
-            <a:off x="6278728" y="1417320"/>
-            <a:ext cx="5364328" cy="4754880"/>
-          </a:xfrm>
-          <a:prstGeom prst="roundRect">
-            <a:avLst>
-              <a:gd name="adj" fmla="val 1538"/>
-            </a:avLst>
+            <a:off x="548640" y="5596890"/>
+            <a:ext cx="146304" cy="146304"/>
+          </a:xfrm>
+          <a:prstGeom prst="rect">
+            <a:avLst/>
           </a:prstGeom>
           <a:solidFill>
-            <a:srgbClr val="EEF2F4"/>
+            <a:srgbClr val="0E7C86"/>
           </a:solidFill>
           <a:ln w="12700">
             <a:solidFill>
-              <a:srgbClr val="EEF2F4"/>
+              <a:srgbClr val="0E7C86"/>
             </a:solidFill>
             <a:prstDash val="solid"/>
           </a:ln>
@@ -5122,81 +5283,33 @@
       </p:sp>
       <p:sp>
         <p:nvSpPr>
-          <p:cNvPr id="7" name="Text 5"/>
+          <p:cNvPr id="12" name="Text 10"/>
           <p:cNvSpPr txBox="1"/>
           <p:nvPr/>
         </p:nvSpPr>
         <p:spPr>
           <a:xfrm>
-            <a:off x="6553048" y="1645920"/>
-            <a:ext cx="4815688" cy="548640"/>
-          </a:xfrm>
-          <a:prstGeom prst="roundRect">
-            <a:avLst>
-              <a:gd name="adj" fmla="val 13333"/>
-            </a:avLst>
-          </a:prstGeom>
-          <a:solidFill>
-            <a:srgbClr val="C7791B"/>
-          </a:solidFill>
-          <a:ln>
-            <a:solidFill>
-              <a:srgbClr val="C7791B"/>
-            </a:solidFill>
-          </a:ln>
-        </p:spPr>
-        <p:txBody>
-          <a:bodyPr wrap="square" lIns="0" tIns="0" rIns="0" bIns="0" rtlCol="0" anchor="ctr"/>
+            <a:off x="932688" y="5490464"/>
+            <a:ext cx="6565392" cy="681736"/>
+          </a:xfrm>
+          <a:prstGeom prst="rect">
+            <a:avLst/>
+          </a:prstGeom>
+          <a:noFill/>
+          <a:ln/>
+        </p:spPr>
+        <p:txBody>
+          <a:bodyPr wrap="square" lIns="0" tIns="0" rIns="0" bIns="0" rtlCol="0" anchor="t"/>
           <a:lstStyle/>
           <a:p>
-            <a:pPr algn="ctr" indent="0" marL="0">
+            <a:pPr indent="0" marL="0">
+              <a:spcAft>
+                <a:spcPts val="200"/>
+              </a:spcAft>
               <a:buNone/>
             </a:pPr>
             <a:r>
-              <a:rPr lang="en-US" sz="1900" b="1" dirty="0">
-                <a:solidFill>
-                  <a:srgbClr val="FFFFFF"/>
-                </a:solidFill>
-                <a:latin typeface="Calibri" pitchFamily="34" charset="0"/>
-                <a:ea typeface="Calibri" pitchFamily="34" charset="-122"/>
-                <a:cs typeface="Calibri" pitchFamily="34" charset="-120"/>
-              </a:rPr>
-              <a:t>Una GPU</a:t>
-            </a:r>
-            <a:endParaRPr lang="en-US" sz="1900" dirty="0"/>
-          </a:p>
-        </p:txBody>
-      </p:sp>
-      <p:sp>
-        <p:nvSpPr>
-          <p:cNvPr id="8" name="Text 6"/>
-          <p:cNvSpPr txBox="1"/>
-          <p:nvPr/>
-        </p:nvSpPr>
-        <p:spPr>
-          <a:xfrm>
-            <a:off x="6598768" y="2423160"/>
-            <a:ext cx="4724248" cy="3566160"/>
-          </a:xfrm>
-          <a:prstGeom prst="rect">
-            <a:avLst/>
-          </a:prstGeom>
-          <a:noFill/>
-          <a:ln/>
-        </p:spPr>
-        <p:txBody>
-          <a:bodyPr wrap="square" lIns="0" tIns="0" rIns="0" bIns="0" rtlCol="0" anchor="t"/>
-          <a:lstStyle/>
-          <a:p>
-            <a:pPr marL="203200" indent="-203200">
-              <a:spcAft>
-                <a:spcPts val="800"/>
-              </a:spcAft>
-              <a:buSzPct val="100000"/>
-              <a:buChar char="•"/>
-            </a:pPr>
-            <a:r>
-              <a:rPr lang="en-US" sz="2100" dirty="0">
+              <a:rPr lang="en-US" sz="2200" dirty="0">
                 <a:solidFill>
                   <a:srgbClr val="1B2530"/>
                 </a:solidFill>
@@ -5204,72 +5317,114 @@
                 <a:ea typeface="Calibri" pitchFamily="34" charset="-122"/>
                 <a:cs typeface="Calibri" pitchFamily="34" charset="-120"/>
               </a:rPr>
-              <a:t>Migliaia di core piccoli e semplici</a:t>
+              <a:t>Per la stessa ragione nel vostro kit c'è un piccolo core RISC-V: milliwatt</a:t>
             </a:r>
-            <a:endParaRPr lang="en-US" sz="2100" dirty="0"/>
-          </a:p>
-          <a:p>
-            <a:pPr marL="203200" indent="-203200">
-              <a:spcAft>
-                <a:spcPts val="800"/>
-              </a:spcAft>
-              <a:buSzPct val="100000"/>
-              <a:buChar char="•"/>
+            <a:endParaRPr lang="en-US" sz="2200" dirty="0"/>
+          </a:p>
+        </p:txBody>
+      </p:sp>
+      <p:sp>
+        <p:nvSpPr>
+          <p:cNvPr id="13" name="Shape 11"/>
+          <p:cNvSpPr/>
+          <p:nvPr/>
+        </p:nvSpPr>
+        <p:spPr>
+          <a:xfrm>
+            <a:off x="7863840" y="1417320"/>
+            <a:ext cx="3779215" cy="4754880"/>
+          </a:xfrm>
+          <a:prstGeom prst="roundRect">
+            <a:avLst>
+              <a:gd name="adj" fmla="val 1936"/>
+            </a:avLst>
+          </a:prstGeom>
+          <a:solidFill>
+            <a:srgbClr val="1B2530"/>
+          </a:solidFill>
+          <a:ln w="12700">
+            <a:solidFill>
+              <a:srgbClr val="1B2530"/>
+            </a:solidFill>
+            <a:prstDash val="solid"/>
+          </a:ln>
+        </p:spPr>
+      </p:sp>
+      <p:sp>
+        <p:nvSpPr>
+          <p:cNvPr id="14" name="Text 12"/>
+          <p:cNvSpPr txBox="1"/>
+          <p:nvPr/>
+        </p:nvSpPr>
+        <p:spPr>
+          <a:xfrm>
+            <a:off x="8046720" y="2148840"/>
+            <a:ext cx="3413455" cy="1828800"/>
+          </a:xfrm>
+          <a:prstGeom prst="rect">
+            <a:avLst/>
+          </a:prstGeom>
+          <a:noFill/>
+          <a:ln/>
+        </p:spPr>
+        <p:txBody>
+          <a:bodyPr wrap="square" lIns="0" tIns="0" rIns="0" bIns="0" rtlCol="0" anchor="ctr"/>
+          <a:lstStyle/>
+          <a:p>
+            <a:pPr algn="ctr" indent="0" marL="0">
+              <a:buNone/>
             </a:pPr>
             <a:r>
-              <a:rPr lang="en-US" sz="2100" dirty="0">
+              <a:rPr lang="en-US" sz="6000" b="1" dirty="0">
                 <a:solidFill>
-                  <a:srgbClr val="1B2530"/>
+                  <a:srgbClr val="FFFFFF"/>
+                </a:solidFill>
+                <a:latin typeface="Cambria" pitchFamily="34" charset="0"/>
+                <a:ea typeface="Cambria" pitchFamily="34" charset="-122"/>
+                <a:cs typeface="Cambria" pitchFamily="34" charset="-120"/>
+              </a:rPr>
+              <a:t>~20 MW</a:t>
+            </a:r>
+            <a:endParaRPr lang="en-US" sz="6000" dirty="0"/>
+          </a:p>
+        </p:txBody>
+      </p:sp>
+      <p:sp>
+        <p:nvSpPr>
+          <p:cNvPr id="15" name="Text 13"/>
+          <p:cNvSpPr txBox="1"/>
+          <p:nvPr/>
+        </p:nvSpPr>
+        <p:spPr>
+          <a:xfrm>
+            <a:off x="8138160" y="4160520"/>
+            <a:ext cx="3230575" cy="1554480"/>
+          </a:xfrm>
+          <a:prstGeom prst="rect">
+            <a:avLst/>
+          </a:prstGeom>
+          <a:noFill/>
+          <a:ln/>
+        </p:spPr>
+        <p:txBody>
+          <a:bodyPr wrap="square" lIns="0" tIns="0" rIns="0" bIns="0" rtlCol="0" anchor="t"/>
+          <a:lstStyle/>
+          <a:p>
+            <a:pPr algn="ctr" indent="0" marL="0">
+              <a:buNone/>
+            </a:pPr>
+            <a:r>
+              <a:rPr lang="en-US" sz="1900" dirty="0">
+                <a:solidFill>
+                  <a:srgbClr val="CFE3EA"/>
                 </a:solidFill>
                 <a:latin typeface="Calibri" pitchFamily="34" charset="0"/>
                 <a:ea typeface="Calibri" pitchFamily="34" charset="-122"/>
                 <a:cs typeface="Calibri" pitchFamily="34" charset="-120"/>
               </a:rPr>
-              <a:t>Tutti eseguono lo stesso codice su dati diversi</a:t>
+              <a:t>per 10^18 operazioni al secondo: circa 50 miliardi di operazioni per joule</a:t>
             </a:r>
-            <a:endParaRPr lang="en-US" sz="2100" dirty="0"/>
-          </a:p>
-          <a:p>
-            <a:pPr marL="203200" indent="-203200">
-              <a:spcAft>
-                <a:spcPts val="800"/>
-              </a:spcAft>
-              <a:buSzPct val="100000"/>
-              <a:buChar char="•"/>
-            </a:pPr>
-            <a:r>
-              <a:rPr lang="en-US" sz="2100" dirty="0">
-                <a:solidFill>
-                  <a:srgbClr val="1B2530"/>
-                </a:solidFill>
-                <a:latin typeface="Calibri" pitchFamily="34" charset="0"/>
-                <a:ea typeface="Calibri" pitchFamily="34" charset="-122"/>
-                <a:cs typeface="Calibri" pitchFamily="34" charset="-120"/>
-              </a:rPr>
-              <a:t>Costruita per finire un milione di compiti al secondo</a:t>
-            </a:r>
-            <a:endParaRPr lang="en-US" sz="2100" dirty="0"/>
-          </a:p>
-          <a:p>
-            <a:pPr marL="203200" indent="-203200">
-              <a:spcAft>
-                <a:spcPts val="800"/>
-              </a:spcAft>
-              <a:buSzPct val="100000"/>
-              <a:buChar char="•"/>
-            </a:pPr>
-            <a:r>
-              <a:rPr lang="en-US" sz="2100" dirty="0">
-                <a:solidFill>
-                  <a:srgbClr val="1B2530"/>
-                </a:solidFill>
-                <a:latin typeface="Calibri" pitchFamily="34" charset="0"/>
-                <a:ea typeface="Calibri" pitchFamily="34" charset="-122"/>
-                <a:cs typeface="Calibri" pitchFamily="34" charset="-120"/>
-              </a:rPr>
-              <a:t>A suo agio con array regolari: pixel, matrici, griglie</a:t>
-            </a:r>
-            <a:endParaRPr lang="en-US" sz="2100" dirty="0"/>
+            <a:endParaRPr lang="en-US" sz="1900" dirty="0"/>
           </a:p>
         </p:txBody>
       </p:sp>
@@ -5381,7 +5536,7 @@
                 <a:ea typeface="Cambria" pitchFamily="34" charset="-122"/>
                 <a:cs typeface="Cambria" pitchFamily="34" charset="-120"/>
               </a:rPr>
-              <a:t>Un chip che diventa il circuito che descrivete</a:t>
+              <a:t>Due modi di spendere i transistor</a:t>
             </a:r>
             <a:endParaRPr lang="en-US" sz="3200" dirty="0"/>
           </a:p>
@@ -5395,33 +5550,82 @@
         </p:nvSpPr>
         <p:spPr>
           <a:xfrm>
-            <a:off x="548640" y="1515999"/>
-            <a:ext cx="146304" cy="146304"/>
-          </a:xfrm>
-          <a:prstGeom prst="rect">
-            <a:avLst/>
+            <a:off x="548640" y="1417320"/>
+            <a:ext cx="5364328" cy="4754880"/>
+          </a:xfrm>
+          <a:prstGeom prst="roundRect">
+            <a:avLst>
+              <a:gd name="adj" fmla="val 1538"/>
+            </a:avLst>
+          </a:prstGeom>
+          <a:solidFill>
+            <a:srgbClr val="EEF2F4"/>
+          </a:solidFill>
+          <a:ln w="12700">
+            <a:solidFill>
+              <a:srgbClr val="EEF2F4"/>
+            </a:solidFill>
+            <a:prstDash val="solid"/>
+          </a:ln>
+        </p:spPr>
+      </p:sp>
+      <p:sp>
+        <p:nvSpPr>
+          <p:cNvPr id="4" name="Text 2"/>
+          <p:cNvSpPr txBox="1"/>
+          <p:nvPr/>
+        </p:nvSpPr>
+        <p:spPr>
+          <a:xfrm>
+            <a:off x="822960" y="1645920"/>
+            <a:ext cx="4815688" cy="548640"/>
+          </a:xfrm>
+          <a:prstGeom prst="roundRect">
+            <a:avLst>
+              <a:gd name="adj" fmla="val 13333"/>
+            </a:avLst>
           </a:prstGeom>
           <a:solidFill>
             <a:srgbClr val="0E7C86"/>
           </a:solidFill>
-          <a:ln w="12700">
+          <a:ln>
             <a:solidFill>
               <a:srgbClr val="0E7C86"/>
             </a:solidFill>
-            <a:prstDash val="solid"/>
           </a:ln>
         </p:spPr>
-      </p:sp>
-      <p:sp>
-        <p:nvSpPr>
-          <p:cNvPr id="4" name="Text 2"/>
+        <p:txBody>
+          <a:bodyPr wrap="square" lIns="0" tIns="0" rIns="0" bIns="0" rtlCol="0" anchor="ctr"/>
+          <a:lstStyle/>
+          <a:p>
+            <a:pPr algn="ctr" indent="0" marL="0">
+              <a:buNone/>
+            </a:pPr>
+            <a:r>
+              <a:rPr lang="en-US" sz="1900" b="1" dirty="0">
+                <a:solidFill>
+                  <a:srgbClr val="FFFFFF"/>
+                </a:solidFill>
+                <a:latin typeface="Calibri" pitchFamily="34" charset="0"/>
+                <a:ea typeface="Calibri" pitchFamily="34" charset="-122"/>
+                <a:cs typeface="Calibri" pitchFamily="34" charset="-120"/>
+              </a:rPr>
+              <a:t>Una CPU</a:t>
+            </a:r>
+            <a:endParaRPr lang="en-US" sz="1900" dirty="0"/>
+          </a:p>
+        </p:txBody>
+      </p:sp>
+      <p:sp>
+        <p:nvSpPr>
+          <p:cNvPr id="5" name="Text 3"/>
           <p:cNvSpPr txBox="1"/>
           <p:nvPr/>
         </p:nvSpPr>
         <p:spPr>
           <a:xfrm>
-            <a:off x="932688" y="1417320"/>
-            <a:ext cx="6565392" cy="325374"/>
+            <a:off x="868680" y="2423160"/>
+            <a:ext cx="4724248" cy="3566160"/>
           </a:xfrm>
           <a:prstGeom prst="rect">
             <a:avLst/>
@@ -5433,11 +5637,12 @@
           <a:bodyPr wrap="square" lIns="0" tIns="0" rIns="0" bIns="0" rtlCol="0" anchor="t"/>
           <a:lstStyle/>
           <a:p>
-            <a:pPr indent="0" marL="0">
+            <a:pPr marL="203200" indent="-203200">
               <a:spcAft>
-                <a:spcPts val="200"/>
+                <a:spcPts val="800"/>
               </a:spcAft>
-              <a:buNone/>
+              <a:buSzPct val="100000"/>
+              <a:buChar char="•"/>
             </a:pPr>
             <a:r>
               <a:rPr lang="en-US" sz="2100" dirty="0">
@@ -5448,63 +5653,17 @@
                 <a:ea typeface="Calibri" pitchFamily="34" charset="-122"/>
                 <a:cs typeface="Calibri" pitchFamily="34" charset="-120"/>
               </a:rPr>
-              <a:t>FPGA: field-programmable gate array</a:t>
+              <a:t>Pochi core grandi: decine</a:t>
             </a:r>
             <a:endParaRPr lang="en-US" sz="2100" dirty="0"/>
           </a:p>
-        </p:txBody>
-      </p:sp>
-      <p:sp>
-        <p:nvSpPr>
-          <p:cNvPr id="5" name="Shape 3"/>
-          <p:cNvSpPr/>
-          <p:nvPr/>
-        </p:nvSpPr>
-        <p:spPr>
-          <a:xfrm>
-            <a:off x="548640" y="2003298"/>
-            <a:ext cx="146304" cy="146304"/>
-          </a:xfrm>
-          <a:prstGeom prst="rect">
-            <a:avLst/>
-          </a:prstGeom>
-          <a:solidFill>
-            <a:srgbClr val="C7791B"/>
-          </a:solidFill>
-          <a:ln w="12700">
-            <a:solidFill>
-              <a:srgbClr val="C7791B"/>
-            </a:solidFill>
-            <a:prstDash val="solid"/>
-          </a:ln>
-        </p:spPr>
-      </p:sp>
-      <p:sp>
-        <p:nvSpPr>
-          <p:cNvPr id="6" name="Text 4"/>
-          <p:cNvSpPr txBox="1"/>
-          <p:nvPr/>
-        </p:nvSpPr>
-        <p:spPr>
-          <a:xfrm>
-            <a:off x="932688" y="1904619"/>
-            <a:ext cx="6565392" cy="1829562"/>
-          </a:xfrm>
-          <a:prstGeom prst="rect">
-            <a:avLst/>
-          </a:prstGeom>
-          <a:noFill/>
-          <a:ln/>
-        </p:spPr>
-        <p:txBody>
-          <a:bodyPr wrap="square" lIns="0" tIns="0" rIns="0" bIns="0" rtlCol="0" anchor="t"/>
-          <a:lstStyle/>
-          <a:p>
-            <a:pPr indent="0" marL="0">
+          <a:p>
+            <a:pPr marL="203200" indent="-203200">
               <a:spcAft>
-                <a:spcPts val="200"/>
+                <a:spcPts val="800"/>
               </a:spcAft>
-              <a:buNone/>
+              <a:buSzPct val="100000"/>
+              <a:buChar char="•"/>
             </a:pPr>
             <a:r>
               <a:rPr lang="en-US" sz="2100" dirty="0">
@@ -5515,123 +5674,17 @@
                 <a:ea typeface="Calibri" pitchFamily="34" charset="-122"/>
                 <a:cs typeface="Calibri" pitchFamily="34" charset="-120"/>
               </a:rPr>
-              <a:t>Dentro: un mare di piccoli blocchi programmabili</a:t>
+              <a:t>Ciascuno fuori ordine, con predittori e grandi cache</a:t>
             </a:r>
             <a:endParaRPr lang="en-US" sz="2100" dirty="0"/>
           </a:p>
           <a:p>
-            <a:pPr indent="0" marL="0">
+            <a:pPr marL="203200" indent="-203200">
               <a:spcAft>
-                <a:spcPts val="200"/>
+                <a:spcPts val="800"/>
               </a:spcAft>
-              <a:buNone/>
-            </a:pPr>
-            <a:r>
-              <a:rPr lang="en-US" sz="1800" dirty="0">
-                <a:solidFill>
-                  <a:srgbClr val="5B6B78"/>
-                </a:solidFill>
-                <a:latin typeface="Calibri" pitchFamily="34" charset="0"/>
-                <a:ea typeface="Calibri" pitchFamily="34" charset="-122"/>
-                <a:cs typeface="Calibri" pitchFamily="34" charset="-120"/>
-              </a:rPr>
-              <a:t>– tabelle di look-up, ciascuna capace di essere qualunque funzione di pochi ingressi</a:t>
-            </a:r>
-            <a:endParaRPr lang="en-US" sz="2100" dirty="0"/>
-          </a:p>
-          <a:p>
-            <a:pPr indent="0" marL="0">
-              <a:spcAft>
-                <a:spcPts val="200"/>
-              </a:spcAft>
-              <a:buNone/>
-            </a:pPr>
-            <a:r>
-              <a:rPr lang="en-US" sz="1800" dirty="0">
-                <a:solidFill>
-                  <a:srgbClr val="5B6B78"/>
-                </a:solidFill>
-                <a:latin typeface="Calibri" pitchFamily="34" charset="0"/>
-                <a:ea typeface="Calibri" pitchFamily="34" charset="-122"/>
-                <a:cs typeface="Calibri" pitchFamily="34" charset="-120"/>
-              </a:rPr>
-              <a:t>– flip-flop, uno accanto a ogni tabella</a:t>
-            </a:r>
-            <a:endParaRPr lang="en-US" sz="2100" dirty="0"/>
-          </a:p>
-          <a:p>
-            <a:pPr indent="0" marL="0">
-              <a:spcAft>
-                <a:spcPts val="200"/>
-              </a:spcAft>
-              <a:buNone/>
-            </a:pPr>
-            <a:r>
-              <a:rPr lang="en-US" sz="1800" dirty="0">
-                <a:solidFill>
-                  <a:srgbClr val="5B6B78"/>
-                </a:solidFill>
-                <a:latin typeface="Calibri" pitchFamily="34" charset="0"/>
-                <a:ea typeface="Calibri" pitchFamily="34" charset="-122"/>
-                <a:cs typeface="Calibri" pitchFamily="34" charset="-120"/>
-              </a:rPr>
-              <a:t>– fili e interruttori che possono collegare ogni blocco a ogni altro</a:t>
-            </a:r>
-            <a:endParaRPr lang="en-US" sz="2100" dirty="0"/>
-          </a:p>
-        </p:txBody>
-      </p:sp>
-      <p:sp>
-        <p:nvSpPr>
-          <p:cNvPr id="7" name="Shape 5"/>
-          <p:cNvSpPr/>
-          <p:nvPr/>
-        </p:nvSpPr>
-        <p:spPr>
-          <a:xfrm>
-            <a:off x="548640" y="3994785"/>
-            <a:ext cx="146304" cy="146304"/>
-          </a:xfrm>
-          <a:prstGeom prst="rect">
-            <a:avLst/>
-          </a:prstGeom>
-          <a:solidFill>
-            <a:srgbClr val="0E7C86"/>
-          </a:solidFill>
-          <a:ln w="12700">
-            <a:solidFill>
-              <a:srgbClr val="0E7C86"/>
-            </a:solidFill>
-            <a:prstDash val="solid"/>
-          </a:ln>
-        </p:spPr>
-      </p:sp>
-      <p:sp>
-        <p:nvSpPr>
-          <p:cNvPr id="8" name="Text 6"/>
-          <p:cNvSpPr txBox="1"/>
-          <p:nvPr/>
-        </p:nvSpPr>
-        <p:spPr>
-          <a:xfrm>
-            <a:off x="932688" y="3896106"/>
-            <a:ext cx="6565392" cy="650748"/>
-          </a:xfrm>
-          <a:prstGeom prst="rect">
-            <a:avLst/>
-          </a:prstGeom>
-          <a:noFill/>
-          <a:ln/>
-        </p:spPr>
-        <p:txBody>
-          <a:bodyPr wrap="square" lIns="0" tIns="0" rIns="0" bIns="0" rtlCol="0" anchor="t"/>
-          <a:lstStyle/>
-          <a:p>
-            <a:pPr indent="0" marL="0">
-              <a:spcAft>
-                <a:spcPts val="200"/>
-              </a:spcAft>
-              <a:buNone/>
+              <a:buSzPct val="100000"/>
+              <a:buChar char="•"/>
             </a:pPr>
             <a:r>
               <a:rPr lang="en-US" sz="2100" dirty="0">
@@ -5642,63 +5695,17 @@
                 <a:ea typeface="Calibri" pitchFamily="34" charset="-122"/>
                 <a:cs typeface="Calibri" pitchFamily="34" charset="-120"/>
               </a:rPr>
-              <a:t>Un file di configurazione, il bitstream, imposta ogni tabella e ogni interruttore</a:t>
+              <a:t>Costruita per finire un compito il prima possibile</a:t>
             </a:r>
             <a:endParaRPr lang="en-US" sz="2100" dirty="0"/>
           </a:p>
-        </p:txBody>
-      </p:sp>
-      <p:sp>
-        <p:nvSpPr>
-          <p:cNvPr id="9" name="Shape 7"/>
-          <p:cNvSpPr/>
-          <p:nvPr/>
-        </p:nvSpPr>
-        <p:spPr>
-          <a:xfrm>
-            <a:off x="548640" y="4807458"/>
-            <a:ext cx="146304" cy="146304"/>
-          </a:xfrm>
-          <a:prstGeom prst="rect">
-            <a:avLst/>
-          </a:prstGeom>
-          <a:solidFill>
-            <a:srgbClr val="C7791B"/>
-          </a:solidFill>
-          <a:ln w="12700">
-            <a:solidFill>
-              <a:srgbClr val="C7791B"/>
-            </a:solidFill>
-            <a:prstDash val="solid"/>
-          </a:ln>
-        </p:spPr>
-      </p:sp>
-      <p:sp>
-        <p:nvSpPr>
-          <p:cNvPr id="10" name="Text 8"/>
-          <p:cNvSpPr txBox="1"/>
-          <p:nvPr/>
-        </p:nvSpPr>
-        <p:spPr>
-          <a:xfrm>
-            <a:off x="932688" y="4708779"/>
-            <a:ext cx="6565392" cy="650748"/>
-          </a:xfrm>
-          <a:prstGeom prst="rect">
-            <a:avLst/>
-          </a:prstGeom>
-          <a:noFill/>
-          <a:ln/>
-        </p:spPr>
-        <p:txBody>
-          <a:bodyPr wrap="square" lIns="0" tIns="0" rIns="0" bIns="0" rtlCol="0" anchor="t"/>
-          <a:lstStyle/>
-          <a:p>
-            <a:pPr indent="0" marL="0">
+          <a:p>
+            <a:pPr marL="203200" indent="-203200">
               <a:spcAft>
-                <a:spcPts val="200"/>
+                <a:spcPts val="800"/>
               </a:spcAft>
-              <a:buNone/>
+              <a:buSzPct val="100000"/>
+              <a:buChar char="•"/>
             </a:pPr>
             <a:r>
               <a:rPr lang="en-US" sz="2100" dirty="0">
@@ -5709,7 +5716,7 @@
                 <a:ea typeface="Calibri" pitchFamily="34" charset="-122"/>
                 <a:cs typeface="Calibri" pitchFamily="34" charset="-120"/>
               </a:rPr>
-              <a:t>Caricate un altro bitstream e lo stesso chip è un altro circuito</a:t>
+              <a:t>A suo agio con salti e dati irregolari</a:t>
             </a:r>
             <a:endParaRPr lang="en-US" sz="2100" dirty="0"/>
           </a:p>
@@ -5717,24 +5724,26 @@
       </p:sp>
       <p:sp>
         <p:nvSpPr>
-          <p:cNvPr id="11" name="Shape 9"/>
+          <p:cNvPr id="6" name="Shape 4"/>
           <p:cNvSpPr/>
           <p:nvPr/>
         </p:nvSpPr>
         <p:spPr>
           <a:xfrm>
-            <a:off x="548640" y="5620131"/>
-            <a:ext cx="146304" cy="146304"/>
-          </a:xfrm>
-          <a:prstGeom prst="rect">
-            <a:avLst/>
+            <a:off x="6278728" y="1417320"/>
+            <a:ext cx="5364328" cy="4754880"/>
+          </a:xfrm>
+          <a:prstGeom prst="roundRect">
+            <a:avLst>
+              <a:gd name="adj" fmla="val 1538"/>
+            </a:avLst>
           </a:prstGeom>
           <a:solidFill>
-            <a:srgbClr val="0E7C86"/>
+            <a:srgbClr val="EEF2F4"/>
           </a:solidFill>
           <a:ln w="12700">
             <a:solidFill>
-              <a:srgbClr val="0E7C86"/>
+              <a:srgbClr val="EEF2F4"/>
             </a:solidFill>
             <a:prstDash val="solid"/>
           </a:ln>
@@ -5742,14 +5751,61 @@
       </p:sp>
       <p:sp>
         <p:nvSpPr>
-          <p:cNvPr id="12" name="Text 10"/>
+          <p:cNvPr id="7" name="Text 5"/>
           <p:cNvSpPr txBox="1"/>
           <p:nvPr/>
         </p:nvSpPr>
         <p:spPr>
           <a:xfrm>
-            <a:off x="932688" y="5521452"/>
-            <a:ext cx="6565392" cy="650748"/>
+            <a:off x="6553048" y="1645920"/>
+            <a:ext cx="4815688" cy="548640"/>
+          </a:xfrm>
+          <a:prstGeom prst="roundRect">
+            <a:avLst>
+              <a:gd name="adj" fmla="val 13333"/>
+            </a:avLst>
+          </a:prstGeom>
+          <a:solidFill>
+            <a:srgbClr val="C7791B"/>
+          </a:solidFill>
+          <a:ln>
+            <a:solidFill>
+              <a:srgbClr val="C7791B"/>
+            </a:solidFill>
+          </a:ln>
+        </p:spPr>
+        <p:txBody>
+          <a:bodyPr wrap="square" lIns="0" tIns="0" rIns="0" bIns="0" rtlCol="0" anchor="ctr"/>
+          <a:lstStyle/>
+          <a:p>
+            <a:pPr algn="ctr" indent="0" marL="0">
+              <a:buNone/>
+            </a:pPr>
+            <a:r>
+              <a:rPr lang="en-US" sz="1900" b="1" dirty="0">
+                <a:solidFill>
+                  <a:srgbClr val="FFFFFF"/>
+                </a:solidFill>
+                <a:latin typeface="Calibri" pitchFamily="34" charset="0"/>
+                <a:ea typeface="Calibri" pitchFamily="34" charset="-122"/>
+                <a:cs typeface="Calibri" pitchFamily="34" charset="-120"/>
+              </a:rPr>
+              <a:t>Una GPU</a:t>
+            </a:r>
+            <a:endParaRPr lang="en-US" sz="1900" dirty="0"/>
+          </a:p>
+        </p:txBody>
+      </p:sp>
+      <p:sp>
+        <p:nvSpPr>
+          <p:cNvPr id="8" name="Text 6"/>
+          <p:cNvSpPr txBox="1"/>
+          <p:nvPr/>
+        </p:nvSpPr>
+        <p:spPr>
+          <a:xfrm>
+            <a:off x="6598768" y="2423160"/>
+            <a:ext cx="4724248" cy="3566160"/>
           </a:xfrm>
           <a:prstGeom prst="rect">
             <a:avLst/>
@@ -5761,11 +5817,12 @@
           <a:bodyPr wrap="square" lIns="0" tIns="0" rIns="0" bIns="0" rtlCol="0" anchor="t"/>
           <a:lstStyle/>
           <a:p>
-            <a:pPr indent="0" marL="0">
+            <a:pPr marL="203200" indent="-203200">
               <a:spcAft>
-                <a:spcPts val="200"/>
+                <a:spcPts val="800"/>
               </a:spcAft>
-              <a:buNone/>
+              <a:buSzPct val="100000"/>
+              <a:buChar char="•"/>
             </a:pPr>
             <a:r>
               <a:rPr lang="en-US" sz="2100" dirty="0">
@@ -5776,72 +5833,72 @@
                 <a:ea typeface="Calibri" pitchFamily="34" charset="-122"/>
                 <a:cs typeface="Calibri" pitchFamily="34" charset="-120"/>
               </a:rPr>
-              <a:t>In vendita dal 1985; oggi da pochi euro fino alle schede per i data center</a:t>
+              <a:t>Migliaia di core piccoli e semplici</a:t>
             </a:r>
             <a:endParaRPr lang="en-US" sz="2100" dirty="0"/>
           </a:p>
-        </p:txBody>
-      </p:sp>
-      <p:pic>
-        <p:nvPicPr>
-          <p:cNvPr id="13" name="Image 0" descr="/Users/raffaelemontella/devel/riscv-prg32/computer-architecture-with-prg32/tools/assets/pcb.jpg">    </p:cNvPr>
-          <p:cNvPicPr>
-            <a:picLocks noChangeAspect="1"/>
-          </p:cNvPicPr>
-          <p:nvPr/>
-        </p:nvPicPr>
-        <p:blipFill>
-          <a:blip r:embed="rId1"/>
-          <a:stretch>
-            <a:fillRect/>
-          </a:stretch>
-        </p:blipFill>
-        <p:spPr>
-          <a:xfrm>
-            <a:off x="7863840" y="2230837"/>
-            <a:ext cx="3779215" cy="2670645"/>
-          </a:xfrm>
-          <a:prstGeom prst="rect">
-            <a:avLst/>
-          </a:prstGeom>
-        </p:spPr>
-      </p:pic>
-      <p:sp>
-        <p:nvSpPr>
-          <p:cNvPr id="14" name="Text 11"/>
-          <p:cNvSpPr txBox="1"/>
-          <p:nvPr/>
-        </p:nvSpPr>
-        <p:spPr>
-          <a:xfrm>
-            <a:off x="7863840" y="5788152"/>
-            <a:ext cx="3779215" cy="384048"/>
-          </a:xfrm>
-          <a:prstGeom prst="rect">
-            <a:avLst/>
-          </a:prstGeom>
-          <a:noFill/>
-          <a:ln/>
-        </p:spPr>
-        <p:txBody>
-          <a:bodyPr wrap="square" lIns="0" tIns="0" rIns="0" bIns="0" rtlCol="0" anchor="ctr"/>
-          <a:lstStyle/>
-          <a:p>
-            <a:pPr algn="ctr" indent="0" marL="0">
-              <a:buNone/>
+          <a:p>
+            <a:pPr marL="203200" indent="-203200">
+              <a:spcAft>
+                <a:spcPts val="800"/>
+              </a:spcAft>
+              <a:buSzPct val="100000"/>
+              <a:buChar char="•"/>
             </a:pPr>
             <a:r>
-              <a:rPr lang="en-US" sz="1200" i="1" dirty="0">
+              <a:rPr lang="en-US" sz="2100" dirty="0">
                 <a:solidFill>
-                  <a:srgbClr val="5B6B78"/>
+                  <a:srgbClr val="1B2530"/>
                 </a:solidFill>
                 <a:latin typeface="Calibri" pitchFamily="34" charset="0"/>
                 <a:ea typeface="Calibri" pitchFamily="34" charset="-122"/>
                 <a:cs typeface="Calibri" pitchFamily="34" charset="-120"/>
               </a:rPr>
-              <a:t>La logica programmabile sta sulle schede come ogni altro chip</a:t>
+              <a:t>Tutti eseguono lo stesso codice su dati diversi</a:t>
             </a:r>
-            <a:endParaRPr lang="en-US" sz="1200" dirty="0"/>
+            <a:endParaRPr lang="en-US" sz="2100" dirty="0"/>
+          </a:p>
+          <a:p>
+            <a:pPr marL="203200" indent="-203200">
+              <a:spcAft>
+                <a:spcPts val="800"/>
+              </a:spcAft>
+              <a:buSzPct val="100000"/>
+              <a:buChar char="•"/>
+            </a:pPr>
+            <a:r>
+              <a:rPr lang="en-US" sz="2100" dirty="0">
+                <a:solidFill>
+                  <a:srgbClr val="1B2530"/>
+                </a:solidFill>
+                <a:latin typeface="Calibri" pitchFamily="34" charset="0"/>
+                <a:ea typeface="Calibri" pitchFamily="34" charset="-122"/>
+                <a:cs typeface="Calibri" pitchFamily="34" charset="-120"/>
+              </a:rPr>
+              <a:t>Costruita per finire un milione di compiti al secondo</a:t>
+            </a:r>
+            <a:endParaRPr lang="en-US" sz="2100" dirty="0"/>
+          </a:p>
+          <a:p>
+            <a:pPr marL="203200" indent="-203200">
+              <a:spcAft>
+                <a:spcPts val="800"/>
+              </a:spcAft>
+              <a:buSzPct val="100000"/>
+              <a:buChar char="•"/>
+            </a:pPr>
+            <a:r>
+              <a:rPr lang="en-US" sz="2100" dirty="0">
+                <a:solidFill>
+                  <a:srgbClr val="1B2530"/>
+                </a:solidFill>
+                <a:latin typeface="Calibri" pitchFamily="34" charset="0"/>
+                <a:ea typeface="Calibri" pitchFamily="34" charset="-122"/>
+                <a:cs typeface="Calibri" pitchFamily="34" charset="-120"/>
+              </a:rPr>
+              <a:t>A suo agio con array regolari: pixel, matrici, griglie</a:t>
+            </a:r>
+            <a:endParaRPr lang="en-US" sz="2100" dirty="0"/>
           </a:p>
         </p:txBody>
       </p:sp>
@@ -5953,1781 +6010,153 @@
                 <a:ea typeface="Cambria" pitchFamily="34" charset="-122"/>
                 <a:cs typeface="Cambria" pitchFamily="34" charset="-120"/>
               </a:rPr>
-              <a:t>Una tabella di look-up è una tabella di verità in memoria</a:t>
+              <a:t>Un chip che diventa il circuito che descrivete</a:t>
             </a:r>
             <a:endParaRPr lang="en-US" sz="3200" dirty="0"/>
           </a:p>
         </p:txBody>
       </p:sp>
-      <p:graphicFrame>
-        <p:nvGraphicFramePr>
-          <p:cNvPr id="16" name="Table 0"/>
-          <p:cNvGraphicFramePr>
-            <a:graphicFrameLocks noGrp="1"/>
-          </p:cNvGraphicFramePr>
-          <p:nvPr>
-            <p:extLst>
-              <p:ext uri="{D42A27DB-BD31-4B8C-83A1-F6EECF244321}">
-                <p14:modId xmlns:p14="http://schemas.microsoft.com/office/powerpoint/2010/main" val="1579011935"/>
-              </p:ext>
-            </p:extLst>
-          </p:nvPr>
-        </p:nvGraphicFramePr>
-        <p:xfrm>
-          <a:off x="548640" y="1417320"/>
-          <a:ext cx="11094415" cy="914400"/>
-        </p:xfrm>
-        <a:graphic>
-          <a:graphicData uri="http://schemas.openxmlformats.org/drawingml/2006/table">
-            <a:tbl>
-              <a:tblPr/>
-              <a:tblGrid>
-                <a:gridCol w="1194783"/>
-                <a:gridCol w="1194783"/>
-                <a:gridCol w="2901616"/>
-                <a:gridCol w="2901616"/>
-                <a:gridCol w="2901616"/>
-              </a:tblGrid>
-              <a:tr h="0">
-                <a:tc>
-                  <a:txBody>
-                    <a:bodyPr/>
-                    <a:lstStyle/>
-                    <a:p>
-                      <a:pPr algn="l" indent="0" marL="0">
-                        <a:buNone/>
-                      </a:pPr>
-                      <a:r>
-                        <a:rPr lang="en-US" sz="2100" b="1" dirty="0">
-                          <a:solidFill>
-                            <a:srgbClr val="FFFFFF"/>
-                          </a:solidFill>
-                          <a:latin typeface="Calibri" pitchFamily="34" charset="0"/>
-                          <a:ea typeface="Calibri" pitchFamily="34" charset="-122"/>
-                          <a:cs typeface="Calibri" pitchFamily="34" charset="-120"/>
-                        </a:rPr>
-                        <a:t>a</a:t>
-                      </a:r>
-                      <a:endParaRPr lang="en-US" sz="2100" dirty="0">
-                        <a:latin typeface="Calibri" charset="0"/>
-                        <a:ea typeface="Calibri" charset="0"/>
-                        <a:cs typeface="Calibri" charset="0"/>
-                      </a:endParaRPr>
-                    </a:p>
-                  </a:txBody>
-                  <a:tcPr marL="101600" marR="101600" marT="50800" marB="50800" anchor="ctr">
-                    <a:lnL w="6350" cap="flat" cmpd="sng" algn="ctr">
-                      <a:solidFill>
-                        <a:srgbClr val="C9D2D8"/>
-                      </a:solidFill>
-                      <a:prstDash val="solid"/>
-                      <a:round/>
-                      <a:headEnd type="none" w="med" len="med"/>
-                      <a:tailEnd type="none" w="med" len="med"/>
-                    </a:lnL>
-                    <a:lnR w="6350" cap="flat" cmpd="sng" algn="ctr">
-                      <a:solidFill>
-                        <a:srgbClr val="C9D2D8"/>
-                      </a:solidFill>
-                      <a:prstDash val="solid"/>
-                      <a:round/>
-                      <a:headEnd type="none" w="med" len="med"/>
-                      <a:tailEnd type="none" w="med" len="med"/>
-                    </a:lnR>
-                    <a:lnT w="6350" cap="flat" cmpd="sng" algn="ctr">
-                      <a:solidFill>
-                        <a:srgbClr val="C9D2D8"/>
-                      </a:solidFill>
-                      <a:prstDash val="solid"/>
-                      <a:round/>
-                      <a:headEnd type="none" w="med" len="med"/>
-                      <a:tailEnd type="none" w="med" len="med"/>
-                    </a:lnT>
-                    <a:lnB w="6350" cap="flat" cmpd="sng" algn="ctr">
-                      <a:solidFill>
-                        <a:srgbClr val="C9D2D8"/>
-                      </a:solidFill>
-                      <a:prstDash val="solid"/>
-                      <a:round/>
-                      <a:headEnd type="none" w="med" len="med"/>
-                      <a:tailEnd type="none" w="med" len="med"/>
-                    </a:lnB>
-                    <a:solidFill>
-                      <a:srgbClr val="2E4A62"/>
-                    </a:solidFill>
-                  </a:tcPr>
-                </a:tc>
-                <a:tc>
-                  <a:txBody>
-                    <a:bodyPr/>
-                    <a:lstStyle/>
-                    <a:p>
-                      <a:pPr algn="l" indent="0" marL="0">
-                        <a:buNone/>
-                      </a:pPr>
-                      <a:r>
-                        <a:rPr lang="en-US" sz="2100" b="1" dirty="0">
-                          <a:solidFill>
-                            <a:srgbClr val="FFFFFF"/>
-                          </a:solidFill>
-                          <a:latin typeface="Calibri" pitchFamily="34" charset="0"/>
-                          <a:ea typeface="Calibri" pitchFamily="34" charset="-122"/>
-                          <a:cs typeface="Calibri" pitchFamily="34" charset="-120"/>
-                        </a:rPr>
-                        <a:t>b</a:t>
-                      </a:r>
-                      <a:endParaRPr lang="en-US" sz="2100" dirty="0">
-                        <a:latin typeface="Calibri" charset="0"/>
-                        <a:ea typeface="Calibri" charset="0"/>
-                        <a:cs typeface="Calibri" charset="0"/>
-                      </a:endParaRPr>
-                    </a:p>
-                  </a:txBody>
-                  <a:tcPr marL="101600" marR="101600" marT="50800" marB="50800" anchor="ctr">
-                    <a:lnL w="6350" cap="flat" cmpd="sng" algn="ctr">
-                      <a:solidFill>
-                        <a:srgbClr val="C9D2D8"/>
-                      </a:solidFill>
-                      <a:prstDash val="solid"/>
-                      <a:round/>
-                      <a:headEnd type="none" w="med" len="med"/>
-                      <a:tailEnd type="none" w="med" len="med"/>
-                    </a:lnL>
-                    <a:lnR w="6350" cap="flat" cmpd="sng" algn="ctr">
-                      <a:solidFill>
-                        <a:srgbClr val="C9D2D8"/>
-                      </a:solidFill>
-                      <a:prstDash val="solid"/>
-                      <a:round/>
-                      <a:headEnd type="none" w="med" len="med"/>
-                      <a:tailEnd type="none" w="med" len="med"/>
-                    </a:lnR>
-                    <a:lnT w="6350" cap="flat" cmpd="sng" algn="ctr">
-                      <a:solidFill>
-                        <a:srgbClr val="C9D2D8"/>
-                      </a:solidFill>
-                      <a:prstDash val="solid"/>
-                      <a:round/>
-                      <a:headEnd type="none" w="med" len="med"/>
-                      <a:tailEnd type="none" w="med" len="med"/>
-                    </a:lnT>
-                    <a:lnB w="6350" cap="flat" cmpd="sng" algn="ctr">
-                      <a:solidFill>
-                        <a:srgbClr val="C9D2D8"/>
-                      </a:solidFill>
-                      <a:prstDash val="solid"/>
-                      <a:round/>
-                      <a:headEnd type="none" w="med" len="med"/>
-                      <a:tailEnd type="none" w="med" len="med"/>
-                    </a:lnB>
-                    <a:solidFill>
-                      <a:srgbClr val="2E4A62"/>
-                    </a:solidFill>
-                  </a:tcPr>
-                </a:tc>
-                <a:tc>
-                  <a:txBody>
-                    <a:bodyPr/>
-                    <a:lstStyle/>
-                    <a:p>
-                      <a:pPr algn="l" indent="0" marL="0">
-                        <a:buNone/>
-                      </a:pPr>
-                      <a:r>
-                        <a:rPr lang="en-US" sz="2100" b="1" dirty="0">
-                          <a:solidFill>
-                            <a:srgbClr val="FFFFFF"/>
-                          </a:solidFill>
-                          <a:latin typeface="Calibri" pitchFamily="34" charset="0"/>
-                          <a:ea typeface="Calibri" pitchFamily="34" charset="-122"/>
-                          <a:cs typeface="Calibri" pitchFamily="34" charset="-120"/>
-                        </a:rPr>
-                        <a:t>memorizzato per AND</a:t>
-                      </a:r>
-                      <a:endParaRPr lang="en-US" sz="2100" dirty="0">
-                        <a:latin typeface="Calibri" charset="0"/>
-                        <a:ea typeface="Calibri" charset="0"/>
-                        <a:cs typeface="Calibri" charset="0"/>
-                      </a:endParaRPr>
-                    </a:p>
-                  </a:txBody>
-                  <a:tcPr marL="101600" marR="101600" marT="50800" marB="50800" anchor="ctr">
-                    <a:lnL w="6350" cap="flat" cmpd="sng" algn="ctr">
-                      <a:solidFill>
-                        <a:srgbClr val="C9D2D8"/>
-                      </a:solidFill>
-                      <a:prstDash val="solid"/>
-                      <a:round/>
-                      <a:headEnd type="none" w="med" len="med"/>
-                      <a:tailEnd type="none" w="med" len="med"/>
-                    </a:lnL>
-                    <a:lnR w="6350" cap="flat" cmpd="sng" algn="ctr">
-                      <a:solidFill>
-                        <a:srgbClr val="C9D2D8"/>
-                      </a:solidFill>
-                      <a:prstDash val="solid"/>
-                      <a:round/>
-                      <a:headEnd type="none" w="med" len="med"/>
-                      <a:tailEnd type="none" w="med" len="med"/>
-                    </a:lnR>
-                    <a:lnT w="6350" cap="flat" cmpd="sng" algn="ctr">
-                      <a:solidFill>
-                        <a:srgbClr val="C9D2D8"/>
-                      </a:solidFill>
-                      <a:prstDash val="solid"/>
-                      <a:round/>
-                      <a:headEnd type="none" w="med" len="med"/>
-                      <a:tailEnd type="none" w="med" len="med"/>
-                    </a:lnT>
-                    <a:lnB w="6350" cap="flat" cmpd="sng" algn="ctr">
-                      <a:solidFill>
-                        <a:srgbClr val="C9D2D8"/>
-                      </a:solidFill>
-                      <a:prstDash val="solid"/>
-                      <a:round/>
-                      <a:headEnd type="none" w="med" len="med"/>
-                      <a:tailEnd type="none" w="med" len="med"/>
-                    </a:lnB>
-                    <a:solidFill>
-                      <a:srgbClr val="2E4A62"/>
-                    </a:solidFill>
-                  </a:tcPr>
-                </a:tc>
-                <a:tc>
-                  <a:txBody>
-                    <a:bodyPr/>
-                    <a:lstStyle/>
-                    <a:p>
-                      <a:pPr algn="l" indent="0" marL="0">
-                        <a:buNone/>
-                      </a:pPr>
-                      <a:r>
-                        <a:rPr lang="en-US" sz="2100" b="1" dirty="0">
-                          <a:solidFill>
-                            <a:srgbClr val="FFFFFF"/>
-                          </a:solidFill>
-                          <a:latin typeface="Calibri" pitchFamily="34" charset="0"/>
-                          <a:ea typeface="Calibri" pitchFamily="34" charset="-122"/>
-                          <a:cs typeface="Calibri" pitchFamily="34" charset="-120"/>
-                        </a:rPr>
-                        <a:t>memorizzato per XOR</a:t>
-                      </a:r>
-                      <a:endParaRPr lang="en-US" sz="2100" dirty="0">
-                        <a:latin typeface="Calibri" charset="0"/>
-                        <a:ea typeface="Calibri" charset="0"/>
-                        <a:cs typeface="Calibri" charset="0"/>
-                      </a:endParaRPr>
-                    </a:p>
-                  </a:txBody>
-                  <a:tcPr marL="101600" marR="101600" marT="50800" marB="50800" anchor="ctr">
-                    <a:lnL w="6350" cap="flat" cmpd="sng" algn="ctr">
-                      <a:solidFill>
-                        <a:srgbClr val="C9D2D8"/>
-                      </a:solidFill>
-                      <a:prstDash val="solid"/>
-                      <a:round/>
-                      <a:headEnd type="none" w="med" len="med"/>
-                      <a:tailEnd type="none" w="med" len="med"/>
-                    </a:lnL>
-                    <a:lnR w="6350" cap="flat" cmpd="sng" algn="ctr">
-                      <a:solidFill>
-                        <a:srgbClr val="C9D2D8"/>
-                      </a:solidFill>
-                      <a:prstDash val="solid"/>
-                      <a:round/>
-                      <a:headEnd type="none" w="med" len="med"/>
-                      <a:tailEnd type="none" w="med" len="med"/>
-                    </a:lnR>
-                    <a:lnT w="6350" cap="flat" cmpd="sng" algn="ctr">
-                      <a:solidFill>
-                        <a:srgbClr val="C9D2D8"/>
-                      </a:solidFill>
-                      <a:prstDash val="solid"/>
-                      <a:round/>
-                      <a:headEnd type="none" w="med" len="med"/>
-                      <a:tailEnd type="none" w="med" len="med"/>
-                    </a:lnT>
-                    <a:lnB w="6350" cap="flat" cmpd="sng" algn="ctr">
-                      <a:solidFill>
-                        <a:srgbClr val="C9D2D8"/>
-                      </a:solidFill>
-                      <a:prstDash val="solid"/>
-                      <a:round/>
-                      <a:headEnd type="none" w="med" len="med"/>
-                      <a:tailEnd type="none" w="med" len="med"/>
-                    </a:lnB>
-                    <a:solidFill>
-                      <a:srgbClr val="2E4A62"/>
-                    </a:solidFill>
-                  </a:tcPr>
-                </a:tc>
-                <a:tc>
-                  <a:txBody>
-                    <a:bodyPr/>
-                    <a:lstStyle/>
-                    <a:p>
-                      <a:pPr algn="l" indent="0" marL="0">
-                        <a:buNone/>
-                      </a:pPr>
-                      <a:r>
-                        <a:rPr lang="en-US" sz="2100" b="1" dirty="0">
-                          <a:solidFill>
-                            <a:srgbClr val="FFFFFF"/>
-                          </a:solidFill>
-                          <a:latin typeface="Calibri" pitchFamily="34" charset="0"/>
-                          <a:ea typeface="Calibri" pitchFamily="34" charset="-122"/>
-                          <a:cs typeface="Calibri" pitchFamily="34" charset="-120"/>
-                        </a:rPr>
-                        <a:t>memorizzato per NOT a</a:t>
-                      </a:r>
-                      <a:endParaRPr lang="en-US" sz="2100" dirty="0">
-                        <a:latin typeface="Calibri" charset="0"/>
-                        <a:ea typeface="Calibri" charset="0"/>
-                        <a:cs typeface="Calibri" charset="0"/>
-                      </a:endParaRPr>
-                    </a:p>
-                  </a:txBody>
-                  <a:tcPr marL="101600" marR="101600" marT="50800" marB="50800" anchor="ctr">
-                    <a:lnL w="6350" cap="flat" cmpd="sng" algn="ctr">
-                      <a:solidFill>
-                        <a:srgbClr val="C9D2D8"/>
-                      </a:solidFill>
-                      <a:prstDash val="solid"/>
-                      <a:round/>
-                      <a:headEnd type="none" w="med" len="med"/>
-                      <a:tailEnd type="none" w="med" len="med"/>
-                    </a:lnL>
-                    <a:lnR w="6350" cap="flat" cmpd="sng" algn="ctr">
-                      <a:solidFill>
-                        <a:srgbClr val="C9D2D8"/>
-                      </a:solidFill>
-                      <a:prstDash val="solid"/>
-                      <a:round/>
-                      <a:headEnd type="none" w="med" len="med"/>
-                      <a:tailEnd type="none" w="med" len="med"/>
-                    </a:lnR>
-                    <a:lnT w="6350" cap="flat" cmpd="sng" algn="ctr">
-                      <a:solidFill>
-                        <a:srgbClr val="C9D2D8"/>
-                      </a:solidFill>
-                      <a:prstDash val="solid"/>
-                      <a:round/>
-                      <a:headEnd type="none" w="med" len="med"/>
-                      <a:tailEnd type="none" w="med" len="med"/>
-                    </a:lnT>
-                    <a:lnB w="6350" cap="flat" cmpd="sng" algn="ctr">
-                      <a:solidFill>
-                        <a:srgbClr val="C9D2D8"/>
-                      </a:solidFill>
-                      <a:prstDash val="solid"/>
-                      <a:round/>
-                      <a:headEnd type="none" w="med" len="med"/>
-                      <a:tailEnd type="none" w="med" len="med"/>
-                    </a:lnB>
-                    <a:solidFill>
-                      <a:srgbClr val="2E4A62"/>
-                    </a:solidFill>
-                  </a:tcPr>
-                </a:tc>
-              </a:tr>
-              <a:tr h="0">
-                <a:tc>
-                  <a:txBody>
-                    <a:bodyPr/>
-                    <a:lstStyle/>
-                    <a:p>
-                      <a:pPr algn="l" indent="0" marL="0">
-                        <a:buNone/>
-                      </a:pPr>
-                      <a:r>
-                        <a:rPr lang="en-US" sz="2100" dirty="0">
-                          <a:solidFill>
-                            <a:srgbClr val="1B2530"/>
-                          </a:solidFill>
-                          <a:latin typeface="Courier New" pitchFamily="34" charset="0"/>
-                          <a:ea typeface="Courier New" pitchFamily="34" charset="-122"/>
-                          <a:cs typeface="Courier New" pitchFamily="34" charset="-120"/>
-                        </a:rPr>
-                        <a:t>0</a:t>
-                      </a:r>
-                      <a:endParaRPr lang="en-US" sz="2100" dirty="0">
-                        <a:latin typeface="Courier New" charset="0"/>
-                        <a:ea typeface="Courier New" charset="0"/>
-                        <a:cs typeface="Courier New" charset="0"/>
-                      </a:endParaRPr>
-                    </a:p>
-                  </a:txBody>
-                  <a:tcPr marL="101600" marR="101600" marT="50800" marB="50800" anchor="ctr">
-                    <a:lnL w="6350" cap="flat" cmpd="sng" algn="ctr">
-                      <a:solidFill>
-                        <a:srgbClr val="C9D2D8"/>
-                      </a:solidFill>
-                      <a:prstDash val="solid"/>
-                      <a:round/>
-                      <a:headEnd type="none" w="med" len="med"/>
-                      <a:tailEnd type="none" w="med" len="med"/>
-                    </a:lnL>
-                    <a:lnR w="6350" cap="flat" cmpd="sng" algn="ctr">
-                      <a:solidFill>
-                        <a:srgbClr val="C9D2D8"/>
-                      </a:solidFill>
-                      <a:prstDash val="solid"/>
-                      <a:round/>
-                      <a:headEnd type="none" w="med" len="med"/>
-                      <a:tailEnd type="none" w="med" len="med"/>
-                    </a:lnR>
-                    <a:lnT w="6350" cap="flat" cmpd="sng" algn="ctr">
-                      <a:solidFill>
-                        <a:srgbClr val="C9D2D8"/>
-                      </a:solidFill>
-                      <a:prstDash val="solid"/>
-                      <a:round/>
-                      <a:headEnd type="none" w="med" len="med"/>
-                      <a:tailEnd type="none" w="med" len="med"/>
-                    </a:lnT>
-                    <a:lnB w="6350" cap="flat" cmpd="sng" algn="ctr">
-                      <a:solidFill>
-                        <a:srgbClr val="C9D2D8"/>
-                      </a:solidFill>
-                      <a:prstDash val="solid"/>
-                      <a:round/>
-                      <a:headEnd type="none" w="med" len="med"/>
-                      <a:tailEnd type="none" w="med" len="med"/>
-                    </a:lnB>
-                    <a:solidFill>
-                      <a:srgbClr val="EEF2F4"/>
-                    </a:solidFill>
-                  </a:tcPr>
-                </a:tc>
-                <a:tc>
-                  <a:txBody>
-                    <a:bodyPr/>
-                    <a:lstStyle/>
-                    <a:p>
-                      <a:pPr algn="l" indent="0" marL="0">
-                        <a:buNone/>
-                      </a:pPr>
-                      <a:r>
-                        <a:rPr lang="en-US" sz="2100" dirty="0">
-                          <a:solidFill>
-                            <a:srgbClr val="1B2530"/>
-                          </a:solidFill>
-                          <a:latin typeface="Courier New" pitchFamily="34" charset="0"/>
-                          <a:ea typeface="Courier New" pitchFamily="34" charset="-122"/>
-                          <a:cs typeface="Courier New" pitchFamily="34" charset="-120"/>
-                        </a:rPr>
-                        <a:t>0</a:t>
-                      </a:r>
-                      <a:endParaRPr lang="en-US" sz="2100" dirty="0">
-                        <a:latin typeface="Courier New" charset="0"/>
-                        <a:ea typeface="Courier New" charset="0"/>
-                        <a:cs typeface="Courier New" charset="0"/>
-                      </a:endParaRPr>
-                    </a:p>
-                  </a:txBody>
-                  <a:tcPr marL="101600" marR="101600" marT="50800" marB="50800" anchor="ctr">
-                    <a:lnL w="6350" cap="flat" cmpd="sng" algn="ctr">
-                      <a:solidFill>
-                        <a:srgbClr val="C9D2D8"/>
-                      </a:solidFill>
-                      <a:prstDash val="solid"/>
-                      <a:round/>
-                      <a:headEnd type="none" w="med" len="med"/>
-                      <a:tailEnd type="none" w="med" len="med"/>
-                    </a:lnL>
-                    <a:lnR w="6350" cap="flat" cmpd="sng" algn="ctr">
-                      <a:solidFill>
-                        <a:srgbClr val="C9D2D8"/>
-                      </a:solidFill>
-                      <a:prstDash val="solid"/>
-                      <a:round/>
-                      <a:headEnd type="none" w="med" len="med"/>
-                      <a:tailEnd type="none" w="med" len="med"/>
-                    </a:lnR>
-                    <a:lnT w="6350" cap="flat" cmpd="sng" algn="ctr">
-                      <a:solidFill>
-                        <a:srgbClr val="C9D2D8"/>
-                      </a:solidFill>
-                      <a:prstDash val="solid"/>
-                      <a:round/>
-                      <a:headEnd type="none" w="med" len="med"/>
-                      <a:tailEnd type="none" w="med" len="med"/>
-                    </a:lnT>
-                    <a:lnB w="6350" cap="flat" cmpd="sng" algn="ctr">
-                      <a:solidFill>
-                        <a:srgbClr val="C9D2D8"/>
-                      </a:solidFill>
-                      <a:prstDash val="solid"/>
-                      <a:round/>
-                      <a:headEnd type="none" w="med" len="med"/>
-                      <a:tailEnd type="none" w="med" len="med"/>
-                    </a:lnB>
-                    <a:solidFill>
-                      <a:srgbClr val="EEF2F4"/>
-                    </a:solidFill>
-                  </a:tcPr>
-                </a:tc>
-                <a:tc>
-                  <a:txBody>
-                    <a:bodyPr/>
-                    <a:lstStyle/>
-                    <a:p>
-                      <a:pPr algn="l" indent="0" marL="0">
-                        <a:buNone/>
-                      </a:pPr>
-                      <a:r>
-                        <a:rPr lang="en-US" sz="2100" dirty="0">
-                          <a:solidFill>
-                            <a:srgbClr val="1B2530"/>
-                          </a:solidFill>
-                          <a:latin typeface="Courier New" pitchFamily="34" charset="0"/>
-                          <a:ea typeface="Courier New" pitchFamily="34" charset="-122"/>
-                          <a:cs typeface="Courier New" pitchFamily="34" charset="-120"/>
-                        </a:rPr>
-                        <a:t>0</a:t>
-                      </a:r>
-                      <a:endParaRPr lang="en-US" sz="2100" dirty="0">
-                        <a:latin typeface="Courier New" charset="0"/>
-                        <a:ea typeface="Courier New" charset="0"/>
-                        <a:cs typeface="Courier New" charset="0"/>
-                      </a:endParaRPr>
-                    </a:p>
-                  </a:txBody>
-                  <a:tcPr marL="101600" marR="101600" marT="50800" marB="50800" anchor="ctr">
-                    <a:lnL w="6350" cap="flat" cmpd="sng" algn="ctr">
-                      <a:solidFill>
-                        <a:srgbClr val="C9D2D8"/>
-                      </a:solidFill>
-                      <a:prstDash val="solid"/>
-                      <a:round/>
-                      <a:headEnd type="none" w="med" len="med"/>
-                      <a:tailEnd type="none" w="med" len="med"/>
-                    </a:lnL>
-                    <a:lnR w="6350" cap="flat" cmpd="sng" algn="ctr">
-                      <a:solidFill>
-                        <a:srgbClr val="C9D2D8"/>
-                      </a:solidFill>
-                      <a:prstDash val="solid"/>
-                      <a:round/>
-                      <a:headEnd type="none" w="med" len="med"/>
-                      <a:tailEnd type="none" w="med" len="med"/>
-                    </a:lnR>
-                    <a:lnT w="6350" cap="flat" cmpd="sng" algn="ctr">
-                      <a:solidFill>
-                        <a:srgbClr val="C9D2D8"/>
-                      </a:solidFill>
-                      <a:prstDash val="solid"/>
-                      <a:round/>
-                      <a:headEnd type="none" w="med" len="med"/>
-                      <a:tailEnd type="none" w="med" len="med"/>
-                    </a:lnT>
-                    <a:lnB w="6350" cap="flat" cmpd="sng" algn="ctr">
-                      <a:solidFill>
-                        <a:srgbClr val="C9D2D8"/>
-                      </a:solidFill>
-                      <a:prstDash val="solid"/>
-                      <a:round/>
-                      <a:headEnd type="none" w="med" len="med"/>
-                      <a:tailEnd type="none" w="med" len="med"/>
-                    </a:lnB>
-                    <a:solidFill>
-                      <a:srgbClr val="EEF2F4"/>
-                    </a:solidFill>
-                  </a:tcPr>
-                </a:tc>
-                <a:tc>
-                  <a:txBody>
-                    <a:bodyPr/>
-                    <a:lstStyle/>
-                    <a:p>
-                      <a:pPr algn="l" indent="0" marL="0">
-                        <a:buNone/>
-                      </a:pPr>
-                      <a:r>
-                        <a:rPr lang="en-US" sz="2100" dirty="0">
-                          <a:solidFill>
-                            <a:srgbClr val="1B2530"/>
-                          </a:solidFill>
-                          <a:latin typeface="Courier New" pitchFamily="34" charset="0"/>
-                          <a:ea typeface="Courier New" pitchFamily="34" charset="-122"/>
-                          <a:cs typeface="Courier New" pitchFamily="34" charset="-120"/>
-                        </a:rPr>
-                        <a:t>0</a:t>
-                      </a:r>
-                      <a:endParaRPr lang="en-US" sz="2100" dirty="0">
-                        <a:latin typeface="Courier New" charset="0"/>
-                        <a:ea typeface="Courier New" charset="0"/>
-                        <a:cs typeface="Courier New" charset="0"/>
-                      </a:endParaRPr>
-                    </a:p>
-                  </a:txBody>
-                  <a:tcPr marL="101600" marR="101600" marT="50800" marB="50800" anchor="ctr">
-                    <a:lnL w="6350" cap="flat" cmpd="sng" algn="ctr">
-                      <a:solidFill>
-                        <a:srgbClr val="C9D2D8"/>
-                      </a:solidFill>
-                      <a:prstDash val="solid"/>
-                      <a:round/>
-                      <a:headEnd type="none" w="med" len="med"/>
-                      <a:tailEnd type="none" w="med" len="med"/>
-                    </a:lnL>
-                    <a:lnR w="6350" cap="flat" cmpd="sng" algn="ctr">
-                      <a:solidFill>
-                        <a:srgbClr val="C9D2D8"/>
-                      </a:solidFill>
-                      <a:prstDash val="solid"/>
-                      <a:round/>
-                      <a:headEnd type="none" w="med" len="med"/>
-                      <a:tailEnd type="none" w="med" len="med"/>
-                    </a:lnR>
-                    <a:lnT w="6350" cap="flat" cmpd="sng" algn="ctr">
-                      <a:solidFill>
-                        <a:srgbClr val="C9D2D8"/>
-                      </a:solidFill>
-                      <a:prstDash val="solid"/>
-                      <a:round/>
-                      <a:headEnd type="none" w="med" len="med"/>
-                      <a:tailEnd type="none" w="med" len="med"/>
-                    </a:lnT>
-                    <a:lnB w="6350" cap="flat" cmpd="sng" algn="ctr">
-                      <a:solidFill>
-                        <a:srgbClr val="C9D2D8"/>
-                      </a:solidFill>
-                      <a:prstDash val="solid"/>
-                      <a:round/>
-                      <a:headEnd type="none" w="med" len="med"/>
-                      <a:tailEnd type="none" w="med" len="med"/>
-                    </a:lnB>
-                    <a:solidFill>
-                      <a:srgbClr val="EEF2F4"/>
-                    </a:solidFill>
-                  </a:tcPr>
-                </a:tc>
-                <a:tc>
-                  <a:txBody>
-                    <a:bodyPr/>
-                    <a:lstStyle/>
-                    <a:p>
-                      <a:pPr algn="l" indent="0" marL="0">
-                        <a:buNone/>
-                      </a:pPr>
-                      <a:r>
-                        <a:rPr lang="en-US" sz="2100" dirty="0">
-                          <a:solidFill>
-                            <a:srgbClr val="1B2530"/>
-                          </a:solidFill>
-                          <a:latin typeface="Courier New" pitchFamily="34" charset="0"/>
-                          <a:ea typeface="Courier New" pitchFamily="34" charset="-122"/>
-                          <a:cs typeface="Courier New" pitchFamily="34" charset="-120"/>
-                        </a:rPr>
-                        <a:t>1</a:t>
-                      </a:r>
-                      <a:endParaRPr lang="en-US" sz="2100" dirty="0">
-                        <a:latin typeface="Courier New" charset="0"/>
-                        <a:ea typeface="Courier New" charset="0"/>
-                        <a:cs typeface="Courier New" charset="0"/>
-                      </a:endParaRPr>
-                    </a:p>
-                  </a:txBody>
-                  <a:tcPr marL="101600" marR="101600" marT="50800" marB="50800" anchor="ctr">
-                    <a:lnL w="6350" cap="flat" cmpd="sng" algn="ctr">
-                      <a:solidFill>
-                        <a:srgbClr val="C9D2D8"/>
-                      </a:solidFill>
-                      <a:prstDash val="solid"/>
-                      <a:round/>
-                      <a:headEnd type="none" w="med" len="med"/>
-                      <a:tailEnd type="none" w="med" len="med"/>
-                    </a:lnL>
-                    <a:lnR w="6350" cap="flat" cmpd="sng" algn="ctr">
-                      <a:solidFill>
-                        <a:srgbClr val="C9D2D8"/>
-                      </a:solidFill>
-                      <a:prstDash val="solid"/>
-                      <a:round/>
-                      <a:headEnd type="none" w="med" len="med"/>
-                      <a:tailEnd type="none" w="med" len="med"/>
-                    </a:lnR>
-                    <a:lnT w="6350" cap="flat" cmpd="sng" algn="ctr">
-                      <a:solidFill>
-                        <a:srgbClr val="C9D2D8"/>
-                      </a:solidFill>
-                      <a:prstDash val="solid"/>
-                      <a:round/>
-                      <a:headEnd type="none" w="med" len="med"/>
-                      <a:tailEnd type="none" w="med" len="med"/>
-                    </a:lnT>
-                    <a:lnB w="6350" cap="flat" cmpd="sng" algn="ctr">
-                      <a:solidFill>
-                        <a:srgbClr val="C9D2D8"/>
-                      </a:solidFill>
-                      <a:prstDash val="solid"/>
-                      <a:round/>
-                      <a:headEnd type="none" w="med" len="med"/>
-                      <a:tailEnd type="none" w="med" len="med"/>
-                    </a:lnB>
-                    <a:solidFill>
-                      <a:srgbClr val="EEF2F4"/>
-                    </a:solidFill>
-                  </a:tcPr>
-                </a:tc>
-              </a:tr>
-              <a:tr h="0">
-                <a:tc>
-                  <a:txBody>
-                    <a:bodyPr/>
-                    <a:lstStyle/>
-                    <a:p>
-                      <a:pPr algn="l" indent="0" marL="0">
-                        <a:buNone/>
-                      </a:pPr>
-                      <a:r>
-                        <a:rPr lang="en-US" sz="2100" dirty="0">
-                          <a:solidFill>
-                            <a:srgbClr val="1B2530"/>
-                          </a:solidFill>
-                          <a:latin typeface="Courier New" pitchFamily="34" charset="0"/>
-                          <a:ea typeface="Courier New" pitchFamily="34" charset="-122"/>
-                          <a:cs typeface="Courier New" pitchFamily="34" charset="-120"/>
-                        </a:rPr>
-                        <a:t>0</a:t>
-                      </a:r>
-                      <a:endParaRPr lang="en-US" sz="2100" dirty="0">
-                        <a:latin typeface="Courier New" charset="0"/>
-                        <a:ea typeface="Courier New" charset="0"/>
-                        <a:cs typeface="Courier New" charset="0"/>
-                      </a:endParaRPr>
-                    </a:p>
-                  </a:txBody>
-                  <a:tcPr marL="101600" marR="101600" marT="50800" marB="50800" anchor="ctr">
-                    <a:lnL w="6350" cap="flat" cmpd="sng" algn="ctr">
-                      <a:solidFill>
-                        <a:srgbClr val="C9D2D8"/>
-                      </a:solidFill>
-                      <a:prstDash val="solid"/>
-                      <a:round/>
-                      <a:headEnd type="none" w="med" len="med"/>
-                      <a:tailEnd type="none" w="med" len="med"/>
-                    </a:lnL>
-                    <a:lnR w="6350" cap="flat" cmpd="sng" algn="ctr">
-                      <a:solidFill>
-                        <a:srgbClr val="C9D2D8"/>
-                      </a:solidFill>
-                      <a:prstDash val="solid"/>
-                      <a:round/>
-                      <a:headEnd type="none" w="med" len="med"/>
-                      <a:tailEnd type="none" w="med" len="med"/>
-                    </a:lnR>
-                    <a:lnT w="6350" cap="flat" cmpd="sng" algn="ctr">
-                      <a:solidFill>
-                        <a:srgbClr val="C9D2D8"/>
-                      </a:solidFill>
-                      <a:prstDash val="solid"/>
-                      <a:round/>
-                      <a:headEnd type="none" w="med" len="med"/>
-                      <a:tailEnd type="none" w="med" len="med"/>
-                    </a:lnT>
-                    <a:lnB w="6350" cap="flat" cmpd="sng" algn="ctr">
-                      <a:solidFill>
-                        <a:srgbClr val="C9D2D8"/>
-                      </a:solidFill>
-                      <a:prstDash val="solid"/>
-                      <a:round/>
-                      <a:headEnd type="none" w="med" len="med"/>
-                      <a:tailEnd type="none" w="med" len="med"/>
-                    </a:lnB>
-                    <a:solidFill>
-                      <a:srgbClr val="FFFFFF"/>
-                    </a:solidFill>
-                  </a:tcPr>
-                </a:tc>
-                <a:tc>
-                  <a:txBody>
-                    <a:bodyPr/>
-                    <a:lstStyle/>
-                    <a:p>
-                      <a:pPr algn="l" indent="0" marL="0">
-                        <a:buNone/>
-                      </a:pPr>
-                      <a:r>
-                        <a:rPr lang="en-US" sz="2100" dirty="0">
-                          <a:solidFill>
-                            <a:srgbClr val="1B2530"/>
-                          </a:solidFill>
-                          <a:latin typeface="Courier New" pitchFamily="34" charset="0"/>
-                          <a:ea typeface="Courier New" pitchFamily="34" charset="-122"/>
-                          <a:cs typeface="Courier New" pitchFamily="34" charset="-120"/>
-                        </a:rPr>
-                        <a:t>1</a:t>
-                      </a:r>
-                      <a:endParaRPr lang="en-US" sz="2100" dirty="0">
-                        <a:latin typeface="Courier New" charset="0"/>
-                        <a:ea typeface="Courier New" charset="0"/>
-                        <a:cs typeface="Courier New" charset="0"/>
-                      </a:endParaRPr>
-                    </a:p>
-                  </a:txBody>
-                  <a:tcPr marL="101600" marR="101600" marT="50800" marB="50800" anchor="ctr">
-                    <a:lnL w="6350" cap="flat" cmpd="sng" algn="ctr">
-                      <a:solidFill>
-                        <a:srgbClr val="C9D2D8"/>
-                      </a:solidFill>
-                      <a:prstDash val="solid"/>
-                      <a:round/>
-                      <a:headEnd type="none" w="med" len="med"/>
-                      <a:tailEnd type="none" w="med" len="med"/>
-                    </a:lnL>
-                    <a:lnR w="6350" cap="flat" cmpd="sng" algn="ctr">
-                      <a:solidFill>
-                        <a:srgbClr val="C9D2D8"/>
-                      </a:solidFill>
-                      <a:prstDash val="solid"/>
-                      <a:round/>
-                      <a:headEnd type="none" w="med" len="med"/>
-                      <a:tailEnd type="none" w="med" len="med"/>
-                    </a:lnR>
-                    <a:lnT w="6350" cap="flat" cmpd="sng" algn="ctr">
-                      <a:solidFill>
-                        <a:srgbClr val="C9D2D8"/>
-                      </a:solidFill>
-                      <a:prstDash val="solid"/>
-                      <a:round/>
-                      <a:headEnd type="none" w="med" len="med"/>
-                      <a:tailEnd type="none" w="med" len="med"/>
-                    </a:lnT>
-                    <a:lnB w="6350" cap="flat" cmpd="sng" algn="ctr">
-                      <a:solidFill>
-                        <a:srgbClr val="C9D2D8"/>
-                      </a:solidFill>
-                      <a:prstDash val="solid"/>
-                      <a:round/>
-                      <a:headEnd type="none" w="med" len="med"/>
-                      <a:tailEnd type="none" w="med" len="med"/>
-                    </a:lnB>
-                    <a:solidFill>
-                      <a:srgbClr val="FFFFFF"/>
-                    </a:solidFill>
-                  </a:tcPr>
-                </a:tc>
-                <a:tc>
-                  <a:txBody>
-                    <a:bodyPr/>
-                    <a:lstStyle/>
-                    <a:p>
-                      <a:pPr algn="l" indent="0" marL="0">
-                        <a:buNone/>
-                      </a:pPr>
-                      <a:r>
-                        <a:rPr lang="en-US" sz="2100" dirty="0">
-                          <a:solidFill>
-                            <a:srgbClr val="1B2530"/>
-                          </a:solidFill>
-                          <a:latin typeface="Courier New" pitchFamily="34" charset="0"/>
-                          <a:ea typeface="Courier New" pitchFamily="34" charset="-122"/>
-                          <a:cs typeface="Courier New" pitchFamily="34" charset="-120"/>
-                        </a:rPr>
-                        <a:t>0</a:t>
-                      </a:r>
-                      <a:endParaRPr lang="en-US" sz="2100" dirty="0">
-                        <a:latin typeface="Courier New" charset="0"/>
-                        <a:ea typeface="Courier New" charset="0"/>
-                        <a:cs typeface="Courier New" charset="0"/>
-                      </a:endParaRPr>
-                    </a:p>
-                  </a:txBody>
-                  <a:tcPr marL="101600" marR="101600" marT="50800" marB="50800" anchor="ctr">
-                    <a:lnL w="6350" cap="flat" cmpd="sng" algn="ctr">
-                      <a:solidFill>
-                        <a:srgbClr val="C9D2D8"/>
-                      </a:solidFill>
-                      <a:prstDash val="solid"/>
-                      <a:round/>
-                      <a:headEnd type="none" w="med" len="med"/>
-                      <a:tailEnd type="none" w="med" len="med"/>
-                    </a:lnL>
-                    <a:lnR w="6350" cap="flat" cmpd="sng" algn="ctr">
-                      <a:solidFill>
-                        <a:srgbClr val="C9D2D8"/>
-                      </a:solidFill>
-                      <a:prstDash val="solid"/>
-                      <a:round/>
-                      <a:headEnd type="none" w="med" len="med"/>
-                      <a:tailEnd type="none" w="med" len="med"/>
-                    </a:lnR>
-                    <a:lnT w="6350" cap="flat" cmpd="sng" algn="ctr">
-                      <a:solidFill>
-                        <a:srgbClr val="C9D2D8"/>
-                      </a:solidFill>
-                      <a:prstDash val="solid"/>
-                      <a:round/>
-                      <a:headEnd type="none" w="med" len="med"/>
-                      <a:tailEnd type="none" w="med" len="med"/>
-                    </a:lnT>
-                    <a:lnB w="6350" cap="flat" cmpd="sng" algn="ctr">
-                      <a:solidFill>
-                        <a:srgbClr val="C9D2D8"/>
-                      </a:solidFill>
-                      <a:prstDash val="solid"/>
-                      <a:round/>
-                      <a:headEnd type="none" w="med" len="med"/>
-                      <a:tailEnd type="none" w="med" len="med"/>
-                    </a:lnB>
-                    <a:solidFill>
-                      <a:srgbClr val="FFFFFF"/>
-                    </a:solidFill>
-                  </a:tcPr>
-                </a:tc>
-                <a:tc>
-                  <a:txBody>
-                    <a:bodyPr/>
-                    <a:lstStyle/>
-                    <a:p>
-                      <a:pPr algn="l" indent="0" marL="0">
-                        <a:buNone/>
-                      </a:pPr>
-                      <a:r>
-                        <a:rPr lang="en-US" sz="2100" dirty="0">
-                          <a:solidFill>
-                            <a:srgbClr val="1B2530"/>
-                          </a:solidFill>
-                          <a:latin typeface="Courier New" pitchFamily="34" charset="0"/>
-                          <a:ea typeface="Courier New" pitchFamily="34" charset="-122"/>
-                          <a:cs typeface="Courier New" pitchFamily="34" charset="-120"/>
-                        </a:rPr>
-                        <a:t>1</a:t>
-                      </a:r>
-                      <a:endParaRPr lang="en-US" sz="2100" dirty="0">
-                        <a:latin typeface="Courier New" charset="0"/>
-                        <a:ea typeface="Courier New" charset="0"/>
-                        <a:cs typeface="Courier New" charset="0"/>
-                      </a:endParaRPr>
-                    </a:p>
-                  </a:txBody>
-                  <a:tcPr marL="101600" marR="101600" marT="50800" marB="50800" anchor="ctr">
-                    <a:lnL w="6350" cap="flat" cmpd="sng" algn="ctr">
-                      <a:solidFill>
-                        <a:srgbClr val="C9D2D8"/>
-                      </a:solidFill>
-                      <a:prstDash val="solid"/>
-                      <a:round/>
-                      <a:headEnd type="none" w="med" len="med"/>
-                      <a:tailEnd type="none" w="med" len="med"/>
-                    </a:lnL>
-                    <a:lnR w="6350" cap="flat" cmpd="sng" algn="ctr">
-                      <a:solidFill>
-                        <a:srgbClr val="C9D2D8"/>
-                      </a:solidFill>
-                      <a:prstDash val="solid"/>
-                      <a:round/>
-                      <a:headEnd type="none" w="med" len="med"/>
-                      <a:tailEnd type="none" w="med" len="med"/>
-                    </a:lnR>
-                    <a:lnT w="6350" cap="flat" cmpd="sng" algn="ctr">
-                      <a:solidFill>
-                        <a:srgbClr val="C9D2D8"/>
-                      </a:solidFill>
-                      <a:prstDash val="solid"/>
-                      <a:round/>
-                      <a:headEnd type="none" w="med" len="med"/>
-                      <a:tailEnd type="none" w="med" len="med"/>
-                    </a:lnT>
-                    <a:lnB w="6350" cap="flat" cmpd="sng" algn="ctr">
-                      <a:solidFill>
-                        <a:srgbClr val="C9D2D8"/>
-                      </a:solidFill>
-                      <a:prstDash val="solid"/>
-                      <a:round/>
-                      <a:headEnd type="none" w="med" len="med"/>
-                      <a:tailEnd type="none" w="med" len="med"/>
-                    </a:lnB>
-                    <a:solidFill>
-                      <a:srgbClr val="FFFFFF"/>
-                    </a:solidFill>
-                  </a:tcPr>
-                </a:tc>
-                <a:tc>
-                  <a:txBody>
-                    <a:bodyPr/>
-                    <a:lstStyle/>
-                    <a:p>
-                      <a:pPr algn="l" indent="0" marL="0">
-                        <a:buNone/>
-                      </a:pPr>
-                      <a:r>
-                        <a:rPr lang="en-US" sz="2100" dirty="0">
-                          <a:solidFill>
-                            <a:srgbClr val="1B2530"/>
-                          </a:solidFill>
-                          <a:latin typeface="Courier New" pitchFamily="34" charset="0"/>
-                          <a:ea typeface="Courier New" pitchFamily="34" charset="-122"/>
-                          <a:cs typeface="Courier New" pitchFamily="34" charset="-120"/>
-                        </a:rPr>
-                        <a:t>1</a:t>
-                      </a:r>
-                      <a:endParaRPr lang="en-US" sz="2100" dirty="0">
-                        <a:latin typeface="Courier New" charset="0"/>
-                        <a:ea typeface="Courier New" charset="0"/>
-                        <a:cs typeface="Courier New" charset="0"/>
-                      </a:endParaRPr>
-                    </a:p>
-                  </a:txBody>
-                  <a:tcPr marL="101600" marR="101600" marT="50800" marB="50800" anchor="ctr">
-                    <a:lnL w="6350" cap="flat" cmpd="sng" algn="ctr">
-                      <a:solidFill>
-                        <a:srgbClr val="C9D2D8"/>
-                      </a:solidFill>
-                      <a:prstDash val="solid"/>
-                      <a:round/>
-                      <a:headEnd type="none" w="med" len="med"/>
-                      <a:tailEnd type="none" w="med" len="med"/>
-                    </a:lnL>
-                    <a:lnR w="6350" cap="flat" cmpd="sng" algn="ctr">
-                      <a:solidFill>
-                        <a:srgbClr val="C9D2D8"/>
-                      </a:solidFill>
-                      <a:prstDash val="solid"/>
-                      <a:round/>
-                      <a:headEnd type="none" w="med" len="med"/>
-                      <a:tailEnd type="none" w="med" len="med"/>
-                    </a:lnR>
-                    <a:lnT w="6350" cap="flat" cmpd="sng" algn="ctr">
-                      <a:solidFill>
-                        <a:srgbClr val="C9D2D8"/>
-                      </a:solidFill>
-                      <a:prstDash val="solid"/>
-                      <a:round/>
-                      <a:headEnd type="none" w="med" len="med"/>
-                      <a:tailEnd type="none" w="med" len="med"/>
-                    </a:lnT>
-                    <a:lnB w="6350" cap="flat" cmpd="sng" algn="ctr">
-                      <a:solidFill>
-                        <a:srgbClr val="C9D2D8"/>
-                      </a:solidFill>
-                      <a:prstDash val="solid"/>
-                      <a:round/>
-                      <a:headEnd type="none" w="med" len="med"/>
-                      <a:tailEnd type="none" w="med" len="med"/>
-                    </a:lnB>
-                    <a:solidFill>
-                      <a:srgbClr val="FFFFFF"/>
-                    </a:solidFill>
-                  </a:tcPr>
-                </a:tc>
-              </a:tr>
-              <a:tr h="0">
-                <a:tc>
-                  <a:txBody>
-                    <a:bodyPr/>
-                    <a:lstStyle/>
-                    <a:p>
-                      <a:pPr algn="l" indent="0" marL="0">
-                        <a:buNone/>
-                      </a:pPr>
-                      <a:r>
-                        <a:rPr lang="en-US" sz="2100" dirty="0">
-                          <a:solidFill>
-                            <a:srgbClr val="1B2530"/>
-                          </a:solidFill>
-                          <a:latin typeface="Courier New" pitchFamily="34" charset="0"/>
-                          <a:ea typeface="Courier New" pitchFamily="34" charset="-122"/>
-                          <a:cs typeface="Courier New" pitchFamily="34" charset="-120"/>
-                        </a:rPr>
-                        <a:t>1</a:t>
-                      </a:r>
-                      <a:endParaRPr lang="en-US" sz="2100" dirty="0">
-                        <a:latin typeface="Courier New" charset="0"/>
-                        <a:ea typeface="Courier New" charset="0"/>
-                        <a:cs typeface="Courier New" charset="0"/>
-                      </a:endParaRPr>
-                    </a:p>
-                  </a:txBody>
-                  <a:tcPr marL="101600" marR="101600" marT="50800" marB="50800" anchor="ctr">
-                    <a:lnL w="6350" cap="flat" cmpd="sng" algn="ctr">
-                      <a:solidFill>
-                        <a:srgbClr val="C9D2D8"/>
-                      </a:solidFill>
-                      <a:prstDash val="solid"/>
-                      <a:round/>
-                      <a:headEnd type="none" w="med" len="med"/>
-                      <a:tailEnd type="none" w="med" len="med"/>
-                    </a:lnL>
-                    <a:lnR w="6350" cap="flat" cmpd="sng" algn="ctr">
-                      <a:solidFill>
-                        <a:srgbClr val="C9D2D8"/>
-                      </a:solidFill>
-                      <a:prstDash val="solid"/>
-                      <a:round/>
-                      <a:headEnd type="none" w="med" len="med"/>
-                      <a:tailEnd type="none" w="med" len="med"/>
-                    </a:lnR>
-                    <a:lnT w="6350" cap="flat" cmpd="sng" algn="ctr">
-                      <a:solidFill>
-                        <a:srgbClr val="C9D2D8"/>
-                      </a:solidFill>
-                      <a:prstDash val="solid"/>
-                      <a:round/>
-                      <a:headEnd type="none" w="med" len="med"/>
-                      <a:tailEnd type="none" w="med" len="med"/>
-                    </a:lnT>
-                    <a:lnB w="6350" cap="flat" cmpd="sng" algn="ctr">
-                      <a:solidFill>
-                        <a:srgbClr val="C9D2D8"/>
-                      </a:solidFill>
-                      <a:prstDash val="solid"/>
-                      <a:round/>
-                      <a:headEnd type="none" w="med" len="med"/>
-                      <a:tailEnd type="none" w="med" len="med"/>
-                    </a:lnB>
-                    <a:solidFill>
-                      <a:srgbClr val="EEF2F4"/>
-                    </a:solidFill>
-                  </a:tcPr>
-                </a:tc>
-                <a:tc>
-                  <a:txBody>
-                    <a:bodyPr/>
-                    <a:lstStyle/>
-                    <a:p>
-                      <a:pPr algn="l" indent="0" marL="0">
-                        <a:buNone/>
-                      </a:pPr>
-                      <a:r>
-                        <a:rPr lang="en-US" sz="2100" dirty="0">
-                          <a:solidFill>
-                            <a:srgbClr val="1B2530"/>
-                          </a:solidFill>
-                          <a:latin typeface="Courier New" pitchFamily="34" charset="0"/>
-                          <a:ea typeface="Courier New" pitchFamily="34" charset="-122"/>
-                          <a:cs typeface="Courier New" pitchFamily="34" charset="-120"/>
-                        </a:rPr>
-                        <a:t>0</a:t>
-                      </a:r>
-                      <a:endParaRPr lang="en-US" sz="2100" dirty="0">
-                        <a:latin typeface="Courier New" charset="0"/>
-                        <a:ea typeface="Courier New" charset="0"/>
-                        <a:cs typeface="Courier New" charset="0"/>
-                      </a:endParaRPr>
-                    </a:p>
-                  </a:txBody>
-                  <a:tcPr marL="101600" marR="101600" marT="50800" marB="50800" anchor="ctr">
-                    <a:lnL w="6350" cap="flat" cmpd="sng" algn="ctr">
-                      <a:solidFill>
-                        <a:srgbClr val="C9D2D8"/>
-                      </a:solidFill>
-                      <a:prstDash val="solid"/>
-                      <a:round/>
-                      <a:headEnd type="none" w="med" len="med"/>
-                      <a:tailEnd type="none" w="med" len="med"/>
-                    </a:lnL>
-                    <a:lnR w="6350" cap="flat" cmpd="sng" algn="ctr">
-                      <a:solidFill>
-                        <a:srgbClr val="C9D2D8"/>
-                      </a:solidFill>
-                      <a:prstDash val="solid"/>
-                      <a:round/>
-                      <a:headEnd type="none" w="med" len="med"/>
-                      <a:tailEnd type="none" w="med" len="med"/>
-                    </a:lnR>
-                    <a:lnT w="6350" cap="flat" cmpd="sng" algn="ctr">
-                      <a:solidFill>
-                        <a:srgbClr val="C9D2D8"/>
-                      </a:solidFill>
-                      <a:prstDash val="solid"/>
-                      <a:round/>
-                      <a:headEnd type="none" w="med" len="med"/>
-                      <a:tailEnd type="none" w="med" len="med"/>
-                    </a:lnT>
-                    <a:lnB w="6350" cap="flat" cmpd="sng" algn="ctr">
-                      <a:solidFill>
-                        <a:srgbClr val="C9D2D8"/>
-                      </a:solidFill>
-                      <a:prstDash val="solid"/>
-                      <a:round/>
-                      <a:headEnd type="none" w="med" len="med"/>
-                      <a:tailEnd type="none" w="med" len="med"/>
-                    </a:lnB>
-                    <a:solidFill>
-                      <a:srgbClr val="EEF2F4"/>
-                    </a:solidFill>
-                  </a:tcPr>
-                </a:tc>
-                <a:tc>
-                  <a:txBody>
-                    <a:bodyPr/>
-                    <a:lstStyle/>
-                    <a:p>
-                      <a:pPr algn="l" indent="0" marL="0">
-                        <a:buNone/>
-                      </a:pPr>
-                      <a:r>
-                        <a:rPr lang="en-US" sz="2100" dirty="0">
-                          <a:solidFill>
-                            <a:srgbClr val="1B2530"/>
-                          </a:solidFill>
-                          <a:latin typeface="Courier New" pitchFamily="34" charset="0"/>
-                          <a:ea typeface="Courier New" pitchFamily="34" charset="-122"/>
-                          <a:cs typeface="Courier New" pitchFamily="34" charset="-120"/>
-                        </a:rPr>
-                        <a:t>0</a:t>
-                      </a:r>
-                      <a:endParaRPr lang="en-US" sz="2100" dirty="0">
-                        <a:latin typeface="Courier New" charset="0"/>
-                        <a:ea typeface="Courier New" charset="0"/>
-                        <a:cs typeface="Courier New" charset="0"/>
-                      </a:endParaRPr>
-                    </a:p>
-                  </a:txBody>
-                  <a:tcPr marL="101600" marR="101600" marT="50800" marB="50800" anchor="ctr">
-                    <a:lnL w="6350" cap="flat" cmpd="sng" algn="ctr">
-                      <a:solidFill>
-                        <a:srgbClr val="C9D2D8"/>
-                      </a:solidFill>
-                      <a:prstDash val="solid"/>
-                      <a:round/>
-                      <a:headEnd type="none" w="med" len="med"/>
-                      <a:tailEnd type="none" w="med" len="med"/>
-                    </a:lnL>
-                    <a:lnR w="6350" cap="flat" cmpd="sng" algn="ctr">
-                      <a:solidFill>
-                        <a:srgbClr val="C9D2D8"/>
-                      </a:solidFill>
-                      <a:prstDash val="solid"/>
-                      <a:round/>
-                      <a:headEnd type="none" w="med" len="med"/>
-                      <a:tailEnd type="none" w="med" len="med"/>
-                    </a:lnR>
-                    <a:lnT w="6350" cap="flat" cmpd="sng" algn="ctr">
-                      <a:solidFill>
-                        <a:srgbClr val="C9D2D8"/>
-                      </a:solidFill>
-                      <a:prstDash val="solid"/>
-                      <a:round/>
-                      <a:headEnd type="none" w="med" len="med"/>
-                      <a:tailEnd type="none" w="med" len="med"/>
-                    </a:lnT>
-                    <a:lnB w="6350" cap="flat" cmpd="sng" algn="ctr">
-                      <a:solidFill>
-                        <a:srgbClr val="C9D2D8"/>
-                      </a:solidFill>
-                      <a:prstDash val="solid"/>
-                      <a:round/>
-                      <a:headEnd type="none" w="med" len="med"/>
-                      <a:tailEnd type="none" w="med" len="med"/>
-                    </a:lnB>
-                    <a:solidFill>
-                      <a:srgbClr val="EEF2F4"/>
-                    </a:solidFill>
-                  </a:tcPr>
-                </a:tc>
-                <a:tc>
-                  <a:txBody>
-                    <a:bodyPr/>
-                    <a:lstStyle/>
-                    <a:p>
-                      <a:pPr algn="l" indent="0" marL="0">
-                        <a:buNone/>
-                      </a:pPr>
-                      <a:r>
-                        <a:rPr lang="en-US" sz="2100" dirty="0">
-                          <a:solidFill>
-                            <a:srgbClr val="1B2530"/>
-                          </a:solidFill>
-                          <a:latin typeface="Courier New" pitchFamily="34" charset="0"/>
-                          <a:ea typeface="Courier New" pitchFamily="34" charset="-122"/>
-                          <a:cs typeface="Courier New" pitchFamily="34" charset="-120"/>
-                        </a:rPr>
-                        <a:t>1</a:t>
-                      </a:r>
-                      <a:endParaRPr lang="en-US" sz="2100" dirty="0">
-                        <a:latin typeface="Courier New" charset="0"/>
-                        <a:ea typeface="Courier New" charset="0"/>
-                        <a:cs typeface="Courier New" charset="0"/>
-                      </a:endParaRPr>
-                    </a:p>
-                  </a:txBody>
-                  <a:tcPr marL="101600" marR="101600" marT="50800" marB="50800" anchor="ctr">
-                    <a:lnL w="6350" cap="flat" cmpd="sng" algn="ctr">
-                      <a:solidFill>
-                        <a:srgbClr val="C9D2D8"/>
-                      </a:solidFill>
-                      <a:prstDash val="solid"/>
-                      <a:round/>
-                      <a:headEnd type="none" w="med" len="med"/>
-                      <a:tailEnd type="none" w="med" len="med"/>
-                    </a:lnL>
-                    <a:lnR w="6350" cap="flat" cmpd="sng" algn="ctr">
-                      <a:solidFill>
-                        <a:srgbClr val="C9D2D8"/>
-                      </a:solidFill>
-                      <a:prstDash val="solid"/>
-                      <a:round/>
-                      <a:headEnd type="none" w="med" len="med"/>
-                      <a:tailEnd type="none" w="med" len="med"/>
-                    </a:lnR>
-                    <a:lnT w="6350" cap="flat" cmpd="sng" algn="ctr">
-                      <a:solidFill>
-                        <a:srgbClr val="C9D2D8"/>
-                      </a:solidFill>
-                      <a:prstDash val="solid"/>
-                      <a:round/>
-                      <a:headEnd type="none" w="med" len="med"/>
-                      <a:tailEnd type="none" w="med" len="med"/>
-                    </a:lnT>
-                    <a:lnB w="6350" cap="flat" cmpd="sng" algn="ctr">
-                      <a:solidFill>
-                        <a:srgbClr val="C9D2D8"/>
-                      </a:solidFill>
-                      <a:prstDash val="solid"/>
-                      <a:round/>
-                      <a:headEnd type="none" w="med" len="med"/>
-                      <a:tailEnd type="none" w="med" len="med"/>
-                    </a:lnB>
-                    <a:solidFill>
-                      <a:srgbClr val="EEF2F4"/>
-                    </a:solidFill>
-                  </a:tcPr>
-                </a:tc>
-                <a:tc>
-                  <a:txBody>
-                    <a:bodyPr/>
-                    <a:lstStyle/>
-                    <a:p>
-                      <a:pPr algn="l" indent="0" marL="0">
-                        <a:buNone/>
-                      </a:pPr>
-                      <a:r>
-                        <a:rPr lang="en-US" sz="2100" dirty="0">
-                          <a:solidFill>
-                            <a:srgbClr val="1B2530"/>
-                          </a:solidFill>
-                          <a:latin typeface="Courier New" pitchFamily="34" charset="0"/>
-                          <a:ea typeface="Courier New" pitchFamily="34" charset="-122"/>
-                          <a:cs typeface="Courier New" pitchFamily="34" charset="-120"/>
-                        </a:rPr>
-                        <a:t>0</a:t>
-                      </a:r>
-                      <a:endParaRPr lang="en-US" sz="2100" dirty="0">
-                        <a:latin typeface="Courier New" charset="0"/>
-                        <a:ea typeface="Courier New" charset="0"/>
-                        <a:cs typeface="Courier New" charset="0"/>
-                      </a:endParaRPr>
-                    </a:p>
-                  </a:txBody>
-                  <a:tcPr marL="101600" marR="101600" marT="50800" marB="50800" anchor="ctr">
-                    <a:lnL w="6350" cap="flat" cmpd="sng" algn="ctr">
-                      <a:solidFill>
-                        <a:srgbClr val="C9D2D8"/>
-                      </a:solidFill>
-                      <a:prstDash val="solid"/>
-                      <a:round/>
-                      <a:headEnd type="none" w="med" len="med"/>
-                      <a:tailEnd type="none" w="med" len="med"/>
-                    </a:lnL>
-                    <a:lnR w="6350" cap="flat" cmpd="sng" algn="ctr">
-                      <a:solidFill>
-                        <a:srgbClr val="C9D2D8"/>
-                      </a:solidFill>
-                      <a:prstDash val="solid"/>
-                      <a:round/>
-                      <a:headEnd type="none" w="med" len="med"/>
-                      <a:tailEnd type="none" w="med" len="med"/>
-                    </a:lnR>
-                    <a:lnT w="6350" cap="flat" cmpd="sng" algn="ctr">
-                      <a:solidFill>
-                        <a:srgbClr val="C9D2D8"/>
-                      </a:solidFill>
-                      <a:prstDash val="solid"/>
-                      <a:round/>
-                      <a:headEnd type="none" w="med" len="med"/>
-                      <a:tailEnd type="none" w="med" len="med"/>
-                    </a:lnT>
-                    <a:lnB w="6350" cap="flat" cmpd="sng" algn="ctr">
-                      <a:solidFill>
-                        <a:srgbClr val="C9D2D8"/>
-                      </a:solidFill>
-                      <a:prstDash val="solid"/>
-                      <a:round/>
-                      <a:headEnd type="none" w="med" len="med"/>
-                      <a:tailEnd type="none" w="med" len="med"/>
-                    </a:lnB>
-                    <a:solidFill>
-                      <a:srgbClr val="EEF2F4"/>
-                    </a:solidFill>
-                  </a:tcPr>
-                </a:tc>
-              </a:tr>
-              <a:tr h="0">
-                <a:tc>
-                  <a:txBody>
-                    <a:bodyPr/>
-                    <a:lstStyle/>
-                    <a:p>
-                      <a:pPr algn="l" indent="0" marL="0">
-                        <a:buNone/>
-                      </a:pPr>
-                      <a:r>
-                        <a:rPr lang="en-US" sz="2100" dirty="0">
-                          <a:solidFill>
-                            <a:srgbClr val="1B2530"/>
-                          </a:solidFill>
-                          <a:latin typeface="Courier New" pitchFamily="34" charset="0"/>
-                          <a:ea typeface="Courier New" pitchFamily="34" charset="-122"/>
-                          <a:cs typeface="Courier New" pitchFamily="34" charset="-120"/>
-                        </a:rPr>
-                        <a:t>1</a:t>
-                      </a:r>
-                      <a:endParaRPr lang="en-US" sz="2100" dirty="0">
-                        <a:latin typeface="Courier New" charset="0"/>
-                        <a:ea typeface="Courier New" charset="0"/>
-                        <a:cs typeface="Courier New" charset="0"/>
-                      </a:endParaRPr>
-                    </a:p>
-                  </a:txBody>
-                  <a:tcPr marL="101600" marR="101600" marT="50800" marB="50800" anchor="ctr">
-                    <a:lnL w="6350" cap="flat" cmpd="sng" algn="ctr">
-                      <a:solidFill>
-                        <a:srgbClr val="C9D2D8"/>
-                      </a:solidFill>
-                      <a:prstDash val="solid"/>
-                      <a:round/>
-                      <a:headEnd type="none" w="med" len="med"/>
-                      <a:tailEnd type="none" w="med" len="med"/>
-                    </a:lnL>
-                    <a:lnR w="6350" cap="flat" cmpd="sng" algn="ctr">
-                      <a:solidFill>
-                        <a:srgbClr val="C9D2D8"/>
-                      </a:solidFill>
-                      <a:prstDash val="solid"/>
-                      <a:round/>
-                      <a:headEnd type="none" w="med" len="med"/>
-                      <a:tailEnd type="none" w="med" len="med"/>
-                    </a:lnR>
-                    <a:lnT w="6350" cap="flat" cmpd="sng" algn="ctr">
-                      <a:solidFill>
-                        <a:srgbClr val="C9D2D8"/>
-                      </a:solidFill>
-                      <a:prstDash val="solid"/>
-                      <a:round/>
-                      <a:headEnd type="none" w="med" len="med"/>
-                      <a:tailEnd type="none" w="med" len="med"/>
-                    </a:lnT>
-                    <a:lnB w="6350" cap="flat" cmpd="sng" algn="ctr">
-                      <a:solidFill>
-                        <a:srgbClr val="C9D2D8"/>
-                      </a:solidFill>
-                      <a:prstDash val="solid"/>
-                      <a:round/>
-                      <a:headEnd type="none" w="med" len="med"/>
-                      <a:tailEnd type="none" w="med" len="med"/>
-                    </a:lnB>
-                    <a:solidFill>
-                      <a:srgbClr val="FFFFFF"/>
-                    </a:solidFill>
-                  </a:tcPr>
-                </a:tc>
-                <a:tc>
-                  <a:txBody>
-                    <a:bodyPr/>
-                    <a:lstStyle/>
-                    <a:p>
-                      <a:pPr algn="l" indent="0" marL="0">
-                        <a:buNone/>
-                      </a:pPr>
-                      <a:r>
-                        <a:rPr lang="en-US" sz="2100" dirty="0">
-                          <a:solidFill>
-                            <a:srgbClr val="1B2530"/>
-                          </a:solidFill>
-                          <a:latin typeface="Courier New" pitchFamily="34" charset="0"/>
-                          <a:ea typeface="Courier New" pitchFamily="34" charset="-122"/>
-                          <a:cs typeface="Courier New" pitchFamily="34" charset="-120"/>
-                        </a:rPr>
-                        <a:t>1</a:t>
-                      </a:r>
-                      <a:endParaRPr lang="en-US" sz="2100" dirty="0">
-                        <a:latin typeface="Courier New" charset="0"/>
-                        <a:ea typeface="Courier New" charset="0"/>
-                        <a:cs typeface="Courier New" charset="0"/>
-                      </a:endParaRPr>
-                    </a:p>
-                  </a:txBody>
-                  <a:tcPr marL="101600" marR="101600" marT="50800" marB="50800" anchor="ctr">
-                    <a:lnL w="6350" cap="flat" cmpd="sng" algn="ctr">
-                      <a:solidFill>
-                        <a:srgbClr val="C9D2D8"/>
-                      </a:solidFill>
-                      <a:prstDash val="solid"/>
-                      <a:round/>
-                      <a:headEnd type="none" w="med" len="med"/>
-                      <a:tailEnd type="none" w="med" len="med"/>
-                    </a:lnL>
-                    <a:lnR w="6350" cap="flat" cmpd="sng" algn="ctr">
-                      <a:solidFill>
-                        <a:srgbClr val="C9D2D8"/>
-                      </a:solidFill>
-                      <a:prstDash val="solid"/>
-                      <a:round/>
-                      <a:headEnd type="none" w="med" len="med"/>
-                      <a:tailEnd type="none" w="med" len="med"/>
-                    </a:lnR>
-                    <a:lnT w="6350" cap="flat" cmpd="sng" algn="ctr">
-                      <a:solidFill>
-                        <a:srgbClr val="C9D2D8"/>
-                      </a:solidFill>
-                      <a:prstDash val="solid"/>
-                      <a:round/>
-                      <a:headEnd type="none" w="med" len="med"/>
-                      <a:tailEnd type="none" w="med" len="med"/>
-                    </a:lnT>
-                    <a:lnB w="6350" cap="flat" cmpd="sng" algn="ctr">
-                      <a:solidFill>
-                        <a:srgbClr val="C9D2D8"/>
-                      </a:solidFill>
-                      <a:prstDash val="solid"/>
-                      <a:round/>
-                      <a:headEnd type="none" w="med" len="med"/>
-                      <a:tailEnd type="none" w="med" len="med"/>
-                    </a:lnB>
-                    <a:solidFill>
-                      <a:srgbClr val="FFFFFF"/>
-                    </a:solidFill>
-                  </a:tcPr>
-                </a:tc>
-                <a:tc>
-                  <a:txBody>
-                    <a:bodyPr/>
-                    <a:lstStyle/>
-                    <a:p>
-                      <a:pPr algn="l" indent="0" marL="0">
-                        <a:buNone/>
-                      </a:pPr>
-                      <a:r>
-                        <a:rPr lang="en-US" sz="2100" dirty="0">
-                          <a:solidFill>
-                            <a:srgbClr val="1B2530"/>
-                          </a:solidFill>
-                          <a:latin typeface="Courier New" pitchFamily="34" charset="0"/>
-                          <a:ea typeface="Courier New" pitchFamily="34" charset="-122"/>
-                          <a:cs typeface="Courier New" pitchFamily="34" charset="-120"/>
-                        </a:rPr>
-                        <a:t>1</a:t>
-                      </a:r>
-                      <a:endParaRPr lang="en-US" sz="2100" dirty="0">
-                        <a:latin typeface="Courier New" charset="0"/>
-                        <a:ea typeface="Courier New" charset="0"/>
-                        <a:cs typeface="Courier New" charset="0"/>
-                      </a:endParaRPr>
-                    </a:p>
-                  </a:txBody>
-                  <a:tcPr marL="101600" marR="101600" marT="50800" marB="50800" anchor="ctr">
-                    <a:lnL w="6350" cap="flat" cmpd="sng" algn="ctr">
-                      <a:solidFill>
-                        <a:srgbClr val="C9D2D8"/>
-                      </a:solidFill>
-                      <a:prstDash val="solid"/>
-                      <a:round/>
-                      <a:headEnd type="none" w="med" len="med"/>
-                      <a:tailEnd type="none" w="med" len="med"/>
-                    </a:lnL>
-                    <a:lnR w="6350" cap="flat" cmpd="sng" algn="ctr">
-                      <a:solidFill>
-                        <a:srgbClr val="C9D2D8"/>
-                      </a:solidFill>
-                      <a:prstDash val="solid"/>
-                      <a:round/>
-                      <a:headEnd type="none" w="med" len="med"/>
-                      <a:tailEnd type="none" w="med" len="med"/>
-                    </a:lnR>
-                    <a:lnT w="6350" cap="flat" cmpd="sng" algn="ctr">
-                      <a:solidFill>
-                        <a:srgbClr val="C9D2D8"/>
-                      </a:solidFill>
-                      <a:prstDash val="solid"/>
-                      <a:round/>
-                      <a:headEnd type="none" w="med" len="med"/>
-                      <a:tailEnd type="none" w="med" len="med"/>
-                    </a:lnT>
-                    <a:lnB w="6350" cap="flat" cmpd="sng" algn="ctr">
-                      <a:solidFill>
-                        <a:srgbClr val="C9D2D8"/>
-                      </a:solidFill>
-                      <a:prstDash val="solid"/>
-                      <a:round/>
-                      <a:headEnd type="none" w="med" len="med"/>
-                      <a:tailEnd type="none" w="med" len="med"/>
-                    </a:lnB>
-                    <a:solidFill>
-                      <a:srgbClr val="FFFFFF"/>
-                    </a:solidFill>
-                  </a:tcPr>
-                </a:tc>
-                <a:tc>
-                  <a:txBody>
-                    <a:bodyPr/>
-                    <a:lstStyle/>
-                    <a:p>
-                      <a:pPr algn="l" indent="0" marL="0">
-                        <a:buNone/>
-                      </a:pPr>
-                      <a:r>
-                        <a:rPr lang="en-US" sz="2100" dirty="0">
-                          <a:solidFill>
-                            <a:srgbClr val="1B2530"/>
-                          </a:solidFill>
-                          <a:latin typeface="Courier New" pitchFamily="34" charset="0"/>
-                          <a:ea typeface="Courier New" pitchFamily="34" charset="-122"/>
-                          <a:cs typeface="Courier New" pitchFamily="34" charset="-120"/>
-                        </a:rPr>
-                        <a:t>0</a:t>
-                      </a:r>
-                      <a:endParaRPr lang="en-US" sz="2100" dirty="0">
-                        <a:latin typeface="Courier New" charset="0"/>
-                        <a:ea typeface="Courier New" charset="0"/>
-                        <a:cs typeface="Courier New" charset="0"/>
-                      </a:endParaRPr>
-                    </a:p>
-                  </a:txBody>
-                  <a:tcPr marL="101600" marR="101600" marT="50800" marB="50800" anchor="ctr">
-                    <a:lnL w="6350" cap="flat" cmpd="sng" algn="ctr">
-                      <a:solidFill>
-                        <a:srgbClr val="C9D2D8"/>
-                      </a:solidFill>
-                      <a:prstDash val="solid"/>
-                      <a:round/>
-                      <a:headEnd type="none" w="med" len="med"/>
-                      <a:tailEnd type="none" w="med" len="med"/>
-                    </a:lnL>
-                    <a:lnR w="6350" cap="flat" cmpd="sng" algn="ctr">
-                      <a:solidFill>
-                        <a:srgbClr val="C9D2D8"/>
-                      </a:solidFill>
-                      <a:prstDash val="solid"/>
-                      <a:round/>
-                      <a:headEnd type="none" w="med" len="med"/>
-                      <a:tailEnd type="none" w="med" len="med"/>
-                    </a:lnR>
-                    <a:lnT w="6350" cap="flat" cmpd="sng" algn="ctr">
-                      <a:solidFill>
-                        <a:srgbClr val="C9D2D8"/>
-                      </a:solidFill>
-                      <a:prstDash val="solid"/>
-                      <a:round/>
-                      <a:headEnd type="none" w="med" len="med"/>
-                      <a:tailEnd type="none" w="med" len="med"/>
-                    </a:lnT>
-                    <a:lnB w="6350" cap="flat" cmpd="sng" algn="ctr">
-                      <a:solidFill>
-                        <a:srgbClr val="C9D2D8"/>
-                      </a:solidFill>
-                      <a:prstDash val="solid"/>
-                      <a:round/>
-                      <a:headEnd type="none" w="med" len="med"/>
-                      <a:tailEnd type="none" w="med" len="med"/>
-                    </a:lnB>
-                    <a:solidFill>
-                      <a:srgbClr val="FFFFFF"/>
-                    </a:solidFill>
-                  </a:tcPr>
-                </a:tc>
-                <a:tc>
-                  <a:txBody>
-                    <a:bodyPr/>
-                    <a:lstStyle/>
-                    <a:p>
-                      <a:pPr algn="l" indent="0" marL="0">
-                        <a:buNone/>
-                      </a:pPr>
-                      <a:r>
-                        <a:rPr lang="en-US" sz="2100" dirty="0">
-                          <a:solidFill>
-                            <a:srgbClr val="1B2530"/>
-                          </a:solidFill>
-                          <a:latin typeface="Courier New" pitchFamily="34" charset="0"/>
-                          <a:ea typeface="Courier New" pitchFamily="34" charset="-122"/>
-                          <a:cs typeface="Courier New" pitchFamily="34" charset="-120"/>
-                        </a:rPr>
-                        <a:t>0</a:t>
-                      </a:r>
-                      <a:endParaRPr lang="en-US" sz="2100" dirty="0">
-                        <a:latin typeface="Courier New" charset="0"/>
-                        <a:ea typeface="Courier New" charset="0"/>
-                        <a:cs typeface="Courier New" charset="0"/>
-                      </a:endParaRPr>
-                    </a:p>
-                  </a:txBody>
-                  <a:tcPr marL="101600" marR="101600" marT="50800" marB="50800" anchor="ctr">
-                    <a:lnL w="6350" cap="flat" cmpd="sng" algn="ctr">
-                      <a:solidFill>
-                        <a:srgbClr val="C9D2D8"/>
-                      </a:solidFill>
-                      <a:prstDash val="solid"/>
-                      <a:round/>
-                      <a:headEnd type="none" w="med" len="med"/>
-                      <a:tailEnd type="none" w="med" len="med"/>
-                    </a:lnL>
-                    <a:lnR w="6350" cap="flat" cmpd="sng" algn="ctr">
-                      <a:solidFill>
-                        <a:srgbClr val="C9D2D8"/>
-                      </a:solidFill>
-                      <a:prstDash val="solid"/>
-                      <a:round/>
-                      <a:headEnd type="none" w="med" len="med"/>
-                      <a:tailEnd type="none" w="med" len="med"/>
-                    </a:lnR>
-                    <a:lnT w="6350" cap="flat" cmpd="sng" algn="ctr">
-                      <a:solidFill>
-                        <a:srgbClr val="C9D2D8"/>
-                      </a:solidFill>
-                      <a:prstDash val="solid"/>
-                      <a:round/>
-                      <a:headEnd type="none" w="med" len="med"/>
-                      <a:tailEnd type="none" w="med" len="med"/>
-                    </a:lnT>
-                    <a:lnB w="6350" cap="flat" cmpd="sng" algn="ctr">
-                      <a:solidFill>
-                        <a:srgbClr val="C9D2D8"/>
-                      </a:solidFill>
-                      <a:prstDash val="solid"/>
-                      <a:round/>
-                      <a:headEnd type="none" w="med" len="med"/>
-                      <a:tailEnd type="none" w="med" len="med"/>
-                    </a:lnB>
-                    <a:solidFill>
-                      <a:srgbClr val="FFFFFF"/>
-                    </a:solidFill>
-                  </a:tcPr>
-                </a:tc>
-              </a:tr>
-            </a:tbl>
-          </a:graphicData>
-        </a:graphic>
-      </p:graphicFrame>
-      <p:sp>
-        <p:nvSpPr>
-          <p:cNvPr id="4" name="Text 1"/>
-          <p:cNvSpPr txBox="1"/>
-          <p:nvPr/>
-        </p:nvSpPr>
-        <p:spPr>
-          <a:xfrm>
-            <a:off x="548640" y="5760720"/>
-            <a:ext cx="11094415" cy="411480"/>
+      <p:sp>
+        <p:nvSpPr>
+          <p:cNvPr id="3" name="Shape 1"/>
+          <p:cNvSpPr/>
+          <p:nvPr/>
+        </p:nvSpPr>
+        <p:spPr>
+          <a:xfrm>
+            <a:off x="548640" y="1515999"/>
+            <a:ext cx="146304" cy="146304"/>
           </a:xfrm>
           <a:prstGeom prst="rect">
             <a:avLst/>
           </a:prstGeom>
+          <a:solidFill>
+            <a:srgbClr val="0E7C86"/>
+          </a:solidFill>
+          <a:ln w="12700">
+            <a:solidFill>
+              <a:srgbClr val="0E7C86"/>
+            </a:solidFill>
+            <a:prstDash val="solid"/>
+          </a:ln>
+        </p:spPr>
+      </p:sp>
+      <p:sp>
+        <p:nvSpPr>
+          <p:cNvPr id="4" name="Text 2"/>
+          <p:cNvSpPr txBox="1"/>
+          <p:nvPr/>
+        </p:nvSpPr>
+        <p:spPr>
+          <a:xfrm>
+            <a:off x="932688" y="1417320"/>
+            <a:ext cx="6565392" cy="325374"/>
+          </a:xfrm>
+          <a:prstGeom prst="rect">
+            <a:avLst/>
+          </a:prstGeom>
           <a:noFill/>
           <a:ln/>
         </p:spPr>
         <p:txBody>
-          <a:bodyPr wrap="square" lIns="0" tIns="0" rIns="0" bIns="0" rtlCol="0" anchor="ctr"/>
+          <a:bodyPr wrap="square" lIns="0" tIns="0" rIns="0" bIns="0" rtlCol="0" anchor="t"/>
           <a:lstStyle/>
           <a:p>
             <a:pPr indent="0" marL="0">
+              <a:spcAft>
+                <a:spcPts val="200"/>
+              </a:spcAft>
               <a:buNone/>
             </a:pPr>
             <a:r>
-              <a:rPr lang="en-US" sz="1500" i="1" dirty="0">
+              <a:rPr lang="en-US" sz="2100" dirty="0">
+                <a:solidFill>
+                  <a:srgbClr val="1B2530"/>
+                </a:solidFill>
+                <a:latin typeface="Calibri" pitchFamily="34" charset="0"/>
+                <a:ea typeface="Calibri" pitchFamily="34" charset="-122"/>
+                <a:cs typeface="Calibri" pitchFamily="34" charset="-120"/>
+              </a:rPr>
+              <a:t>FPGA: field-programmable gate array</a:t>
+            </a:r>
+            <a:endParaRPr lang="en-US" sz="2100" dirty="0"/>
+          </a:p>
+        </p:txBody>
+      </p:sp>
+      <p:sp>
+        <p:nvSpPr>
+          <p:cNvPr id="5" name="Shape 3"/>
+          <p:cNvSpPr/>
+          <p:nvPr/>
+        </p:nvSpPr>
+        <p:spPr>
+          <a:xfrm>
+            <a:off x="548640" y="2003298"/>
+            <a:ext cx="146304" cy="146304"/>
+          </a:xfrm>
+          <a:prstGeom prst="rect">
+            <a:avLst/>
+          </a:prstGeom>
+          <a:solidFill>
+            <a:srgbClr val="C7791B"/>
+          </a:solidFill>
+          <a:ln w="12700">
+            <a:solidFill>
+              <a:srgbClr val="C7791B"/>
+            </a:solidFill>
+            <a:prstDash val="solid"/>
+          </a:ln>
+        </p:spPr>
+      </p:sp>
+      <p:sp>
+        <p:nvSpPr>
+          <p:cNvPr id="6" name="Text 4"/>
+          <p:cNvSpPr txBox="1"/>
+          <p:nvPr/>
+        </p:nvSpPr>
+        <p:spPr>
+          <a:xfrm>
+            <a:off x="932688" y="1904619"/>
+            <a:ext cx="6565392" cy="1829562"/>
+          </a:xfrm>
+          <a:prstGeom prst="rect">
+            <a:avLst/>
+          </a:prstGeom>
+          <a:noFill/>
+          <a:ln/>
+        </p:spPr>
+        <p:txBody>
+          <a:bodyPr wrap="square" lIns="0" tIns="0" rIns="0" bIns="0" rtlCol="0" anchor="t"/>
+          <a:lstStyle/>
+          <a:p>
+            <a:pPr indent="0" marL="0">
+              <a:spcAft>
+                <a:spcPts val="200"/>
+              </a:spcAft>
+              <a:buNone/>
+            </a:pPr>
+            <a:r>
+              <a:rPr lang="en-US" sz="2100" dirty="0">
+                <a:solidFill>
+                  <a:srgbClr val="1B2530"/>
+                </a:solidFill>
+                <a:latin typeface="Calibri" pitchFamily="34" charset="0"/>
+                <a:ea typeface="Calibri" pitchFamily="34" charset="-122"/>
+                <a:cs typeface="Calibri" pitchFamily="34" charset="-120"/>
+              </a:rPr>
+              <a:t>Dentro: un mare di piccoli blocchi programmabili</a:t>
+            </a:r>
+            <a:endParaRPr lang="en-US" sz="2100" dirty="0"/>
+          </a:p>
+          <a:p>
+            <a:pPr indent="0" marL="0">
+              <a:spcAft>
+                <a:spcPts val="200"/>
+              </a:spcAft>
+              <a:buNone/>
+            </a:pPr>
+            <a:r>
+              <a:rPr lang="en-US" sz="1800" dirty="0">
                 <a:solidFill>
                   <a:srgbClr val="5B6B78"/>
                 </a:solidFill>
@@ -7735,9 +6164,313 @@
                 <a:ea typeface="Calibri" pitchFamily="34" charset="-122"/>
                 <a:cs typeface="Calibri" pitchFamily="34" charset="-120"/>
               </a:rPr>
-              <a:t>Gli ingressi sono l'indirizzo; quattro bit memorizzati scelgono la funzione. Cambiare i bit cambia la porta.</a:t>
+              <a:t>– tabelle di look-up, ciascuna capace di essere qualunque funzione di pochi ingressi</a:t>
             </a:r>
-            <a:endParaRPr lang="en-US" sz="1500" dirty="0"/>
+            <a:endParaRPr lang="en-US" sz="2100" dirty="0"/>
+          </a:p>
+          <a:p>
+            <a:pPr indent="0" marL="0">
+              <a:spcAft>
+                <a:spcPts val="200"/>
+              </a:spcAft>
+              <a:buNone/>
+            </a:pPr>
+            <a:r>
+              <a:rPr lang="en-US" sz="1800" dirty="0">
+                <a:solidFill>
+                  <a:srgbClr val="5B6B78"/>
+                </a:solidFill>
+                <a:latin typeface="Calibri" pitchFamily="34" charset="0"/>
+                <a:ea typeface="Calibri" pitchFamily="34" charset="-122"/>
+                <a:cs typeface="Calibri" pitchFamily="34" charset="-120"/>
+              </a:rPr>
+              <a:t>– flip-flop, uno accanto a ogni tabella</a:t>
+            </a:r>
+            <a:endParaRPr lang="en-US" sz="2100" dirty="0"/>
+          </a:p>
+          <a:p>
+            <a:pPr indent="0" marL="0">
+              <a:spcAft>
+                <a:spcPts val="200"/>
+              </a:spcAft>
+              <a:buNone/>
+            </a:pPr>
+            <a:r>
+              <a:rPr lang="en-US" sz="1800" dirty="0">
+                <a:solidFill>
+                  <a:srgbClr val="5B6B78"/>
+                </a:solidFill>
+                <a:latin typeface="Calibri" pitchFamily="34" charset="0"/>
+                <a:ea typeface="Calibri" pitchFamily="34" charset="-122"/>
+                <a:cs typeface="Calibri" pitchFamily="34" charset="-120"/>
+              </a:rPr>
+              <a:t>– fili e interruttori che possono collegare ogni blocco a ogni altro</a:t>
+            </a:r>
+            <a:endParaRPr lang="en-US" sz="2100" dirty="0"/>
+          </a:p>
+        </p:txBody>
+      </p:sp>
+      <p:sp>
+        <p:nvSpPr>
+          <p:cNvPr id="7" name="Shape 5"/>
+          <p:cNvSpPr/>
+          <p:nvPr/>
+        </p:nvSpPr>
+        <p:spPr>
+          <a:xfrm>
+            <a:off x="548640" y="3994785"/>
+            <a:ext cx="146304" cy="146304"/>
+          </a:xfrm>
+          <a:prstGeom prst="rect">
+            <a:avLst/>
+          </a:prstGeom>
+          <a:solidFill>
+            <a:srgbClr val="0E7C86"/>
+          </a:solidFill>
+          <a:ln w="12700">
+            <a:solidFill>
+              <a:srgbClr val="0E7C86"/>
+            </a:solidFill>
+            <a:prstDash val="solid"/>
+          </a:ln>
+        </p:spPr>
+      </p:sp>
+      <p:sp>
+        <p:nvSpPr>
+          <p:cNvPr id="8" name="Text 6"/>
+          <p:cNvSpPr txBox="1"/>
+          <p:nvPr/>
+        </p:nvSpPr>
+        <p:spPr>
+          <a:xfrm>
+            <a:off x="932688" y="3896106"/>
+            <a:ext cx="6565392" cy="650748"/>
+          </a:xfrm>
+          <a:prstGeom prst="rect">
+            <a:avLst/>
+          </a:prstGeom>
+          <a:noFill/>
+          <a:ln/>
+        </p:spPr>
+        <p:txBody>
+          <a:bodyPr wrap="square" lIns="0" tIns="0" rIns="0" bIns="0" rtlCol="0" anchor="t"/>
+          <a:lstStyle/>
+          <a:p>
+            <a:pPr indent="0" marL="0">
+              <a:spcAft>
+                <a:spcPts val="200"/>
+              </a:spcAft>
+              <a:buNone/>
+            </a:pPr>
+            <a:r>
+              <a:rPr lang="en-US" sz="2100" dirty="0">
+                <a:solidFill>
+                  <a:srgbClr val="1B2530"/>
+                </a:solidFill>
+                <a:latin typeface="Calibri" pitchFamily="34" charset="0"/>
+                <a:ea typeface="Calibri" pitchFamily="34" charset="-122"/>
+                <a:cs typeface="Calibri" pitchFamily="34" charset="-120"/>
+              </a:rPr>
+              <a:t>Un file di configurazione, il bitstream, imposta ogni tabella e ogni interruttore</a:t>
+            </a:r>
+            <a:endParaRPr lang="en-US" sz="2100" dirty="0"/>
+          </a:p>
+        </p:txBody>
+      </p:sp>
+      <p:sp>
+        <p:nvSpPr>
+          <p:cNvPr id="9" name="Shape 7"/>
+          <p:cNvSpPr/>
+          <p:nvPr/>
+        </p:nvSpPr>
+        <p:spPr>
+          <a:xfrm>
+            <a:off x="548640" y="4807458"/>
+            <a:ext cx="146304" cy="146304"/>
+          </a:xfrm>
+          <a:prstGeom prst="rect">
+            <a:avLst/>
+          </a:prstGeom>
+          <a:solidFill>
+            <a:srgbClr val="C7791B"/>
+          </a:solidFill>
+          <a:ln w="12700">
+            <a:solidFill>
+              <a:srgbClr val="C7791B"/>
+            </a:solidFill>
+            <a:prstDash val="solid"/>
+          </a:ln>
+        </p:spPr>
+      </p:sp>
+      <p:sp>
+        <p:nvSpPr>
+          <p:cNvPr id="10" name="Text 8"/>
+          <p:cNvSpPr txBox="1"/>
+          <p:nvPr/>
+        </p:nvSpPr>
+        <p:spPr>
+          <a:xfrm>
+            <a:off x="932688" y="4708779"/>
+            <a:ext cx="6565392" cy="650748"/>
+          </a:xfrm>
+          <a:prstGeom prst="rect">
+            <a:avLst/>
+          </a:prstGeom>
+          <a:noFill/>
+          <a:ln/>
+        </p:spPr>
+        <p:txBody>
+          <a:bodyPr wrap="square" lIns="0" tIns="0" rIns="0" bIns="0" rtlCol="0" anchor="t"/>
+          <a:lstStyle/>
+          <a:p>
+            <a:pPr indent="0" marL="0">
+              <a:spcAft>
+                <a:spcPts val="200"/>
+              </a:spcAft>
+              <a:buNone/>
+            </a:pPr>
+            <a:r>
+              <a:rPr lang="en-US" sz="2100" dirty="0">
+                <a:solidFill>
+                  <a:srgbClr val="1B2530"/>
+                </a:solidFill>
+                <a:latin typeface="Calibri" pitchFamily="34" charset="0"/>
+                <a:ea typeface="Calibri" pitchFamily="34" charset="-122"/>
+                <a:cs typeface="Calibri" pitchFamily="34" charset="-120"/>
+              </a:rPr>
+              <a:t>Caricate un altro bitstream e lo stesso chip è un altro circuito</a:t>
+            </a:r>
+            <a:endParaRPr lang="en-US" sz="2100" dirty="0"/>
+          </a:p>
+        </p:txBody>
+      </p:sp>
+      <p:sp>
+        <p:nvSpPr>
+          <p:cNvPr id="11" name="Shape 9"/>
+          <p:cNvSpPr/>
+          <p:nvPr/>
+        </p:nvSpPr>
+        <p:spPr>
+          <a:xfrm>
+            <a:off x="548640" y="5620131"/>
+            <a:ext cx="146304" cy="146304"/>
+          </a:xfrm>
+          <a:prstGeom prst="rect">
+            <a:avLst/>
+          </a:prstGeom>
+          <a:solidFill>
+            <a:srgbClr val="0E7C86"/>
+          </a:solidFill>
+          <a:ln w="12700">
+            <a:solidFill>
+              <a:srgbClr val="0E7C86"/>
+            </a:solidFill>
+            <a:prstDash val="solid"/>
+          </a:ln>
+        </p:spPr>
+      </p:sp>
+      <p:sp>
+        <p:nvSpPr>
+          <p:cNvPr id="12" name="Text 10"/>
+          <p:cNvSpPr txBox="1"/>
+          <p:nvPr/>
+        </p:nvSpPr>
+        <p:spPr>
+          <a:xfrm>
+            <a:off x="932688" y="5521452"/>
+            <a:ext cx="6565392" cy="650748"/>
+          </a:xfrm>
+          <a:prstGeom prst="rect">
+            <a:avLst/>
+          </a:prstGeom>
+          <a:noFill/>
+          <a:ln/>
+        </p:spPr>
+        <p:txBody>
+          <a:bodyPr wrap="square" lIns="0" tIns="0" rIns="0" bIns="0" rtlCol="0" anchor="t"/>
+          <a:lstStyle/>
+          <a:p>
+            <a:pPr indent="0" marL="0">
+              <a:spcAft>
+                <a:spcPts val="200"/>
+              </a:spcAft>
+              <a:buNone/>
+            </a:pPr>
+            <a:r>
+              <a:rPr lang="en-US" sz="2100" dirty="0">
+                <a:solidFill>
+                  <a:srgbClr val="1B2530"/>
+                </a:solidFill>
+                <a:latin typeface="Calibri" pitchFamily="34" charset="0"/>
+                <a:ea typeface="Calibri" pitchFamily="34" charset="-122"/>
+                <a:cs typeface="Calibri" pitchFamily="34" charset="-120"/>
+              </a:rPr>
+              <a:t>In vendita dal 1985; oggi da pochi euro fino alle schede per i data center</a:t>
+            </a:r>
+            <a:endParaRPr lang="en-US" sz="2100" dirty="0"/>
+          </a:p>
+        </p:txBody>
+      </p:sp>
+      <p:pic>
+        <p:nvPicPr>
+          <p:cNvPr id="13" name="Image 0" descr="/Users/raffaelemontella/devel/riscv-prg32/computer-architecture-with-prg32/tools/assets/fpga_board.jpg">    </p:cNvPr>
+          <p:cNvPicPr>
+            <a:picLocks noChangeAspect="1"/>
+          </p:cNvPicPr>
+          <p:nvPr/>
+        </p:nvPicPr>
+        <p:blipFill>
+          <a:blip r:embed="rId1"/>
+          <a:stretch>
+            <a:fillRect/>
+          </a:stretch>
+        </p:blipFill>
+        <p:spPr>
+          <a:xfrm>
+            <a:off x="7863840" y="1676552"/>
+            <a:ext cx="3779215" cy="3779215"/>
+          </a:xfrm>
+          <a:prstGeom prst="rect">
+            <a:avLst/>
+          </a:prstGeom>
+        </p:spPr>
+      </p:pic>
+      <p:sp>
+        <p:nvSpPr>
+          <p:cNvPr id="14" name="Text 11"/>
+          <p:cNvSpPr txBox="1"/>
+          <p:nvPr/>
+        </p:nvSpPr>
+        <p:spPr>
+          <a:xfrm>
+            <a:off x="7863840" y="5788152"/>
+            <a:ext cx="3779215" cy="384048"/>
+          </a:xfrm>
+          <a:prstGeom prst="rect">
+            <a:avLst/>
+          </a:prstGeom>
+          <a:noFill/>
+          <a:ln/>
+        </p:spPr>
+        <p:txBody>
+          <a:bodyPr wrap="square" lIns="0" tIns="0" rIns="0" bIns="0" rtlCol="0" anchor="ctr"/>
+          <a:lstStyle/>
+          <a:p>
+            <a:pPr algn="ctr" indent="0" marL="0">
+              <a:buNone/>
+            </a:pPr>
+            <a:r>
+              <a:rPr lang="en-US" sz="1200" i="1" dirty="0">
+                <a:solidFill>
+                  <a:srgbClr val="5B6B78"/>
+                </a:solidFill>
+                <a:latin typeface="Calibri" pitchFamily="34" charset="0"/>
+                <a:ea typeface="Calibri" pitchFamily="34" charset="-122"/>
+                <a:cs typeface="Calibri" pitchFamily="34" charset="-120"/>
+              </a:rPr>
+              <a:t>Una scheda di sviluppo FPGA: il chip grande è l'FPGA</a:t>
+            </a:r>
+            <a:endParaRPr lang="en-US" sz="1200" dirty="0"/>
           </a:p>
         </p:txBody>
       </p:sp>
@@ -15670,7 +14403,7 @@
         </p:nvSpPr>
         <p:spPr>
           <a:xfrm>
-            <a:off x="548640" y="1485011"/>
+            <a:off x="548640" y="1515999"/>
             <a:ext cx="146304" cy="146304"/>
           </a:xfrm>
           <a:prstGeom prst="rect">
@@ -15696,7 +14429,7 @@
         <p:spPr>
           <a:xfrm>
             <a:off x="932688" y="1417320"/>
-            <a:ext cx="6565392" cy="526796"/>
+            <a:ext cx="10710367" cy="650748"/>
           </a:xfrm>
           <a:prstGeom prst="rect">
             <a:avLst/>
@@ -15715,7 +14448,7 @@
               <a:buNone/>
             </a:pPr>
             <a:r>
-              <a:rPr lang="en-US" sz="1700" dirty="0">
+              <a:rPr lang="en-US" sz="2100" dirty="0">
                 <a:solidFill>
                   <a:srgbClr val="1B2530"/>
                 </a:solidFill>
@@ -15725,7 +14458,7 @@
               </a:rPr>
               <a:t>Un'equazione, tre fattori: ogni macchina veloce ne attacca uno, oppure moltiplica i processori</a:t>
             </a:r>
-            <a:endParaRPr lang="en-US" sz="1700" dirty="0"/>
+            <a:endParaRPr lang="en-US" sz="2100" dirty="0"/>
           </a:p>
         </p:txBody>
       </p:sp>
@@ -15737,7 +14470,7 @@
         </p:nvSpPr>
         <p:spPr>
           <a:xfrm>
-            <a:off x="548640" y="2231835"/>
+            <a:off x="548640" y="2386775"/>
             <a:ext cx="146304" cy="146304"/>
           </a:xfrm>
           <a:prstGeom prst="rect">
@@ -15762,8 +14495,8 @@
         </p:nvSpPr>
         <p:spPr>
           <a:xfrm>
-            <a:off x="932688" y="2164144"/>
-            <a:ext cx="6565392" cy="790194"/>
+            <a:off x="932688" y="2288096"/>
+            <a:ext cx="10710367" cy="650748"/>
           </a:xfrm>
           <a:prstGeom prst="rect">
             <a:avLst/>
@@ -15782,7 +14515,7 @@
               <a:buNone/>
             </a:pPr>
             <a:r>
-              <a:rPr lang="en-US" sz="1700" dirty="0">
+              <a:rPr lang="en-US" sz="2100" dirty="0">
                 <a:solidFill>
                   <a:srgbClr val="1B2530"/>
                 </a:solidFill>
@@ -15792,7 +14525,7 @@
               </a:rPr>
               <a:t>I core superscalari fuori ordine rispettano il contratto dell'insieme di istruzioni ed eseguono molte istruzioni insieme</a:t>
             </a:r>
-            <a:endParaRPr lang="en-US" sz="1700" dirty="0"/>
+            <a:endParaRPr lang="en-US" sz="2100" dirty="0"/>
           </a:p>
         </p:txBody>
       </p:sp>
@@ -15804,7 +14537,7 @@
         </p:nvSpPr>
         <p:spPr>
           <a:xfrm>
-            <a:off x="548640" y="3242056"/>
+            <a:off x="548640" y="3257550"/>
             <a:ext cx="146304" cy="146304"/>
           </a:xfrm>
           <a:prstGeom prst="rect">
@@ -15829,8 +14562,8 @@
         </p:nvSpPr>
         <p:spPr>
           <a:xfrm>
-            <a:off x="932688" y="3174365"/>
-            <a:ext cx="6565392" cy="790194"/>
+            <a:off x="932688" y="3158871"/>
+            <a:ext cx="10710367" cy="650748"/>
           </a:xfrm>
           <a:prstGeom prst="rect">
             <a:avLst/>
@@ -15849,7 +14582,7 @@
               <a:buNone/>
             </a:pPr>
             <a:r>
-              <a:rPr lang="en-US" sz="1700" dirty="0">
+              <a:rPr lang="en-US" sz="2100" dirty="0">
                 <a:solidFill>
                   <a:srgbClr val="1B2530"/>
                 </a:solidFill>
@@ -15859,7 +14592,7 @@
               </a:rPr>
               <a:t>Vettori, GPU e cluster sfruttano i dati che si possono elaborare in modo indipendente; la legge di Amdahl dice fin dove si arriva</a:t>
             </a:r>
-            <a:endParaRPr lang="en-US" sz="1700" dirty="0"/>
+            <a:endParaRPr lang="en-US" sz="2100" dirty="0"/>
           </a:p>
         </p:txBody>
       </p:sp>
@@ -15871,7 +14604,7 @@
         </p:nvSpPr>
         <p:spPr>
           <a:xfrm>
-            <a:off x="548640" y="4252278"/>
+            <a:off x="548640" y="4128326"/>
             <a:ext cx="146304" cy="146304"/>
           </a:xfrm>
           <a:prstGeom prst="rect">
@@ -15896,8 +14629,8 @@
         </p:nvSpPr>
         <p:spPr>
           <a:xfrm>
-            <a:off x="932688" y="4184587"/>
-            <a:ext cx="6565392" cy="526796"/>
+            <a:off x="932688" y="4029647"/>
+            <a:ext cx="10710367" cy="650748"/>
           </a:xfrm>
           <a:prstGeom prst="rect">
             <a:avLst/>
@@ -15916,7 +14649,7 @@
               <a:buNone/>
             </a:pPr>
             <a:r>
-              <a:rPr lang="en-US" sz="1700" dirty="0">
+              <a:rPr lang="en-US" sz="2100" dirty="0">
                 <a:solidFill>
                   <a:srgbClr val="1B2530"/>
                 </a:solidFill>
@@ -15926,7 +14659,7 @@
               </a:rPr>
               <a:t>Le FPGA trasformano una descrizione in un circuito: la logica di questo corso, su grande scala</a:t>
             </a:r>
-            <a:endParaRPr lang="en-US" sz="1700" dirty="0"/>
+            <a:endParaRPr lang="en-US" sz="2100" dirty="0"/>
           </a:p>
         </p:txBody>
       </p:sp>
@@ -15963,8 +14696,8 @@
         </p:nvSpPr>
         <p:spPr>
           <a:xfrm>
-            <a:off x="932688" y="4931410"/>
-            <a:ext cx="6565392" cy="1240790"/>
+            <a:off x="932688" y="4900422"/>
+            <a:ext cx="10710367" cy="1271778"/>
           </a:xfrm>
           <a:prstGeom prst="rect">
             <a:avLst/>
@@ -15983,7 +14716,7 @@
               <a:buNone/>
             </a:pPr>
             <a:r>
-              <a:rPr lang="en-US" sz="1700" dirty="0">
+              <a:rPr lang="en-US" sz="2100" dirty="0">
                 <a:solidFill>
                   <a:srgbClr val="1B2530"/>
                 </a:solidFill>
@@ -15993,7 +14726,7 @@
               </a:rPr>
               <a:t>Letture</a:t>
             </a:r>
-            <a:endParaRPr lang="en-US" sz="1700" dirty="0"/>
+            <a:endParaRPr lang="en-US" sz="2100" dirty="0"/>
           </a:p>
           <a:p>
             <a:pPr indent="0" marL="0">
@@ -16003,7 +14736,7 @@
               <a:buNone/>
             </a:pPr>
             <a:r>
-              <a:rPr lang="en-US" sz="1400" dirty="0">
+              <a:rPr lang="en-US" sz="1800" dirty="0">
                 <a:solidFill>
                   <a:srgbClr val="5B6B78"/>
                 </a:solidFill>
@@ -16013,7 +14746,7 @@
               </a:rPr>
               <a:t>– Patterson, Hennessy: Struttura e progetto dei calcolatori, edizione RISC-V, capitoli 4 e 6</a:t>
             </a:r>
-            <a:endParaRPr lang="en-US" sz="1700" dirty="0"/>
+            <a:endParaRPr lang="en-US" sz="2100" dirty="0"/>
           </a:p>
           <a:p>
             <a:pPr indent="0" marL="0">
@@ -16023,7 +14756,7 @@
               <a:buNone/>
             </a:pPr>
             <a:r>
-              <a:rPr lang="en-US" sz="1400" dirty="0">
+              <a:rPr lang="en-US" sz="1800" dirty="0">
                 <a:solidFill>
                   <a:srgbClr val="5B6B78"/>
                 </a:solidFill>
@@ -16033,7 +14766,7 @@
               </a:rPr>
               <a:t>– Hennessy, Patterson: Computer Architecture, A Quantitative Approach</a:t>
             </a:r>
-            <a:endParaRPr lang="en-US" sz="1700" dirty="0"/>
+            <a:endParaRPr lang="en-US" sz="2100" dirty="0"/>
           </a:p>
           <a:p>
             <a:pPr indent="0" marL="0">
@@ -16043,7 +14776,7 @@
               <a:buNone/>
             </a:pPr>
             <a:r>
-              <a:rPr lang="en-US" sz="1400" dirty="0">
+              <a:rPr lang="en-US" sz="1800" dirty="0">
                 <a:solidFill>
                   <a:srgbClr val="5B6B78"/>
                 </a:solidFill>
@@ -16053,70 +14786,7 @@
               </a:rPr>
               <a:t>– top500.org; la specifica vettoriale di RISC-V su riscv.org</a:t>
             </a:r>
-            <a:endParaRPr lang="en-US" sz="1700" dirty="0"/>
-          </a:p>
-        </p:txBody>
-      </p:sp>
-      <p:pic>
-        <p:nvPicPr>
-          <p:cNvPr id="13" name="Image 0" descr="/Users/raffaelemontella/devel/riscv-prg32/computer-architecture-with-prg32/tools/assets/book_patterson.jpg">    </p:cNvPr>
-          <p:cNvPicPr>
-            <a:picLocks noChangeAspect="1"/>
-          </p:cNvPicPr>
-          <p:nvPr/>
-        </p:nvPicPr>
-        <p:blipFill>
-          <a:blip r:embed="rId1"/>
-          <a:stretch>
-            <a:fillRect/>
-          </a:stretch>
-        </p:blipFill>
-        <p:spPr>
-          <a:xfrm>
-            <a:off x="8192838" y="1417320"/>
-            <a:ext cx="3121220" cy="4297680"/>
-          </a:xfrm>
-          <a:prstGeom prst="rect">
-            <a:avLst/>
-          </a:prstGeom>
-        </p:spPr>
-      </p:pic>
-      <p:sp>
-        <p:nvSpPr>
-          <p:cNvPr id="14" name="Text 11"/>
-          <p:cNvSpPr txBox="1"/>
-          <p:nvPr/>
-        </p:nvSpPr>
-        <p:spPr>
-          <a:xfrm>
-            <a:off x="7863840" y="5788152"/>
-            <a:ext cx="3779215" cy="384048"/>
-          </a:xfrm>
-          <a:prstGeom prst="rect">
-            <a:avLst/>
-          </a:prstGeom>
-          <a:noFill/>
-          <a:ln/>
-        </p:spPr>
-        <p:txBody>
-          <a:bodyPr wrap="square" lIns="0" tIns="0" rIns="0" bIns="0" rtlCol="0" anchor="ctr"/>
-          <a:lstStyle/>
-          <a:p>
-            <a:pPr algn="ctr" indent="0" marL="0">
-              <a:buNone/>
-            </a:pPr>
-            <a:r>
-              <a:rPr lang="en-US" sz="1200" i="1" dirty="0">
-                <a:solidFill>
-                  <a:srgbClr val="5B6B78"/>
-                </a:solidFill>
-                <a:latin typeface="Calibri" pitchFamily="34" charset="0"/>
-                <a:ea typeface="Calibri" pitchFamily="34" charset="-122"/>
-                <a:cs typeface="Calibri" pitchFamily="34" charset="-120"/>
-              </a:rPr>
-              <a:t>Patterson, Hennessy: edizione RISC-V</a:t>
-            </a:r>
-            <a:endParaRPr lang="en-US" sz="1200" dirty="0"/>
+            <a:endParaRPr lang="en-US" sz="2100" dirty="0"/>
           </a:p>
         </p:txBody>
       </p:sp>
@@ -20196,318 +18866,1485 @@
                 <a:ea typeface="Cambria" pitchFamily="34" charset="-122"/>
                 <a:cs typeface="Cambria" pitchFamily="34" charset="-120"/>
               </a:rPr>
-              <a:t>Un'architettura, molte microarchitetture</a:t>
+              <a:t>RISC-V diventa superscalare</a:t>
             </a:r>
             <a:endParaRPr lang="en-US" sz="3200" dirty="0"/>
           </a:p>
         </p:txBody>
       </p:sp>
-      <p:sp>
-        <p:nvSpPr>
-          <p:cNvPr id="3" name="Shape 1"/>
-          <p:cNvSpPr/>
-          <p:nvPr/>
-        </p:nvSpPr>
-        <p:spPr>
-          <a:xfrm>
-            <a:off x="548640" y="1417320"/>
-            <a:ext cx="11094415" cy="1937004"/>
-          </a:xfrm>
-          <a:prstGeom prst="roundRect">
-            <a:avLst>
-              <a:gd name="adj" fmla="val 3777"/>
-            </a:avLst>
-          </a:prstGeom>
-          <a:solidFill>
-            <a:srgbClr val="F6E7D2"/>
-          </a:solidFill>
-          <a:ln w="12700">
-            <a:solidFill>
-              <a:srgbClr val="F6E7D2"/>
-            </a:solidFill>
-            <a:prstDash val="solid"/>
-          </a:ln>
-        </p:spPr>
-      </p:sp>
-      <p:sp>
-        <p:nvSpPr>
-          <p:cNvPr id="4" name="Text 2"/>
-          <p:cNvSpPr txBox="1"/>
-          <p:nvPr/>
-        </p:nvSpPr>
-        <p:spPr>
-          <a:xfrm>
-            <a:off x="914400" y="1600200"/>
-            <a:ext cx="10362895" cy="411480"/>
-          </a:xfrm>
-          <a:prstGeom prst="rect">
-            <a:avLst/>
-          </a:prstGeom>
-          <a:noFill/>
-          <a:ln/>
-        </p:spPr>
-        <p:txBody>
-          <a:bodyPr wrap="square" lIns="0" tIns="0" rIns="0" bIns="0" rtlCol="0" anchor="ctr"/>
-          <a:lstStyle/>
-          <a:p>
-            <a:pPr indent="0" marL="0">
-              <a:buNone/>
-            </a:pPr>
-            <a:r>
-              <a:rPr lang="en-US" sz="1600" b="1" dirty="0">
-                <a:solidFill>
-                  <a:srgbClr val="C7791B"/>
-                </a:solidFill>
-                <a:latin typeface="Calibri" pitchFamily="34" charset="0"/>
-                <a:ea typeface="Calibri" pitchFamily="34" charset="-122"/>
-                <a:cs typeface="Calibri" pitchFamily="34" charset="-120"/>
-              </a:rPr>
-              <a:t>Architettura e microarchitettura</a:t>
-            </a:r>
-            <a:endParaRPr lang="en-US" sz="1600" dirty="0"/>
-          </a:p>
-        </p:txBody>
-      </p:sp>
-      <p:sp>
-        <p:nvSpPr>
-          <p:cNvPr id="5" name="Text 3"/>
-          <p:cNvSpPr txBox="1"/>
-          <p:nvPr/>
-        </p:nvSpPr>
-        <p:spPr>
-          <a:xfrm>
-            <a:off x="914400" y="2057400"/>
-            <a:ext cx="10362895" cy="1114044"/>
-          </a:xfrm>
-          <a:prstGeom prst="rect">
-            <a:avLst/>
-          </a:prstGeom>
-          <a:noFill/>
-          <a:ln/>
-        </p:spPr>
-        <p:txBody>
-          <a:bodyPr wrap="square" lIns="0" tIns="0" rIns="0" bIns="0" rtlCol="0" anchor="ctr"/>
-          <a:lstStyle/>
-          <a:p>
-            <a:pPr indent="0" marL="0">
-              <a:buNone/>
-            </a:pPr>
-            <a:r>
-              <a:rPr lang="en-US" sz="2300" i="1" dirty="0">
-                <a:solidFill>
-                  <a:srgbClr val="1B2530"/>
-                </a:solidFill>
-                <a:latin typeface="Cambria" pitchFamily="34" charset="0"/>
-                <a:ea typeface="Cambria" pitchFamily="34" charset="-122"/>
-                <a:cs typeface="Cambria" pitchFamily="34" charset="-120"/>
-              </a:rPr>
-              <a:t>L'architettura è il contratto: istruzioni, registri, che cosa fa ogni istruzione. La microarchitettura è un modo di rispettarlo: stadi, larghezza, predittori, cache.</a:t>
-            </a:r>
-            <a:endParaRPr lang="en-US" sz="2300" dirty="0"/>
-          </a:p>
-        </p:txBody>
-      </p:sp>
-      <p:sp>
-        <p:nvSpPr>
-          <p:cNvPr id="6" name="Shape 4"/>
-          <p:cNvSpPr/>
-          <p:nvPr/>
-        </p:nvSpPr>
-        <p:spPr>
-          <a:xfrm>
-            <a:off x="548640" y="3796284"/>
-            <a:ext cx="146304" cy="146304"/>
-          </a:xfrm>
-          <a:prstGeom prst="rect">
-            <a:avLst/>
-          </a:prstGeom>
-          <a:solidFill>
-            <a:srgbClr val="0E7C86"/>
-          </a:solidFill>
-          <a:ln w="12700">
-            <a:solidFill>
-              <a:srgbClr val="0E7C86"/>
-            </a:solidFill>
-            <a:prstDash val="solid"/>
-          </a:ln>
-        </p:spPr>
-      </p:sp>
-      <p:sp>
-        <p:nvSpPr>
-          <p:cNvPr id="7" name="Text 5"/>
-          <p:cNvSpPr txBox="1"/>
-          <p:nvPr/>
-        </p:nvSpPr>
-        <p:spPr>
-          <a:xfrm>
-            <a:off x="932688" y="3674364"/>
-            <a:ext cx="10710367" cy="743712"/>
-          </a:xfrm>
-          <a:prstGeom prst="rect">
-            <a:avLst/>
-          </a:prstGeom>
-          <a:noFill/>
-          <a:ln/>
-        </p:spPr>
-        <p:txBody>
-          <a:bodyPr wrap="square" lIns="0" tIns="0" rIns="0" bIns="0" rtlCol="0" anchor="t"/>
-          <a:lstStyle/>
-          <a:p>
-            <a:pPr indent="0" marL="0">
-              <a:spcAft>
-                <a:spcPts val="200"/>
-              </a:spcAft>
-              <a:buNone/>
-            </a:pPr>
-            <a:r>
-              <a:rPr lang="en-US" sz="2400" dirty="0">
-                <a:solidFill>
-                  <a:srgbClr val="1B2530"/>
-                </a:solidFill>
-                <a:latin typeface="Calibri" pitchFamily="34" charset="0"/>
-                <a:ea typeface="Calibri" pitchFamily="34" charset="-122"/>
-                <a:cs typeface="Calibri" pitchFamily="34" charset="-120"/>
-              </a:rPr>
-              <a:t>La add che avete scritto per un microcontrollore a 160 MHz è la add di un core da server</a:t>
-            </a:r>
-            <a:endParaRPr lang="en-US" sz="2400" dirty="0"/>
-          </a:p>
-        </p:txBody>
-      </p:sp>
-      <p:sp>
-        <p:nvSpPr>
-          <p:cNvPr id="8" name="Shape 6"/>
-          <p:cNvSpPr/>
-          <p:nvPr/>
-        </p:nvSpPr>
-        <p:spPr>
-          <a:xfrm>
-            <a:off x="548640" y="4673346"/>
-            <a:ext cx="146304" cy="146304"/>
-          </a:xfrm>
-          <a:prstGeom prst="rect">
-            <a:avLst/>
-          </a:prstGeom>
-          <a:solidFill>
-            <a:srgbClr val="C7791B"/>
-          </a:solidFill>
-          <a:ln w="12700">
-            <a:solidFill>
-              <a:srgbClr val="C7791B"/>
-            </a:solidFill>
-            <a:prstDash val="solid"/>
-          </a:ln>
-        </p:spPr>
-      </p:sp>
-      <p:sp>
-        <p:nvSpPr>
-          <p:cNvPr id="9" name="Text 7"/>
-          <p:cNvSpPr txBox="1"/>
-          <p:nvPr/>
-        </p:nvSpPr>
-        <p:spPr>
-          <a:xfrm>
-            <a:off x="932688" y="4551426"/>
-            <a:ext cx="10710367" cy="743712"/>
-          </a:xfrm>
-          <a:prstGeom prst="rect">
-            <a:avLst/>
-          </a:prstGeom>
-          <a:noFill/>
-          <a:ln/>
-        </p:spPr>
-        <p:txBody>
-          <a:bodyPr wrap="square" lIns="0" tIns="0" rIns="0" bIns="0" rtlCol="0" anchor="t"/>
-          <a:lstStyle/>
-          <a:p>
-            <a:pPr indent="0" marL="0">
-              <a:spcAft>
-                <a:spcPts val="200"/>
-              </a:spcAft>
-              <a:buNone/>
-            </a:pPr>
-            <a:r>
-              <a:rPr lang="en-US" sz="2400" dirty="0">
-                <a:solidFill>
-                  <a:srgbClr val="1B2530"/>
-                </a:solidFill>
-                <a:latin typeface="Calibri" pitchFamily="34" charset="0"/>
-                <a:ea typeface="Calibri" pitchFamily="34" charset="-122"/>
-                <a:cs typeface="Calibri" pitchFamily="34" charset="-120"/>
-              </a:rPr>
-              <a:t>Verm1 girerebbe senza modifiche su uno qualunque dei core della slide precedente, dato uno schermo</a:t>
-            </a:r>
-            <a:endParaRPr lang="en-US" sz="2400" dirty="0"/>
-          </a:p>
-        </p:txBody>
-      </p:sp>
-      <p:sp>
-        <p:nvSpPr>
-          <p:cNvPr id="10" name="Shape 8"/>
-          <p:cNvSpPr/>
-          <p:nvPr/>
-        </p:nvSpPr>
-        <p:spPr>
-          <a:xfrm>
-            <a:off x="548640" y="5550408"/>
-            <a:ext cx="146304" cy="146304"/>
-          </a:xfrm>
-          <a:prstGeom prst="rect">
-            <a:avLst/>
-          </a:prstGeom>
-          <a:solidFill>
-            <a:srgbClr val="0E7C86"/>
-          </a:solidFill>
-          <a:ln w="12700">
-            <a:solidFill>
-              <a:srgbClr val="0E7C86"/>
-            </a:solidFill>
-            <a:prstDash val="solid"/>
-          </a:ln>
-        </p:spPr>
-      </p:sp>
-      <p:sp>
-        <p:nvSpPr>
-          <p:cNvPr id="11" name="Text 9"/>
-          <p:cNvSpPr txBox="1"/>
-          <p:nvPr/>
-        </p:nvSpPr>
-        <p:spPr>
-          <a:xfrm>
-            <a:off x="932688" y="5428488"/>
-            <a:ext cx="10710367" cy="743712"/>
-          </a:xfrm>
-          <a:prstGeom prst="rect">
-            <a:avLst/>
-          </a:prstGeom>
-          <a:noFill/>
-          <a:ln/>
-        </p:spPr>
-        <p:txBody>
-          <a:bodyPr wrap="square" lIns="0" tIns="0" rIns="0" bIns="0" rtlCol="0" anchor="t"/>
-          <a:lstStyle/>
-          <a:p>
-            <a:pPr indent="0" marL="0">
-              <a:spcAft>
-                <a:spcPts val="200"/>
-              </a:spcAft>
-              <a:buNone/>
-            </a:pPr>
-            <a:r>
-              <a:rPr lang="en-US" sz="2400" dirty="0">
-                <a:solidFill>
-                  <a:srgbClr val="1B2530"/>
-                </a:solidFill>
-                <a:latin typeface="Calibri" pitchFamily="34" charset="0"/>
-                <a:ea typeface="Calibri" pitchFamily="34" charset="-122"/>
-                <a:cs typeface="Calibri" pitchFamily="34" charset="-120"/>
-              </a:rPr>
-              <a:t>Per questo un insieme di istruzioni imparato una volta è una conoscenza che dura</a:t>
-            </a:r>
-            <a:endParaRPr lang="en-US" sz="2400" dirty="0"/>
-          </a:p>
-        </p:txBody>
-      </p:sp>
+      <p:graphicFrame>
+        <p:nvGraphicFramePr>
+          <p:cNvPr id="9" name="Table 0"/>
+          <p:cNvGraphicFramePr>
+            <a:graphicFrameLocks noGrp="1"/>
+          </p:cNvGraphicFramePr>
+          <p:nvPr>
+            <p:extLst>
+              <p:ext uri="{D42A27DB-BD31-4B8C-83A1-F6EECF244321}">
+                <p14:modId xmlns:p14="http://schemas.microsoft.com/office/powerpoint/2010/main" val="1579011935"/>
+              </p:ext>
+            </p:extLst>
+          </p:nvPr>
+        </p:nvGraphicFramePr>
+        <p:xfrm>
+          <a:off x="548640" y="1417320"/>
+          <a:ext cx="11094415" cy="914400"/>
+        </p:xfrm>
+        <a:graphic>
+          <a:graphicData uri="http://schemas.openxmlformats.org/drawingml/2006/table">
+            <a:tbl>
+              <a:tblPr/>
+              <a:tblGrid>
+                <a:gridCol w="2694358"/>
+                <a:gridCol w="3328325"/>
+                <a:gridCol w="5071733"/>
+              </a:tblGrid>
+              <a:tr h="0">
+                <a:tc>
+                  <a:txBody>
+                    <a:bodyPr/>
+                    <a:lstStyle/>
+                    <a:p>
+                      <a:pPr algn="l" indent="0" marL="0">
+                        <a:buNone/>
+                      </a:pPr>
+                      <a:r>
+                        <a:rPr lang="en-US" sz="2000" b="1" dirty="0">
+                          <a:solidFill>
+                            <a:srgbClr val="FFFFFF"/>
+                          </a:solidFill>
+                          <a:latin typeface="Calibri" pitchFamily="34" charset="0"/>
+                          <a:ea typeface="Calibri" pitchFamily="34" charset="-122"/>
+                          <a:cs typeface="Calibri" pitchFamily="34" charset="-120"/>
+                        </a:rPr>
+                        <a:t>Core</a:t>
+                      </a:r>
+                      <a:endParaRPr lang="en-US" sz="2000" dirty="0">
+                        <a:latin typeface="Calibri" charset="0"/>
+                        <a:ea typeface="Calibri" charset="0"/>
+                        <a:cs typeface="Calibri" charset="0"/>
+                      </a:endParaRPr>
+                    </a:p>
+                  </a:txBody>
+                  <a:tcPr marL="101600" marR="101600" marT="50800" marB="50800" anchor="ctr">
+                    <a:lnL w="6350" cap="flat" cmpd="sng" algn="ctr">
+                      <a:solidFill>
+                        <a:srgbClr val="C9D2D8"/>
+                      </a:solidFill>
+                      <a:prstDash val="solid"/>
+                      <a:round/>
+                      <a:headEnd type="none" w="med" len="med"/>
+                      <a:tailEnd type="none" w="med" len="med"/>
+                    </a:lnL>
+                    <a:lnR w="6350" cap="flat" cmpd="sng" algn="ctr">
+                      <a:solidFill>
+                        <a:srgbClr val="C9D2D8"/>
+                      </a:solidFill>
+                      <a:prstDash val="solid"/>
+                      <a:round/>
+                      <a:headEnd type="none" w="med" len="med"/>
+                      <a:tailEnd type="none" w="med" len="med"/>
+                    </a:lnR>
+                    <a:lnT w="6350" cap="flat" cmpd="sng" algn="ctr">
+                      <a:solidFill>
+                        <a:srgbClr val="C9D2D8"/>
+                      </a:solidFill>
+                      <a:prstDash val="solid"/>
+                      <a:round/>
+                      <a:headEnd type="none" w="med" len="med"/>
+                      <a:tailEnd type="none" w="med" len="med"/>
+                    </a:lnT>
+                    <a:lnB w="6350" cap="flat" cmpd="sng" algn="ctr">
+                      <a:solidFill>
+                        <a:srgbClr val="C9D2D8"/>
+                      </a:solidFill>
+                      <a:prstDash val="solid"/>
+                      <a:round/>
+                      <a:headEnd type="none" w="med" len="med"/>
+                      <a:tailEnd type="none" w="med" len="med"/>
+                    </a:lnB>
+                    <a:solidFill>
+                      <a:srgbClr val="2E4A62"/>
+                    </a:solidFill>
+                  </a:tcPr>
+                </a:tc>
+                <a:tc>
+                  <a:txBody>
+                    <a:bodyPr/>
+                    <a:lstStyle/>
+                    <a:p>
+                      <a:pPr algn="l" indent="0" marL="0">
+                        <a:buNone/>
+                      </a:pPr>
+                      <a:r>
+                        <a:rPr lang="en-US" sz="2000" b="1" dirty="0">
+                          <a:solidFill>
+                            <a:srgbClr val="FFFFFF"/>
+                          </a:solidFill>
+                          <a:latin typeface="Calibri" pitchFamily="34" charset="0"/>
+                          <a:ea typeface="Calibri" pitchFamily="34" charset="-122"/>
+                          <a:cs typeface="Calibri" pitchFamily="34" charset="-120"/>
+                        </a:rPr>
+                        <a:t>Da</a:t>
+                      </a:r>
+                      <a:endParaRPr lang="en-US" sz="2000" dirty="0">
+                        <a:latin typeface="Calibri" charset="0"/>
+                        <a:ea typeface="Calibri" charset="0"/>
+                        <a:cs typeface="Calibri" charset="0"/>
+                      </a:endParaRPr>
+                    </a:p>
+                  </a:txBody>
+                  <a:tcPr marL="101600" marR="101600" marT="50800" marB="50800" anchor="ctr">
+                    <a:lnL w="6350" cap="flat" cmpd="sng" algn="ctr">
+                      <a:solidFill>
+                        <a:srgbClr val="C9D2D8"/>
+                      </a:solidFill>
+                      <a:prstDash val="solid"/>
+                      <a:round/>
+                      <a:headEnd type="none" w="med" len="med"/>
+                      <a:tailEnd type="none" w="med" len="med"/>
+                    </a:lnL>
+                    <a:lnR w="6350" cap="flat" cmpd="sng" algn="ctr">
+                      <a:solidFill>
+                        <a:srgbClr val="C9D2D8"/>
+                      </a:solidFill>
+                      <a:prstDash val="solid"/>
+                      <a:round/>
+                      <a:headEnd type="none" w="med" len="med"/>
+                      <a:tailEnd type="none" w="med" len="med"/>
+                    </a:lnR>
+                    <a:lnT w="6350" cap="flat" cmpd="sng" algn="ctr">
+                      <a:solidFill>
+                        <a:srgbClr val="C9D2D8"/>
+                      </a:solidFill>
+                      <a:prstDash val="solid"/>
+                      <a:round/>
+                      <a:headEnd type="none" w="med" len="med"/>
+                      <a:tailEnd type="none" w="med" len="med"/>
+                    </a:lnT>
+                    <a:lnB w="6350" cap="flat" cmpd="sng" algn="ctr">
+                      <a:solidFill>
+                        <a:srgbClr val="C9D2D8"/>
+                      </a:solidFill>
+                      <a:prstDash val="solid"/>
+                      <a:round/>
+                      <a:headEnd type="none" w="med" len="med"/>
+                      <a:tailEnd type="none" w="med" len="med"/>
+                    </a:lnB>
+                    <a:solidFill>
+                      <a:srgbClr val="2E4A62"/>
+                    </a:solidFill>
+                  </a:tcPr>
+                </a:tc>
+                <a:tc>
+                  <a:txBody>
+                    <a:bodyPr/>
+                    <a:lstStyle/>
+                    <a:p>
+                      <a:pPr algn="l" indent="0" marL="0">
+                        <a:buNone/>
+                      </a:pPr>
+                      <a:r>
+                        <a:rPr lang="en-US" sz="2000" b="1" dirty="0">
+                          <a:solidFill>
+                            <a:srgbClr val="FFFFFF"/>
+                          </a:solidFill>
+                          <a:latin typeface="Calibri" pitchFamily="34" charset="0"/>
+                          <a:ea typeface="Calibri" pitchFamily="34" charset="-122"/>
+                          <a:cs typeface="Calibri" pitchFamily="34" charset="-120"/>
+                        </a:rPr>
+                        <a:t>Tipo</a:t>
+                      </a:r>
+                      <a:endParaRPr lang="en-US" sz="2000" dirty="0">
+                        <a:latin typeface="Calibri" charset="0"/>
+                        <a:ea typeface="Calibri" charset="0"/>
+                        <a:cs typeface="Calibri" charset="0"/>
+                      </a:endParaRPr>
+                    </a:p>
+                  </a:txBody>
+                  <a:tcPr marL="101600" marR="101600" marT="50800" marB="50800" anchor="ctr">
+                    <a:lnL w="6350" cap="flat" cmpd="sng" algn="ctr">
+                      <a:solidFill>
+                        <a:srgbClr val="C9D2D8"/>
+                      </a:solidFill>
+                      <a:prstDash val="solid"/>
+                      <a:round/>
+                      <a:headEnd type="none" w="med" len="med"/>
+                      <a:tailEnd type="none" w="med" len="med"/>
+                    </a:lnL>
+                    <a:lnR w="6350" cap="flat" cmpd="sng" algn="ctr">
+                      <a:solidFill>
+                        <a:srgbClr val="C9D2D8"/>
+                      </a:solidFill>
+                      <a:prstDash val="solid"/>
+                      <a:round/>
+                      <a:headEnd type="none" w="med" len="med"/>
+                      <a:tailEnd type="none" w="med" len="med"/>
+                    </a:lnR>
+                    <a:lnT w="6350" cap="flat" cmpd="sng" algn="ctr">
+                      <a:solidFill>
+                        <a:srgbClr val="C9D2D8"/>
+                      </a:solidFill>
+                      <a:prstDash val="solid"/>
+                      <a:round/>
+                      <a:headEnd type="none" w="med" len="med"/>
+                      <a:tailEnd type="none" w="med" len="med"/>
+                    </a:lnT>
+                    <a:lnB w="6350" cap="flat" cmpd="sng" algn="ctr">
+                      <a:solidFill>
+                        <a:srgbClr val="C9D2D8"/>
+                      </a:solidFill>
+                      <a:prstDash val="solid"/>
+                      <a:round/>
+                      <a:headEnd type="none" w="med" len="med"/>
+                      <a:tailEnd type="none" w="med" len="med"/>
+                    </a:lnB>
+                    <a:solidFill>
+                      <a:srgbClr val="2E4A62"/>
+                    </a:solidFill>
+                  </a:tcPr>
+                </a:tc>
+              </a:tr>
+              <a:tr h="0">
+                <a:tc>
+                  <a:txBody>
+                    <a:bodyPr/>
+                    <a:lstStyle/>
+                    <a:p>
+                      <a:pPr algn="l" indent="0" marL="0">
+                        <a:buNone/>
+                      </a:pPr>
+                      <a:r>
+                        <a:rPr lang="en-US" sz="2000" b="1" dirty="0">
+                          <a:solidFill>
+                            <a:srgbClr val="1B2530"/>
+                          </a:solidFill>
+                          <a:latin typeface="Calibri" pitchFamily="34" charset="0"/>
+                          <a:ea typeface="Calibri" pitchFamily="34" charset="-122"/>
+                          <a:cs typeface="Calibri" pitchFamily="34" charset="-120"/>
+                        </a:rPr>
+                        <a:t>Core HP dell'ESP32-C6</a:t>
+                      </a:r>
+                      <a:endParaRPr lang="en-US" sz="2000" dirty="0">
+                        <a:latin typeface="Calibri" charset="0"/>
+                        <a:ea typeface="Calibri" charset="0"/>
+                        <a:cs typeface="Calibri" charset="0"/>
+                      </a:endParaRPr>
+                    </a:p>
+                  </a:txBody>
+                  <a:tcPr marL="101600" marR="101600" marT="50800" marB="50800" anchor="ctr">
+                    <a:lnL w="6350" cap="flat" cmpd="sng" algn="ctr">
+                      <a:solidFill>
+                        <a:srgbClr val="C9D2D8"/>
+                      </a:solidFill>
+                      <a:prstDash val="solid"/>
+                      <a:round/>
+                      <a:headEnd type="none" w="med" len="med"/>
+                      <a:tailEnd type="none" w="med" len="med"/>
+                    </a:lnL>
+                    <a:lnR w="6350" cap="flat" cmpd="sng" algn="ctr">
+                      <a:solidFill>
+                        <a:srgbClr val="C9D2D8"/>
+                      </a:solidFill>
+                      <a:prstDash val="solid"/>
+                      <a:round/>
+                      <a:headEnd type="none" w="med" len="med"/>
+                      <a:tailEnd type="none" w="med" len="med"/>
+                    </a:lnR>
+                    <a:lnT w="6350" cap="flat" cmpd="sng" algn="ctr">
+                      <a:solidFill>
+                        <a:srgbClr val="C9D2D8"/>
+                      </a:solidFill>
+                      <a:prstDash val="solid"/>
+                      <a:round/>
+                      <a:headEnd type="none" w="med" len="med"/>
+                      <a:tailEnd type="none" w="med" len="med"/>
+                    </a:lnT>
+                    <a:lnB w="6350" cap="flat" cmpd="sng" algn="ctr">
+                      <a:solidFill>
+                        <a:srgbClr val="C9D2D8"/>
+                      </a:solidFill>
+                      <a:prstDash val="solid"/>
+                      <a:round/>
+                      <a:headEnd type="none" w="med" len="med"/>
+                      <a:tailEnd type="none" w="med" len="med"/>
+                    </a:lnB>
+                    <a:solidFill>
+                      <a:srgbClr val="EEF2F4"/>
+                    </a:solidFill>
+                  </a:tcPr>
+                </a:tc>
+                <a:tc>
+                  <a:txBody>
+                    <a:bodyPr/>
+                    <a:lstStyle/>
+                    <a:p>
+                      <a:pPr algn="l" indent="0" marL="0">
+                        <a:buNone/>
+                      </a:pPr>
+                      <a:r>
+                        <a:rPr lang="en-US" sz="2000" dirty="0">
+                          <a:solidFill>
+                            <a:srgbClr val="1B2530"/>
+                          </a:solidFill>
+                          <a:latin typeface="Calibri" pitchFamily="34" charset="0"/>
+                          <a:ea typeface="Calibri" pitchFamily="34" charset="-122"/>
+                          <a:cs typeface="Calibri" pitchFamily="34" charset="-120"/>
+                        </a:rPr>
+                        <a:t>Espressif</a:t>
+                      </a:r>
+                      <a:endParaRPr lang="en-US" sz="2000" dirty="0">
+                        <a:latin typeface="Calibri" charset="0"/>
+                        <a:ea typeface="Calibri" charset="0"/>
+                        <a:cs typeface="Calibri" charset="0"/>
+                      </a:endParaRPr>
+                    </a:p>
+                  </a:txBody>
+                  <a:tcPr marL="101600" marR="101600" marT="50800" marB="50800" anchor="ctr">
+                    <a:lnL w="6350" cap="flat" cmpd="sng" algn="ctr">
+                      <a:solidFill>
+                        <a:srgbClr val="C9D2D8"/>
+                      </a:solidFill>
+                      <a:prstDash val="solid"/>
+                      <a:round/>
+                      <a:headEnd type="none" w="med" len="med"/>
+                      <a:tailEnd type="none" w="med" len="med"/>
+                    </a:lnL>
+                    <a:lnR w="6350" cap="flat" cmpd="sng" algn="ctr">
+                      <a:solidFill>
+                        <a:srgbClr val="C9D2D8"/>
+                      </a:solidFill>
+                      <a:prstDash val="solid"/>
+                      <a:round/>
+                      <a:headEnd type="none" w="med" len="med"/>
+                      <a:tailEnd type="none" w="med" len="med"/>
+                    </a:lnR>
+                    <a:lnT w="6350" cap="flat" cmpd="sng" algn="ctr">
+                      <a:solidFill>
+                        <a:srgbClr val="C9D2D8"/>
+                      </a:solidFill>
+                      <a:prstDash val="solid"/>
+                      <a:round/>
+                      <a:headEnd type="none" w="med" len="med"/>
+                      <a:tailEnd type="none" w="med" len="med"/>
+                    </a:lnT>
+                    <a:lnB w="6350" cap="flat" cmpd="sng" algn="ctr">
+                      <a:solidFill>
+                        <a:srgbClr val="C9D2D8"/>
+                      </a:solidFill>
+                      <a:prstDash val="solid"/>
+                      <a:round/>
+                      <a:headEnd type="none" w="med" len="med"/>
+                      <a:tailEnd type="none" w="med" len="med"/>
+                    </a:lnB>
+                    <a:solidFill>
+                      <a:srgbClr val="EEF2F4"/>
+                    </a:solidFill>
+                  </a:tcPr>
+                </a:tc>
+                <a:tc>
+                  <a:txBody>
+                    <a:bodyPr/>
+                    <a:lstStyle/>
+                    <a:p>
+                      <a:pPr algn="l" indent="0" marL="0">
+                        <a:buNone/>
+                      </a:pPr>
+                      <a:r>
+                        <a:rPr lang="en-US" sz="2000" dirty="0">
+                          <a:solidFill>
+                            <a:srgbClr val="1B2530"/>
+                          </a:solidFill>
+                          <a:latin typeface="Calibri" pitchFamily="34" charset="0"/>
+                          <a:ea typeface="Calibri" pitchFamily="34" charset="-122"/>
+                          <a:cs typeface="Calibri" pitchFamily="34" charset="-120"/>
+                        </a:rPr>
+                        <a:t>in ordine, quattro stadi, un'istruzione per ciclo: il vostro kit</a:t>
+                      </a:r>
+                      <a:endParaRPr lang="en-US" sz="2000" dirty="0">
+                        <a:latin typeface="Calibri" charset="0"/>
+                        <a:ea typeface="Calibri" charset="0"/>
+                        <a:cs typeface="Calibri" charset="0"/>
+                      </a:endParaRPr>
+                    </a:p>
+                  </a:txBody>
+                  <a:tcPr marL="101600" marR="101600" marT="50800" marB="50800" anchor="ctr">
+                    <a:lnL w="6350" cap="flat" cmpd="sng" algn="ctr">
+                      <a:solidFill>
+                        <a:srgbClr val="C9D2D8"/>
+                      </a:solidFill>
+                      <a:prstDash val="solid"/>
+                      <a:round/>
+                      <a:headEnd type="none" w="med" len="med"/>
+                      <a:tailEnd type="none" w="med" len="med"/>
+                    </a:lnL>
+                    <a:lnR w="6350" cap="flat" cmpd="sng" algn="ctr">
+                      <a:solidFill>
+                        <a:srgbClr val="C9D2D8"/>
+                      </a:solidFill>
+                      <a:prstDash val="solid"/>
+                      <a:round/>
+                      <a:headEnd type="none" w="med" len="med"/>
+                      <a:tailEnd type="none" w="med" len="med"/>
+                    </a:lnR>
+                    <a:lnT w="6350" cap="flat" cmpd="sng" algn="ctr">
+                      <a:solidFill>
+                        <a:srgbClr val="C9D2D8"/>
+                      </a:solidFill>
+                      <a:prstDash val="solid"/>
+                      <a:round/>
+                      <a:headEnd type="none" w="med" len="med"/>
+                      <a:tailEnd type="none" w="med" len="med"/>
+                    </a:lnT>
+                    <a:lnB w="6350" cap="flat" cmpd="sng" algn="ctr">
+                      <a:solidFill>
+                        <a:srgbClr val="C9D2D8"/>
+                      </a:solidFill>
+                      <a:prstDash val="solid"/>
+                      <a:round/>
+                      <a:headEnd type="none" w="med" len="med"/>
+                      <a:tailEnd type="none" w="med" len="med"/>
+                    </a:lnB>
+                    <a:solidFill>
+                      <a:srgbClr val="EEF2F4"/>
+                    </a:solidFill>
+                  </a:tcPr>
+                </a:tc>
+              </a:tr>
+              <a:tr h="0">
+                <a:tc>
+                  <a:txBody>
+                    <a:bodyPr/>
+                    <a:lstStyle/>
+                    <a:p>
+                      <a:pPr algn="l" indent="0" marL="0">
+                        <a:buNone/>
+                      </a:pPr>
+                      <a:r>
+                        <a:rPr lang="en-US" sz="2000" b="1" dirty="0">
+                          <a:solidFill>
+                            <a:srgbClr val="1B2530"/>
+                          </a:solidFill>
+                          <a:latin typeface="Calibri" pitchFamily="34" charset="0"/>
+                          <a:ea typeface="Calibri" pitchFamily="34" charset="-122"/>
+                          <a:cs typeface="Calibri" pitchFamily="34" charset="-120"/>
+                        </a:rPr>
+                        <a:t>BOOM</a:t>
+                      </a:r>
+                      <a:endParaRPr lang="en-US" sz="2000" dirty="0">
+                        <a:latin typeface="Calibri" charset="0"/>
+                        <a:ea typeface="Calibri" charset="0"/>
+                        <a:cs typeface="Calibri" charset="0"/>
+                      </a:endParaRPr>
+                    </a:p>
+                  </a:txBody>
+                  <a:tcPr marL="101600" marR="101600" marT="50800" marB="50800" anchor="ctr">
+                    <a:lnL w="6350" cap="flat" cmpd="sng" algn="ctr">
+                      <a:solidFill>
+                        <a:srgbClr val="C9D2D8"/>
+                      </a:solidFill>
+                      <a:prstDash val="solid"/>
+                      <a:round/>
+                      <a:headEnd type="none" w="med" len="med"/>
+                      <a:tailEnd type="none" w="med" len="med"/>
+                    </a:lnL>
+                    <a:lnR w="6350" cap="flat" cmpd="sng" algn="ctr">
+                      <a:solidFill>
+                        <a:srgbClr val="C9D2D8"/>
+                      </a:solidFill>
+                      <a:prstDash val="solid"/>
+                      <a:round/>
+                      <a:headEnd type="none" w="med" len="med"/>
+                      <a:tailEnd type="none" w="med" len="med"/>
+                    </a:lnR>
+                    <a:lnT w="6350" cap="flat" cmpd="sng" algn="ctr">
+                      <a:solidFill>
+                        <a:srgbClr val="C9D2D8"/>
+                      </a:solidFill>
+                      <a:prstDash val="solid"/>
+                      <a:round/>
+                      <a:headEnd type="none" w="med" len="med"/>
+                      <a:tailEnd type="none" w="med" len="med"/>
+                    </a:lnT>
+                    <a:lnB w="6350" cap="flat" cmpd="sng" algn="ctr">
+                      <a:solidFill>
+                        <a:srgbClr val="C9D2D8"/>
+                      </a:solidFill>
+                      <a:prstDash val="solid"/>
+                      <a:round/>
+                      <a:headEnd type="none" w="med" len="med"/>
+                      <a:tailEnd type="none" w="med" len="med"/>
+                    </a:lnB>
+                    <a:solidFill>
+                      <a:srgbClr val="FFFFFF"/>
+                    </a:solidFill>
+                  </a:tcPr>
+                </a:tc>
+                <a:tc>
+                  <a:txBody>
+                    <a:bodyPr/>
+                    <a:lstStyle/>
+                    <a:p>
+                      <a:pPr algn="l" indent="0" marL="0">
+                        <a:buNone/>
+                      </a:pPr>
+                      <a:r>
+                        <a:rPr lang="en-US" sz="2000" dirty="0">
+                          <a:solidFill>
+                            <a:srgbClr val="1B2530"/>
+                          </a:solidFill>
+                          <a:latin typeface="Calibri" pitchFamily="34" charset="0"/>
+                          <a:ea typeface="Calibri" pitchFamily="34" charset="-122"/>
+                          <a:cs typeface="Calibri" pitchFamily="34" charset="-120"/>
+                        </a:rPr>
+                        <a:t>Università della California, Berkeley</a:t>
+                      </a:r>
+                      <a:endParaRPr lang="en-US" sz="2000" dirty="0">
+                        <a:latin typeface="Calibri" charset="0"/>
+                        <a:ea typeface="Calibri" charset="0"/>
+                        <a:cs typeface="Calibri" charset="0"/>
+                      </a:endParaRPr>
+                    </a:p>
+                  </a:txBody>
+                  <a:tcPr marL="101600" marR="101600" marT="50800" marB="50800" anchor="ctr">
+                    <a:lnL w="6350" cap="flat" cmpd="sng" algn="ctr">
+                      <a:solidFill>
+                        <a:srgbClr val="C9D2D8"/>
+                      </a:solidFill>
+                      <a:prstDash val="solid"/>
+                      <a:round/>
+                      <a:headEnd type="none" w="med" len="med"/>
+                      <a:tailEnd type="none" w="med" len="med"/>
+                    </a:lnL>
+                    <a:lnR w="6350" cap="flat" cmpd="sng" algn="ctr">
+                      <a:solidFill>
+                        <a:srgbClr val="C9D2D8"/>
+                      </a:solidFill>
+                      <a:prstDash val="solid"/>
+                      <a:round/>
+                      <a:headEnd type="none" w="med" len="med"/>
+                      <a:tailEnd type="none" w="med" len="med"/>
+                    </a:lnR>
+                    <a:lnT w="6350" cap="flat" cmpd="sng" algn="ctr">
+                      <a:solidFill>
+                        <a:srgbClr val="C9D2D8"/>
+                      </a:solidFill>
+                      <a:prstDash val="solid"/>
+                      <a:round/>
+                      <a:headEnd type="none" w="med" len="med"/>
+                      <a:tailEnd type="none" w="med" len="med"/>
+                    </a:lnT>
+                    <a:lnB w="6350" cap="flat" cmpd="sng" algn="ctr">
+                      <a:solidFill>
+                        <a:srgbClr val="C9D2D8"/>
+                      </a:solidFill>
+                      <a:prstDash val="solid"/>
+                      <a:round/>
+                      <a:headEnd type="none" w="med" len="med"/>
+                      <a:tailEnd type="none" w="med" len="med"/>
+                    </a:lnB>
+                    <a:solidFill>
+                      <a:srgbClr val="FFFFFF"/>
+                    </a:solidFill>
+                  </a:tcPr>
+                </a:tc>
+                <a:tc>
+                  <a:txBody>
+                    <a:bodyPr/>
+                    <a:lstStyle/>
+                    <a:p>
+                      <a:pPr algn="l" indent="0" marL="0">
+                        <a:buNone/>
+                      </a:pPr>
+                      <a:r>
+                        <a:rPr lang="en-US" sz="2000" dirty="0">
+                          <a:solidFill>
+                            <a:srgbClr val="1B2530"/>
+                          </a:solidFill>
+                          <a:latin typeface="Calibri" pitchFamily="34" charset="0"/>
+                          <a:ea typeface="Calibri" pitchFamily="34" charset="-122"/>
+                          <a:cs typeface="Calibri" pitchFamily="34" charset="-120"/>
+                        </a:rPr>
+                        <a:t>fuori ordine, open source, per ricerca e didattica</a:t>
+                      </a:r>
+                      <a:endParaRPr lang="en-US" sz="2000" dirty="0">
+                        <a:latin typeface="Calibri" charset="0"/>
+                        <a:ea typeface="Calibri" charset="0"/>
+                        <a:cs typeface="Calibri" charset="0"/>
+                      </a:endParaRPr>
+                    </a:p>
+                  </a:txBody>
+                  <a:tcPr marL="101600" marR="101600" marT="50800" marB="50800" anchor="ctr">
+                    <a:lnL w="6350" cap="flat" cmpd="sng" algn="ctr">
+                      <a:solidFill>
+                        <a:srgbClr val="C9D2D8"/>
+                      </a:solidFill>
+                      <a:prstDash val="solid"/>
+                      <a:round/>
+                      <a:headEnd type="none" w="med" len="med"/>
+                      <a:tailEnd type="none" w="med" len="med"/>
+                    </a:lnL>
+                    <a:lnR w="6350" cap="flat" cmpd="sng" algn="ctr">
+                      <a:solidFill>
+                        <a:srgbClr val="C9D2D8"/>
+                      </a:solidFill>
+                      <a:prstDash val="solid"/>
+                      <a:round/>
+                      <a:headEnd type="none" w="med" len="med"/>
+                      <a:tailEnd type="none" w="med" len="med"/>
+                    </a:lnR>
+                    <a:lnT w="6350" cap="flat" cmpd="sng" algn="ctr">
+                      <a:solidFill>
+                        <a:srgbClr val="C9D2D8"/>
+                      </a:solidFill>
+                      <a:prstDash val="solid"/>
+                      <a:round/>
+                      <a:headEnd type="none" w="med" len="med"/>
+                      <a:tailEnd type="none" w="med" len="med"/>
+                    </a:lnT>
+                    <a:lnB w="6350" cap="flat" cmpd="sng" algn="ctr">
+                      <a:solidFill>
+                        <a:srgbClr val="C9D2D8"/>
+                      </a:solidFill>
+                      <a:prstDash val="solid"/>
+                      <a:round/>
+                      <a:headEnd type="none" w="med" len="med"/>
+                      <a:tailEnd type="none" w="med" len="med"/>
+                    </a:lnB>
+                    <a:solidFill>
+                      <a:srgbClr val="FFFFFF"/>
+                    </a:solidFill>
+                  </a:tcPr>
+                </a:tc>
+              </a:tr>
+              <a:tr h="0">
+                <a:tc>
+                  <a:txBody>
+                    <a:bodyPr/>
+                    <a:lstStyle/>
+                    <a:p>
+                      <a:pPr algn="l" indent="0" marL="0">
+                        <a:buNone/>
+                      </a:pPr>
+                      <a:r>
+                        <a:rPr lang="en-US" sz="2000" b="1" dirty="0">
+                          <a:solidFill>
+                            <a:srgbClr val="1B2530"/>
+                          </a:solidFill>
+                          <a:latin typeface="Calibri" pitchFamily="34" charset="0"/>
+                          <a:ea typeface="Calibri" pitchFamily="34" charset="-122"/>
+                          <a:cs typeface="Calibri" pitchFamily="34" charset="-120"/>
+                        </a:rPr>
+                        <a:t>XiangShan</a:t>
+                      </a:r>
+                      <a:endParaRPr lang="en-US" sz="2000" dirty="0">
+                        <a:latin typeface="Calibri" charset="0"/>
+                        <a:ea typeface="Calibri" charset="0"/>
+                        <a:cs typeface="Calibri" charset="0"/>
+                      </a:endParaRPr>
+                    </a:p>
+                  </a:txBody>
+                  <a:tcPr marL="101600" marR="101600" marT="50800" marB="50800" anchor="ctr">
+                    <a:lnL w="6350" cap="flat" cmpd="sng" algn="ctr">
+                      <a:solidFill>
+                        <a:srgbClr val="C9D2D8"/>
+                      </a:solidFill>
+                      <a:prstDash val="solid"/>
+                      <a:round/>
+                      <a:headEnd type="none" w="med" len="med"/>
+                      <a:tailEnd type="none" w="med" len="med"/>
+                    </a:lnL>
+                    <a:lnR w="6350" cap="flat" cmpd="sng" algn="ctr">
+                      <a:solidFill>
+                        <a:srgbClr val="C9D2D8"/>
+                      </a:solidFill>
+                      <a:prstDash val="solid"/>
+                      <a:round/>
+                      <a:headEnd type="none" w="med" len="med"/>
+                      <a:tailEnd type="none" w="med" len="med"/>
+                    </a:lnR>
+                    <a:lnT w="6350" cap="flat" cmpd="sng" algn="ctr">
+                      <a:solidFill>
+                        <a:srgbClr val="C9D2D8"/>
+                      </a:solidFill>
+                      <a:prstDash val="solid"/>
+                      <a:round/>
+                      <a:headEnd type="none" w="med" len="med"/>
+                      <a:tailEnd type="none" w="med" len="med"/>
+                    </a:lnT>
+                    <a:lnB w="6350" cap="flat" cmpd="sng" algn="ctr">
+                      <a:solidFill>
+                        <a:srgbClr val="C9D2D8"/>
+                      </a:solidFill>
+                      <a:prstDash val="solid"/>
+                      <a:round/>
+                      <a:headEnd type="none" w="med" len="med"/>
+                      <a:tailEnd type="none" w="med" len="med"/>
+                    </a:lnB>
+                    <a:solidFill>
+                      <a:srgbClr val="EEF2F4"/>
+                    </a:solidFill>
+                  </a:tcPr>
+                </a:tc>
+                <a:tc>
+                  <a:txBody>
+                    <a:bodyPr/>
+                    <a:lstStyle/>
+                    <a:p>
+                      <a:pPr algn="l" indent="0" marL="0">
+                        <a:buNone/>
+                      </a:pPr>
+                      <a:r>
+                        <a:rPr lang="en-US" sz="2000" dirty="0">
+                          <a:solidFill>
+                            <a:srgbClr val="1B2530"/>
+                          </a:solidFill>
+                          <a:latin typeface="Calibri" pitchFamily="34" charset="0"/>
+                          <a:ea typeface="Calibri" pitchFamily="34" charset="-122"/>
+                          <a:cs typeface="Calibri" pitchFamily="34" charset="-120"/>
+                        </a:rPr>
+                        <a:t>Accademia Cinese delle Scienze</a:t>
+                      </a:r>
+                      <a:endParaRPr lang="en-US" sz="2000" dirty="0">
+                        <a:latin typeface="Calibri" charset="0"/>
+                        <a:ea typeface="Calibri" charset="0"/>
+                        <a:cs typeface="Calibri" charset="0"/>
+                      </a:endParaRPr>
+                    </a:p>
+                  </a:txBody>
+                  <a:tcPr marL="101600" marR="101600" marT="50800" marB="50800" anchor="ctr">
+                    <a:lnL w="6350" cap="flat" cmpd="sng" algn="ctr">
+                      <a:solidFill>
+                        <a:srgbClr val="C9D2D8"/>
+                      </a:solidFill>
+                      <a:prstDash val="solid"/>
+                      <a:round/>
+                      <a:headEnd type="none" w="med" len="med"/>
+                      <a:tailEnd type="none" w="med" len="med"/>
+                    </a:lnL>
+                    <a:lnR w="6350" cap="flat" cmpd="sng" algn="ctr">
+                      <a:solidFill>
+                        <a:srgbClr val="C9D2D8"/>
+                      </a:solidFill>
+                      <a:prstDash val="solid"/>
+                      <a:round/>
+                      <a:headEnd type="none" w="med" len="med"/>
+                      <a:tailEnd type="none" w="med" len="med"/>
+                    </a:lnR>
+                    <a:lnT w="6350" cap="flat" cmpd="sng" algn="ctr">
+                      <a:solidFill>
+                        <a:srgbClr val="C9D2D8"/>
+                      </a:solidFill>
+                      <a:prstDash val="solid"/>
+                      <a:round/>
+                      <a:headEnd type="none" w="med" len="med"/>
+                      <a:tailEnd type="none" w="med" len="med"/>
+                    </a:lnT>
+                    <a:lnB w="6350" cap="flat" cmpd="sng" algn="ctr">
+                      <a:solidFill>
+                        <a:srgbClr val="C9D2D8"/>
+                      </a:solidFill>
+                      <a:prstDash val="solid"/>
+                      <a:round/>
+                      <a:headEnd type="none" w="med" len="med"/>
+                      <a:tailEnd type="none" w="med" len="med"/>
+                    </a:lnB>
+                    <a:solidFill>
+                      <a:srgbClr val="EEF2F4"/>
+                    </a:solidFill>
+                  </a:tcPr>
+                </a:tc>
+                <a:tc>
+                  <a:txBody>
+                    <a:bodyPr/>
+                    <a:lstStyle/>
+                    <a:p>
+                      <a:pPr algn="l" indent="0" marL="0">
+                        <a:buNone/>
+                      </a:pPr>
+                      <a:r>
+                        <a:rPr lang="en-US" sz="2000" dirty="0">
+                          <a:solidFill>
+                            <a:srgbClr val="1B2530"/>
+                          </a:solidFill>
+                          <a:latin typeface="Calibri" pitchFamily="34" charset="0"/>
+                          <a:ea typeface="Calibri" pitchFamily="34" charset="-122"/>
+                          <a:cs typeface="Calibri" pitchFamily="34" charset="-120"/>
+                        </a:rPr>
+                        <a:t>fuori ordine, open source, alte prestazioni</a:t>
+                      </a:r>
+                      <a:endParaRPr lang="en-US" sz="2000" dirty="0">
+                        <a:latin typeface="Calibri" charset="0"/>
+                        <a:ea typeface="Calibri" charset="0"/>
+                        <a:cs typeface="Calibri" charset="0"/>
+                      </a:endParaRPr>
+                    </a:p>
+                  </a:txBody>
+                  <a:tcPr marL="101600" marR="101600" marT="50800" marB="50800" anchor="ctr">
+                    <a:lnL w="6350" cap="flat" cmpd="sng" algn="ctr">
+                      <a:solidFill>
+                        <a:srgbClr val="C9D2D8"/>
+                      </a:solidFill>
+                      <a:prstDash val="solid"/>
+                      <a:round/>
+                      <a:headEnd type="none" w="med" len="med"/>
+                      <a:tailEnd type="none" w="med" len="med"/>
+                    </a:lnL>
+                    <a:lnR w="6350" cap="flat" cmpd="sng" algn="ctr">
+                      <a:solidFill>
+                        <a:srgbClr val="C9D2D8"/>
+                      </a:solidFill>
+                      <a:prstDash val="solid"/>
+                      <a:round/>
+                      <a:headEnd type="none" w="med" len="med"/>
+                      <a:tailEnd type="none" w="med" len="med"/>
+                    </a:lnR>
+                    <a:lnT w="6350" cap="flat" cmpd="sng" algn="ctr">
+                      <a:solidFill>
+                        <a:srgbClr val="C9D2D8"/>
+                      </a:solidFill>
+                      <a:prstDash val="solid"/>
+                      <a:round/>
+                      <a:headEnd type="none" w="med" len="med"/>
+                      <a:tailEnd type="none" w="med" len="med"/>
+                    </a:lnT>
+                    <a:lnB w="6350" cap="flat" cmpd="sng" algn="ctr">
+                      <a:solidFill>
+                        <a:srgbClr val="C9D2D8"/>
+                      </a:solidFill>
+                      <a:prstDash val="solid"/>
+                      <a:round/>
+                      <a:headEnd type="none" w="med" len="med"/>
+                      <a:tailEnd type="none" w="med" len="med"/>
+                    </a:lnB>
+                    <a:solidFill>
+                      <a:srgbClr val="EEF2F4"/>
+                    </a:solidFill>
+                  </a:tcPr>
+                </a:tc>
+              </a:tr>
+              <a:tr h="0">
+                <a:tc>
+                  <a:txBody>
+                    <a:bodyPr/>
+                    <a:lstStyle/>
+                    <a:p>
+                      <a:pPr algn="l" indent="0" marL="0">
+                        <a:buNone/>
+                      </a:pPr>
+                      <a:r>
+                        <a:rPr lang="en-US" sz="2000" b="1" dirty="0">
+                          <a:solidFill>
+                            <a:srgbClr val="1B2530"/>
+                          </a:solidFill>
+                          <a:latin typeface="Calibri" pitchFamily="34" charset="0"/>
+                          <a:ea typeface="Calibri" pitchFamily="34" charset="-122"/>
+                          <a:cs typeface="Calibri" pitchFamily="34" charset="-120"/>
+                        </a:rPr>
+                        <a:t>XuanTie C910</a:t>
+                      </a:r>
+                      <a:endParaRPr lang="en-US" sz="2000" dirty="0">
+                        <a:latin typeface="Calibri" charset="0"/>
+                        <a:ea typeface="Calibri" charset="0"/>
+                        <a:cs typeface="Calibri" charset="0"/>
+                      </a:endParaRPr>
+                    </a:p>
+                  </a:txBody>
+                  <a:tcPr marL="101600" marR="101600" marT="50800" marB="50800" anchor="ctr">
+                    <a:lnL w="6350" cap="flat" cmpd="sng" algn="ctr">
+                      <a:solidFill>
+                        <a:srgbClr val="C9D2D8"/>
+                      </a:solidFill>
+                      <a:prstDash val="solid"/>
+                      <a:round/>
+                      <a:headEnd type="none" w="med" len="med"/>
+                      <a:tailEnd type="none" w="med" len="med"/>
+                    </a:lnL>
+                    <a:lnR w="6350" cap="flat" cmpd="sng" algn="ctr">
+                      <a:solidFill>
+                        <a:srgbClr val="C9D2D8"/>
+                      </a:solidFill>
+                      <a:prstDash val="solid"/>
+                      <a:round/>
+                      <a:headEnd type="none" w="med" len="med"/>
+                      <a:tailEnd type="none" w="med" len="med"/>
+                    </a:lnR>
+                    <a:lnT w="6350" cap="flat" cmpd="sng" algn="ctr">
+                      <a:solidFill>
+                        <a:srgbClr val="C9D2D8"/>
+                      </a:solidFill>
+                      <a:prstDash val="solid"/>
+                      <a:round/>
+                      <a:headEnd type="none" w="med" len="med"/>
+                      <a:tailEnd type="none" w="med" len="med"/>
+                    </a:lnT>
+                    <a:lnB w="6350" cap="flat" cmpd="sng" algn="ctr">
+                      <a:solidFill>
+                        <a:srgbClr val="C9D2D8"/>
+                      </a:solidFill>
+                      <a:prstDash val="solid"/>
+                      <a:round/>
+                      <a:headEnd type="none" w="med" len="med"/>
+                      <a:tailEnd type="none" w="med" len="med"/>
+                    </a:lnB>
+                    <a:solidFill>
+                      <a:srgbClr val="FFFFFF"/>
+                    </a:solidFill>
+                  </a:tcPr>
+                </a:tc>
+                <a:tc>
+                  <a:txBody>
+                    <a:bodyPr/>
+                    <a:lstStyle/>
+                    <a:p>
+                      <a:pPr algn="l" indent="0" marL="0">
+                        <a:buNone/>
+                      </a:pPr>
+                      <a:r>
+                        <a:rPr lang="en-US" sz="2000" dirty="0">
+                          <a:solidFill>
+                            <a:srgbClr val="1B2530"/>
+                          </a:solidFill>
+                          <a:latin typeface="Calibri" pitchFamily="34" charset="0"/>
+                          <a:ea typeface="Calibri" pitchFamily="34" charset="-122"/>
+                          <a:cs typeface="Calibri" pitchFamily="34" charset="-120"/>
+                        </a:rPr>
+                        <a:t>T-Head (Alibaba)</a:t>
+                      </a:r>
+                      <a:endParaRPr lang="en-US" sz="2000" dirty="0">
+                        <a:latin typeface="Calibri" charset="0"/>
+                        <a:ea typeface="Calibri" charset="0"/>
+                        <a:cs typeface="Calibri" charset="0"/>
+                      </a:endParaRPr>
+                    </a:p>
+                  </a:txBody>
+                  <a:tcPr marL="101600" marR="101600" marT="50800" marB="50800" anchor="ctr">
+                    <a:lnL w="6350" cap="flat" cmpd="sng" algn="ctr">
+                      <a:solidFill>
+                        <a:srgbClr val="C9D2D8"/>
+                      </a:solidFill>
+                      <a:prstDash val="solid"/>
+                      <a:round/>
+                      <a:headEnd type="none" w="med" len="med"/>
+                      <a:tailEnd type="none" w="med" len="med"/>
+                    </a:lnL>
+                    <a:lnR w="6350" cap="flat" cmpd="sng" algn="ctr">
+                      <a:solidFill>
+                        <a:srgbClr val="C9D2D8"/>
+                      </a:solidFill>
+                      <a:prstDash val="solid"/>
+                      <a:round/>
+                      <a:headEnd type="none" w="med" len="med"/>
+                      <a:tailEnd type="none" w="med" len="med"/>
+                    </a:lnR>
+                    <a:lnT w="6350" cap="flat" cmpd="sng" algn="ctr">
+                      <a:solidFill>
+                        <a:srgbClr val="C9D2D8"/>
+                      </a:solidFill>
+                      <a:prstDash val="solid"/>
+                      <a:round/>
+                      <a:headEnd type="none" w="med" len="med"/>
+                      <a:tailEnd type="none" w="med" len="med"/>
+                    </a:lnT>
+                    <a:lnB w="6350" cap="flat" cmpd="sng" algn="ctr">
+                      <a:solidFill>
+                        <a:srgbClr val="C9D2D8"/>
+                      </a:solidFill>
+                      <a:prstDash val="solid"/>
+                      <a:round/>
+                      <a:headEnd type="none" w="med" len="med"/>
+                      <a:tailEnd type="none" w="med" len="med"/>
+                    </a:lnB>
+                    <a:solidFill>
+                      <a:srgbClr val="FFFFFF"/>
+                    </a:solidFill>
+                  </a:tcPr>
+                </a:tc>
+                <a:tc>
+                  <a:txBody>
+                    <a:bodyPr/>
+                    <a:lstStyle/>
+                    <a:p>
+                      <a:pPr algn="l" indent="0" marL="0">
+                        <a:buNone/>
+                      </a:pPr>
+                      <a:r>
+                        <a:rPr lang="en-US" sz="2000" dirty="0">
+                          <a:solidFill>
+                            <a:srgbClr val="1B2530"/>
+                          </a:solidFill>
+                          <a:latin typeface="Calibri" pitchFamily="34" charset="0"/>
+                          <a:ea typeface="Calibri" pitchFamily="34" charset="-122"/>
+                          <a:cs typeface="Calibri" pitchFamily="34" charset="-120"/>
+                        </a:rPr>
+                        <a:t>fuori ordine, larghezza tre; rilasciato come open source</a:t>
+                      </a:r>
+                      <a:endParaRPr lang="en-US" sz="2000" dirty="0">
+                        <a:latin typeface="Calibri" charset="0"/>
+                        <a:ea typeface="Calibri" charset="0"/>
+                        <a:cs typeface="Calibri" charset="0"/>
+                      </a:endParaRPr>
+                    </a:p>
+                  </a:txBody>
+                  <a:tcPr marL="101600" marR="101600" marT="50800" marB="50800" anchor="ctr">
+                    <a:lnL w="6350" cap="flat" cmpd="sng" algn="ctr">
+                      <a:solidFill>
+                        <a:srgbClr val="C9D2D8"/>
+                      </a:solidFill>
+                      <a:prstDash val="solid"/>
+                      <a:round/>
+                      <a:headEnd type="none" w="med" len="med"/>
+                      <a:tailEnd type="none" w="med" len="med"/>
+                    </a:lnL>
+                    <a:lnR w="6350" cap="flat" cmpd="sng" algn="ctr">
+                      <a:solidFill>
+                        <a:srgbClr val="C9D2D8"/>
+                      </a:solidFill>
+                      <a:prstDash val="solid"/>
+                      <a:round/>
+                      <a:headEnd type="none" w="med" len="med"/>
+                      <a:tailEnd type="none" w="med" len="med"/>
+                    </a:lnR>
+                    <a:lnT w="6350" cap="flat" cmpd="sng" algn="ctr">
+                      <a:solidFill>
+                        <a:srgbClr val="C9D2D8"/>
+                      </a:solidFill>
+                      <a:prstDash val="solid"/>
+                      <a:round/>
+                      <a:headEnd type="none" w="med" len="med"/>
+                      <a:tailEnd type="none" w="med" len="med"/>
+                    </a:lnT>
+                    <a:lnB w="6350" cap="flat" cmpd="sng" algn="ctr">
+                      <a:solidFill>
+                        <a:srgbClr val="C9D2D8"/>
+                      </a:solidFill>
+                      <a:prstDash val="solid"/>
+                      <a:round/>
+                      <a:headEnd type="none" w="med" len="med"/>
+                      <a:tailEnd type="none" w="med" len="med"/>
+                    </a:lnB>
+                    <a:solidFill>
+                      <a:srgbClr val="FFFFFF"/>
+                    </a:solidFill>
+                  </a:tcPr>
+                </a:tc>
+              </a:tr>
+              <a:tr h="0">
+                <a:tc>
+                  <a:txBody>
+                    <a:bodyPr/>
+                    <a:lstStyle/>
+                    <a:p>
+                      <a:pPr algn="l" indent="0" marL="0">
+                        <a:buNone/>
+                      </a:pPr>
+                      <a:r>
+                        <a:rPr lang="en-US" sz="2000" b="1" dirty="0">
+                          <a:solidFill>
+                            <a:srgbClr val="1B2530"/>
+                          </a:solidFill>
+                          <a:latin typeface="Calibri" pitchFamily="34" charset="0"/>
+                          <a:ea typeface="Calibri" pitchFamily="34" charset="-122"/>
+                          <a:cs typeface="Calibri" pitchFamily="34" charset="-120"/>
+                        </a:rPr>
+                        <a:t>Performance P550</a:t>
+                      </a:r>
+                      <a:endParaRPr lang="en-US" sz="2000" dirty="0">
+                        <a:latin typeface="Calibri" charset="0"/>
+                        <a:ea typeface="Calibri" charset="0"/>
+                        <a:cs typeface="Calibri" charset="0"/>
+                      </a:endParaRPr>
+                    </a:p>
+                  </a:txBody>
+                  <a:tcPr marL="101600" marR="101600" marT="50800" marB="50800" anchor="ctr">
+                    <a:lnL w="6350" cap="flat" cmpd="sng" algn="ctr">
+                      <a:solidFill>
+                        <a:srgbClr val="C9D2D8"/>
+                      </a:solidFill>
+                      <a:prstDash val="solid"/>
+                      <a:round/>
+                      <a:headEnd type="none" w="med" len="med"/>
+                      <a:tailEnd type="none" w="med" len="med"/>
+                    </a:lnL>
+                    <a:lnR w="6350" cap="flat" cmpd="sng" algn="ctr">
+                      <a:solidFill>
+                        <a:srgbClr val="C9D2D8"/>
+                      </a:solidFill>
+                      <a:prstDash val="solid"/>
+                      <a:round/>
+                      <a:headEnd type="none" w="med" len="med"/>
+                      <a:tailEnd type="none" w="med" len="med"/>
+                    </a:lnR>
+                    <a:lnT w="6350" cap="flat" cmpd="sng" algn="ctr">
+                      <a:solidFill>
+                        <a:srgbClr val="C9D2D8"/>
+                      </a:solidFill>
+                      <a:prstDash val="solid"/>
+                      <a:round/>
+                      <a:headEnd type="none" w="med" len="med"/>
+                      <a:tailEnd type="none" w="med" len="med"/>
+                    </a:lnT>
+                    <a:lnB w="6350" cap="flat" cmpd="sng" algn="ctr">
+                      <a:solidFill>
+                        <a:srgbClr val="C9D2D8"/>
+                      </a:solidFill>
+                      <a:prstDash val="solid"/>
+                      <a:round/>
+                      <a:headEnd type="none" w="med" len="med"/>
+                      <a:tailEnd type="none" w="med" len="med"/>
+                    </a:lnB>
+                    <a:solidFill>
+                      <a:srgbClr val="EEF2F4"/>
+                    </a:solidFill>
+                  </a:tcPr>
+                </a:tc>
+                <a:tc>
+                  <a:txBody>
+                    <a:bodyPr/>
+                    <a:lstStyle/>
+                    <a:p>
+                      <a:pPr algn="l" indent="0" marL="0">
+                        <a:buNone/>
+                      </a:pPr>
+                      <a:r>
+                        <a:rPr lang="en-US" sz="2000" dirty="0">
+                          <a:solidFill>
+                            <a:srgbClr val="1B2530"/>
+                          </a:solidFill>
+                          <a:latin typeface="Calibri" pitchFamily="34" charset="0"/>
+                          <a:ea typeface="Calibri" pitchFamily="34" charset="-122"/>
+                          <a:cs typeface="Calibri" pitchFamily="34" charset="-120"/>
+                        </a:rPr>
+                        <a:t>SiFive</a:t>
+                      </a:r>
+                      <a:endParaRPr lang="en-US" sz="2000" dirty="0">
+                        <a:latin typeface="Calibri" charset="0"/>
+                        <a:ea typeface="Calibri" charset="0"/>
+                        <a:cs typeface="Calibri" charset="0"/>
+                      </a:endParaRPr>
+                    </a:p>
+                  </a:txBody>
+                  <a:tcPr marL="101600" marR="101600" marT="50800" marB="50800" anchor="ctr">
+                    <a:lnL w="6350" cap="flat" cmpd="sng" algn="ctr">
+                      <a:solidFill>
+                        <a:srgbClr val="C9D2D8"/>
+                      </a:solidFill>
+                      <a:prstDash val="solid"/>
+                      <a:round/>
+                      <a:headEnd type="none" w="med" len="med"/>
+                      <a:tailEnd type="none" w="med" len="med"/>
+                    </a:lnL>
+                    <a:lnR w="6350" cap="flat" cmpd="sng" algn="ctr">
+                      <a:solidFill>
+                        <a:srgbClr val="C9D2D8"/>
+                      </a:solidFill>
+                      <a:prstDash val="solid"/>
+                      <a:round/>
+                      <a:headEnd type="none" w="med" len="med"/>
+                      <a:tailEnd type="none" w="med" len="med"/>
+                    </a:lnR>
+                    <a:lnT w="6350" cap="flat" cmpd="sng" algn="ctr">
+                      <a:solidFill>
+                        <a:srgbClr val="C9D2D8"/>
+                      </a:solidFill>
+                      <a:prstDash val="solid"/>
+                      <a:round/>
+                      <a:headEnd type="none" w="med" len="med"/>
+                      <a:tailEnd type="none" w="med" len="med"/>
+                    </a:lnT>
+                    <a:lnB w="6350" cap="flat" cmpd="sng" algn="ctr">
+                      <a:solidFill>
+                        <a:srgbClr val="C9D2D8"/>
+                      </a:solidFill>
+                      <a:prstDash val="solid"/>
+                      <a:round/>
+                      <a:headEnd type="none" w="med" len="med"/>
+                      <a:tailEnd type="none" w="med" len="med"/>
+                    </a:lnB>
+                    <a:solidFill>
+                      <a:srgbClr val="EEF2F4"/>
+                    </a:solidFill>
+                  </a:tcPr>
+                </a:tc>
+                <a:tc>
+                  <a:txBody>
+                    <a:bodyPr/>
+                    <a:lstStyle/>
+                    <a:p>
+                      <a:pPr algn="l" indent="0" marL="0">
+                        <a:buNone/>
+                      </a:pPr>
+                      <a:r>
+                        <a:rPr lang="en-US" sz="2000" dirty="0">
+                          <a:solidFill>
+                            <a:srgbClr val="1B2530"/>
+                          </a:solidFill>
+                          <a:latin typeface="Calibri" pitchFamily="34" charset="0"/>
+                          <a:ea typeface="Calibri" pitchFamily="34" charset="-122"/>
+                          <a:cs typeface="Calibri" pitchFamily="34" charset="-120"/>
+                        </a:rPr>
+                        <a:t>fuori ordine, larghezza tre, tredici stadi; venduto come progetto</a:t>
+                      </a:r>
+                      <a:endParaRPr lang="en-US" sz="2000" dirty="0">
+                        <a:latin typeface="Calibri" charset="0"/>
+                        <a:ea typeface="Calibri" charset="0"/>
+                        <a:cs typeface="Calibri" charset="0"/>
+                      </a:endParaRPr>
+                    </a:p>
+                  </a:txBody>
+                  <a:tcPr marL="101600" marR="101600" marT="50800" marB="50800" anchor="ctr">
+                    <a:lnL w="6350" cap="flat" cmpd="sng" algn="ctr">
+                      <a:solidFill>
+                        <a:srgbClr val="C9D2D8"/>
+                      </a:solidFill>
+                      <a:prstDash val="solid"/>
+                      <a:round/>
+                      <a:headEnd type="none" w="med" len="med"/>
+                      <a:tailEnd type="none" w="med" len="med"/>
+                    </a:lnL>
+                    <a:lnR w="6350" cap="flat" cmpd="sng" algn="ctr">
+                      <a:solidFill>
+                        <a:srgbClr val="C9D2D8"/>
+                      </a:solidFill>
+                      <a:prstDash val="solid"/>
+                      <a:round/>
+                      <a:headEnd type="none" w="med" len="med"/>
+                      <a:tailEnd type="none" w="med" len="med"/>
+                    </a:lnR>
+                    <a:lnT w="6350" cap="flat" cmpd="sng" algn="ctr">
+                      <a:solidFill>
+                        <a:srgbClr val="C9D2D8"/>
+                      </a:solidFill>
+                      <a:prstDash val="solid"/>
+                      <a:round/>
+                      <a:headEnd type="none" w="med" len="med"/>
+                      <a:tailEnd type="none" w="med" len="med"/>
+                    </a:lnT>
+                    <a:lnB w="6350" cap="flat" cmpd="sng" algn="ctr">
+                      <a:solidFill>
+                        <a:srgbClr val="C9D2D8"/>
+                      </a:solidFill>
+                      <a:prstDash val="solid"/>
+                      <a:round/>
+                      <a:headEnd type="none" w="med" len="med"/>
+                      <a:tailEnd type="none" w="med" len="med"/>
+                    </a:lnB>
+                    <a:solidFill>
+                      <a:srgbClr val="EEF2F4"/>
+                    </a:solidFill>
+                  </a:tcPr>
+                </a:tc>
+              </a:tr>
+              <a:tr h="0">
+                <a:tc>
+                  <a:txBody>
+                    <a:bodyPr/>
+                    <a:lstStyle/>
+                    <a:p>
+                      <a:pPr algn="l" indent="0" marL="0">
+                        <a:buNone/>
+                      </a:pPr>
+                      <a:r>
+                        <a:rPr lang="en-US" sz="2000" b="1" dirty="0">
+                          <a:solidFill>
+                            <a:srgbClr val="1B2530"/>
+                          </a:solidFill>
+                          <a:latin typeface="Calibri" pitchFamily="34" charset="0"/>
+                          <a:ea typeface="Calibri" pitchFamily="34" charset="-122"/>
+                          <a:cs typeface="Calibri" pitchFamily="34" charset="-120"/>
+                        </a:rPr>
+                        <a:t>Veyron</a:t>
+                      </a:r>
+                      <a:endParaRPr lang="en-US" sz="2000" dirty="0">
+                        <a:latin typeface="Calibri" charset="0"/>
+                        <a:ea typeface="Calibri" charset="0"/>
+                        <a:cs typeface="Calibri" charset="0"/>
+                      </a:endParaRPr>
+                    </a:p>
+                  </a:txBody>
+                  <a:tcPr marL="101600" marR="101600" marT="50800" marB="50800" anchor="ctr">
+                    <a:lnL w="6350" cap="flat" cmpd="sng" algn="ctr">
+                      <a:solidFill>
+                        <a:srgbClr val="C9D2D8"/>
+                      </a:solidFill>
+                      <a:prstDash val="solid"/>
+                      <a:round/>
+                      <a:headEnd type="none" w="med" len="med"/>
+                      <a:tailEnd type="none" w="med" len="med"/>
+                    </a:lnL>
+                    <a:lnR w="6350" cap="flat" cmpd="sng" algn="ctr">
+                      <a:solidFill>
+                        <a:srgbClr val="C9D2D8"/>
+                      </a:solidFill>
+                      <a:prstDash val="solid"/>
+                      <a:round/>
+                      <a:headEnd type="none" w="med" len="med"/>
+                      <a:tailEnd type="none" w="med" len="med"/>
+                    </a:lnR>
+                    <a:lnT w="6350" cap="flat" cmpd="sng" algn="ctr">
+                      <a:solidFill>
+                        <a:srgbClr val="C9D2D8"/>
+                      </a:solidFill>
+                      <a:prstDash val="solid"/>
+                      <a:round/>
+                      <a:headEnd type="none" w="med" len="med"/>
+                      <a:tailEnd type="none" w="med" len="med"/>
+                    </a:lnT>
+                    <a:lnB w="6350" cap="flat" cmpd="sng" algn="ctr">
+                      <a:solidFill>
+                        <a:srgbClr val="C9D2D8"/>
+                      </a:solidFill>
+                      <a:prstDash val="solid"/>
+                      <a:round/>
+                      <a:headEnd type="none" w="med" len="med"/>
+                      <a:tailEnd type="none" w="med" len="med"/>
+                    </a:lnB>
+                    <a:solidFill>
+                      <a:srgbClr val="FFFFFF"/>
+                    </a:solidFill>
+                  </a:tcPr>
+                </a:tc>
+                <a:tc>
+                  <a:txBody>
+                    <a:bodyPr/>
+                    <a:lstStyle/>
+                    <a:p>
+                      <a:pPr algn="l" indent="0" marL="0">
+                        <a:buNone/>
+                      </a:pPr>
+                      <a:r>
+                        <a:rPr lang="en-US" sz="2000" dirty="0">
+                          <a:solidFill>
+                            <a:srgbClr val="1B2530"/>
+                          </a:solidFill>
+                          <a:latin typeface="Calibri" pitchFamily="34" charset="0"/>
+                          <a:ea typeface="Calibri" pitchFamily="34" charset="-122"/>
+                          <a:cs typeface="Calibri" pitchFamily="34" charset="-120"/>
+                        </a:rPr>
+                        <a:t>Ventana Micro Systems</a:t>
+                      </a:r>
+                      <a:endParaRPr lang="en-US" sz="2000" dirty="0">
+                        <a:latin typeface="Calibri" charset="0"/>
+                        <a:ea typeface="Calibri" charset="0"/>
+                        <a:cs typeface="Calibri" charset="0"/>
+                      </a:endParaRPr>
+                    </a:p>
+                  </a:txBody>
+                  <a:tcPr marL="101600" marR="101600" marT="50800" marB="50800" anchor="ctr">
+                    <a:lnL w="6350" cap="flat" cmpd="sng" algn="ctr">
+                      <a:solidFill>
+                        <a:srgbClr val="C9D2D8"/>
+                      </a:solidFill>
+                      <a:prstDash val="solid"/>
+                      <a:round/>
+                      <a:headEnd type="none" w="med" len="med"/>
+                      <a:tailEnd type="none" w="med" len="med"/>
+                    </a:lnL>
+                    <a:lnR w="6350" cap="flat" cmpd="sng" algn="ctr">
+                      <a:solidFill>
+                        <a:srgbClr val="C9D2D8"/>
+                      </a:solidFill>
+                      <a:prstDash val="solid"/>
+                      <a:round/>
+                      <a:headEnd type="none" w="med" len="med"/>
+                      <a:tailEnd type="none" w="med" len="med"/>
+                    </a:lnR>
+                    <a:lnT w="6350" cap="flat" cmpd="sng" algn="ctr">
+                      <a:solidFill>
+                        <a:srgbClr val="C9D2D8"/>
+                      </a:solidFill>
+                      <a:prstDash val="solid"/>
+                      <a:round/>
+                      <a:headEnd type="none" w="med" len="med"/>
+                      <a:tailEnd type="none" w="med" len="med"/>
+                    </a:lnT>
+                    <a:lnB w="6350" cap="flat" cmpd="sng" algn="ctr">
+                      <a:solidFill>
+                        <a:srgbClr val="C9D2D8"/>
+                      </a:solidFill>
+                      <a:prstDash val="solid"/>
+                      <a:round/>
+                      <a:headEnd type="none" w="med" len="med"/>
+                      <a:tailEnd type="none" w="med" len="med"/>
+                    </a:lnB>
+                    <a:solidFill>
+                      <a:srgbClr val="FFFFFF"/>
+                    </a:solidFill>
+                  </a:tcPr>
+                </a:tc>
+                <a:tc>
+                  <a:txBody>
+                    <a:bodyPr/>
+                    <a:lstStyle/>
+                    <a:p>
+                      <a:pPr algn="l" indent="0" marL="0">
+                        <a:buNone/>
+                      </a:pPr>
+                      <a:r>
+                        <a:rPr lang="en-US" sz="2000" dirty="0">
+                          <a:solidFill>
+                            <a:srgbClr val="1B2530"/>
+                          </a:solidFill>
+                          <a:latin typeface="Calibri" pitchFamily="34" charset="0"/>
+                          <a:ea typeface="Calibri" pitchFamily="34" charset="-122"/>
+                          <a:cs typeface="Calibri" pitchFamily="34" charset="-120"/>
+                        </a:rPr>
+                        <a:t>fuori ordine, per i data center</a:t>
+                      </a:r>
+                      <a:endParaRPr lang="en-US" sz="2000" dirty="0">
+                        <a:latin typeface="Calibri" charset="0"/>
+                        <a:ea typeface="Calibri" charset="0"/>
+                        <a:cs typeface="Calibri" charset="0"/>
+                      </a:endParaRPr>
+                    </a:p>
+                  </a:txBody>
+                  <a:tcPr marL="101600" marR="101600" marT="50800" marB="50800" anchor="ctr">
+                    <a:lnL w="6350" cap="flat" cmpd="sng" algn="ctr">
+                      <a:solidFill>
+                        <a:srgbClr val="C9D2D8"/>
+                      </a:solidFill>
+                      <a:prstDash val="solid"/>
+                      <a:round/>
+                      <a:headEnd type="none" w="med" len="med"/>
+                      <a:tailEnd type="none" w="med" len="med"/>
+                    </a:lnL>
+                    <a:lnR w="6350" cap="flat" cmpd="sng" algn="ctr">
+                      <a:solidFill>
+                        <a:srgbClr val="C9D2D8"/>
+                      </a:solidFill>
+                      <a:prstDash val="solid"/>
+                      <a:round/>
+                      <a:headEnd type="none" w="med" len="med"/>
+                      <a:tailEnd type="none" w="med" len="med"/>
+                    </a:lnR>
+                    <a:lnT w="6350" cap="flat" cmpd="sng" algn="ctr">
+                      <a:solidFill>
+                        <a:srgbClr val="C9D2D8"/>
+                      </a:solidFill>
+                      <a:prstDash val="solid"/>
+                      <a:round/>
+                      <a:headEnd type="none" w="med" len="med"/>
+                      <a:tailEnd type="none" w="med" len="med"/>
+                    </a:lnT>
+                    <a:lnB w="6350" cap="flat" cmpd="sng" algn="ctr">
+                      <a:solidFill>
+                        <a:srgbClr val="C9D2D8"/>
+                      </a:solidFill>
+                      <a:prstDash val="solid"/>
+                      <a:round/>
+                      <a:headEnd type="none" w="med" len="med"/>
+                      <a:tailEnd type="none" w="med" len="med"/>
+                    </a:lnB>
+                    <a:solidFill>
+                      <a:srgbClr val="FFFFFF"/>
+                    </a:solidFill>
+                  </a:tcPr>
+                </a:tc>
+              </a:tr>
+            </a:tbl>
+          </a:graphicData>
+        </a:graphic>
+      </p:graphicFrame>
       <p:sp>
         <p:nvSpPr>
           <p:cNvPr id="25" name="Slide Number Placeholder 0"/>
@@ -20616,7 +20453,7 @@
                 <a:ea typeface="Cambria" pitchFamily="34" charset="-122"/>
                 <a:cs typeface="Cambria" pitchFamily="34" charset="-120"/>
               </a:rPr>
-              <a:t>Che cos'è un supercalcolatore?</a:t>
+              <a:t>Un'architettura, molte microarchitetture</a:t>
             </a:r>
             <a:endParaRPr lang="en-US" sz="3200" dirty="0"/>
           </a:p>
@@ -20630,7 +20467,112 @@
         </p:nvSpPr>
         <p:spPr>
           <a:xfrm>
-            <a:off x="548640" y="1500505"/>
+            <a:off x="548640" y="1417320"/>
+            <a:ext cx="11094415" cy="1937004"/>
+          </a:xfrm>
+          <a:prstGeom prst="roundRect">
+            <a:avLst>
+              <a:gd name="adj" fmla="val 3777"/>
+            </a:avLst>
+          </a:prstGeom>
+          <a:solidFill>
+            <a:srgbClr val="F6E7D2"/>
+          </a:solidFill>
+          <a:ln w="12700">
+            <a:solidFill>
+              <a:srgbClr val="F6E7D2"/>
+            </a:solidFill>
+            <a:prstDash val="solid"/>
+          </a:ln>
+        </p:spPr>
+      </p:sp>
+      <p:sp>
+        <p:nvSpPr>
+          <p:cNvPr id="4" name="Text 2"/>
+          <p:cNvSpPr txBox="1"/>
+          <p:nvPr/>
+        </p:nvSpPr>
+        <p:spPr>
+          <a:xfrm>
+            <a:off x="914400" y="1600200"/>
+            <a:ext cx="10362895" cy="411480"/>
+          </a:xfrm>
+          <a:prstGeom prst="rect">
+            <a:avLst/>
+          </a:prstGeom>
+          <a:noFill/>
+          <a:ln/>
+        </p:spPr>
+        <p:txBody>
+          <a:bodyPr wrap="square" lIns="0" tIns="0" rIns="0" bIns="0" rtlCol="0" anchor="ctr"/>
+          <a:lstStyle/>
+          <a:p>
+            <a:pPr indent="0" marL="0">
+              <a:buNone/>
+            </a:pPr>
+            <a:r>
+              <a:rPr lang="en-US" sz="1600" b="1" dirty="0">
+                <a:solidFill>
+                  <a:srgbClr val="C7791B"/>
+                </a:solidFill>
+                <a:latin typeface="Calibri" pitchFamily="34" charset="0"/>
+                <a:ea typeface="Calibri" pitchFamily="34" charset="-122"/>
+                <a:cs typeface="Calibri" pitchFamily="34" charset="-120"/>
+              </a:rPr>
+              <a:t>Architettura e microarchitettura</a:t>
+            </a:r>
+            <a:endParaRPr lang="en-US" sz="1600" dirty="0"/>
+          </a:p>
+        </p:txBody>
+      </p:sp>
+      <p:sp>
+        <p:nvSpPr>
+          <p:cNvPr id="5" name="Text 3"/>
+          <p:cNvSpPr txBox="1"/>
+          <p:nvPr/>
+        </p:nvSpPr>
+        <p:spPr>
+          <a:xfrm>
+            <a:off x="914400" y="2057400"/>
+            <a:ext cx="10362895" cy="1114044"/>
+          </a:xfrm>
+          <a:prstGeom prst="rect">
+            <a:avLst/>
+          </a:prstGeom>
+          <a:noFill/>
+          <a:ln/>
+        </p:spPr>
+        <p:txBody>
+          <a:bodyPr wrap="square" lIns="0" tIns="0" rIns="0" bIns="0" rtlCol="0" anchor="ctr"/>
+          <a:lstStyle/>
+          <a:p>
+            <a:pPr indent="0" marL="0">
+              <a:buNone/>
+            </a:pPr>
+            <a:r>
+              <a:rPr lang="en-US" sz="2300" i="1" dirty="0">
+                <a:solidFill>
+                  <a:srgbClr val="1B2530"/>
+                </a:solidFill>
+                <a:latin typeface="Cambria" pitchFamily="34" charset="0"/>
+                <a:ea typeface="Cambria" pitchFamily="34" charset="-122"/>
+                <a:cs typeface="Cambria" pitchFamily="34" charset="-120"/>
+              </a:rPr>
+              <a:t>L'architettura è il contratto: istruzioni, registri, che cosa fa ogni istruzione. La microarchitettura è un modo di rispettarlo: stadi, larghezza, predittori, cache.</a:t>
+            </a:r>
+            <a:endParaRPr lang="en-US" sz="2300" dirty="0"/>
+          </a:p>
+        </p:txBody>
+      </p:sp>
+      <p:sp>
+        <p:nvSpPr>
+          <p:cNvPr id="6" name="Shape 4"/>
+          <p:cNvSpPr/>
+          <p:nvPr/>
+        </p:nvSpPr>
+        <p:spPr>
+          <a:xfrm>
+            <a:off x="548640" y="3796284"/>
             <a:ext cx="146304" cy="146304"/>
           </a:xfrm>
           <a:prstGeom prst="rect">
@@ -20649,14 +20591,14 @@
       </p:sp>
       <p:sp>
         <p:nvSpPr>
-          <p:cNvPr id="4" name="Text 2"/>
+          <p:cNvPr id="7" name="Text 5"/>
           <p:cNvSpPr txBox="1"/>
           <p:nvPr/>
         </p:nvSpPr>
         <p:spPr>
           <a:xfrm>
-            <a:off x="932688" y="1417320"/>
-            <a:ext cx="6565392" cy="883158"/>
+            <a:off x="932688" y="3674364"/>
+            <a:ext cx="10710367" cy="743712"/>
           </a:xfrm>
           <a:prstGeom prst="rect">
             <a:avLst/>
@@ -20675,7 +20617,7 @@
               <a:buNone/>
             </a:pPr>
             <a:r>
-              <a:rPr lang="en-US" sz="1900" dirty="0">
+              <a:rPr lang="en-US" sz="2400" dirty="0">
                 <a:solidFill>
                   <a:srgbClr val="1B2530"/>
                 </a:solidFill>
@@ -20683,21 +20625,21 @@
                 <a:ea typeface="Calibri" pitchFamily="34" charset="-122"/>
                 <a:cs typeface="Calibri" pitchFamily="34" charset="-120"/>
               </a:rPr>
-              <a:t>Non un unico processore enorme: migliaia di calcolatori normali, i nodi, che lavorano allo stesso problema</a:t>
+              <a:t>La add che avete scritto per un microcontrollore a 160 MHz è la add di un core da server</a:t>
             </a:r>
-            <a:endParaRPr lang="en-US" sz="1900" dirty="0"/>
-          </a:p>
-        </p:txBody>
-      </p:sp>
-      <p:sp>
-        <p:nvSpPr>
-          <p:cNvPr id="5" name="Shape 3"/>
+            <a:endParaRPr lang="en-US" sz="2400" dirty="0"/>
+          </a:p>
+        </p:txBody>
+      </p:sp>
+      <p:sp>
+        <p:nvSpPr>
+          <p:cNvPr id="8" name="Shape 6"/>
           <p:cNvSpPr/>
           <p:nvPr/>
         </p:nvSpPr>
         <p:spPr>
           <a:xfrm>
-            <a:off x="548640" y="2549462"/>
+            <a:off x="548640" y="4673346"/>
             <a:ext cx="146304" cy="146304"/>
           </a:xfrm>
           <a:prstGeom prst="rect">
@@ -20716,14 +20658,14 @@
       </p:sp>
       <p:sp>
         <p:nvSpPr>
-          <p:cNvPr id="6" name="Text 4"/>
+          <p:cNvPr id="9" name="Text 7"/>
           <p:cNvSpPr txBox="1"/>
           <p:nvPr/>
         </p:nvSpPr>
         <p:spPr>
           <a:xfrm>
-            <a:off x="932688" y="2466277"/>
-            <a:ext cx="6565392" cy="1147826"/>
+            <a:off x="932688" y="4551426"/>
+            <a:ext cx="10710367" cy="743712"/>
           </a:xfrm>
           <a:prstGeom prst="rect">
             <a:avLst/>
@@ -20742,7 +20684,7 @@
               <a:buNone/>
             </a:pPr>
             <a:r>
-              <a:rPr lang="en-US" sz="1900" dirty="0">
+              <a:rPr lang="en-US" sz="2400" dirty="0">
                 <a:solidFill>
                   <a:srgbClr val="1B2530"/>
                 </a:solidFill>
@@ -20750,81 +20692,21 @@
                 <a:ea typeface="Calibri" pitchFamily="34" charset="-122"/>
                 <a:cs typeface="Calibri" pitchFamily="34" charset="-120"/>
               </a:rPr>
-              <a:t>Ogni nodo ha</a:t>
+              <a:t>Verm1 girerebbe senza modifiche su uno qualunque dei core della slide precedente, dato uno schermo</a:t>
             </a:r>
-            <a:endParaRPr lang="en-US" sz="1900" dirty="0"/>
-          </a:p>
-          <a:p>
-            <a:pPr indent="0" marL="0">
-              <a:spcAft>
-                <a:spcPts val="200"/>
-              </a:spcAft>
-              <a:buNone/>
-            </a:pPr>
-            <a:r>
-              <a:rPr lang="en-US" sz="1600" dirty="0">
-                <a:solidFill>
-                  <a:srgbClr val="5B6B78"/>
-                </a:solidFill>
-                <a:latin typeface="Calibri" pitchFamily="34" charset="0"/>
-                <a:ea typeface="Calibri" pitchFamily="34" charset="-122"/>
-                <a:cs typeface="Calibri" pitchFamily="34" charset="-120"/>
-              </a:rPr>
-              <a:t>– uno o due processori con decine di core</a:t>
-            </a:r>
-            <a:endParaRPr lang="en-US" sz="1900" dirty="0"/>
-          </a:p>
-          <a:p>
-            <a:pPr indent="0" marL="0">
-              <a:spcAft>
-                <a:spcPts val="200"/>
-              </a:spcAft>
-              <a:buNone/>
-            </a:pPr>
-            <a:r>
-              <a:rPr lang="en-US" sz="1600" dirty="0">
-                <a:solidFill>
-                  <a:srgbClr val="5B6B78"/>
-                </a:solidFill>
-                <a:latin typeface="Calibri" pitchFamily="34" charset="0"/>
-                <a:ea typeface="Calibri" pitchFamily="34" charset="-122"/>
-                <a:cs typeface="Calibri" pitchFamily="34" charset="-120"/>
-              </a:rPr>
-              <a:t>– spesso più GPU</a:t>
-            </a:r>
-            <a:endParaRPr lang="en-US" sz="1900" dirty="0"/>
-          </a:p>
-          <a:p>
-            <a:pPr indent="0" marL="0">
-              <a:spcAft>
-                <a:spcPts val="200"/>
-              </a:spcAft>
-              <a:buNone/>
-            </a:pPr>
-            <a:r>
-              <a:rPr lang="en-US" sz="1600" dirty="0">
-                <a:solidFill>
-                  <a:srgbClr val="5B6B78"/>
-                </a:solidFill>
-                <a:latin typeface="Calibri" pitchFamily="34" charset="0"/>
-                <a:ea typeface="Calibri" pitchFamily="34" charset="-122"/>
-                <a:cs typeface="Calibri" pitchFamily="34" charset="-120"/>
-              </a:rPr>
-              <a:t>– moltissima memoria</a:t>
-            </a:r>
-            <a:endParaRPr lang="en-US" sz="1900" dirty="0"/>
-          </a:p>
-        </p:txBody>
-      </p:sp>
-      <p:sp>
-        <p:nvSpPr>
-          <p:cNvPr id="7" name="Shape 5"/>
+            <a:endParaRPr lang="en-US" sz="2400" dirty="0"/>
+          </a:p>
+        </p:txBody>
+      </p:sp>
+      <p:sp>
+        <p:nvSpPr>
+          <p:cNvPr id="10" name="Shape 8"/>
           <p:cNvSpPr/>
           <p:nvPr/>
         </p:nvSpPr>
         <p:spPr>
           <a:xfrm>
-            <a:off x="548640" y="3863086"/>
+            <a:off x="548640" y="5550408"/>
             <a:ext cx="146304" cy="146304"/>
           </a:xfrm>
           <a:prstGeom prst="rect">
@@ -20843,14 +20725,14 @@
       </p:sp>
       <p:sp>
         <p:nvSpPr>
-          <p:cNvPr id="8" name="Text 6"/>
+          <p:cNvPr id="11" name="Text 9"/>
           <p:cNvSpPr txBox="1"/>
           <p:nvPr/>
         </p:nvSpPr>
         <p:spPr>
           <a:xfrm>
-            <a:off x="932688" y="3779901"/>
-            <a:ext cx="6565392" cy="588772"/>
+            <a:off x="932688" y="5428488"/>
+            <a:ext cx="10710367" cy="743712"/>
           </a:xfrm>
           <a:prstGeom prst="rect">
             <a:avLst/>
@@ -20869,7 +20751,7 @@
               <a:buNone/>
             </a:pPr>
             <a:r>
-              <a:rPr lang="en-US" sz="1900" dirty="0">
+              <a:rPr lang="en-US" sz="2400" dirty="0">
                 <a:solidFill>
                   <a:srgbClr val="1B2530"/>
                 </a:solidFill>
@@ -20877,206 +20759,9 @@
                 <a:ea typeface="Calibri" pitchFamily="34" charset="-122"/>
                 <a:cs typeface="Calibri" pitchFamily="34" charset="-120"/>
               </a:rPr>
-              <a:t>Una rete molto veloce unisce i nodi, e un file system parallelo li serve tutti</a:t>
+              <a:t>Per questo un insieme di istruzioni imparato una volta è una conoscenza che dura</a:t>
             </a:r>
-            <a:endParaRPr lang="en-US" sz="1900" dirty="0"/>
-          </a:p>
-        </p:txBody>
-      </p:sp>
-      <p:sp>
-        <p:nvSpPr>
-          <p:cNvPr id="9" name="Shape 7"/>
-          <p:cNvSpPr/>
-          <p:nvPr/>
-        </p:nvSpPr>
-        <p:spPr>
-          <a:xfrm>
-            <a:off x="548640" y="4617657"/>
-            <a:ext cx="146304" cy="146304"/>
-          </a:xfrm>
-          <a:prstGeom prst="rect">
-            <a:avLst/>
-          </a:prstGeom>
-          <a:solidFill>
-            <a:srgbClr val="C7791B"/>
-          </a:solidFill>
-          <a:ln w="12700">
-            <a:solidFill>
-              <a:srgbClr val="C7791B"/>
-            </a:solidFill>
-            <a:prstDash val="solid"/>
-          </a:ln>
-        </p:spPr>
-      </p:sp>
-      <p:sp>
-        <p:nvSpPr>
-          <p:cNvPr id="10" name="Text 8"/>
-          <p:cNvSpPr txBox="1"/>
-          <p:nvPr/>
-        </p:nvSpPr>
-        <p:spPr>
-          <a:xfrm>
-            <a:off x="932688" y="4534472"/>
-            <a:ext cx="6565392" cy="883158"/>
-          </a:xfrm>
-          <a:prstGeom prst="rect">
-            <a:avLst/>
-          </a:prstGeom>
-          <a:noFill/>
-          <a:ln/>
-        </p:spPr>
-        <p:txBody>
-          <a:bodyPr wrap="square" lIns="0" tIns="0" rIns="0" bIns="0" rtlCol="0" anchor="t"/>
-          <a:lstStyle/>
-          <a:p>
-            <a:pPr indent="0" marL="0">
-              <a:spcAft>
-                <a:spcPts val="200"/>
-              </a:spcAft>
-              <a:buNone/>
-            </a:pPr>
-            <a:r>
-              <a:rPr lang="en-US" sz="1900" dirty="0">
-                <a:solidFill>
-                  <a:srgbClr val="1B2530"/>
-                </a:solidFill>
-                <a:latin typeface="Calibri" pitchFamily="34" charset="0"/>
-                <a:ea typeface="Calibri" pitchFamily="34" charset="-122"/>
-                <a:cs typeface="Calibri" pitchFamily="34" charset="-120"/>
-              </a:rPr>
-              <a:t>La velocità si misura in operazioni in virgola mobile al secondo, FLOPS, su un problema standard: un enorme sistema di equazioni lineari</a:t>
-            </a:r>
-            <a:endParaRPr lang="en-US" sz="1900" dirty="0"/>
-          </a:p>
-        </p:txBody>
-      </p:sp>
-      <p:sp>
-        <p:nvSpPr>
-          <p:cNvPr id="11" name="Shape 9"/>
-          <p:cNvSpPr/>
-          <p:nvPr/>
-        </p:nvSpPr>
-        <p:spPr>
-          <a:xfrm>
-            <a:off x="548640" y="5666613"/>
-            <a:ext cx="146304" cy="146304"/>
-          </a:xfrm>
-          <a:prstGeom prst="rect">
-            <a:avLst/>
-          </a:prstGeom>
-          <a:solidFill>
-            <a:srgbClr val="0E7C86"/>
-          </a:solidFill>
-          <a:ln w="12700">
-            <a:solidFill>
-              <a:srgbClr val="0E7C86"/>
-            </a:solidFill>
-            <a:prstDash val="solid"/>
-          </a:ln>
-        </p:spPr>
-      </p:sp>
-      <p:sp>
-        <p:nvSpPr>
-          <p:cNvPr id="12" name="Text 10"/>
-          <p:cNvSpPr txBox="1"/>
-          <p:nvPr/>
-        </p:nvSpPr>
-        <p:spPr>
-          <a:xfrm>
-            <a:off x="932688" y="5583428"/>
-            <a:ext cx="6565392" cy="588772"/>
-          </a:xfrm>
-          <a:prstGeom prst="rect">
-            <a:avLst/>
-          </a:prstGeom>
-          <a:noFill/>
-          <a:ln/>
-        </p:spPr>
-        <p:txBody>
-          <a:bodyPr wrap="square" lIns="0" tIns="0" rIns="0" bIns="0" rtlCol="0" anchor="t"/>
-          <a:lstStyle/>
-          <a:p>
-            <a:pPr indent="0" marL="0">
-              <a:spcAft>
-                <a:spcPts val="200"/>
-              </a:spcAft>
-              <a:buNone/>
-            </a:pPr>
-            <a:r>
-              <a:rPr lang="en-US" sz="1900" dirty="0">
-                <a:solidFill>
-                  <a:srgbClr val="1B2530"/>
-                </a:solidFill>
-                <a:latin typeface="Calibri" pitchFamily="34" charset="0"/>
-                <a:ea typeface="Calibri" pitchFamily="34" charset="-122"/>
-                <a:cs typeface="Calibri" pitchFamily="34" charset="-120"/>
-              </a:rPr>
-              <a:t>La lista TOP500 classifica le macchine più veloci due volte l'anno dal 1993</a:t>
-            </a:r>
-            <a:endParaRPr lang="en-US" sz="1900" dirty="0"/>
-          </a:p>
-        </p:txBody>
-      </p:sp>
-      <p:pic>
-        <p:nvPicPr>
-          <p:cNvPr id="13" name="Image 0" descr="/Users/raffaelemontella/devel/riscv-prg32/computer-architecture-with-prg32/tools/assets/cluster_1.jpg">    </p:cNvPr>
-          <p:cNvPicPr>
-            <a:picLocks noChangeAspect="1"/>
-          </p:cNvPicPr>
-          <p:nvPr/>
-        </p:nvPicPr>
-        <p:blipFill>
-          <a:blip r:embed="rId1"/>
-          <a:stretch>
-            <a:fillRect/>
-          </a:stretch>
-        </p:blipFill>
-        <p:spPr>
-          <a:xfrm>
-            <a:off x="7863840" y="2148954"/>
-            <a:ext cx="3779215" cy="2834411"/>
-          </a:xfrm>
-          <a:prstGeom prst="rect">
-            <a:avLst/>
-          </a:prstGeom>
-        </p:spPr>
-      </p:pic>
-      <p:sp>
-        <p:nvSpPr>
-          <p:cNvPr id="14" name="Text 11"/>
-          <p:cNvSpPr txBox="1"/>
-          <p:nvPr/>
-        </p:nvSpPr>
-        <p:spPr>
-          <a:xfrm>
-            <a:off x="7863840" y="5788152"/>
-            <a:ext cx="3779215" cy="384048"/>
-          </a:xfrm>
-          <a:prstGeom prst="rect">
-            <a:avLst/>
-          </a:prstGeom>
-          <a:noFill/>
-          <a:ln/>
-        </p:spPr>
-        <p:txBody>
-          <a:bodyPr wrap="square" lIns="0" tIns="0" rIns="0" bIns="0" rtlCol="0" anchor="ctr"/>
-          <a:lstStyle/>
-          <a:p>
-            <a:pPr algn="ctr" indent="0" marL="0">
-              <a:buNone/>
-            </a:pPr>
-            <a:r>
-              <a:rPr lang="en-US" sz="1200" i="1" dirty="0">
-                <a:solidFill>
-                  <a:srgbClr val="5B6B78"/>
-                </a:solidFill>
-                <a:latin typeface="Calibri" pitchFamily="34" charset="0"/>
-                <a:ea typeface="Calibri" pitchFamily="34" charset="-122"/>
-                <a:cs typeface="Calibri" pitchFamily="34" charset="-120"/>
-              </a:rPr>
-              <a:t>Un piccolo cluster: nodi, GPU, una rete veloce</a:t>
-            </a:r>
-            <a:endParaRPr lang="en-US" sz="1200" dirty="0"/>
+            <a:endParaRPr lang="en-US" sz="2400" dirty="0"/>
           </a:p>
         </p:txBody>
       </p:sp>

--- a/it/slides/24-Architettura_dei_Calcolatori-Superscalari_HPC_GPU_FPGA.pptx
+++ b/it/slides/24-Architettura_dei_Calcolatori-Superscalari_HPC_GPU_FPGA.pptx
@@ -126,19 +126,19 @@
   <p:extLst>
     <p:ext uri="{521415D9-36F7-43E2-AB2F-B90AF26B5E84}">
       <p14:sectionLst xmlns:p14="http://schemas.microsoft.com/office/powerpoint/2010/main">
-        <p14:section name="Apertura" id="{ebf96490-1493-d217-10dd-c1cd2bd026f0}">
+        <p14:section name="Apertura" id="{9c1e7f6b-c597-1d34-a9fa-681bf771907f}">
           <p14:sldIdLst>
             <p14:sldId id="256"/>
             <p14:sldId id="257"/>
           </p14:sldIdLst>
         </p14:section>
-        <p14:section name="Riscaldamento sulla macchina" id="{652c86b6-9ba9-3c3e-c742-2d3244004034}">
+        <p14:section name="Riscaldamento sulla macchina" id="{b40c2d98-c091-5ba3-5ecc-9da130954f86}">
           <p14:sldIdLst>
             <p14:sldId id="258"/>
             <p14:sldId id="259"/>
           </p14:sldIdLst>
         </p14:section>
-        <p14:section name="Processori superscalari" id="{0b7a2afc-dc11-dcf8-1918-f510524b3b10}">
+        <p14:section name="Processori superscalari" id="{af03edf1-f678-33ed-7947-727bfa0d8e76}">
           <p14:sldIdLst>
             <p14:sldId id="260"/>
             <p14:sldId id="261"/>
@@ -147,7 +147,7 @@
             <p14:sldId id="264"/>
           </p14:sldIdLst>
         </p14:section>
-        <p14:section name="Calcolo ad alte prestazioni" id="{b117b54d-c2a2-c0f3-e373-d4a377822898}">
+        <p14:section name="Calcolo ad alte prestazioni" id="{a6188c6c-8a33-70ff-ec90-e8854e6715c8}">
           <p14:sldIdLst>
             <p14:sldId id="265"/>
             <p14:sldId id="266"/>
@@ -155,18 +155,18 @@
             <p14:sldId id="268"/>
           </p14:sldIdLst>
         </p14:section>
-        <p14:section name="Acceleratori GPU" id="{9361159d-e245-4a1a-7d4a-7ac0e99744c5}">
+        <p14:section name="Acceleratori GPU" id="{ff25b7bb-0a59-3250-08c2-4248da65ec88}">
           <p14:sldIdLst>
             <p14:sldId id="269"/>
           </p14:sldIdLst>
         </p14:section>
-        <p14:section name="Acceleratori FPGA" id="{1bf7dd9f-c2d2-10fe-7350-e8012aebd055}">
+        <p14:section name="Acceleratori FPGA" id="{4fcf8c68-80f5-b6c9-af3e-25f36a049ebf}">
           <p14:sldIdLst>
             <p14:sldId id="270"/>
             <p14:sldId id="271"/>
           </p14:sldIdLst>
         </p14:section>
-        <p14:section name="Ritorno alla macchina" id="{933448f8-7594-e9b4-f518-e8891a3c170c}">
+        <p14:section name="Ritorno alla macchina" id="{bb871925-2af5-eab7-e2fa-5dfdaf1b51bc}">
           <p14:sldIdLst>
             <p14:sldId id="272"/>
             <p14:sldId id="273"/>
@@ -579,6 +579,8 @@
             <a:r>
               <a:rPr lang="en-US" dirty="0"/>
               <a:t>L'ultima lezione guarda oltre il kit. Tutto ciò che avete imparato lo avete imparato su un piccolo processore che esegue un'istruzione alla volta. Le macchine che prevedono il tempo o addestrano una rete neurale eseguono lo stesso tipo di istruzioni, in numero enorme e tutte insieme. La lezione prende un piccolo ciclo di Verm1 e lo segue su quattro tipi di macchina. La domanda di Cray su buoi e polli tornerà: non ha una risposta unica. Questa lezione è uno sguardo in avanti, e non fa parte della prova intercorso.
+Stato di apprendimento: DA COMPRENDERE OGGI, alla fine di questa lezione lo spiegate, lo seguite passo passo e lo applicate da soli; DA UTILIZZARE OGGI, oggi seguite e usate la ricetta; come funziona dentro si spiega più avanti, o non fa parte del corso; DA COMPRENDERE PIÙ AVANTI, riconoscete il nome e lo scopo; lo spiega una lezione successiva. Una slide senza etichetta è contesto: una storia, un esempio, una domanda, un esercizio.
+Stato di apprendimento di questa lezione. DA COMPRENDERE OGGI: l'equazione delle prestazioni; i processori superscalari; le istruzioni vettoriali; HPC e legge di Amdahl; acceleratori GPU e FPGA. DA UTILIZZARE OGGI: il programma completo, gli strumenti di PRG32 (si usa, non si studia, in questo corso). DA COMPRENDERE PIÙ AVANTI: niente. Una slide senza etichetta è contesto: una storia, un esempio, una domanda, un esercizio.
 Per il docente: Lezione conclusiva e di prospettiva, nuova nel 2026/27: non ha una presentazione italiana di origine. Parte da un ciclo di Verm1 e lo segue su quattro tipi di macchina. Prepara la visita ai sistemi di supercalcolo del Dipartimento. Non fa parte della prova intercorso. I listati vettoriali RISC-V sono provati su QEMU (tools/tests/vector_qemu.S); i frammenti CUDA e Verilog sono forme standard da manuale, non compilate per queste slide. Le cifre sui supercalcolatori sono arrotondate e risalgono alle liste TOP500 dal 2022 al 2025: controllate la lista corrente prima della lezione.</a:t>
             </a:r>
             <a:endParaRPr lang="en-US" dirty="0"/>
@@ -668,6 +670,7 @@
             <a:r>
               <a:rPr lang="en-US" dirty="0"/>
               <a:t>Un supercalcolatore non è un unico processore enorme: sono migliaia di calcolatori normali, i nodi, che lavorano allo stesso problema. Ogni nodo ha uno o due processori con decine di core, spesso più GPU, e molta memoria. Una rete molto veloce unisce i nodi, e un file system parallelo li serve tutti. La velocità si misura in operazioni in virgola mobile al secondo su un problema standard, e la lista TOP500 classifica le macchine più veloci dal 1993. La foto mostra armadi di nodi delle Research Computing Facilities dell'Ateneo.
+DA COMPRENDERE OGGI: HPC e legge di Amdahl.
 Per il docente: Il benchmark è HPL, High-Performance Linpack.</a:t>
             </a:r>
             <a:endParaRPr lang="en-US" dirty="0"/>
@@ -757,6 +760,7 @@
             <a:r>
               <a:rPr lang="en-US" dirty="0"/>
               <a:t>La legge di Amdahl dice quanto può dare il parallelismo. Se una frazione p del lavoro si può svolgere in parallelo e il resto no, con n processori lo speed-up è 1 diviso la parte seriale più la parte parallela divisa per n. La parte seriale non si riduce per quanti processori si aggiungano. Con p uguale a 0,9 lo speed-up non può mai superare 10. La lezione pratica: prima di comprare processori, misurate p.
+DA COMPRENDERE OGGI: HPC e legge di Amdahl.
 Per il docente: Gene Amdahl, 1967. La stessa legge vale per ogni miglioramento che si applica solo a una parte del lavoro: una GPU più veloce non aiuta la parte che gira sulla CPU.</a:t>
             </a:r>
             <a:endParaRPr lang="en-US" dirty="0"/>
@@ -846,6 +850,7 @@
             <a:r>
               <a:rPr lang="en-US" dirty="0"/>
               <a:t>Due modi di dividere il lavoro. Con la memoria condivisa, più core dello stesso nodo vedono la stessa memoria, e il programma gira come thread che leggono e scrivono le stesse variabili; è facile cominciare, e il pericolo sono due thread che scrivono la stessa variabile. Con la memoria distribuita ogni nodo ha la propria memoria, e il programma gira come processi che si scambiano messaggi, con lo standard MPI; scala fino a un milione di core, a spese del programmatore. Le applicazioni reali usano entrambi.
+DA COMPRENDERE OGGI: HPC e legge di Amdahl.
 Per il docente: Le applicazioni reali usano entrambi: MPI tra i nodi, thread e GPU dentro ogni nodo. I modelli meteorologici e marini del Dipartimento funzionano così.</a:t>
             </a:r>
             <a:endParaRPr lang="en-US" dirty="0"/>
@@ -935,6 +940,7 @@
             <a:r>
               <a:rPr lang="en-US" dirty="0"/>
               <a:t>Il limite è l'energia. Una macchina exascale assorbe circa venti megawatt, il consumo di una piccola città, e l'elettricità della sua vita utile costa quanto la macchina. Quindi la cifra che conta sono le operazioni per watt, che hanno una classifica propria, la Green500. La guida l'hardware specializzato, perché fa di più con ogni joule. La stessa ragione, all'altro estremo della scala, mette un piccolo core RISC-V nel vostro kit.
+DA COMPRENDERE OGGI: HPC e legge di Amdahl.
 Per il docente: Frontier ha raggiunto il suo exaflop a circa 21 megawatt. L'efficienza energetica è il filo che lega un microcontrollore a un supercalcolatore.</a:t>
             </a:r>
             <a:endParaRPr lang="en-US" dirty="0"/>
@@ -1024,6 +1030,7 @@
             <a:r>
               <a:rPr lang="en-US" dirty="0"/>
               <a:t>Due modi di spendere gli stessi transistor. Una CPU ha pochi core grandi, ciascuno fuori ordine, con predittori e grandi cache: è costruita per finire un compito il prima possibile, ed è a suo agio con salti e dati irregolari. Una GPU ha migliaia di core piccoli e semplici che eseguono lo stesso codice su dati diversi: è costruita per finire moltissimi compiti al secondo, ed è a suo agio con array regolari. Buoi e polli: la risposta dipende dal campo.
+DA COMPRENDERE OGGI: acceleratori GPU e FPGA.
 Per il docente: La Lezione 20 ha raccontato la storia dalla scheda video al GPGPU. I buoi e i polli di Cray: la risposta dipende dal campo. La GPU non è più veloce in nessuna singola cosa; fa più cose insieme.</a:t>
             </a:r>
             <a:endParaRPr lang="en-US" dirty="0"/>
@@ -1113,6 +1120,7 @@
             <a:r>
               <a:rPr lang="en-US" dirty="0"/>
               <a:t>Una FPGA, field-programmable gate array, è un chip che diventa il circuito che descrivete. Dentro c'è un mare di piccoli blocchi: tabelle di look-up, ciascuna capace di essere qualunque funzione di pochi ingressi; un flip-flop accanto a ogni tabella; e fili con interruttori che possono collegare ogni blocco a ogni altro. Un file di configurazione, il bitstream, imposta ogni tabella e ogni interruttore. Caricate un altro bitstream e lo stesso chip è un circuito diverso. Non esegue un programma: è un circuito.
+DA COMPRENDERE OGGI: acceleratori GPU e FPGA.
 Per il docente: Lo Xilinx XC2064, 1985. Una FPGA non esegue un programma: diventa un circuito. Nulla viene prelevato o decodificato; tutte le porte lavorano nello stesso momento.
 Immagini: Mojo v3 FPGA Development Board (9303578174).jpg, SparkFun Electronics, CC BY 2.0, Wikimedia Commons.</a:t>
             </a:r>
@@ -1203,6 +1211,7 @@
             <a:r>
               <a:rPr lang="en-US" dirty="0"/>
               <a:t>Quattro modi di calcolare, a confronto. Leggete la tabella per righe. Una CPU sono pochi core complessi, programmati in qualunque linguaggio, bravi in tutto con moderazione. Una GPU sono migliaia di core semplici per dati regolari in massa. Una FPGA è un circuito che si configura, per flussi e bassa latenza. Un ASIC è un circuito fatto per un solo compito. Da sinistra a destra cresce il lavoro svolto per joule, e cresce la fatica richiesta. La generalità si paga in energia, l'efficienza in fatica.
+DA COMPRENDERE OGGI: acceleratori GPU e FPGA.
 Per il docente: La generalità si paga in energia; l'efficienza si paga in fatica. Un moderno system on a chip li ha tutti e quattro: il vostro telefono contiene core CPU, una GPU, e circuiti fissi per video e radio.</a:t>
             </a:r>
             <a:endParaRPr lang="en-US" dirty="0"/>
@@ -1650,6 +1659,7 @@
             <a:r>
               <a:rPr lang="en-US" dirty="0"/>
               <a:t>Quattro conclusioni. Un'equazione con tre fattori: ogni macchina veloce ne attacca uno, oppure moltiplica i processori. I core superscalari fuori ordine rispettano il contratto dell'insieme di istruzioni ed eseguono molte istruzioni insieme. Vettori, GPU e cluster sfruttano i dati che si possono elaborare in modo indipendente, e la legge di Amdahl dice fin dove si arriva. Le FPGA trasformano una descrizione in un circuito. Il corso finisce qui: da un bit a un supercalcolatore, con un solo insieme di istruzioni.
+Stato di apprendimento, riepilogo. DA COMPRENDERE OGGI: l'equazione delle prestazioni; i processori superscalari; le istruzioni vettoriali; HPC e legge di Amdahl; acceleratori GPU e FPGA. DA UTILIZZARE OGGI: il programma completo, gli strumenti di PRG32 (si usa, non si studia, in questo corso). DA COMPRENDERE PIÙ AVANTI: niente. Una slide senza etichetta è contesto: una storia, un esempio, una domanda, un esercizio.
 Per il docente: Il corso finisce qui: da un bit a un supercalcolatore, con un solo insieme di istruzioni. Poi: la visita ai sistemi di calcolo del Dipartimento, e la presentazione dei giochi degli studenti.</a:t>
             </a:r>
             <a:endParaRPr lang="en-US" dirty="0"/>
@@ -1739,6 +1749,7 @@
             <a:r>
               <a:rPr lang="en-US" dirty="0"/>
               <a:t>Il tempo impiegato da un programma è il prodotto di tre numeri: le istruzioni eseguite, i cicli di clock che ciascuna richiede in media, e la durata di un ciclo. Ogni fattore si può attaccare. Meno istruzioni: algoritmi migliori, istruzioni più ricche, vettori. Meno cicli per istruzione: pipeline ed esecuzione superscalare. Un ciclo più corto: transistor più veloci. E quando un processore non basta, più processori. Tenete d'occhio questa equazione: ogni macchina della lezione ne è una risposta diversa.
+DA COMPRENDERE OGGI: l'equazione delle prestazioni.
 Per il docente: L'equazione delle prestazioni di Patterson e Hennessy. Per il ciclo del riscaldamento (presentazione del codice) sul kit: 3 840 istruzioni, circa 1 ciclo ciascuna, 6,25 nanosecondi per ciclo.</a:t>
             </a:r>
             <a:endParaRPr lang="en-US" dirty="0"/>
@@ -1828,6 +1839,7 @@
             <a:r>
               <a:rPr lang="en-US" dirty="0"/>
               <a:t>Perché non alzare semplicemente la frequenza di clock? Per trent'anni ogni generazione di transistor è stata più piccola e più veloce senza essere più calda per unità di area. Intorno al 2005 questo è finito: oggi un clock più veloce significa più calore di quanto un chip possa smaltire. Le frequenze sono rimaste a pochi gigahertz, e i transistor in più sono stati spesi diversamente: processori più larghi, più core, unità vettoriali, acceleratori. Oggi le prestazioni vengono dal parallelismo, dal fare molte cose insieme.
+DA COMPRENDERE OGGI: l'equazione delle prestazioni.
 Per il docente: La legge di Moore (più transistor) è proseguita; la scalatura di Dennard (densità di potenza costante) è finita. I 160 MHz del kit sono lenti per scelta: costano milliwatt.</a:t>
             </a:r>
             <a:endParaRPr lang="en-US" dirty="0"/>
@@ -1917,6 +1929,7 @@
             <a:r>
               <a:rPr lang="en-US" dirty="0"/>
               <a:t>Quattro tipi di processore, in ordine di ambizione. Il processore multiciclo termina un'istruzione prima di cominciare la successiva. Quello con pipeline ha più istruzioni in volo, ciascuna in uno stadio diverso, e ne termina al massimo una per ciclo: è il vostro kit. Il superscalare in ordine ha due o più pipeline affiancate. Il superscalare fuori ordine avvia ogni istruzione appena i suoi operandi sono pronti, e arriva a quattro, sei, otto istruzioni per ciclo: è nel vostro portatile e nel vostro telefono.
+DA COMPRENDERE OGGI: i processori superscalari.
 Per il docente: La Lezione 19 ha introdotto la pipeline e nominato i processori superscalari in una riga: questa sezione apre quella riga. La larghezza è il numero di istruzioni che il processore può avviare in un ciclo.</a:t>
             </a:r>
             <a:endParaRPr lang="en-US" dirty="0"/>
@@ -2006,6 +2019,7 @@
             <a:r>
               <a:rPr lang="en-US" dirty="0"/>
               <a:t>L'esecuzione fuori ordine, in quattro tappe. Le istruzioni vengono prelevate e decodificate in ordine, più d'una per ciclo, in una finestra di decine o centinaia. A ogni risultato viene dato un registro fisico nuovo: la ridenominazione. Ogni istruzione viene eseguita appena esistono i suoi operandi, dovunque si trovi nel programma. Infine i risultati vengono confermati nell'ordine del programma, così che, visto da fuori, nessuno ha mai sorpassato. Il modello che avete imparato, un'istruzione dopo l'altra, è conservato esattamente: cambiano solo i tempi.
+DA COMPRENDERE OGGI: i processori superscalari.
 Per il docente: L'algoritmo è quello di Tomasulo, progettato nel 1967 per l'unità in virgola mobile dell'IBM System/360 Model 91; il reorder buffer che fa il commit in ordine è arrivato negli anni Ottanta. Il modello del programmatore, quello che avete imparato, è conservato esattamente: è il contratto dell'insieme di istruzioni.</a:t>
             </a:r>
             <a:endParaRPr lang="en-US" dirty="0"/>
@@ -2095,6 +2109,7 @@
             <a:r>
               <a:rPr lang="en-US" dirty="0"/>
               <a:t>Un processore largo incontra un salto ogni poche istruzioni e non può aspettare di conoscerne l'esito. Quindi predice: indovina la direzione dalla storia di quel salto e prosegue lungo l'ipotesi. Se l'ipotesi era giusta, non si perde nulla; se era sbagliata, il lavoro speculativo viene buttato via. Il ciclo del riscaldamento salta all'indietro 959 volte e prosegue una volta: un predittore lo impara subito. I predittori moderni hanno ragione ben più di nove volte su dieci.
+DA COMPRENDERE OGGI: i processori superscalari.
 Per il docente: L'esecuzione speculativa ha un lato oscuro: nel 2018 gli attacchi Spectre e Meltdown hanno mostrato che il lavoro buttato via può lasciare comunque nella cache tracce che rivelano segreti. I trucchi per le prestazioni sono anche questioni di sicurezza.</a:t>
             </a:r>
             <a:endParaRPr lang="en-US" dirty="0"/>
@@ -2184,6 +2199,7 @@
             <a:r>
               <a:rPr lang="en-US" dirty="0"/>
               <a:t>Processori RISC-V di questo tipo esistono. La prima riga è il core del vostro kit: in ordine, un'istruzione per ciclo. Gli altri sono core fuori ordine: BOOM di Berkeley e XiangShan dell'Accademia Cinese delle Scienze, entrambi open source; il C910, il P550, Veyron, di aziende. Poiché l'insieme di istruzioni è aperto, chiunque può costruire un core simile, e alcuni sono pubblicati come codice sorgente che potreste leggere.
+DA COMPRENDERE OGGI: i processori superscalari.
 Per il docente: BOOM è la Berkeley Out-of-Order Machine. Poiché l'insieme di istruzioni è aperto, chiunque può costruire un core simile, e parecchi sono pubblicati come codice sorgente che uno studente può leggere: non ha precedenti tra le architetture commerciali. L'elenco invecchia in fretta: aggiornatelo.</a:t>
             </a:r>
             <a:endParaRPr lang="en-US" dirty="0"/>
@@ -2273,6 +2289,7 @@
             <a:r>
               <a:rPr lang="en-US" dirty="0"/>
               <a:t>Una distinzione che organizza l'intero corso. L'architettura è il contratto: le istruzioni, i registri, che cosa fa ogni istruzione. La microarchitettura è un modo di rispettare il contratto: stadi, larghezza, predittori, cache. La add che avete scritto per un microcontrollore è la stessa add di un core da server. Verm1 girerebbe senza modifiche su qualunque core della slide precedente. Per questo un insieme di istruzioni, una volta imparato, è una conoscenza che dura.
+DA COMPRENDERE OGGI: i processori superscalari.
 Per il docente: La distinzione che organizza l'intero corso: le Lezioni dalla 02 alla 22 hanno insegnato l'architettura; il kit è una piccola microarchitettura.</a:t>
             </a:r>
             <a:endParaRPr lang="en-US" dirty="0"/>
@@ -3410,6 +3427,420 @@
       </p:pic>
       <p:sp>
         <p:nvSpPr>
+          <p:cNvPr id="15" name="Shape 12"/>
+          <p:cNvSpPr/>
+          <p:nvPr/>
+        </p:nvSpPr>
+        <p:spPr>
+          <a:xfrm>
+            <a:off x="8910777" y="91440"/>
+            <a:ext cx="2732278" cy="274320"/>
+          </a:xfrm>
+          <a:prstGeom prst="rect">
+            <a:avLst/>
+          </a:prstGeom>
+          <a:solidFill>
+            <a:srgbClr val="F3E8FF"/>
+          </a:solidFill>
+          <a:ln w="12700">
+            <a:solidFill>
+              <a:srgbClr val="7E22CE"/>
+            </a:solidFill>
+            <a:prstDash val="dash"/>
+          </a:ln>
+        </p:spPr>
+      </p:sp>
+      <p:sp>
+        <p:nvSpPr>
+          <p:cNvPr id="16" name="Shape 13"/>
+          <p:cNvSpPr/>
+          <p:nvPr/>
+        </p:nvSpPr>
+        <p:spPr>
+          <a:xfrm>
+            <a:off x="8938209" y="128016"/>
+            <a:ext cx="45720" cy="45720"/>
+          </a:xfrm>
+          <a:prstGeom prst="rect">
+            <a:avLst/>
+          </a:prstGeom>
+          <a:solidFill>
+            <a:srgbClr val="7E22CE"/>
+          </a:solidFill>
+          <a:ln w="12700">
+            <a:solidFill>
+              <a:srgbClr val="7E22CE"/>
+            </a:solidFill>
+            <a:prstDash val="solid"/>
+          </a:ln>
+        </p:spPr>
+      </p:sp>
+      <p:sp>
+        <p:nvSpPr>
+          <p:cNvPr id="17" name="Shape 14"/>
+          <p:cNvSpPr/>
+          <p:nvPr/>
+        </p:nvSpPr>
+        <p:spPr>
+          <a:xfrm>
+            <a:off x="8938209" y="205740"/>
+            <a:ext cx="45720" cy="45720"/>
+          </a:xfrm>
+          <a:prstGeom prst="rect">
+            <a:avLst/>
+          </a:prstGeom>
+          <a:solidFill>
+            <a:srgbClr val="7E22CE"/>
+          </a:solidFill>
+          <a:ln w="12700">
+            <a:solidFill>
+              <a:srgbClr val="7E22CE"/>
+            </a:solidFill>
+            <a:prstDash val="solid"/>
+          </a:ln>
+        </p:spPr>
+      </p:sp>
+      <p:sp>
+        <p:nvSpPr>
+          <p:cNvPr id="18" name="Shape 15"/>
+          <p:cNvSpPr/>
+          <p:nvPr/>
+        </p:nvSpPr>
+        <p:spPr>
+          <a:xfrm>
+            <a:off x="8938209" y="283464"/>
+            <a:ext cx="45720" cy="45720"/>
+          </a:xfrm>
+          <a:prstGeom prst="rect">
+            <a:avLst/>
+          </a:prstGeom>
+          <a:solidFill>
+            <a:srgbClr val="7E22CE"/>
+          </a:solidFill>
+          <a:ln w="12700">
+            <a:solidFill>
+              <a:srgbClr val="7E22CE"/>
+            </a:solidFill>
+            <a:prstDash val="solid"/>
+          </a:ln>
+        </p:spPr>
+      </p:sp>
+      <p:pic>
+        <p:nvPicPr>
+          <p:cNvPr id="19" name="Image 1" descr="preencoded.png">    </p:cNvPr>
+          <p:cNvPicPr>
+            <a:picLocks noChangeAspect="1"/>
+          </p:cNvPicPr>
+          <p:nvPr/>
+        </p:nvPicPr>
+        <p:blipFill>
+          <a:blip r:embed="rId2"/>
+          <a:stretch>
+            <a:fillRect/>
+          </a:stretch>
+        </p:blipFill>
+        <p:spPr>
+          <a:xfrm>
+            <a:off x="9038793" y="128016"/>
+            <a:ext cx="201168" cy="201168"/>
+          </a:xfrm>
+          <a:prstGeom prst="rect">
+            <a:avLst/>
+          </a:prstGeom>
+        </p:spPr>
+      </p:pic>
+      <p:sp>
+        <p:nvSpPr>
+          <p:cNvPr id="20" name="Text 16"/>
+          <p:cNvSpPr txBox="1"/>
+          <p:nvPr/>
+        </p:nvSpPr>
+        <p:spPr>
+          <a:xfrm>
+            <a:off x="9294825" y="91440"/>
+            <a:ext cx="2311654" cy="274320"/>
+          </a:xfrm>
+          <a:prstGeom prst="rect">
+            <a:avLst/>
+          </a:prstGeom>
+          <a:noFill/>
+          <a:ln/>
+        </p:spPr>
+        <p:txBody>
+          <a:bodyPr wrap="square" lIns="0" tIns="0" rIns="0" bIns="0" rtlCol="0" anchor="ctr"/>
+          <a:lstStyle/>
+          <a:p>
+            <a:pPr indent="0" marL="0">
+              <a:buNone/>
+            </a:pPr>
+            <a:r>
+              <a:rPr lang="en-US" sz="1100" b="1" dirty="0">
+                <a:solidFill>
+                  <a:srgbClr val="6B21A8"/>
+                </a:solidFill>
+                <a:latin typeface="Calibri" pitchFamily="34" charset="0"/>
+                <a:ea typeface="Calibri" pitchFamily="34" charset="-122"/>
+                <a:cs typeface="Calibri" pitchFamily="34" charset="-120"/>
+              </a:rPr>
+              <a:t>DA COMPRENDERE PIÙ AVANTI</a:t>
+            </a:r>
+            <a:endParaRPr lang="en-US" sz="1100" dirty="0"/>
+          </a:p>
+        </p:txBody>
+      </p:sp>
+      <p:sp>
+        <p:nvSpPr>
+          <p:cNvPr id="21" name="Shape 17"/>
+          <p:cNvSpPr/>
+          <p:nvPr/>
+        </p:nvSpPr>
+        <p:spPr>
+          <a:xfrm>
+            <a:off x="6675069" y="91440"/>
+            <a:ext cx="2125980" cy="274320"/>
+          </a:xfrm>
+          <a:prstGeom prst="rect">
+            <a:avLst/>
+          </a:prstGeom>
+          <a:solidFill>
+            <a:srgbClr val="FEF3C7"/>
+          </a:solidFill>
+          <a:ln w="12700">
+            <a:solidFill>
+              <a:srgbClr val="B45309"/>
+            </a:solidFill>
+            <a:prstDash val="solid"/>
+          </a:ln>
+        </p:spPr>
+      </p:sp>
+      <p:sp>
+        <p:nvSpPr>
+          <p:cNvPr id="22" name="Shape 18"/>
+          <p:cNvSpPr/>
+          <p:nvPr/>
+        </p:nvSpPr>
+        <p:spPr>
+          <a:xfrm>
+            <a:off x="6675069" y="91440"/>
+            <a:ext cx="27432" cy="274320"/>
+          </a:xfrm>
+          <a:prstGeom prst="rect">
+            <a:avLst/>
+          </a:prstGeom>
+          <a:solidFill>
+            <a:srgbClr val="B45309"/>
+          </a:solidFill>
+          <a:ln w="12700">
+            <a:solidFill>
+              <a:srgbClr val="B45309"/>
+            </a:solidFill>
+            <a:prstDash val="solid"/>
+          </a:ln>
+        </p:spPr>
+      </p:sp>
+      <p:sp>
+        <p:nvSpPr>
+          <p:cNvPr id="23" name="Shape 19"/>
+          <p:cNvSpPr/>
+          <p:nvPr/>
+        </p:nvSpPr>
+        <p:spPr>
+          <a:xfrm>
+            <a:off x="6729933" y="91440"/>
+            <a:ext cx="27432" cy="274320"/>
+          </a:xfrm>
+          <a:prstGeom prst="rect">
+            <a:avLst/>
+          </a:prstGeom>
+          <a:solidFill>
+            <a:srgbClr val="B45309"/>
+          </a:solidFill>
+          <a:ln w="12700">
+            <a:solidFill>
+              <a:srgbClr val="B45309"/>
+            </a:solidFill>
+            <a:prstDash val="solid"/>
+          </a:ln>
+        </p:spPr>
+      </p:sp>
+      <p:pic>
+        <p:nvPicPr>
+          <p:cNvPr id="24" name="Image 2" descr="preencoded.png">    </p:cNvPr>
+          <p:cNvPicPr>
+            <a:picLocks noChangeAspect="1"/>
+          </p:cNvPicPr>
+          <p:nvPr/>
+        </p:nvPicPr>
+        <p:blipFill>
+          <a:blip r:embed="rId3"/>
+          <a:stretch>
+            <a:fillRect/>
+          </a:stretch>
+        </p:blipFill>
+        <p:spPr>
+          <a:xfrm>
+            <a:off x="6803085" y="128016"/>
+            <a:ext cx="201168" cy="201168"/>
+          </a:xfrm>
+          <a:prstGeom prst="rect">
+            <a:avLst/>
+          </a:prstGeom>
+        </p:spPr>
+      </p:pic>
+      <p:sp>
+        <p:nvSpPr>
+          <p:cNvPr id="25" name="Text 20"/>
+          <p:cNvSpPr txBox="1"/>
+          <p:nvPr/>
+        </p:nvSpPr>
+        <p:spPr>
+          <a:xfrm>
+            <a:off x="7059117" y="91440"/>
+            <a:ext cx="1705356" cy="274320"/>
+          </a:xfrm>
+          <a:prstGeom prst="rect">
+            <a:avLst/>
+          </a:prstGeom>
+          <a:noFill/>
+          <a:ln/>
+        </p:spPr>
+        <p:txBody>
+          <a:bodyPr wrap="square" lIns="0" tIns="0" rIns="0" bIns="0" rtlCol="0" anchor="ctr"/>
+          <a:lstStyle/>
+          <a:p>
+            <a:pPr indent="0" marL="0">
+              <a:buNone/>
+            </a:pPr>
+            <a:r>
+              <a:rPr lang="en-US" sz="1100" b="1" dirty="0">
+                <a:solidFill>
+                  <a:srgbClr val="92400E"/>
+                </a:solidFill>
+                <a:latin typeface="Calibri" pitchFamily="34" charset="0"/>
+                <a:ea typeface="Calibri" pitchFamily="34" charset="-122"/>
+                <a:cs typeface="Calibri" pitchFamily="34" charset="-120"/>
+              </a:rPr>
+              <a:t>DA UTILIZZARE OGGI</a:t>
+            </a:r>
+            <a:endParaRPr lang="en-US" sz="1100" dirty="0"/>
+          </a:p>
+        </p:txBody>
+      </p:sp>
+      <p:sp>
+        <p:nvSpPr>
+          <p:cNvPr id="26" name="Shape 21"/>
+          <p:cNvSpPr/>
+          <p:nvPr/>
+        </p:nvSpPr>
+        <p:spPr>
+          <a:xfrm>
+            <a:off x="4352747" y="91440"/>
+            <a:ext cx="2212594" cy="274320"/>
+          </a:xfrm>
+          <a:prstGeom prst="rect">
+            <a:avLst/>
+          </a:prstGeom>
+          <a:solidFill>
+            <a:srgbClr val="E0F2FE"/>
+          </a:solidFill>
+          <a:ln w="12700">
+            <a:solidFill>
+              <a:srgbClr val="0369A1"/>
+            </a:solidFill>
+            <a:prstDash val="solid"/>
+          </a:ln>
+        </p:spPr>
+      </p:sp>
+      <p:sp>
+        <p:nvSpPr>
+          <p:cNvPr id="27" name="Shape 22"/>
+          <p:cNvSpPr/>
+          <p:nvPr/>
+        </p:nvSpPr>
+        <p:spPr>
+          <a:xfrm>
+            <a:off x="4352747" y="91440"/>
+            <a:ext cx="73152" cy="274320"/>
+          </a:xfrm>
+          <a:prstGeom prst="rect">
+            <a:avLst/>
+          </a:prstGeom>
+          <a:solidFill>
+            <a:srgbClr val="0369A1"/>
+          </a:solidFill>
+          <a:ln w="12700">
+            <a:solidFill>
+              <a:srgbClr val="0369A1"/>
+            </a:solidFill>
+            <a:prstDash val="solid"/>
+          </a:ln>
+        </p:spPr>
+      </p:sp>
+      <p:pic>
+        <p:nvPicPr>
+          <p:cNvPr id="28" name="Image 3" descr="preencoded.png">    </p:cNvPr>
+          <p:cNvPicPr>
+            <a:picLocks noChangeAspect="1"/>
+          </p:cNvPicPr>
+          <p:nvPr/>
+        </p:nvPicPr>
+        <p:blipFill>
+          <a:blip r:embed="rId4"/>
+          <a:stretch>
+            <a:fillRect/>
+          </a:stretch>
+        </p:blipFill>
+        <p:spPr>
+          <a:xfrm>
+            <a:off x="4480763" y="128016"/>
+            <a:ext cx="201168" cy="201168"/>
+          </a:xfrm>
+          <a:prstGeom prst="rect">
+            <a:avLst/>
+          </a:prstGeom>
+        </p:spPr>
+      </p:pic>
+      <p:sp>
+        <p:nvSpPr>
+          <p:cNvPr id="29" name="Text 23"/>
+          <p:cNvSpPr txBox="1"/>
+          <p:nvPr/>
+        </p:nvSpPr>
+        <p:spPr>
+          <a:xfrm>
+            <a:off x="4736795" y="91440"/>
+            <a:ext cx="1791970" cy="274320"/>
+          </a:xfrm>
+          <a:prstGeom prst="rect">
+            <a:avLst/>
+          </a:prstGeom>
+          <a:noFill/>
+          <a:ln/>
+        </p:spPr>
+        <p:txBody>
+          <a:bodyPr wrap="square" lIns="0" tIns="0" rIns="0" bIns="0" rtlCol="0" anchor="ctr"/>
+          <a:lstStyle/>
+          <a:p>
+            <a:pPr indent="0" marL="0">
+              <a:buNone/>
+            </a:pPr>
+            <a:r>
+              <a:rPr lang="en-US" sz="1100" b="1" dirty="0">
+                <a:solidFill>
+                  <a:srgbClr val="075985"/>
+                </a:solidFill>
+                <a:latin typeface="Calibri" pitchFamily="34" charset="0"/>
+                <a:ea typeface="Calibri" pitchFamily="34" charset="-122"/>
+                <a:cs typeface="Calibri" pitchFamily="34" charset="-120"/>
+              </a:rPr>
+              <a:t>DA COMPRENDERE OGGI</a:t>
+            </a:r>
+            <a:endParaRPr lang="en-US" sz="1100" dirty="0"/>
+          </a:p>
+        </p:txBody>
+      </p:sp>
+      <p:sp>
+        <p:nvSpPr>
           <p:cNvPr id="25" name="Slide Number Placeholder 0"/>
           <p:cNvSpPr>
             <a:spLocks noGrp="1"/>
@@ -3982,6 +4413,133 @@
       </p:sp>
       <p:sp>
         <p:nvSpPr>
+          <p:cNvPr id="15" name="Shape 12"/>
+          <p:cNvSpPr/>
+          <p:nvPr/>
+        </p:nvSpPr>
+        <p:spPr>
+          <a:xfrm>
+            <a:off x="7854645" y="91440"/>
+            <a:ext cx="3788410" cy="274320"/>
+          </a:xfrm>
+          <a:prstGeom prst="rect">
+            <a:avLst/>
+          </a:prstGeom>
+          <a:solidFill>
+            <a:srgbClr val="E0F2FE"/>
+          </a:solidFill>
+          <a:ln w="12700">
+            <a:solidFill>
+              <a:srgbClr val="0369A1"/>
+            </a:solidFill>
+            <a:prstDash val="solid"/>
+          </a:ln>
+        </p:spPr>
+      </p:sp>
+      <p:sp>
+        <p:nvSpPr>
+          <p:cNvPr id="16" name="Shape 13"/>
+          <p:cNvSpPr/>
+          <p:nvPr/>
+        </p:nvSpPr>
+        <p:spPr>
+          <a:xfrm>
+            <a:off x="7854645" y="91440"/>
+            <a:ext cx="73152" cy="274320"/>
+          </a:xfrm>
+          <a:prstGeom prst="rect">
+            <a:avLst/>
+          </a:prstGeom>
+          <a:solidFill>
+            <a:srgbClr val="0369A1"/>
+          </a:solidFill>
+          <a:ln w="12700">
+            <a:solidFill>
+              <a:srgbClr val="0369A1"/>
+            </a:solidFill>
+            <a:prstDash val="solid"/>
+          </a:ln>
+        </p:spPr>
+      </p:sp>
+      <p:pic>
+        <p:nvPicPr>
+          <p:cNvPr id="17" name="Image 1" descr="preencoded.png">    </p:cNvPr>
+          <p:cNvPicPr>
+            <a:picLocks noChangeAspect="1"/>
+          </p:cNvPicPr>
+          <p:nvPr/>
+        </p:nvPicPr>
+        <p:blipFill>
+          <a:blip r:embed="rId2"/>
+          <a:stretch>
+            <a:fillRect/>
+          </a:stretch>
+        </p:blipFill>
+        <p:spPr>
+          <a:xfrm>
+            <a:off x="7982661" y="128016"/>
+            <a:ext cx="201168" cy="201168"/>
+          </a:xfrm>
+          <a:prstGeom prst="rect">
+            <a:avLst/>
+          </a:prstGeom>
+        </p:spPr>
+      </p:pic>
+      <p:sp>
+        <p:nvSpPr>
+          <p:cNvPr id="18" name="Text 14"/>
+          <p:cNvSpPr txBox="1"/>
+          <p:nvPr/>
+        </p:nvSpPr>
+        <p:spPr>
+          <a:xfrm>
+            <a:off x="8238693" y="91440"/>
+            <a:ext cx="3367786" cy="274320"/>
+          </a:xfrm>
+          <a:prstGeom prst="rect">
+            <a:avLst/>
+          </a:prstGeom>
+          <a:noFill/>
+          <a:ln/>
+        </p:spPr>
+        <p:txBody>
+          <a:bodyPr wrap="square" lIns="0" tIns="0" rIns="0" bIns="0" rtlCol="0" anchor="ctr"/>
+          <a:lstStyle/>
+          <a:p>
+            <a:pPr indent="0" marL="0">
+              <a:buNone/>
+            </a:pPr>
+            <a:r>
+              <a:rPr lang="en-US" sz="1100" b="1" dirty="0">
+                <a:solidFill>
+                  <a:srgbClr val="075985"/>
+                </a:solidFill>
+                <a:latin typeface="Calibri" pitchFamily="34" charset="0"/>
+                <a:ea typeface="Calibri" pitchFamily="34" charset="-122"/>
+                <a:cs typeface="Calibri" pitchFamily="34" charset="-120"/>
+              </a:rPr>
+              <a:t>DA COMPRENDERE OGGI</a:t>
+            </a:r>
+            <a:pPr indent="0" marL="0">
+              <a:buNone/>
+            </a:pPr>
+            <a:r>
+              <a:rPr lang="en-US" sz="1100" dirty="0">
+                <a:solidFill>
+                  <a:srgbClr val="075985"/>
+                </a:solidFill>
+                <a:latin typeface="Calibri" pitchFamily="34" charset="0"/>
+                <a:ea typeface="Calibri" pitchFamily="34" charset="-122"/>
+                <a:cs typeface="Calibri" pitchFamily="34" charset="-120"/>
+              </a:rPr>
+              <a:t> · HPC e legge di Amdahl</a:t>
+            </a:r>
+            <a:endParaRPr lang="en-US" sz="1100" dirty="0"/>
+          </a:p>
+        </p:txBody>
+      </p:sp>
+      <p:sp>
+        <p:nvSpPr>
           <p:cNvPr id="25" name="Slide Number Placeholder 0"/>
           <p:cNvSpPr>
             <a:spLocks noGrp="1"/>
@@ -4402,6 +4960,133 @@
       </p:sp>
       <p:sp>
         <p:nvSpPr>
+          <p:cNvPr id="12" name="Shape 10"/>
+          <p:cNvSpPr/>
+          <p:nvPr/>
+        </p:nvSpPr>
+        <p:spPr>
+          <a:xfrm>
+            <a:off x="7854645" y="91440"/>
+            <a:ext cx="3788410" cy="274320"/>
+          </a:xfrm>
+          <a:prstGeom prst="rect">
+            <a:avLst/>
+          </a:prstGeom>
+          <a:solidFill>
+            <a:srgbClr val="E0F2FE"/>
+          </a:solidFill>
+          <a:ln w="12700">
+            <a:solidFill>
+              <a:srgbClr val="0369A1"/>
+            </a:solidFill>
+            <a:prstDash val="solid"/>
+          </a:ln>
+        </p:spPr>
+      </p:sp>
+      <p:sp>
+        <p:nvSpPr>
+          <p:cNvPr id="13" name="Shape 11"/>
+          <p:cNvSpPr/>
+          <p:nvPr/>
+        </p:nvSpPr>
+        <p:spPr>
+          <a:xfrm>
+            <a:off x="7854645" y="91440"/>
+            <a:ext cx="73152" cy="274320"/>
+          </a:xfrm>
+          <a:prstGeom prst="rect">
+            <a:avLst/>
+          </a:prstGeom>
+          <a:solidFill>
+            <a:srgbClr val="0369A1"/>
+          </a:solidFill>
+          <a:ln w="12700">
+            <a:solidFill>
+              <a:srgbClr val="0369A1"/>
+            </a:solidFill>
+            <a:prstDash val="solid"/>
+          </a:ln>
+        </p:spPr>
+      </p:sp>
+      <p:pic>
+        <p:nvPicPr>
+          <p:cNvPr id="14" name="Image 0" descr="preencoded.png">    </p:cNvPr>
+          <p:cNvPicPr>
+            <a:picLocks noChangeAspect="1"/>
+          </p:cNvPicPr>
+          <p:nvPr/>
+        </p:nvPicPr>
+        <p:blipFill>
+          <a:blip r:embed="rId1"/>
+          <a:stretch>
+            <a:fillRect/>
+          </a:stretch>
+        </p:blipFill>
+        <p:spPr>
+          <a:xfrm>
+            <a:off x="7982661" y="128016"/>
+            <a:ext cx="201168" cy="201168"/>
+          </a:xfrm>
+          <a:prstGeom prst="rect">
+            <a:avLst/>
+          </a:prstGeom>
+        </p:spPr>
+      </p:pic>
+      <p:sp>
+        <p:nvSpPr>
+          <p:cNvPr id="15" name="Text 12"/>
+          <p:cNvSpPr txBox="1"/>
+          <p:nvPr/>
+        </p:nvSpPr>
+        <p:spPr>
+          <a:xfrm>
+            <a:off x="8238693" y="91440"/>
+            <a:ext cx="3367786" cy="274320"/>
+          </a:xfrm>
+          <a:prstGeom prst="rect">
+            <a:avLst/>
+          </a:prstGeom>
+          <a:noFill/>
+          <a:ln/>
+        </p:spPr>
+        <p:txBody>
+          <a:bodyPr wrap="square" lIns="0" tIns="0" rIns="0" bIns="0" rtlCol="0" anchor="ctr"/>
+          <a:lstStyle/>
+          <a:p>
+            <a:pPr indent="0" marL="0">
+              <a:buNone/>
+            </a:pPr>
+            <a:r>
+              <a:rPr lang="en-US" sz="1100" b="1" dirty="0">
+                <a:solidFill>
+                  <a:srgbClr val="075985"/>
+                </a:solidFill>
+                <a:latin typeface="Calibri" pitchFamily="34" charset="0"/>
+                <a:ea typeface="Calibri" pitchFamily="34" charset="-122"/>
+                <a:cs typeface="Calibri" pitchFamily="34" charset="-120"/>
+              </a:rPr>
+              <a:t>DA COMPRENDERE OGGI</a:t>
+            </a:r>
+            <a:pPr indent="0" marL="0">
+              <a:buNone/>
+            </a:pPr>
+            <a:r>
+              <a:rPr lang="en-US" sz="1100" dirty="0">
+                <a:solidFill>
+                  <a:srgbClr val="075985"/>
+                </a:solidFill>
+                <a:latin typeface="Calibri" pitchFamily="34" charset="0"/>
+                <a:ea typeface="Calibri" pitchFamily="34" charset="-122"/>
+                <a:cs typeface="Calibri" pitchFamily="34" charset="-120"/>
+              </a:rPr>
+              <a:t> · HPC e legge di Amdahl</a:t>
+            </a:r>
+            <a:endParaRPr lang="en-US" sz="1100" dirty="0"/>
+          </a:p>
+        </p:txBody>
+      </p:sp>
+      <p:sp>
+        <p:nvSpPr>
           <p:cNvPr id="25" name="Slide Number Placeholder 0"/>
           <p:cNvSpPr>
             <a:spLocks noGrp="1"/>
@@ -4876,6 +5561,133 @@
       </p:sp>
       <p:sp>
         <p:nvSpPr>
+          <p:cNvPr id="9" name="Shape 7"/>
+          <p:cNvSpPr/>
+          <p:nvPr/>
+        </p:nvSpPr>
+        <p:spPr>
+          <a:xfrm>
+            <a:off x="7854645" y="91440"/>
+            <a:ext cx="3788410" cy="274320"/>
+          </a:xfrm>
+          <a:prstGeom prst="rect">
+            <a:avLst/>
+          </a:prstGeom>
+          <a:solidFill>
+            <a:srgbClr val="E0F2FE"/>
+          </a:solidFill>
+          <a:ln w="12700">
+            <a:solidFill>
+              <a:srgbClr val="0369A1"/>
+            </a:solidFill>
+            <a:prstDash val="solid"/>
+          </a:ln>
+        </p:spPr>
+      </p:sp>
+      <p:sp>
+        <p:nvSpPr>
+          <p:cNvPr id="10" name="Shape 8"/>
+          <p:cNvSpPr/>
+          <p:nvPr/>
+        </p:nvSpPr>
+        <p:spPr>
+          <a:xfrm>
+            <a:off x="7854645" y="91440"/>
+            <a:ext cx="73152" cy="274320"/>
+          </a:xfrm>
+          <a:prstGeom prst="rect">
+            <a:avLst/>
+          </a:prstGeom>
+          <a:solidFill>
+            <a:srgbClr val="0369A1"/>
+          </a:solidFill>
+          <a:ln w="12700">
+            <a:solidFill>
+              <a:srgbClr val="0369A1"/>
+            </a:solidFill>
+            <a:prstDash val="solid"/>
+          </a:ln>
+        </p:spPr>
+      </p:sp>
+      <p:pic>
+        <p:nvPicPr>
+          <p:cNvPr id="11" name="Image 0" descr="preencoded.png">    </p:cNvPr>
+          <p:cNvPicPr>
+            <a:picLocks noChangeAspect="1"/>
+          </p:cNvPicPr>
+          <p:nvPr/>
+        </p:nvPicPr>
+        <p:blipFill>
+          <a:blip r:embed="rId1"/>
+          <a:stretch>
+            <a:fillRect/>
+          </a:stretch>
+        </p:blipFill>
+        <p:spPr>
+          <a:xfrm>
+            <a:off x="7982661" y="128016"/>
+            <a:ext cx="201168" cy="201168"/>
+          </a:xfrm>
+          <a:prstGeom prst="rect">
+            <a:avLst/>
+          </a:prstGeom>
+        </p:spPr>
+      </p:pic>
+      <p:sp>
+        <p:nvSpPr>
+          <p:cNvPr id="12" name="Text 9"/>
+          <p:cNvSpPr txBox="1"/>
+          <p:nvPr/>
+        </p:nvSpPr>
+        <p:spPr>
+          <a:xfrm>
+            <a:off x="8238693" y="91440"/>
+            <a:ext cx="3367786" cy="274320"/>
+          </a:xfrm>
+          <a:prstGeom prst="rect">
+            <a:avLst/>
+          </a:prstGeom>
+          <a:noFill/>
+          <a:ln/>
+        </p:spPr>
+        <p:txBody>
+          <a:bodyPr wrap="square" lIns="0" tIns="0" rIns="0" bIns="0" rtlCol="0" anchor="ctr"/>
+          <a:lstStyle/>
+          <a:p>
+            <a:pPr indent="0" marL="0">
+              <a:buNone/>
+            </a:pPr>
+            <a:r>
+              <a:rPr lang="en-US" sz="1100" b="1" dirty="0">
+                <a:solidFill>
+                  <a:srgbClr val="075985"/>
+                </a:solidFill>
+                <a:latin typeface="Calibri" pitchFamily="34" charset="0"/>
+                <a:ea typeface="Calibri" pitchFamily="34" charset="-122"/>
+                <a:cs typeface="Calibri" pitchFamily="34" charset="-120"/>
+              </a:rPr>
+              <a:t>DA COMPRENDERE OGGI</a:t>
+            </a:r>
+            <a:pPr indent="0" marL="0">
+              <a:buNone/>
+            </a:pPr>
+            <a:r>
+              <a:rPr lang="en-US" sz="1100" dirty="0">
+                <a:solidFill>
+                  <a:srgbClr val="075985"/>
+                </a:solidFill>
+                <a:latin typeface="Calibri" pitchFamily="34" charset="0"/>
+                <a:ea typeface="Calibri" pitchFamily="34" charset="-122"/>
+                <a:cs typeface="Calibri" pitchFamily="34" charset="-120"/>
+              </a:rPr>
+              <a:t> · HPC e legge di Amdahl</a:t>
+            </a:r>
+            <a:endParaRPr lang="en-US" sz="1100" dirty="0"/>
+          </a:p>
+        </p:txBody>
+      </p:sp>
+      <p:sp>
+        <p:nvSpPr>
           <p:cNvPr id="25" name="Slide Number Placeholder 0"/>
           <p:cNvSpPr>
             <a:spLocks noGrp="1"/>
@@ -5430,6 +6242,133 @@
       </p:sp>
       <p:sp>
         <p:nvSpPr>
+          <p:cNvPr id="16" name="Shape 14"/>
+          <p:cNvSpPr/>
+          <p:nvPr/>
+        </p:nvSpPr>
+        <p:spPr>
+          <a:xfrm>
+            <a:off x="7854645" y="91440"/>
+            <a:ext cx="3788410" cy="274320"/>
+          </a:xfrm>
+          <a:prstGeom prst="rect">
+            <a:avLst/>
+          </a:prstGeom>
+          <a:solidFill>
+            <a:srgbClr val="E0F2FE"/>
+          </a:solidFill>
+          <a:ln w="12700">
+            <a:solidFill>
+              <a:srgbClr val="0369A1"/>
+            </a:solidFill>
+            <a:prstDash val="solid"/>
+          </a:ln>
+        </p:spPr>
+      </p:sp>
+      <p:sp>
+        <p:nvSpPr>
+          <p:cNvPr id="17" name="Shape 15"/>
+          <p:cNvSpPr/>
+          <p:nvPr/>
+        </p:nvSpPr>
+        <p:spPr>
+          <a:xfrm>
+            <a:off x="7854645" y="91440"/>
+            <a:ext cx="73152" cy="274320"/>
+          </a:xfrm>
+          <a:prstGeom prst="rect">
+            <a:avLst/>
+          </a:prstGeom>
+          <a:solidFill>
+            <a:srgbClr val="0369A1"/>
+          </a:solidFill>
+          <a:ln w="12700">
+            <a:solidFill>
+              <a:srgbClr val="0369A1"/>
+            </a:solidFill>
+            <a:prstDash val="solid"/>
+          </a:ln>
+        </p:spPr>
+      </p:sp>
+      <p:pic>
+        <p:nvPicPr>
+          <p:cNvPr id="18" name="Image 0" descr="preencoded.png">    </p:cNvPr>
+          <p:cNvPicPr>
+            <a:picLocks noChangeAspect="1"/>
+          </p:cNvPicPr>
+          <p:nvPr/>
+        </p:nvPicPr>
+        <p:blipFill>
+          <a:blip r:embed="rId1"/>
+          <a:stretch>
+            <a:fillRect/>
+          </a:stretch>
+        </p:blipFill>
+        <p:spPr>
+          <a:xfrm>
+            <a:off x="7982661" y="128016"/>
+            <a:ext cx="201168" cy="201168"/>
+          </a:xfrm>
+          <a:prstGeom prst="rect">
+            <a:avLst/>
+          </a:prstGeom>
+        </p:spPr>
+      </p:pic>
+      <p:sp>
+        <p:nvSpPr>
+          <p:cNvPr id="19" name="Text 16"/>
+          <p:cNvSpPr txBox="1"/>
+          <p:nvPr/>
+        </p:nvSpPr>
+        <p:spPr>
+          <a:xfrm>
+            <a:off x="8238693" y="91440"/>
+            <a:ext cx="3367786" cy="274320"/>
+          </a:xfrm>
+          <a:prstGeom prst="rect">
+            <a:avLst/>
+          </a:prstGeom>
+          <a:noFill/>
+          <a:ln/>
+        </p:spPr>
+        <p:txBody>
+          <a:bodyPr wrap="square" lIns="0" tIns="0" rIns="0" bIns="0" rtlCol="0" anchor="ctr"/>
+          <a:lstStyle/>
+          <a:p>
+            <a:pPr indent="0" marL="0">
+              <a:buNone/>
+            </a:pPr>
+            <a:r>
+              <a:rPr lang="en-US" sz="1100" b="1" dirty="0">
+                <a:solidFill>
+                  <a:srgbClr val="075985"/>
+                </a:solidFill>
+                <a:latin typeface="Calibri" pitchFamily="34" charset="0"/>
+                <a:ea typeface="Calibri" pitchFamily="34" charset="-122"/>
+                <a:cs typeface="Calibri" pitchFamily="34" charset="-120"/>
+              </a:rPr>
+              <a:t>DA COMPRENDERE OGGI</a:t>
+            </a:r>
+            <a:pPr indent="0" marL="0">
+              <a:buNone/>
+            </a:pPr>
+            <a:r>
+              <a:rPr lang="en-US" sz="1100" dirty="0">
+                <a:solidFill>
+                  <a:srgbClr val="075985"/>
+                </a:solidFill>
+                <a:latin typeface="Calibri" pitchFamily="34" charset="0"/>
+                <a:ea typeface="Calibri" pitchFamily="34" charset="-122"/>
+                <a:cs typeface="Calibri" pitchFamily="34" charset="-120"/>
+              </a:rPr>
+              <a:t> · HPC e legge di Amdahl</a:t>
+            </a:r>
+            <a:endParaRPr lang="en-US" sz="1100" dirty="0"/>
+          </a:p>
+        </p:txBody>
+      </p:sp>
+      <p:sp>
+        <p:nvSpPr>
           <p:cNvPr id="25" name="Slide Number Placeholder 0"/>
           <p:cNvSpPr>
             <a:spLocks noGrp="1"/>
@@ -5904,6 +6843,133 @@
       </p:sp>
       <p:sp>
         <p:nvSpPr>
+          <p:cNvPr id="9" name="Shape 7"/>
+          <p:cNvSpPr/>
+          <p:nvPr/>
+        </p:nvSpPr>
+        <p:spPr>
+          <a:xfrm>
+            <a:off x="7723327" y="91440"/>
+            <a:ext cx="3919728" cy="274320"/>
+          </a:xfrm>
+          <a:prstGeom prst="rect">
+            <a:avLst/>
+          </a:prstGeom>
+          <a:solidFill>
+            <a:srgbClr val="E0F2FE"/>
+          </a:solidFill>
+          <a:ln w="12700">
+            <a:solidFill>
+              <a:srgbClr val="0369A1"/>
+            </a:solidFill>
+            <a:prstDash val="solid"/>
+          </a:ln>
+        </p:spPr>
+      </p:sp>
+      <p:sp>
+        <p:nvSpPr>
+          <p:cNvPr id="10" name="Shape 8"/>
+          <p:cNvSpPr/>
+          <p:nvPr/>
+        </p:nvSpPr>
+        <p:spPr>
+          <a:xfrm>
+            <a:off x="7723327" y="91440"/>
+            <a:ext cx="73152" cy="274320"/>
+          </a:xfrm>
+          <a:prstGeom prst="rect">
+            <a:avLst/>
+          </a:prstGeom>
+          <a:solidFill>
+            <a:srgbClr val="0369A1"/>
+          </a:solidFill>
+          <a:ln w="12700">
+            <a:solidFill>
+              <a:srgbClr val="0369A1"/>
+            </a:solidFill>
+            <a:prstDash val="solid"/>
+          </a:ln>
+        </p:spPr>
+      </p:sp>
+      <p:pic>
+        <p:nvPicPr>
+          <p:cNvPr id="11" name="Image 0" descr="preencoded.png">    </p:cNvPr>
+          <p:cNvPicPr>
+            <a:picLocks noChangeAspect="1"/>
+          </p:cNvPicPr>
+          <p:nvPr/>
+        </p:nvPicPr>
+        <p:blipFill>
+          <a:blip r:embed="rId1"/>
+          <a:stretch>
+            <a:fillRect/>
+          </a:stretch>
+        </p:blipFill>
+        <p:spPr>
+          <a:xfrm>
+            <a:off x="7851343" y="128016"/>
+            <a:ext cx="201168" cy="201168"/>
+          </a:xfrm>
+          <a:prstGeom prst="rect">
+            <a:avLst/>
+          </a:prstGeom>
+        </p:spPr>
+      </p:pic>
+      <p:sp>
+        <p:nvSpPr>
+          <p:cNvPr id="12" name="Text 9"/>
+          <p:cNvSpPr txBox="1"/>
+          <p:nvPr/>
+        </p:nvSpPr>
+        <p:spPr>
+          <a:xfrm>
+            <a:off x="8107375" y="91440"/>
+            <a:ext cx="3499104" cy="274320"/>
+          </a:xfrm>
+          <a:prstGeom prst="rect">
+            <a:avLst/>
+          </a:prstGeom>
+          <a:noFill/>
+          <a:ln/>
+        </p:spPr>
+        <p:txBody>
+          <a:bodyPr wrap="square" lIns="0" tIns="0" rIns="0" bIns="0" rtlCol="0" anchor="ctr"/>
+          <a:lstStyle/>
+          <a:p>
+            <a:pPr indent="0" marL="0">
+              <a:buNone/>
+            </a:pPr>
+            <a:r>
+              <a:rPr lang="en-US" sz="1100" b="1" dirty="0">
+                <a:solidFill>
+                  <a:srgbClr val="075985"/>
+                </a:solidFill>
+                <a:latin typeface="Calibri" pitchFamily="34" charset="0"/>
+                <a:ea typeface="Calibri" pitchFamily="34" charset="-122"/>
+                <a:cs typeface="Calibri" pitchFamily="34" charset="-120"/>
+              </a:rPr>
+              <a:t>DA COMPRENDERE OGGI</a:t>
+            </a:r>
+            <a:pPr indent="0" marL="0">
+              <a:buNone/>
+            </a:pPr>
+            <a:r>
+              <a:rPr lang="en-US" sz="1100" dirty="0">
+                <a:solidFill>
+                  <a:srgbClr val="075985"/>
+                </a:solidFill>
+                <a:latin typeface="Calibri" pitchFamily="34" charset="0"/>
+                <a:ea typeface="Calibri" pitchFamily="34" charset="-122"/>
+                <a:cs typeface="Calibri" pitchFamily="34" charset="-120"/>
+              </a:rPr>
+              <a:t> · acceleratori GPU e FPGA</a:t>
+            </a:r>
+            <a:endParaRPr lang="en-US" sz="1100" dirty="0"/>
+          </a:p>
+        </p:txBody>
+      </p:sp>
+      <p:sp>
+        <p:nvSpPr>
           <p:cNvPr id="25" name="Slide Number Placeholder 0"/>
           <p:cNvSpPr>
             <a:spLocks noGrp="1"/>
@@ -6471,6 +7537,133 @@
               <a:t>Una scheda di sviluppo FPGA: il chip grande è l'FPGA</a:t>
             </a:r>
             <a:endParaRPr lang="en-US" sz="1200" dirty="0"/>
+          </a:p>
+        </p:txBody>
+      </p:sp>
+      <p:sp>
+        <p:nvSpPr>
+          <p:cNvPr id="15" name="Shape 12"/>
+          <p:cNvSpPr/>
+          <p:nvPr/>
+        </p:nvSpPr>
+        <p:spPr>
+          <a:xfrm>
+            <a:off x="7723327" y="91440"/>
+            <a:ext cx="3919728" cy="274320"/>
+          </a:xfrm>
+          <a:prstGeom prst="rect">
+            <a:avLst/>
+          </a:prstGeom>
+          <a:solidFill>
+            <a:srgbClr val="E0F2FE"/>
+          </a:solidFill>
+          <a:ln w="12700">
+            <a:solidFill>
+              <a:srgbClr val="0369A1"/>
+            </a:solidFill>
+            <a:prstDash val="solid"/>
+          </a:ln>
+        </p:spPr>
+      </p:sp>
+      <p:sp>
+        <p:nvSpPr>
+          <p:cNvPr id="16" name="Shape 13"/>
+          <p:cNvSpPr/>
+          <p:nvPr/>
+        </p:nvSpPr>
+        <p:spPr>
+          <a:xfrm>
+            <a:off x="7723327" y="91440"/>
+            <a:ext cx="73152" cy="274320"/>
+          </a:xfrm>
+          <a:prstGeom prst="rect">
+            <a:avLst/>
+          </a:prstGeom>
+          <a:solidFill>
+            <a:srgbClr val="0369A1"/>
+          </a:solidFill>
+          <a:ln w="12700">
+            <a:solidFill>
+              <a:srgbClr val="0369A1"/>
+            </a:solidFill>
+            <a:prstDash val="solid"/>
+          </a:ln>
+        </p:spPr>
+      </p:sp>
+      <p:pic>
+        <p:nvPicPr>
+          <p:cNvPr id="17" name="Image 1" descr="preencoded.png">    </p:cNvPr>
+          <p:cNvPicPr>
+            <a:picLocks noChangeAspect="1"/>
+          </p:cNvPicPr>
+          <p:nvPr/>
+        </p:nvPicPr>
+        <p:blipFill>
+          <a:blip r:embed="rId2"/>
+          <a:stretch>
+            <a:fillRect/>
+          </a:stretch>
+        </p:blipFill>
+        <p:spPr>
+          <a:xfrm>
+            <a:off x="7851343" y="128016"/>
+            <a:ext cx="201168" cy="201168"/>
+          </a:xfrm>
+          <a:prstGeom prst="rect">
+            <a:avLst/>
+          </a:prstGeom>
+        </p:spPr>
+      </p:pic>
+      <p:sp>
+        <p:nvSpPr>
+          <p:cNvPr id="18" name="Text 14"/>
+          <p:cNvSpPr txBox="1"/>
+          <p:nvPr/>
+        </p:nvSpPr>
+        <p:spPr>
+          <a:xfrm>
+            <a:off x="8107375" y="91440"/>
+            <a:ext cx="3499104" cy="274320"/>
+          </a:xfrm>
+          <a:prstGeom prst="rect">
+            <a:avLst/>
+          </a:prstGeom>
+          <a:noFill/>
+          <a:ln/>
+        </p:spPr>
+        <p:txBody>
+          <a:bodyPr wrap="square" lIns="0" tIns="0" rIns="0" bIns="0" rtlCol="0" anchor="ctr"/>
+          <a:lstStyle/>
+          <a:p>
+            <a:pPr indent="0" marL="0">
+              <a:buNone/>
+            </a:pPr>
+            <a:r>
+              <a:rPr lang="en-US" sz="1100" b="1" dirty="0">
+                <a:solidFill>
+                  <a:srgbClr val="075985"/>
+                </a:solidFill>
+                <a:latin typeface="Calibri" pitchFamily="34" charset="0"/>
+                <a:ea typeface="Calibri" pitchFamily="34" charset="-122"/>
+                <a:cs typeface="Calibri" pitchFamily="34" charset="-120"/>
+              </a:rPr>
+              <a:t>DA COMPRENDERE OGGI</a:t>
+            </a:r>
+            <a:pPr indent="0" marL="0">
+              <a:buNone/>
+            </a:pPr>
+            <a:r>
+              <a:rPr lang="en-US" sz="1100" dirty="0">
+                <a:solidFill>
+                  <a:srgbClr val="075985"/>
+                </a:solidFill>
+                <a:latin typeface="Calibri" pitchFamily="34" charset="0"/>
+                <a:ea typeface="Calibri" pitchFamily="34" charset="-122"/>
+                <a:cs typeface="Calibri" pitchFamily="34" charset="-120"/>
+              </a:rPr>
+              <a:t> · acceleratori GPU e FPGA</a:t>
+            </a:r>
+            <a:endParaRPr lang="en-US" sz="1100" dirty="0"/>
           </a:p>
         </p:txBody>
       </p:sp>
@@ -9004,6 +10197,133 @@
           </a:graphicData>
         </a:graphic>
       </p:graphicFrame>
+      <p:sp>
+        <p:nvSpPr>
+          <p:cNvPr id="4" name="Shape 1"/>
+          <p:cNvSpPr/>
+          <p:nvPr/>
+        </p:nvSpPr>
+        <p:spPr>
+          <a:xfrm>
+            <a:off x="7723327" y="91440"/>
+            <a:ext cx="3919728" cy="274320"/>
+          </a:xfrm>
+          <a:prstGeom prst="rect">
+            <a:avLst/>
+          </a:prstGeom>
+          <a:solidFill>
+            <a:srgbClr val="E0F2FE"/>
+          </a:solidFill>
+          <a:ln w="12700">
+            <a:solidFill>
+              <a:srgbClr val="0369A1"/>
+            </a:solidFill>
+            <a:prstDash val="solid"/>
+          </a:ln>
+        </p:spPr>
+      </p:sp>
+      <p:sp>
+        <p:nvSpPr>
+          <p:cNvPr id="5" name="Shape 2"/>
+          <p:cNvSpPr/>
+          <p:nvPr/>
+        </p:nvSpPr>
+        <p:spPr>
+          <a:xfrm>
+            <a:off x="7723327" y="91440"/>
+            <a:ext cx="73152" cy="274320"/>
+          </a:xfrm>
+          <a:prstGeom prst="rect">
+            <a:avLst/>
+          </a:prstGeom>
+          <a:solidFill>
+            <a:srgbClr val="0369A1"/>
+          </a:solidFill>
+          <a:ln w="12700">
+            <a:solidFill>
+              <a:srgbClr val="0369A1"/>
+            </a:solidFill>
+            <a:prstDash val="solid"/>
+          </a:ln>
+        </p:spPr>
+      </p:sp>
+      <p:pic>
+        <p:nvPicPr>
+          <p:cNvPr id="6" name="Image 0" descr="preencoded.png">    </p:cNvPr>
+          <p:cNvPicPr>
+            <a:picLocks noChangeAspect="1"/>
+          </p:cNvPicPr>
+          <p:nvPr/>
+        </p:nvPicPr>
+        <p:blipFill>
+          <a:blip r:embed="rId1"/>
+          <a:stretch>
+            <a:fillRect/>
+          </a:stretch>
+        </p:blipFill>
+        <p:spPr>
+          <a:xfrm>
+            <a:off x="7851343" y="128016"/>
+            <a:ext cx="201168" cy="201168"/>
+          </a:xfrm>
+          <a:prstGeom prst="rect">
+            <a:avLst/>
+          </a:prstGeom>
+        </p:spPr>
+      </p:pic>
+      <p:sp>
+        <p:nvSpPr>
+          <p:cNvPr id="7" name="Text 3"/>
+          <p:cNvSpPr txBox="1"/>
+          <p:nvPr/>
+        </p:nvSpPr>
+        <p:spPr>
+          <a:xfrm>
+            <a:off x="8107375" y="91440"/>
+            <a:ext cx="3499104" cy="274320"/>
+          </a:xfrm>
+          <a:prstGeom prst="rect">
+            <a:avLst/>
+          </a:prstGeom>
+          <a:noFill/>
+          <a:ln/>
+        </p:spPr>
+        <p:txBody>
+          <a:bodyPr wrap="square" lIns="0" tIns="0" rIns="0" bIns="0" rtlCol="0" anchor="ctr"/>
+          <a:lstStyle/>
+          <a:p>
+            <a:pPr indent="0" marL="0">
+              <a:buNone/>
+            </a:pPr>
+            <a:r>
+              <a:rPr lang="en-US" sz="1100" b="1" dirty="0">
+                <a:solidFill>
+                  <a:srgbClr val="075985"/>
+                </a:solidFill>
+                <a:latin typeface="Calibri" pitchFamily="34" charset="0"/>
+                <a:ea typeface="Calibri" pitchFamily="34" charset="-122"/>
+                <a:cs typeface="Calibri" pitchFamily="34" charset="-120"/>
+              </a:rPr>
+              <a:t>DA COMPRENDERE OGGI</a:t>
+            </a:r>
+            <a:pPr indent="0" marL="0">
+              <a:buNone/>
+            </a:pPr>
+            <a:r>
+              <a:rPr lang="en-US" sz="1100" dirty="0">
+                <a:solidFill>
+                  <a:srgbClr val="075985"/>
+                </a:solidFill>
+                <a:latin typeface="Calibri" pitchFamily="34" charset="0"/>
+                <a:ea typeface="Calibri" pitchFamily="34" charset="-122"/>
+                <a:cs typeface="Calibri" pitchFamily="34" charset="-120"/>
+              </a:rPr>
+              <a:t> · acceleratori GPU e FPGA</a:t>
+            </a:r>
+            <a:endParaRPr lang="en-US" sz="1100" dirty="0"/>
+          </a:p>
+        </p:txBody>
+      </p:sp>
       <p:sp>
         <p:nvSpPr>
           <p:cNvPr id="25" name="Slide Number Placeholder 0"/>
@@ -15339,6 +16659,133 @@
       </p:sp>
       <p:sp>
         <p:nvSpPr>
+          <p:cNvPr id="14" name="Shape 12"/>
+          <p:cNvSpPr/>
+          <p:nvPr/>
+        </p:nvSpPr>
+        <p:spPr>
+          <a:xfrm>
+            <a:off x="7329373" y="91440"/>
+            <a:ext cx="4313682" cy="274320"/>
+          </a:xfrm>
+          <a:prstGeom prst="rect">
+            <a:avLst/>
+          </a:prstGeom>
+          <a:solidFill>
+            <a:srgbClr val="E0F2FE"/>
+          </a:solidFill>
+          <a:ln w="12700">
+            <a:solidFill>
+              <a:srgbClr val="0369A1"/>
+            </a:solidFill>
+            <a:prstDash val="solid"/>
+          </a:ln>
+        </p:spPr>
+      </p:sp>
+      <p:sp>
+        <p:nvSpPr>
+          <p:cNvPr id="15" name="Shape 13"/>
+          <p:cNvSpPr/>
+          <p:nvPr/>
+        </p:nvSpPr>
+        <p:spPr>
+          <a:xfrm>
+            <a:off x="7329373" y="91440"/>
+            <a:ext cx="73152" cy="274320"/>
+          </a:xfrm>
+          <a:prstGeom prst="rect">
+            <a:avLst/>
+          </a:prstGeom>
+          <a:solidFill>
+            <a:srgbClr val="0369A1"/>
+          </a:solidFill>
+          <a:ln w="12700">
+            <a:solidFill>
+              <a:srgbClr val="0369A1"/>
+            </a:solidFill>
+            <a:prstDash val="solid"/>
+          </a:ln>
+        </p:spPr>
+      </p:sp>
+      <p:pic>
+        <p:nvPicPr>
+          <p:cNvPr id="16" name="Image 0" descr="preencoded.png">    </p:cNvPr>
+          <p:cNvPicPr>
+            <a:picLocks noChangeAspect="1"/>
+          </p:cNvPicPr>
+          <p:nvPr/>
+        </p:nvPicPr>
+        <p:blipFill>
+          <a:blip r:embed="rId1"/>
+          <a:stretch>
+            <a:fillRect/>
+          </a:stretch>
+        </p:blipFill>
+        <p:spPr>
+          <a:xfrm>
+            <a:off x="7457389" y="128016"/>
+            <a:ext cx="201168" cy="201168"/>
+          </a:xfrm>
+          <a:prstGeom prst="rect">
+            <a:avLst/>
+          </a:prstGeom>
+        </p:spPr>
+      </p:pic>
+      <p:sp>
+        <p:nvSpPr>
+          <p:cNvPr id="17" name="Text 14"/>
+          <p:cNvSpPr txBox="1"/>
+          <p:nvPr/>
+        </p:nvSpPr>
+        <p:spPr>
+          <a:xfrm>
+            <a:off x="7713421" y="91440"/>
+            <a:ext cx="3893058" cy="274320"/>
+          </a:xfrm>
+          <a:prstGeom prst="rect">
+            <a:avLst/>
+          </a:prstGeom>
+          <a:noFill/>
+          <a:ln/>
+        </p:spPr>
+        <p:txBody>
+          <a:bodyPr wrap="square" lIns="0" tIns="0" rIns="0" bIns="0" rtlCol="0" anchor="ctr"/>
+          <a:lstStyle/>
+          <a:p>
+            <a:pPr indent="0" marL="0">
+              <a:buNone/>
+            </a:pPr>
+            <a:r>
+              <a:rPr lang="en-US" sz="1100" b="1" dirty="0">
+                <a:solidFill>
+                  <a:srgbClr val="075985"/>
+                </a:solidFill>
+                <a:latin typeface="Calibri" pitchFamily="34" charset="0"/>
+                <a:ea typeface="Calibri" pitchFamily="34" charset="-122"/>
+                <a:cs typeface="Calibri" pitchFamily="34" charset="-120"/>
+              </a:rPr>
+              <a:t>DA COMPRENDERE OGGI</a:t>
+            </a:r>
+            <a:pPr indent="0" marL="0">
+              <a:buNone/>
+            </a:pPr>
+            <a:r>
+              <a:rPr lang="en-US" sz="1100" dirty="0">
+                <a:solidFill>
+                  <a:srgbClr val="075985"/>
+                </a:solidFill>
+                <a:latin typeface="Calibri" pitchFamily="34" charset="0"/>
+                <a:ea typeface="Calibri" pitchFamily="34" charset="-122"/>
+                <a:cs typeface="Calibri" pitchFamily="34" charset="-120"/>
+              </a:rPr>
+              <a:t> · l'equazione delle prestazioni</a:t>
+            </a:r>
+            <a:endParaRPr lang="en-US" sz="1100" dirty="0"/>
+          </a:p>
+        </p:txBody>
+      </p:sp>
+      <p:sp>
+        <p:nvSpPr>
           <p:cNvPr id="25" name="Slide Number Placeholder 0"/>
           <p:cNvSpPr>
             <a:spLocks noGrp="1"/>
@@ -15888,6 +17335,133 @@
               <a:t>la fine del pasto gratis: i clock si fermano a pochi gigahertz, i core si moltiplicano</a:t>
             </a:r>
             <a:endParaRPr lang="en-US" sz="1900" dirty="0"/>
+          </a:p>
+        </p:txBody>
+      </p:sp>
+      <p:sp>
+        <p:nvSpPr>
+          <p:cNvPr id="16" name="Shape 14"/>
+          <p:cNvSpPr/>
+          <p:nvPr/>
+        </p:nvSpPr>
+        <p:spPr>
+          <a:xfrm>
+            <a:off x="7329373" y="91440"/>
+            <a:ext cx="4313682" cy="274320"/>
+          </a:xfrm>
+          <a:prstGeom prst="rect">
+            <a:avLst/>
+          </a:prstGeom>
+          <a:solidFill>
+            <a:srgbClr val="E0F2FE"/>
+          </a:solidFill>
+          <a:ln w="12700">
+            <a:solidFill>
+              <a:srgbClr val="0369A1"/>
+            </a:solidFill>
+            <a:prstDash val="solid"/>
+          </a:ln>
+        </p:spPr>
+      </p:sp>
+      <p:sp>
+        <p:nvSpPr>
+          <p:cNvPr id="17" name="Shape 15"/>
+          <p:cNvSpPr/>
+          <p:nvPr/>
+        </p:nvSpPr>
+        <p:spPr>
+          <a:xfrm>
+            <a:off x="7329373" y="91440"/>
+            <a:ext cx="73152" cy="274320"/>
+          </a:xfrm>
+          <a:prstGeom prst="rect">
+            <a:avLst/>
+          </a:prstGeom>
+          <a:solidFill>
+            <a:srgbClr val="0369A1"/>
+          </a:solidFill>
+          <a:ln w="12700">
+            <a:solidFill>
+              <a:srgbClr val="0369A1"/>
+            </a:solidFill>
+            <a:prstDash val="solid"/>
+          </a:ln>
+        </p:spPr>
+      </p:sp>
+      <p:pic>
+        <p:nvPicPr>
+          <p:cNvPr id="18" name="Image 0" descr="preencoded.png">    </p:cNvPr>
+          <p:cNvPicPr>
+            <a:picLocks noChangeAspect="1"/>
+          </p:cNvPicPr>
+          <p:nvPr/>
+        </p:nvPicPr>
+        <p:blipFill>
+          <a:blip r:embed="rId1"/>
+          <a:stretch>
+            <a:fillRect/>
+          </a:stretch>
+        </p:blipFill>
+        <p:spPr>
+          <a:xfrm>
+            <a:off x="7457389" y="128016"/>
+            <a:ext cx="201168" cy="201168"/>
+          </a:xfrm>
+          <a:prstGeom prst="rect">
+            <a:avLst/>
+          </a:prstGeom>
+        </p:spPr>
+      </p:pic>
+      <p:sp>
+        <p:nvSpPr>
+          <p:cNvPr id="19" name="Text 16"/>
+          <p:cNvSpPr txBox="1"/>
+          <p:nvPr/>
+        </p:nvSpPr>
+        <p:spPr>
+          <a:xfrm>
+            <a:off x="7713421" y="91440"/>
+            <a:ext cx="3893058" cy="274320"/>
+          </a:xfrm>
+          <a:prstGeom prst="rect">
+            <a:avLst/>
+          </a:prstGeom>
+          <a:noFill/>
+          <a:ln/>
+        </p:spPr>
+        <p:txBody>
+          <a:bodyPr wrap="square" lIns="0" tIns="0" rIns="0" bIns="0" rtlCol="0" anchor="ctr"/>
+          <a:lstStyle/>
+          <a:p>
+            <a:pPr indent="0" marL="0">
+              <a:buNone/>
+            </a:pPr>
+            <a:r>
+              <a:rPr lang="en-US" sz="1100" b="1" dirty="0">
+                <a:solidFill>
+                  <a:srgbClr val="075985"/>
+                </a:solidFill>
+                <a:latin typeface="Calibri" pitchFamily="34" charset="0"/>
+                <a:ea typeface="Calibri" pitchFamily="34" charset="-122"/>
+                <a:cs typeface="Calibri" pitchFamily="34" charset="-120"/>
+              </a:rPr>
+              <a:t>DA COMPRENDERE OGGI</a:t>
+            </a:r>
+            <a:pPr indent="0" marL="0">
+              <a:buNone/>
+            </a:pPr>
+            <a:r>
+              <a:rPr lang="en-US" sz="1100" dirty="0">
+                <a:solidFill>
+                  <a:srgbClr val="075985"/>
+                </a:solidFill>
+                <a:latin typeface="Calibri" pitchFamily="34" charset="0"/>
+                <a:ea typeface="Calibri" pitchFamily="34" charset="-122"/>
+                <a:cs typeface="Calibri" pitchFamily="34" charset="-120"/>
+              </a:rPr>
+              <a:t> · l'equazione delle prestazioni</a:t>
+            </a:r>
+            <a:endParaRPr lang="en-US" sz="1100" dirty="0"/>
           </a:p>
         </p:txBody>
       </p:sp>
@@ -17409,6 +18983,133 @@
       </p:graphicFrame>
       <p:sp>
         <p:nvSpPr>
+          <p:cNvPr id="4" name="Shape 1"/>
+          <p:cNvSpPr/>
+          <p:nvPr/>
+        </p:nvSpPr>
+        <p:spPr>
+          <a:xfrm>
+            <a:off x="7592009" y="91440"/>
+            <a:ext cx="4051046" cy="274320"/>
+          </a:xfrm>
+          <a:prstGeom prst="rect">
+            <a:avLst/>
+          </a:prstGeom>
+          <a:solidFill>
+            <a:srgbClr val="E0F2FE"/>
+          </a:solidFill>
+          <a:ln w="12700">
+            <a:solidFill>
+              <a:srgbClr val="0369A1"/>
+            </a:solidFill>
+            <a:prstDash val="solid"/>
+          </a:ln>
+        </p:spPr>
+      </p:sp>
+      <p:sp>
+        <p:nvSpPr>
+          <p:cNvPr id="5" name="Shape 2"/>
+          <p:cNvSpPr/>
+          <p:nvPr/>
+        </p:nvSpPr>
+        <p:spPr>
+          <a:xfrm>
+            <a:off x="7592009" y="91440"/>
+            <a:ext cx="73152" cy="274320"/>
+          </a:xfrm>
+          <a:prstGeom prst="rect">
+            <a:avLst/>
+          </a:prstGeom>
+          <a:solidFill>
+            <a:srgbClr val="0369A1"/>
+          </a:solidFill>
+          <a:ln w="12700">
+            <a:solidFill>
+              <a:srgbClr val="0369A1"/>
+            </a:solidFill>
+            <a:prstDash val="solid"/>
+          </a:ln>
+        </p:spPr>
+      </p:sp>
+      <p:pic>
+        <p:nvPicPr>
+          <p:cNvPr id="6" name="Image 0" descr="preencoded.png">    </p:cNvPr>
+          <p:cNvPicPr>
+            <a:picLocks noChangeAspect="1"/>
+          </p:cNvPicPr>
+          <p:nvPr/>
+        </p:nvPicPr>
+        <p:blipFill>
+          <a:blip r:embed="rId1"/>
+          <a:stretch>
+            <a:fillRect/>
+          </a:stretch>
+        </p:blipFill>
+        <p:spPr>
+          <a:xfrm>
+            <a:off x="7720025" y="128016"/>
+            <a:ext cx="201168" cy="201168"/>
+          </a:xfrm>
+          <a:prstGeom prst="rect">
+            <a:avLst/>
+          </a:prstGeom>
+        </p:spPr>
+      </p:pic>
+      <p:sp>
+        <p:nvSpPr>
+          <p:cNvPr id="7" name="Text 3"/>
+          <p:cNvSpPr txBox="1"/>
+          <p:nvPr/>
+        </p:nvSpPr>
+        <p:spPr>
+          <a:xfrm>
+            <a:off x="7976057" y="91440"/>
+            <a:ext cx="3630422" cy="274320"/>
+          </a:xfrm>
+          <a:prstGeom prst="rect">
+            <a:avLst/>
+          </a:prstGeom>
+          <a:noFill/>
+          <a:ln/>
+        </p:spPr>
+        <p:txBody>
+          <a:bodyPr wrap="square" lIns="0" tIns="0" rIns="0" bIns="0" rtlCol="0" anchor="ctr"/>
+          <a:lstStyle/>
+          <a:p>
+            <a:pPr indent="0" marL="0">
+              <a:buNone/>
+            </a:pPr>
+            <a:r>
+              <a:rPr lang="en-US" sz="1100" b="1" dirty="0">
+                <a:solidFill>
+                  <a:srgbClr val="075985"/>
+                </a:solidFill>
+                <a:latin typeface="Calibri" pitchFamily="34" charset="0"/>
+                <a:ea typeface="Calibri" pitchFamily="34" charset="-122"/>
+                <a:cs typeface="Calibri" pitchFamily="34" charset="-120"/>
+              </a:rPr>
+              <a:t>DA COMPRENDERE OGGI</a:t>
+            </a:r>
+            <a:pPr indent="0" marL="0">
+              <a:buNone/>
+            </a:pPr>
+            <a:r>
+              <a:rPr lang="en-US" sz="1100" dirty="0">
+                <a:solidFill>
+                  <a:srgbClr val="075985"/>
+                </a:solidFill>
+                <a:latin typeface="Calibri" pitchFamily="34" charset="0"/>
+                <a:ea typeface="Calibri" pitchFamily="34" charset="-122"/>
+                <a:cs typeface="Calibri" pitchFamily="34" charset="-120"/>
+              </a:rPr>
+              <a:t> · i processori superscalari</a:t>
+            </a:r>
+            <a:endParaRPr lang="en-US" sz="1100" dirty="0"/>
+          </a:p>
+        </p:txBody>
+      </p:sp>
+      <p:sp>
+        <p:nvSpPr>
           <p:cNvPr id="25" name="Slide Number Placeholder 0"/>
           <p:cNvSpPr>
             <a:spLocks noGrp="1"/>
@@ -18206,6 +19907,133 @@
       </p:sp>
       <p:sp>
         <p:nvSpPr>
+          <p:cNvPr id="22" name="Shape 20"/>
+          <p:cNvSpPr/>
+          <p:nvPr/>
+        </p:nvSpPr>
+        <p:spPr>
+          <a:xfrm>
+            <a:off x="7592009" y="91440"/>
+            <a:ext cx="4051046" cy="274320"/>
+          </a:xfrm>
+          <a:prstGeom prst="rect">
+            <a:avLst/>
+          </a:prstGeom>
+          <a:solidFill>
+            <a:srgbClr val="E0F2FE"/>
+          </a:solidFill>
+          <a:ln w="12700">
+            <a:solidFill>
+              <a:srgbClr val="0369A1"/>
+            </a:solidFill>
+            <a:prstDash val="solid"/>
+          </a:ln>
+        </p:spPr>
+      </p:sp>
+      <p:sp>
+        <p:nvSpPr>
+          <p:cNvPr id="23" name="Shape 21"/>
+          <p:cNvSpPr/>
+          <p:nvPr/>
+        </p:nvSpPr>
+        <p:spPr>
+          <a:xfrm>
+            <a:off x="7592009" y="91440"/>
+            <a:ext cx="73152" cy="274320"/>
+          </a:xfrm>
+          <a:prstGeom prst="rect">
+            <a:avLst/>
+          </a:prstGeom>
+          <a:solidFill>
+            <a:srgbClr val="0369A1"/>
+          </a:solidFill>
+          <a:ln w="12700">
+            <a:solidFill>
+              <a:srgbClr val="0369A1"/>
+            </a:solidFill>
+            <a:prstDash val="solid"/>
+          </a:ln>
+        </p:spPr>
+      </p:sp>
+      <p:pic>
+        <p:nvPicPr>
+          <p:cNvPr id="24" name="Image 0" descr="preencoded.png">    </p:cNvPr>
+          <p:cNvPicPr>
+            <a:picLocks noChangeAspect="1"/>
+          </p:cNvPicPr>
+          <p:nvPr/>
+        </p:nvPicPr>
+        <p:blipFill>
+          <a:blip r:embed="rId1"/>
+          <a:stretch>
+            <a:fillRect/>
+          </a:stretch>
+        </p:blipFill>
+        <p:spPr>
+          <a:xfrm>
+            <a:off x="7720025" y="128016"/>
+            <a:ext cx="201168" cy="201168"/>
+          </a:xfrm>
+          <a:prstGeom prst="rect">
+            <a:avLst/>
+          </a:prstGeom>
+        </p:spPr>
+      </p:pic>
+      <p:sp>
+        <p:nvSpPr>
+          <p:cNvPr id="25" name="Text 22"/>
+          <p:cNvSpPr txBox="1"/>
+          <p:nvPr/>
+        </p:nvSpPr>
+        <p:spPr>
+          <a:xfrm>
+            <a:off x="7976057" y="91440"/>
+            <a:ext cx="3630422" cy="274320"/>
+          </a:xfrm>
+          <a:prstGeom prst="rect">
+            <a:avLst/>
+          </a:prstGeom>
+          <a:noFill/>
+          <a:ln/>
+        </p:spPr>
+        <p:txBody>
+          <a:bodyPr wrap="square" lIns="0" tIns="0" rIns="0" bIns="0" rtlCol="0" anchor="ctr"/>
+          <a:lstStyle/>
+          <a:p>
+            <a:pPr indent="0" marL="0">
+              <a:buNone/>
+            </a:pPr>
+            <a:r>
+              <a:rPr lang="en-US" sz="1100" b="1" dirty="0">
+                <a:solidFill>
+                  <a:srgbClr val="075985"/>
+                </a:solidFill>
+                <a:latin typeface="Calibri" pitchFamily="34" charset="0"/>
+                <a:ea typeface="Calibri" pitchFamily="34" charset="-122"/>
+                <a:cs typeface="Calibri" pitchFamily="34" charset="-120"/>
+              </a:rPr>
+              <a:t>DA COMPRENDERE OGGI</a:t>
+            </a:r>
+            <a:pPr indent="0" marL="0">
+              <a:buNone/>
+            </a:pPr>
+            <a:r>
+              <a:rPr lang="en-US" sz="1100" dirty="0">
+                <a:solidFill>
+                  <a:srgbClr val="075985"/>
+                </a:solidFill>
+                <a:latin typeface="Calibri" pitchFamily="34" charset="0"/>
+                <a:ea typeface="Calibri" pitchFamily="34" charset="-122"/>
+                <a:cs typeface="Calibri" pitchFamily="34" charset="-120"/>
+              </a:rPr>
+              <a:t> · i processori superscalari</a:t>
+            </a:r>
+            <a:endParaRPr lang="en-US" sz="1100" dirty="0"/>
+          </a:p>
+        </p:txBody>
+      </p:sp>
+      <p:sp>
+        <p:nvSpPr>
           <p:cNvPr id="25" name="Slide Number Placeholder 0"/>
           <p:cNvSpPr>
             <a:spLocks noGrp="1"/>
@@ -18755,6 +20583,133 @@
               <a:t>bnez t1, 1b è preso 959 volte e non preso una: un predittore lo impara nei primi giri</a:t>
             </a:r>
             <a:endParaRPr lang="en-US" sz="1900" dirty="0"/>
+          </a:p>
+        </p:txBody>
+      </p:sp>
+      <p:sp>
+        <p:nvSpPr>
+          <p:cNvPr id="16" name="Shape 14"/>
+          <p:cNvSpPr/>
+          <p:nvPr/>
+        </p:nvSpPr>
+        <p:spPr>
+          <a:xfrm>
+            <a:off x="7592009" y="91440"/>
+            <a:ext cx="4051046" cy="274320"/>
+          </a:xfrm>
+          <a:prstGeom prst="rect">
+            <a:avLst/>
+          </a:prstGeom>
+          <a:solidFill>
+            <a:srgbClr val="E0F2FE"/>
+          </a:solidFill>
+          <a:ln w="12700">
+            <a:solidFill>
+              <a:srgbClr val="0369A1"/>
+            </a:solidFill>
+            <a:prstDash val="solid"/>
+          </a:ln>
+        </p:spPr>
+      </p:sp>
+      <p:sp>
+        <p:nvSpPr>
+          <p:cNvPr id="17" name="Shape 15"/>
+          <p:cNvSpPr/>
+          <p:nvPr/>
+        </p:nvSpPr>
+        <p:spPr>
+          <a:xfrm>
+            <a:off x="7592009" y="91440"/>
+            <a:ext cx="73152" cy="274320"/>
+          </a:xfrm>
+          <a:prstGeom prst="rect">
+            <a:avLst/>
+          </a:prstGeom>
+          <a:solidFill>
+            <a:srgbClr val="0369A1"/>
+          </a:solidFill>
+          <a:ln w="12700">
+            <a:solidFill>
+              <a:srgbClr val="0369A1"/>
+            </a:solidFill>
+            <a:prstDash val="solid"/>
+          </a:ln>
+        </p:spPr>
+      </p:sp>
+      <p:pic>
+        <p:nvPicPr>
+          <p:cNvPr id="18" name="Image 0" descr="preencoded.png">    </p:cNvPr>
+          <p:cNvPicPr>
+            <a:picLocks noChangeAspect="1"/>
+          </p:cNvPicPr>
+          <p:nvPr/>
+        </p:nvPicPr>
+        <p:blipFill>
+          <a:blip r:embed="rId1"/>
+          <a:stretch>
+            <a:fillRect/>
+          </a:stretch>
+        </p:blipFill>
+        <p:spPr>
+          <a:xfrm>
+            <a:off x="7720025" y="128016"/>
+            <a:ext cx="201168" cy="201168"/>
+          </a:xfrm>
+          <a:prstGeom prst="rect">
+            <a:avLst/>
+          </a:prstGeom>
+        </p:spPr>
+      </p:pic>
+      <p:sp>
+        <p:nvSpPr>
+          <p:cNvPr id="19" name="Text 16"/>
+          <p:cNvSpPr txBox="1"/>
+          <p:nvPr/>
+        </p:nvSpPr>
+        <p:spPr>
+          <a:xfrm>
+            <a:off x="7976057" y="91440"/>
+            <a:ext cx="3630422" cy="274320"/>
+          </a:xfrm>
+          <a:prstGeom prst="rect">
+            <a:avLst/>
+          </a:prstGeom>
+          <a:noFill/>
+          <a:ln/>
+        </p:spPr>
+        <p:txBody>
+          <a:bodyPr wrap="square" lIns="0" tIns="0" rIns="0" bIns="0" rtlCol="0" anchor="ctr"/>
+          <a:lstStyle/>
+          <a:p>
+            <a:pPr indent="0" marL="0">
+              <a:buNone/>
+            </a:pPr>
+            <a:r>
+              <a:rPr lang="en-US" sz="1100" b="1" dirty="0">
+                <a:solidFill>
+                  <a:srgbClr val="075985"/>
+                </a:solidFill>
+                <a:latin typeface="Calibri" pitchFamily="34" charset="0"/>
+                <a:ea typeface="Calibri" pitchFamily="34" charset="-122"/>
+                <a:cs typeface="Calibri" pitchFamily="34" charset="-120"/>
+              </a:rPr>
+              <a:t>DA COMPRENDERE OGGI</a:t>
+            </a:r>
+            <a:pPr indent="0" marL="0">
+              <a:buNone/>
+            </a:pPr>
+            <a:r>
+              <a:rPr lang="en-US" sz="1100" dirty="0">
+                <a:solidFill>
+                  <a:srgbClr val="075985"/>
+                </a:solidFill>
+                <a:latin typeface="Calibri" pitchFamily="34" charset="0"/>
+                <a:ea typeface="Calibri" pitchFamily="34" charset="-122"/>
+                <a:cs typeface="Calibri" pitchFamily="34" charset="-120"/>
+              </a:rPr>
+              <a:t> · i processori superscalari</a:t>
+            </a:r>
+            <a:endParaRPr lang="en-US" sz="1100" dirty="0"/>
           </a:p>
         </p:txBody>
       </p:sp>
@@ -20347,6 +22302,133 @@
       </p:graphicFrame>
       <p:sp>
         <p:nvSpPr>
+          <p:cNvPr id="4" name="Shape 1"/>
+          <p:cNvSpPr/>
+          <p:nvPr/>
+        </p:nvSpPr>
+        <p:spPr>
+          <a:xfrm>
+            <a:off x="7592009" y="91440"/>
+            <a:ext cx="4051046" cy="274320"/>
+          </a:xfrm>
+          <a:prstGeom prst="rect">
+            <a:avLst/>
+          </a:prstGeom>
+          <a:solidFill>
+            <a:srgbClr val="E0F2FE"/>
+          </a:solidFill>
+          <a:ln w="12700">
+            <a:solidFill>
+              <a:srgbClr val="0369A1"/>
+            </a:solidFill>
+            <a:prstDash val="solid"/>
+          </a:ln>
+        </p:spPr>
+      </p:sp>
+      <p:sp>
+        <p:nvSpPr>
+          <p:cNvPr id="5" name="Shape 2"/>
+          <p:cNvSpPr/>
+          <p:nvPr/>
+        </p:nvSpPr>
+        <p:spPr>
+          <a:xfrm>
+            <a:off x="7592009" y="91440"/>
+            <a:ext cx="73152" cy="274320"/>
+          </a:xfrm>
+          <a:prstGeom prst="rect">
+            <a:avLst/>
+          </a:prstGeom>
+          <a:solidFill>
+            <a:srgbClr val="0369A1"/>
+          </a:solidFill>
+          <a:ln w="12700">
+            <a:solidFill>
+              <a:srgbClr val="0369A1"/>
+            </a:solidFill>
+            <a:prstDash val="solid"/>
+          </a:ln>
+        </p:spPr>
+      </p:sp>
+      <p:pic>
+        <p:nvPicPr>
+          <p:cNvPr id="6" name="Image 0" descr="preencoded.png">    </p:cNvPr>
+          <p:cNvPicPr>
+            <a:picLocks noChangeAspect="1"/>
+          </p:cNvPicPr>
+          <p:nvPr/>
+        </p:nvPicPr>
+        <p:blipFill>
+          <a:blip r:embed="rId1"/>
+          <a:stretch>
+            <a:fillRect/>
+          </a:stretch>
+        </p:blipFill>
+        <p:spPr>
+          <a:xfrm>
+            <a:off x="7720025" y="128016"/>
+            <a:ext cx="201168" cy="201168"/>
+          </a:xfrm>
+          <a:prstGeom prst="rect">
+            <a:avLst/>
+          </a:prstGeom>
+        </p:spPr>
+      </p:pic>
+      <p:sp>
+        <p:nvSpPr>
+          <p:cNvPr id="7" name="Text 3"/>
+          <p:cNvSpPr txBox="1"/>
+          <p:nvPr/>
+        </p:nvSpPr>
+        <p:spPr>
+          <a:xfrm>
+            <a:off x="7976057" y="91440"/>
+            <a:ext cx="3630422" cy="274320"/>
+          </a:xfrm>
+          <a:prstGeom prst="rect">
+            <a:avLst/>
+          </a:prstGeom>
+          <a:noFill/>
+          <a:ln/>
+        </p:spPr>
+        <p:txBody>
+          <a:bodyPr wrap="square" lIns="0" tIns="0" rIns="0" bIns="0" rtlCol="0" anchor="ctr"/>
+          <a:lstStyle/>
+          <a:p>
+            <a:pPr indent="0" marL="0">
+              <a:buNone/>
+            </a:pPr>
+            <a:r>
+              <a:rPr lang="en-US" sz="1100" b="1" dirty="0">
+                <a:solidFill>
+                  <a:srgbClr val="075985"/>
+                </a:solidFill>
+                <a:latin typeface="Calibri" pitchFamily="34" charset="0"/>
+                <a:ea typeface="Calibri" pitchFamily="34" charset="-122"/>
+                <a:cs typeface="Calibri" pitchFamily="34" charset="-120"/>
+              </a:rPr>
+              <a:t>DA COMPRENDERE OGGI</a:t>
+            </a:r>
+            <a:pPr indent="0" marL="0">
+              <a:buNone/>
+            </a:pPr>
+            <a:r>
+              <a:rPr lang="en-US" sz="1100" dirty="0">
+                <a:solidFill>
+                  <a:srgbClr val="075985"/>
+                </a:solidFill>
+                <a:latin typeface="Calibri" pitchFamily="34" charset="0"/>
+                <a:ea typeface="Calibri" pitchFamily="34" charset="-122"/>
+                <a:cs typeface="Calibri" pitchFamily="34" charset="-120"/>
+              </a:rPr>
+              <a:t> · i processori superscalari</a:t>
+            </a:r>
+            <a:endParaRPr lang="en-US" sz="1100" dirty="0"/>
+          </a:p>
+        </p:txBody>
+      </p:sp>
+      <p:sp>
+        <p:nvSpPr>
           <p:cNvPr id="25" name="Slide Number Placeholder 0"/>
           <p:cNvSpPr>
             <a:spLocks noGrp="1"/>
@@ -20762,6 +22844,133 @@
               <a:t>Per questo un insieme di istruzioni imparato una volta è una conoscenza che dura</a:t>
             </a:r>
             <a:endParaRPr lang="en-US" sz="2400" dirty="0"/>
+          </a:p>
+        </p:txBody>
+      </p:sp>
+      <p:sp>
+        <p:nvSpPr>
+          <p:cNvPr id="12" name="Shape 10"/>
+          <p:cNvSpPr/>
+          <p:nvPr/>
+        </p:nvSpPr>
+        <p:spPr>
+          <a:xfrm>
+            <a:off x="7592009" y="91440"/>
+            <a:ext cx="4051046" cy="274320"/>
+          </a:xfrm>
+          <a:prstGeom prst="rect">
+            <a:avLst/>
+          </a:prstGeom>
+          <a:solidFill>
+            <a:srgbClr val="E0F2FE"/>
+          </a:solidFill>
+          <a:ln w="12700">
+            <a:solidFill>
+              <a:srgbClr val="0369A1"/>
+            </a:solidFill>
+            <a:prstDash val="solid"/>
+          </a:ln>
+        </p:spPr>
+      </p:sp>
+      <p:sp>
+        <p:nvSpPr>
+          <p:cNvPr id="13" name="Shape 11"/>
+          <p:cNvSpPr/>
+          <p:nvPr/>
+        </p:nvSpPr>
+        <p:spPr>
+          <a:xfrm>
+            <a:off x="7592009" y="91440"/>
+            <a:ext cx="73152" cy="274320"/>
+          </a:xfrm>
+          <a:prstGeom prst="rect">
+            <a:avLst/>
+          </a:prstGeom>
+          <a:solidFill>
+            <a:srgbClr val="0369A1"/>
+          </a:solidFill>
+          <a:ln w="12700">
+            <a:solidFill>
+              <a:srgbClr val="0369A1"/>
+            </a:solidFill>
+            <a:prstDash val="solid"/>
+          </a:ln>
+        </p:spPr>
+      </p:sp>
+      <p:pic>
+        <p:nvPicPr>
+          <p:cNvPr id="14" name="Image 0" descr="preencoded.png">    </p:cNvPr>
+          <p:cNvPicPr>
+            <a:picLocks noChangeAspect="1"/>
+          </p:cNvPicPr>
+          <p:nvPr/>
+        </p:nvPicPr>
+        <p:blipFill>
+          <a:blip r:embed="rId1"/>
+          <a:stretch>
+            <a:fillRect/>
+          </a:stretch>
+        </p:blipFill>
+        <p:spPr>
+          <a:xfrm>
+            <a:off x="7720025" y="128016"/>
+            <a:ext cx="201168" cy="201168"/>
+          </a:xfrm>
+          <a:prstGeom prst="rect">
+            <a:avLst/>
+          </a:prstGeom>
+        </p:spPr>
+      </p:pic>
+      <p:sp>
+        <p:nvSpPr>
+          <p:cNvPr id="15" name="Text 12"/>
+          <p:cNvSpPr txBox="1"/>
+          <p:nvPr/>
+        </p:nvSpPr>
+        <p:spPr>
+          <a:xfrm>
+            <a:off x="7976057" y="91440"/>
+            <a:ext cx="3630422" cy="274320"/>
+          </a:xfrm>
+          <a:prstGeom prst="rect">
+            <a:avLst/>
+          </a:prstGeom>
+          <a:noFill/>
+          <a:ln/>
+        </p:spPr>
+        <p:txBody>
+          <a:bodyPr wrap="square" lIns="0" tIns="0" rIns="0" bIns="0" rtlCol="0" anchor="ctr"/>
+          <a:lstStyle/>
+          <a:p>
+            <a:pPr indent="0" marL="0">
+              <a:buNone/>
+            </a:pPr>
+            <a:r>
+              <a:rPr lang="en-US" sz="1100" b="1" dirty="0">
+                <a:solidFill>
+                  <a:srgbClr val="075985"/>
+                </a:solidFill>
+                <a:latin typeface="Calibri" pitchFamily="34" charset="0"/>
+                <a:ea typeface="Calibri" pitchFamily="34" charset="-122"/>
+                <a:cs typeface="Calibri" pitchFamily="34" charset="-120"/>
+              </a:rPr>
+              <a:t>DA COMPRENDERE OGGI</a:t>
+            </a:r>
+            <a:pPr indent="0" marL="0">
+              <a:buNone/>
+            </a:pPr>
+            <a:r>
+              <a:rPr lang="en-US" sz="1100" dirty="0">
+                <a:solidFill>
+                  <a:srgbClr val="075985"/>
+                </a:solidFill>
+                <a:latin typeface="Calibri" pitchFamily="34" charset="0"/>
+                <a:ea typeface="Calibri" pitchFamily="34" charset="-122"/>
+                <a:cs typeface="Calibri" pitchFamily="34" charset="-120"/>
+              </a:rPr>
+              <a:t> · i processori superscalari</a:t>
+            </a:r>
+            <a:endParaRPr lang="en-US" sz="1100" dirty="0"/>
           </a:p>
         </p:txBody>
       </p:sp>

--- a/it/slides/24-Architettura_dei_Calcolatori-Superscalari_HPC_GPU_FPGA.pptx
+++ b/it/slides/24-Architettura_dei_Calcolatori-Superscalari_HPC_GPU_FPGA.pptx
@@ -126,19 +126,19 @@
   <p:extLst>
     <p:ext uri="{521415D9-36F7-43E2-AB2F-B90AF26B5E84}">
       <p14:sectionLst xmlns:p14="http://schemas.microsoft.com/office/powerpoint/2010/main">
-        <p14:section name="Apertura" id="{9c1e7f6b-c597-1d34-a9fa-681bf771907f}">
+        <p14:section name="Apertura" id="{b55e3dca-c53d-0f3d-ad44-7ace0da631bf}">
           <p14:sldIdLst>
             <p14:sldId id="256"/>
             <p14:sldId id="257"/>
           </p14:sldIdLst>
         </p14:section>
-        <p14:section name="Riscaldamento sulla macchina" id="{b40c2d98-c091-5ba3-5ecc-9da130954f86}">
+        <p14:section name="Riscaldamento sulla macchina" id="{174997e0-676b-f522-c900-300c9006e7d0}">
           <p14:sldIdLst>
             <p14:sldId id="258"/>
             <p14:sldId id="259"/>
           </p14:sldIdLst>
         </p14:section>
-        <p14:section name="Processori superscalari" id="{af03edf1-f678-33ed-7947-727bfa0d8e76}">
+        <p14:section name="Processori superscalari" id="{c7a3c27d-733f-f6b5-5b6e-03d25c2354bb}">
           <p14:sldIdLst>
             <p14:sldId id="260"/>
             <p14:sldId id="261"/>
@@ -147,7 +147,7 @@
             <p14:sldId id="264"/>
           </p14:sldIdLst>
         </p14:section>
-        <p14:section name="Calcolo ad alte prestazioni" id="{a6188c6c-8a33-70ff-ec90-e8854e6715c8}">
+        <p14:section name="Calcolo ad alte prestazioni" id="{7b72fa8e-753d-f447-325d-28aa3b94dc00}">
           <p14:sldIdLst>
             <p14:sldId id="265"/>
             <p14:sldId id="266"/>
@@ -155,18 +155,18 @@
             <p14:sldId id="268"/>
           </p14:sldIdLst>
         </p14:section>
-        <p14:section name="Acceleratori GPU" id="{ff25b7bb-0a59-3250-08c2-4248da65ec88}">
+        <p14:section name="Acceleratori GPU" id="{f925566b-07c9-1b36-3006-f3ac32add37a}">
           <p14:sldIdLst>
             <p14:sldId id="269"/>
           </p14:sldIdLst>
         </p14:section>
-        <p14:section name="Acceleratori FPGA" id="{4fcf8c68-80f5-b6c9-af3e-25f36a049ebf}">
+        <p14:section name="Acceleratori FPGA" id="{e272bdcc-cd2f-718c-6fa2-93ba8249f370}">
           <p14:sldIdLst>
             <p14:sldId id="270"/>
             <p14:sldId id="271"/>
           </p14:sldIdLst>
         </p14:section>
-        <p14:section name="Ritorno alla macchina" id="{bb871925-2af5-eab7-e2fa-5dfdaf1b51bc}">
+        <p14:section name="Ritorno alla macchina" id="{e850c590-ad89-d880-447d-18e23f5d4cb6}">
           <p14:sldIdLst>
             <p14:sldId id="272"/>
             <p14:sldId id="273"/>

--- a/it/slides/24-Architettura_dei_Calcolatori-Superscalari_HPC_GPU_FPGA.pptx
+++ b/it/slides/24-Architettura_dei_Calcolatori-Superscalari_HPC_GPU_FPGA.pptx
@@ -126,19 +126,19 @@
   <p:extLst>
     <p:ext uri="{521415D9-36F7-43E2-AB2F-B90AF26B5E84}">
       <p14:sectionLst xmlns:p14="http://schemas.microsoft.com/office/powerpoint/2010/main">
-        <p14:section name="Apertura" id="{b55e3dca-c53d-0f3d-ad44-7ace0da631bf}">
+        <p14:section name="Apertura" id="{63a2164d-a6c1-339f-a895-771fab47ff77}">
           <p14:sldIdLst>
             <p14:sldId id="256"/>
             <p14:sldId id="257"/>
           </p14:sldIdLst>
         </p14:section>
-        <p14:section name="Riscaldamento sulla macchina" id="{174997e0-676b-f522-c900-300c9006e7d0}">
+        <p14:section name="Riscaldamento sulla macchina" id="{687d74da-7ebe-7ece-035e-d516b9d8f507}">
           <p14:sldIdLst>
             <p14:sldId id="258"/>
             <p14:sldId id="259"/>
           </p14:sldIdLst>
         </p14:section>
-        <p14:section name="Processori superscalari" id="{c7a3c27d-733f-f6b5-5b6e-03d25c2354bb}">
+        <p14:section name="Processori superscalari" id="{acd58236-0674-028b-2d86-3c0e6871aab5}">
           <p14:sldIdLst>
             <p14:sldId id="260"/>
             <p14:sldId id="261"/>
@@ -147,7 +147,7 @@
             <p14:sldId id="264"/>
           </p14:sldIdLst>
         </p14:section>
-        <p14:section name="Calcolo ad alte prestazioni" id="{7b72fa8e-753d-f447-325d-28aa3b94dc00}">
+        <p14:section name="Calcolo ad alte prestazioni" id="{43238339-bf95-436d-1aa9-d4670addac1b}">
           <p14:sldIdLst>
             <p14:sldId id="265"/>
             <p14:sldId id="266"/>
@@ -155,18 +155,18 @@
             <p14:sldId id="268"/>
           </p14:sldIdLst>
         </p14:section>
-        <p14:section name="Acceleratori GPU" id="{f925566b-07c9-1b36-3006-f3ac32add37a}">
+        <p14:section name="Acceleratori GPU" id="{61466097-d39c-98ef-bb79-8908b0671794}">
           <p14:sldIdLst>
             <p14:sldId id="269"/>
           </p14:sldIdLst>
         </p14:section>
-        <p14:section name="Acceleratori FPGA" id="{e272bdcc-cd2f-718c-6fa2-93ba8249f370}">
+        <p14:section name="Acceleratori FPGA" id="{2c52bcc5-b7b1-636d-6cfd-7810bf5a601b}">
           <p14:sldIdLst>
             <p14:sldId id="270"/>
             <p14:sldId id="271"/>
           </p14:sldIdLst>
         </p14:section>
-        <p14:section name="Ritorno alla macchina" id="{e850c590-ad89-d880-447d-18e23f5d4cb6}">
+        <p14:section name="Ritorno alla macchina" id="{dcfb790d-fb46-fe8f-3ff9-1e5aba3703f2}">
           <p14:sldIdLst>
             <p14:sldId id="272"/>
             <p14:sldId id="273"/>
@@ -578,7 +578,7 @@
           <a:p>
             <a:r>
               <a:rPr lang="en-US" dirty="0"/>
-              <a:t>L'ultima lezione guarda oltre il kit. Tutto ciò che avete imparato lo avete imparato su un piccolo processore che esegue un'istruzione alla volta. Le macchine che prevedono il tempo o addestrano una rete neurale eseguono lo stesso tipo di istruzioni, in numero enorme e tutte insieme. La lezione prende un piccolo ciclo di Verm1 e lo segue su quattro tipi di macchina. La domanda di Cray su buoi e polli tornerà: non ha una risposta unica. Questa lezione è uno sguardo in avanti, e non fa parte della prova intercorso.
+              <a:t>L'ultima lezione guarda oltre il kit. Tutto ciò che si è imparato finora lo si è imparato su un piccolo processore che esegue un'istruzione alla volta. Le macchine che prevedono il tempo o addestrano una rete neurale eseguono istruzioni dello stesso tipo, in numero enorme e contemporaneamente. La lezione prende un piccolo ciclo di Verm1 e lo segue su quattro classi di macchine, così che l'intero panorama del calcolo ad alte prestazioni si veda attraverso un solo esempio familiare. La domanda di Seymour Cray su buoi e galline tornerà, e non ha una risposta unica. Questa lezione è uno sguardo d'insieme e non fa parte della prova intercorso.
 Stato di apprendimento: DA COMPRENDERE OGGI, alla fine di questa lezione lo spiegate, lo seguite passo passo e lo applicate da soli; DA UTILIZZARE OGGI, oggi seguite e usate la ricetta; come funziona dentro si spiega più avanti, o non fa parte del corso; DA COMPRENDERE PIÙ AVANTI, riconoscete il nome e lo scopo; lo spiega una lezione successiva. Una slide senza etichetta è contesto: una storia, un esempio, una domanda, un esercizio.
 Stato di apprendimento di questa lezione. DA COMPRENDERE OGGI: l'equazione delle prestazioni; i processori superscalari; le istruzioni vettoriali; HPC e legge di Amdahl; acceleratori GPU e FPGA. DA UTILIZZARE OGGI: il programma completo, gli strumenti di PRG32 (si usa, non si studia, in questo corso). DA COMPRENDERE PIÙ AVANTI: niente. Una slide senza etichetta è contesto: una storia, un esempio, una domanda, un esercizio.
 Per il docente: Lezione conclusiva e di prospettiva, nuova nel 2026/27: non ha una presentazione italiana di origine. Parte da un ciclo di Verm1 e lo segue su quattro tipi di macchina. Prepara la visita ai sistemi di supercalcolo del Dipartimento. Non fa parte della prova intercorso. I listati vettoriali RISC-V sono provati su QEMU (tools/tests/vector_qemu.S); i frammenti CUDA e Verilog sono forme standard da manuale, non compilate per queste slide. Le cifre sui supercalcolatori sono arrotondate e risalgono alle liste TOP500 dal 2022 al 2025: controllate la lista corrente prima della lezione.</a:t>
@@ -669,7 +669,7 @@
           <a:p>
             <a:r>
               <a:rPr lang="en-US" dirty="0"/>
-              <a:t>Un supercalcolatore non è un unico processore enorme: sono migliaia di calcolatori normali, i nodi, che lavorano allo stesso problema. Ogni nodo ha uno o due processori con decine di core, spesso più GPU, e molta memoria. Una rete molto veloce unisce i nodi, e un file system parallelo li serve tutti. La velocità si misura in operazioni in virgola mobile al secondo su un problema standard, e la lista TOP500 classifica le macchine più veloci dal 1993. La foto mostra armadi di nodi delle Research Computing Facilities dell'Ateneo.
+              <a:t>Un supercalcolatore non è un unico enorme processore ma migliaia di calcolatori ordinari, i nodi, che lavorano sullo stesso problema. Ogni nodo ha uno o due processori con decine di core, spesso più GPU, e memoria abbondante. Una rete molto veloce collega i nodi, e un file system parallelo li serve tutti. Le prestazioni si misurano in operazioni in virgola mobile al secondo su un benchmark standard, e la lista TOP500 classifica le macchine più veloci dal 1993. L'immagine mostra rack di nodi delle Research Computing Facilities dell'Ateneo, incontrate nella Lezione 03.
 DA COMPRENDERE OGGI: HPC e legge di Amdahl.
 Per il docente: Il benchmark è HPL, High-Performance Linpack.</a:t>
             </a:r>
@@ -759,7 +759,7 @@
           <a:p>
             <a:r>
               <a:rPr lang="en-US" dirty="0"/>
-              <a:t>La legge di Amdahl dice quanto può dare il parallelismo. Se una frazione p del lavoro si può svolgere in parallelo e il resto no, con n processori lo speed-up è 1 diviso la parte seriale più la parte parallela divisa per n. La parte seriale non si riduce per quanti processori si aggiungano. Con p uguale a 0,9 lo speed-up non può mai superare 10. La lezione pratica: prima di comprare processori, misurate p.
+              <a:t>La legge di Amdahl dice quanto può dare il parallelismo. Se una frazione p del lavoro si può parallelizzare e il resto no, lo speed-up con n processori è 1 / ((1 - p) + p / n). La parte seriale non si riduce per quanti processori si aggiungano, quindi lo speed-up è limitato da 1 / (1 - p): con p = 0,9 non può mai superare 10. La lezione pratica è misurare p prima di acquistare processori, e riconoscere che ridurre la frazione seriale vale spesso più che aggiungere hardware.
 DA COMPRENDERE OGGI: HPC e legge di Amdahl.
 Per il docente: Gene Amdahl, 1967. La stessa legge vale per ogni miglioramento che si applica solo a una parte del lavoro: una GPU più veloce non aiuta la parte che gira sulla CPU.</a:t>
             </a:r>
@@ -849,7 +849,7 @@
           <a:p>
             <a:r>
               <a:rPr lang="en-US" dirty="0"/>
-              <a:t>Due modi di dividere il lavoro. Con la memoria condivisa, più core dello stesso nodo vedono la stessa memoria, e il programma gira come thread che leggono e scrivono le stesse variabili; è facile cominciare, e il pericolo sono due thread che scrivono la stessa variabile. Con la memoria distribuita ogni nodo ha la propria memoria, e il programma gira come processi che si scambiano messaggi, con lo standard MPI; scala fino a un milione di core, a spese del programmatore. Le applicazioni reali usano entrambi.
+              <a:t>Due modelli per condividere il lavoro. Con la memoria condivisa, più core dello stesso nodo vedono la stessa memoria, e il programma gira come thread che leggono e scrivono variabili comuni; è facile cominciare, e il suo pericolo caratteristico sono due thread che scrivono la stessa variabile. Con la memoria distribuita ogni nodo ha la sua memoria, e il programma gira come processi che si scambiano messaggi, secondo lo standard MPI; scala fino a un milione di core, al prezzo di un maggiore sforzo da parte del programmatore. Le applicazioni reali combinano i due.
 DA COMPRENDERE OGGI: HPC e legge di Amdahl.
 Per il docente: Le applicazioni reali usano entrambi: MPI tra i nodi, thread e GPU dentro ogni nodo. I modelli meteorologici e marini del Dipartimento funzionano così.</a:t>
             </a:r>
@@ -939,7 +939,7 @@
           <a:p>
             <a:r>
               <a:rPr lang="en-US" dirty="0"/>
-              <a:t>Il limite è l'energia. Una macchina exascale assorbe circa venti megawatt, il consumo di una piccola città, e l'elettricità della sua vita utile costa quanto la macchina. Quindi la cifra che conta sono le operazioni per watt, che hanno una classifica propria, la Green500. La guida l'hardware specializzato, perché fa di più con ogni joule. La stessa ragione, all'altro estremo della scala, mette un piccolo core RISC-V nel vostro kit.
+              <a:t>Il vincolo decisivo è l'energia. Una macchina exascale assorbe circa venti megawatt, il consumo di una piccola città, e l'elettricità usata nella sua vita costa quanto la macchina stessa. La cifra che conta è quindi operazioni per watt, che ha una propria classifica, la Green500. In testa c'è l'hardware specializzato, perché ottiene di più da ogni joule. Lo stesso ragionamento, all'estremo opposto della scala, mette un piccolo core RISC-V nel kit.
 DA COMPRENDERE OGGI: HPC e legge di Amdahl.
 Per il docente: Frontier ha raggiunto il suo exaflop a circa 21 megawatt. L'efficienza energetica è il filo che lega un microcontrollore a un supercalcolatore.</a:t>
             </a:r>
@@ -1029,7 +1029,7 @@
           <a:p>
             <a:r>
               <a:rPr lang="en-US" dirty="0"/>
-              <a:t>Due modi di spendere gli stessi transistor. Una CPU ha pochi core grandi, ciascuno fuori ordine, con predittori e grandi cache: è costruita per finire un compito il prima possibile, ed è a suo agio con salti e dati irregolari. Una GPU ha migliaia di core piccoli e semplici che eseguono lo stesso codice su dati diversi: è costruita per finire moltissimi compiti al secondo, ed è a suo agio con array regolari. Buoi e polli: la risposta dipende dal campo.
+              <a:t>Due modi di spendere gli stessi transistor. Una CPU ha pochi core grandi, ciascuno fuori ordine, con predittori e cache ampie; è progettata per completare un singolo compito il più in fretta possibile, e gestisce bene salti e dati irregolari. Una GPU ha migliaia di core piccoli e semplici che eseguono lo stesso codice su dati diversi; è progettata per completare un numero molto grande di compiti al secondo, ed eccelle sugli array regolari. Buoi e galline: quale sia preferibile dipende dal campo da arare.
 DA COMPRENDERE OGGI: acceleratori GPU e FPGA.
 Per il docente: La Lezione 20 ha raccontato la storia dalla scheda video al GPGPU. I buoi e i polli di Cray: la risposta dipende dal campo. La GPU non è più veloce in nessuna singola cosa; fa più cose insieme.</a:t>
             </a:r>
@@ -1119,7 +1119,7 @@
           <a:p>
             <a:r>
               <a:rPr lang="en-US" dirty="0"/>
-              <a:t>Una FPGA, field-programmable gate array, è un chip che diventa il circuito che descrivete. Dentro c'è un mare di piccoli blocchi: tabelle di look-up, ciascuna capace di essere qualunque funzione di pochi ingressi; un flip-flop accanto a ogni tabella; e fili con interruttori che possono collegare ogni blocco a ogni altro. Un file di configurazione, il bitstream, imposta ogni tabella e ogni interruttore. Caricate un altro bitstream e lo stesso chip è un circuito diverso. Non esegue un programma: è un circuito.
+              <a:t>Una FPGA, un array di porte programmabile sul campo, è un chip che diventa il circuito che si descrive. Internamente è un mare di piccoli blocchi: tabelle di consultazione, ciascuna capace di realizzare qualsiasi funzione di pochi ingressi, cioè una tavola di verità tenuta in memoria; un flip-flop accanto a ogni tabella; e fili con interruttori capaci di collegare qualsiasi blocco a qualsiasi altro. Un file di configurazione, il bitstream, imposta ogni tabella e interruttore. Caricando un altro bitstream lo stesso chip diventa un circuito diverso. Non esegue un programma: è un circuito, che unisce le macchine combinatorie e sequenziali del corso in un solo dispositivo riconfigurabile.
 DA COMPRENDERE OGGI: acceleratori GPU e FPGA.
 Per il docente: Lo Xilinx XC2064, 1985. Una FPGA non esegue un programma: diventa un circuito. Nulla viene prelevato o decodificato; tutte le porte lavorano nello stesso momento.
 Immagini: Mojo v3 FPGA Development Board (9303578174).jpg, SparkFun Electronics, CC BY 2.0, Wikimedia Commons.</a:t>
@@ -1210,7 +1210,7 @@
           <a:p>
             <a:r>
               <a:rPr lang="en-US" dirty="0"/>
-              <a:t>Quattro modi di calcolare, a confronto. Leggete la tabella per righe. Una CPU sono pochi core complessi, programmati in qualunque linguaggio, bravi in tutto con moderazione. Una GPU sono migliaia di core semplici per dati regolari in massa. Una FPGA è un circuito che si configura, per flussi e bassa latenza. Un ASIC è un circuito fatto per un solo compito. Da sinistra a destra cresce il lavoro svolto per joule, e cresce la fatica richiesta. La generalità si paga in energia, l'efficienza in fatica.
+              <a:t>Quattro modi di calcolare, confrontati riga per riga. Una CPU consiste di pochi core complessi, programmabili in qualsiasi linguaggio, competenti in tutto con moderazione. Una GPU consiste di migliaia di core semplici per dati regolari in grande quantità. Una FPGA è un circuito configurabile, adatto a flussi di dati e a bassa latenza. Un ASIC è un circuito fatto per un solo compito. Da sinistra a destra cresce il lavoro svolto per joule, e cresce lo sforzo di progetto richiesto. La generalità si paga in energia, l'efficienza in sforzo; è il compromesso centrale dell'architettura dei calcolatori contemporanea.
 DA COMPRENDERE OGGI: acceleratori GPU e FPGA.
 Per il docente: La generalità si paga in energia; l'efficienza si paga in fatica. Un moderno system on a chip li ha tutti e quattro: il vostro telefono contiene core CPU, una GPU, e circuiti fissi per video e radio.</a:t>
             </a:r>
@@ -1300,8 +1300,8 @@
           <a:p>
             <a:r>
               <a:rPr lang="en-US" dirty="0"/>
-              <a:t>Usate l'ultima colonna della tabella della legge di Amdahl: con processori illimitati resta solo la parte seriale.
-Pensate all'esempio con le due metà che usavano entrambe t0: che cosa impediva loro di correre insieme, e che cosa ha cambiato la ridenominazione?
+              <a:t>Per la prima domanda vale l'ultima colonna della tabella della legge di Amdahl: con processori illimitati resta solo la frazione seriale.
+Per la seconda si ricorda l'esempio con le due metà che usavano entrambe t0: che cosa impediva loro di eseguirsi insieme, e che cosa ha cambiato la ridenominazione.
 Per il docente: 1. Risposta: B. Con n illimitato, S = 1 / (1 - p) = 1 / 0,2 = 5.
 2. Risposta: C. Due valori indipendenti che condividono un nome ricevono registri fisici diversi e si possono calcolare nello stesso momento.</a:t>
             </a:r>
@@ -1391,8 +1391,8 @@
           <a:p>
             <a:r>
               <a:rPr lang="en-US" dirty="0"/>
-              <a:t>Quanti byte sono 256 bit? Dividete i 960 byte per quel numero.
-Scrivete i quattro bit memorizzati come tabella di verità con ingressi a e b, e riconoscete la funzione.
+              <a:t>Per la prima domanda: 256 bit sono 32 byte, e i 960 byte si dividono per quel numero.
+Per la seconda, i quattro bit memorizzati si scrivono come tavola di verità con ingressi a e b, e si riconosce la funzione.
 Per il docente: 1. Risposta: B. 256 bit sono 32 byte per giro: 960 / 32 = 30. Il codice non cambia.
 2. Risposta: B. L'uscita vale 1 ogni volta che almeno un ingresso vale 1: OR.</a:t>
             </a:r>
@@ -1482,7 +1482,7 @@
           <a:p>
             <a:r>
               <a:rPr lang="en-US" dirty="0"/>
-              <a:t>Quattordici termini di questa lezione. Out-of-order execution è l'esecuzione fuori ordine; register renaming è la ridenominazione dei registri; branch prediction è la predizione dei salti. Shared memory e message passing, memoria condivisa e scambio di messaggi, sono i due modelli della programmazione parallela. Alcune parole, kernel, bitstream, soft core, si usano in italiano così come sono.</a:t>
+              <a:t>Quattordici termini di questa lezione. L'out-of-order execution è l'esecuzione fuori ordine; il register renaming è la ridenominazione dei registri; la branch prediction è la predizione dei salti. Memoria condivisa e scambio di messaggi sono i due modelli della programmazione parallela. Diversi termini, kernel, bitstream, soft core, si usano in italiano senza traduzione.</a:t>
             </a:r>
             <a:endParaRPr lang="en-US" dirty="0"/>
           </a:p>
@@ -1570,7 +1570,7 @@
           <a:p>
             <a:r>
               <a:rPr lang="en-US" dirty="0"/>
-              <a:t>Cinque obiettivi. Scrivere l'equazione delle prestazioni e dire quale dei suoi fattori attacca ciascuna tecnica. Spiegare come un processore superscalare fuori ordine esegue più istruzioni per ciclo. Leggere un ciclo scritto con l'estensione vettoriale di RISC-V. Descrivere un supercalcolatore, calcolare uno speed-up con la legge di Amdahl e dire perché il limite è l'energia. E dire in che cosa sono forti una GPU e una FPGA, e quanto costa ciascuna al programmatore.</a:t>
+              <a:t>Cinque risultati di apprendimento. Enunciare l'equazione delle prestazioni e individuare su quale dei suoi fattori agisce ciascuna tecnica. Spiegare come un processore superscalare fuori ordine esegue più istruzioni per ciclo. Leggere un ciclo scritto con l'estensione vettoriale di RISC-V. Descrivere un supercalcolatore, calcolare uno speed-up con la legge di Amdahl, e spiegare perché l'energia è il vincolo decisivo. E dire per che cosa sono adatte una GPU e una FPGA, e che cosa ciascuna chiede al programmatore.</a:t>
             </a:r>
             <a:endParaRPr lang="en-US" dirty="0"/>
           </a:p>
@@ -1658,7 +1658,7 @@
           <a:p>
             <a:r>
               <a:rPr lang="en-US" dirty="0"/>
-              <a:t>Quattro conclusioni. Un'equazione con tre fattori: ogni macchina veloce ne attacca uno, oppure moltiplica i processori. I core superscalari fuori ordine rispettano il contratto dell'insieme di istruzioni ed eseguono molte istruzioni insieme. Vettori, GPU e cluster sfruttano i dati che si possono elaborare in modo indipendente, e la legge di Amdahl dice fin dove si arriva. Le FPGA trasformano una descrizione in un circuito. Il corso finisce qui: da un bit a un supercalcolatore, con un solo insieme di istruzioni.
+              <a:t>Quattro conclusioni. Una sola equazione con tre fattori: ogni macchina veloce ne riduce uno, o moltiplica i processori. I core superscalari fuori ordine onorano il contratto dell'insieme di istruzioni pur eseguendo molte istruzioni insieme. Vettori, GPU e cluster sfruttano dati che si possono elaborare indipendentemente, e la legge di Amdahl dice fin dove arriva questo. Le FPGA trasformano una descrizione in un circuito. Il corso finisce qui: da un singolo bit a un supercalcolatore, con un solo insieme di istruzioni dall'inizio alla fine.
 Stato di apprendimento, riepilogo. DA COMPRENDERE OGGI: l'equazione delle prestazioni; i processori superscalari; le istruzioni vettoriali; HPC e legge di Amdahl; acceleratori GPU e FPGA. DA UTILIZZARE OGGI: il programma completo, gli strumenti di PRG32 (si usa, non si studia, in questo corso). DA COMPRENDERE PIÙ AVANTI: niente. Una slide senza etichetta è contesto: una storia, un esempio, una domanda, un esercizio.
 Per il docente: Il corso finisce qui: da un bit a un supercalcolatore, con un solo insieme di istruzioni. Poi: la visita ai sistemi di calcolo del Dipartimento, e la presentazione dei giochi degli studenti.</a:t>
             </a:r>
@@ -1748,7 +1748,7 @@
           <a:p>
             <a:r>
               <a:rPr lang="en-US" dirty="0"/>
-              <a:t>Il tempo impiegato da un programma è il prodotto di tre numeri: le istruzioni eseguite, i cicli di clock che ciascuna richiede in media, e la durata di un ciclo. Ogni fattore si può attaccare. Meno istruzioni: algoritmi migliori, istruzioni più ricche, vettori. Meno cicli per istruzione: pipeline ed esecuzione superscalare. Un ciclo più corto: transistor più veloci. E quando un processore non basta, più processori. Tenete d'occhio questa equazione: ogni macchina della lezione ne è una risposta diversa.
+              <a:t>Il tempo di esecuzione di un programma è il prodotto di tre grandezze: il numero di istruzioni eseguite, il numero medio di cicli di clock che ciascuna richiede, e la durata di un ciclo. Ogni fattore si può ridurre. Meno istruzioni: algoritmi migliori, istruzioni più ricche, vettori. Meno cicli per istruzione: pipeline ed esecuzione superscalare. Un ciclo più breve: transistor più veloci. E quando un processore non basta più, più processori. Questa equazione organizza la lezione: ogni macchina presentata è una risposta diversa a essa.
 DA COMPRENDERE OGGI: l'equazione delle prestazioni.
 Per il docente: L'equazione delle prestazioni di Patterson e Hennessy. Per il ciclo del riscaldamento (presentazione del codice) sul kit: 3 840 istruzioni, circa 1 ciclo ciascuna, 6,25 nanosecondi per ciclo.</a:t>
             </a:r>
@@ -1838,7 +1838,7 @@
           <a:p>
             <a:r>
               <a:rPr lang="en-US" dirty="0"/>
-              <a:t>Perché non alzare semplicemente la frequenza di clock? Per trent'anni ogni generazione di transistor è stata più piccola e più veloce senza essere più calda per unità di area. Intorno al 2005 questo è finito: oggi un clock più veloce significa più calore di quanto un chip possa smaltire. Le frequenze sono rimaste a pochi gigahertz, e i transistor in più sono stati spesi diversamente: processori più larghi, più core, unità vettoriali, acceleratori. Oggi le prestazioni vengono dal parallelismo, dal fare molte cose insieme.
+              <a:t>Perché non alzare semplicemente la frequenza di clock? Per tre decenni ogni generazione di transistor è stata più piccola e più veloce senza dissipare più calore per unità di superficie. Intorno al 2005 questa scala si è interrotta: un clock più veloce produce ora più calore di quanto un chip possa smaltire. Le frequenze sono rimaste a pochi gigahertz, e i transistor aggiuntivi sono stati spesi diversamente: processori più larghi, più core, unità vettoriali e acceleratori. Le prestazioni vengono ora dal parallelismo, dal fare molte cose insieme, ed è per questo che il resto della lezione tratta di macchine parallele.
 DA COMPRENDERE OGGI: l'equazione delle prestazioni.
 Per il docente: La legge di Moore (più transistor) è proseguita; la scalatura di Dennard (densità di potenza costante) è finita. I 160 MHz del kit sono lenti per scelta: costano milliwatt.</a:t>
             </a:r>
@@ -1928,7 +1928,7 @@
           <a:p>
             <a:r>
               <a:rPr lang="en-US" dirty="0"/>
-              <a:t>Quattro tipi di processore, in ordine di ambizione. Il processore multiciclo termina un'istruzione prima di cominciare la successiva. Quello con pipeline ha più istruzioni in volo, ciascuna in uno stadio diverso, e ne termina al massimo una per ciclo: è il vostro kit. Il superscalare in ordine ha due o più pipeline affiancate. Il superscalare fuori ordine avvia ogni istruzione appena i suoi operandi sono pronti, e arriva a quattro, sei, otto istruzioni per ciclo: è nel vostro portatile e nel vostro telefono.
+              <a:t>Quattro tipi di processore, in ordine di ambizione. Il processore multiciclo completa un'istruzione prima di cominciare la successiva. Il processore a pipeline ha più istruzioni in corso, ciascuna in uno stadio diverso, e ne completa al più una per ciclo; è il kit. Il processore superscalare in ordine ha due o più pipeline affiancate. Il processore superscalare fuori ordine avvia ogni istruzione appena i suoi operandi sono pronti e sostiene quattro, sei o otto istruzioni per ciclo; è il processore di portatili e telefoni.
 DA COMPRENDERE OGGI: i processori superscalari.
 Per il docente: La Lezione 19 ha introdotto la pipeline e nominato i processori superscalari in una riga: questa sezione apre quella riga. La larghezza è il numero di istruzioni che il processore può avviare in un ciclo.</a:t>
             </a:r>
@@ -2018,7 +2018,7 @@
           <a:p>
             <a:r>
               <a:rPr lang="en-US" dirty="0"/>
-              <a:t>L'esecuzione fuori ordine, in quattro tappe. Le istruzioni vengono prelevate e decodificate in ordine, più d'una per ciclo, in una finestra di decine o centinaia. A ogni risultato viene dato un registro fisico nuovo: la ridenominazione. Ogni istruzione viene eseguita appena esistono i suoi operandi, dovunque si trovi nel programma. Infine i risultati vengono confermati nell'ordine del programma, così che, visto da fuori, nessuno ha mai sorpassato. Il modello che avete imparato, un'istruzione dopo l'altra, è conservato esattamente: cambiano solo i tempi.
+              <a:t>L'esecuzione fuori ordine in quattro fasi. Le istruzioni si prelevano e si decodificano nell'ordine del programma, più per ciclo, in una finestra di decine o centinaia. A ogni risultato si assegna un registro fisico nuovo: è la ridenominazione, che elimina le false dipendenze tra usi non correlati dello stesso nome di registro. Ogni istruzione si esegue appena i suoi operandi sono disponibili, ovunque si trovi nel programma. Infine i risultati si consolidano nell'ordine del programma, così che dall'esterno nulla sembri aver sorpassato nulla. Il modello sequenziale di esecuzione imparato nel corso è preservato esattamente; cambiano solo i tempi.
 DA COMPRENDERE OGGI: i processori superscalari.
 Per il docente: L'algoritmo è quello di Tomasulo, progettato nel 1967 per l'unità in virgola mobile dell'IBM System/360 Model 91; il reorder buffer che fa il commit in ordine è arrivato negli anni Ottanta. Il modello del programmatore, quello che avete imparato, è conservato esattamente: è il contratto dell'insieme di istruzioni.</a:t>
             </a:r>
@@ -2108,7 +2108,7 @@
           <a:p>
             <a:r>
               <a:rPr lang="en-US" dirty="0"/>
-              <a:t>Un processore largo incontra un salto ogni poche istruzioni e non può aspettare di conoscerne l'esito. Quindi predice: indovina la direzione dalla storia di quel salto e prosegue lungo l'ipotesi. Se l'ipotesi era giusta, non si perde nulla; se era sbagliata, il lavoro speculativo viene buttato via. Il ciclo del riscaldamento salta all'indietro 959 volte e prosegue una volta: un predittore lo impara subito. I predittori moderni hanno ragione ben più di nove volte su dieci.
+              <a:t>Un processore largo incontra un salto ogni poche istruzioni e non può aspettare di conoscerne l'esito. Perciò predice: deduce la direzione probabile dalla storia di quel salto e prosegue speculativamente lungo la predizione. Se la predizione era corretta non si perde nulla; altrimenti il lavoro speculativo si scarta. Il ciclo del riscaldamento salta all'indietro 959 volte e prosegue una volta, uno schema che qualsiasi predittore impara subito. I predittori moderni hanno ragione ben più di nove volte su dieci, e la loro accuratezza è un fattore principale delle prestazioni.
 DA COMPRENDERE OGGI: i processori superscalari.
 Per il docente: L'esecuzione speculativa ha un lato oscuro: nel 2018 gli attacchi Spectre e Meltdown hanno mostrato che il lavoro buttato via può lasciare comunque nella cache tracce che rivelano segreti. I trucchi per le prestazioni sono anche questioni di sicurezza.</a:t>
             </a:r>
@@ -2198,7 +2198,7 @@
           <a:p>
             <a:r>
               <a:rPr lang="en-US" dirty="0"/>
-              <a:t>Processori RISC-V di questo tipo esistono. La prima riga è il core del vostro kit: in ordine, un'istruzione per ciclo. Gli altri sono core fuori ordine: BOOM di Berkeley e XiangShan dell'Accademia Cinese delle Scienze, entrambi open source; il C910, il P550, Veyron, di aziende. Poiché l'insieme di istruzioni è aperto, chiunque può costruire un core simile, e alcuni sono pubblicati come codice sorgente che potreste leggere.
+              <a:t>Esistono processori RISC-V di questa classe. La prima riga è il core del kit: in ordine, un'istruzione per ciclo. Le altre sono core fuori ordine: BOOM di Berkeley e XiangShan dell'Accademia cinese delle scienze, entrambi open source; e il C910, il P550 e Veyron, dall'industria. Poiché l'insieme di istruzioni è aperto, chiunque può costruire un core del genere, e alcuni sono pubblicati come codice sorgente che uno studente potrebbe leggere.
 DA COMPRENDERE OGGI: i processori superscalari.
 Per il docente: BOOM è la Berkeley Out-of-Order Machine. Poiché l'insieme di istruzioni è aperto, chiunque può costruire un core simile, e parecchi sono pubblicati come codice sorgente che uno studente può leggere: non ha precedenti tra le architetture commerciali. L'elenco invecchia in fretta: aggiornatelo.</a:t>
             </a:r>
@@ -2288,7 +2288,7 @@
           <a:p>
             <a:r>
               <a:rPr lang="en-US" dirty="0"/>
-              <a:t>Una distinzione che organizza l'intero corso. L'architettura è il contratto: le istruzioni, i registri, che cosa fa ogni istruzione. La microarchitettura è un modo di rispettare il contratto: stadi, larghezza, predittori, cache. La add che avete scritto per un microcontrollore è la stessa add di un core da server. Verm1 girerebbe senza modifiche su qualunque core della slide precedente. Per questo un insieme di istruzioni, una volta imparato, è una conoscenza che dura.
+              <a:t>Una distinzione che organizza l'intero corso. L'architettura è il contratto: le istruzioni, i registri, e l'effetto di ciascuna istruzione. La microarchitettura è un modo particolare di onorare quel contratto: stadi della pipeline, larghezza, predittori, cache. L'add scritto per un microcontrollore è lo stesso add su un core da server, e Verm1 girerebbe invariato su qualsiasi core della slide precedente. Questa separazione è il motivo per cui un insieme di istruzioni, una volta imparato, è una conoscenza duratura, e per cui il corso ha potuto insegnare l'architettura su una piccola macchina senza perdita di generalità.
 DA COMPRENDERE OGGI: i processori superscalari.
 Per il docente: La distinzione che organizza l'intero corso: le Lezioni dalla 02 alla 22 hanno insegnato l'architettura; il kit è una piccola microarchitettura.</a:t>
             </a:r>
@@ -3368,7 +3368,7 @@
                 <a:ea typeface="Calibri" pitchFamily="34" charset="-122"/>
                 <a:cs typeface="Calibri" pitchFamily="34" charset="-120"/>
               </a:rPr>
-              <a:t>24-Architettura_dei_Calcolatori-Superscalari_HPC_GPU_FPGA-Codice.pptx</a:t>
+              <a:t>24-Architettura_dei_Calcolatori-Superscalari_HPC_GPU_FPGA-Lab.pptx</a:t>
             </a:r>
             <a:endParaRPr lang="en-US" sz="1300" dirty="0"/>
           </a:p>

--- a/it/slides/24-Architettura_dei_Calcolatori-Superscalari_HPC_GPU_FPGA.pptx
+++ b/it/slides/24-Architettura_dei_Calcolatori-Superscalari_HPC_GPU_FPGA.pptx
@@ -126,19 +126,19 @@
   <p:extLst>
     <p:ext uri="{521415D9-36F7-43E2-AB2F-B90AF26B5E84}">
       <p14:sectionLst xmlns:p14="http://schemas.microsoft.com/office/powerpoint/2010/main">
-        <p14:section name="Apertura" id="{63a2164d-a6c1-339f-a895-771fab47ff77}">
+        <p14:section name="Apertura" id="{0e69b837-8755-cb2c-0907-a3a8465b05b2}">
           <p14:sldIdLst>
             <p14:sldId id="256"/>
             <p14:sldId id="257"/>
           </p14:sldIdLst>
         </p14:section>
-        <p14:section name="Riscaldamento sulla macchina" id="{687d74da-7ebe-7ece-035e-d516b9d8f507}">
+        <p14:section name="Riscaldamento sulla macchina" id="{ee9488af-4aa6-c12a-3882-be803686e1e8}">
           <p14:sldIdLst>
             <p14:sldId id="258"/>
             <p14:sldId id="259"/>
           </p14:sldIdLst>
         </p14:section>
-        <p14:section name="Processori superscalari" id="{acd58236-0674-028b-2d86-3c0e6871aab5}">
+        <p14:section name="Processori superscalari" id="{f0ef9733-6b12-73b8-7a0e-4ff06fb9d2c0}">
           <p14:sldIdLst>
             <p14:sldId id="260"/>
             <p14:sldId id="261"/>
@@ -147,7 +147,7 @@
             <p14:sldId id="264"/>
           </p14:sldIdLst>
         </p14:section>
-        <p14:section name="Calcolo ad alte prestazioni" id="{43238339-bf95-436d-1aa9-d4670addac1b}">
+        <p14:section name="Calcolo ad alte prestazioni" id="{0520913f-b555-b033-df54-d83f2fa83412}">
           <p14:sldIdLst>
             <p14:sldId id="265"/>
             <p14:sldId id="266"/>
@@ -155,18 +155,18 @@
             <p14:sldId id="268"/>
           </p14:sldIdLst>
         </p14:section>
-        <p14:section name="Acceleratori GPU" id="{61466097-d39c-98ef-bb79-8908b0671794}">
+        <p14:section name="Acceleratori GPU" id="{8f1ac134-ca88-dc7d-f92c-9e92b29632aa}">
           <p14:sldIdLst>
             <p14:sldId id="269"/>
           </p14:sldIdLst>
         </p14:section>
-        <p14:section name="Acceleratori FPGA" id="{2c52bcc5-b7b1-636d-6cfd-7810bf5a601b}">
+        <p14:section name="Acceleratori FPGA" id="{6f39b6b9-8b57-62f3-40b4-fe4e844f28fa}">
           <p14:sldIdLst>
             <p14:sldId id="270"/>
             <p14:sldId id="271"/>
           </p14:sldIdLst>
         </p14:section>
-        <p14:section name="Ritorno alla macchina" id="{dcfb790d-fb46-fe8f-3ff9-1e5aba3703f2}">
+        <p14:section name="Ritorno alla macchina" id="{633779d7-3c29-2867-19f2-437bf2863081}">
           <p14:sldIdLst>
             <p14:sldId id="272"/>
             <p14:sldId id="273"/>

--- a/it/slides/24-Architettura_dei_Calcolatori-Superscalari_HPC_GPU_FPGA.pptx
+++ b/it/slides/24-Architettura_dei_Calcolatori-Superscalari_HPC_GPU_FPGA.pptx
@@ -126,19 +126,19 @@
   <p:extLst>
     <p:ext uri="{521415D9-36F7-43E2-AB2F-B90AF26B5E84}">
       <p14:sectionLst xmlns:p14="http://schemas.microsoft.com/office/powerpoint/2010/main">
-        <p14:section name="Apertura" id="{0e69b837-8755-cb2c-0907-a3a8465b05b2}">
+        <p14:section name="Apertura" id="{7307dced-7c41-5eb6-59b0-300f2d497e3d}">
           <p14:sldIdLst>
             <p14:sldId id="256"/>
             <p14:sldId id="257"/>
           </p14:sldIdLst>
         </p14:section>
-        <p14:section name="Riscaldamento sulla macchina" id="{ee9488af-4aa6-c12a-3882-be803686e1e8}">
+        <p14:section name="Riscaldamento sulla macchina" id="{ca8f0351-6fe7-80ba-8845-4736e098e83c}">
           <p14:sldIdLst>
             <p14:sldId id="258"/>
             <p14:sldId id="259"/>
           </p14:sldIdLst>
         </p14:section>
-        <p14:section name="Processori superscalari" id="{f0ef9733-6b12-73b8-7a0e-4ff06fb9d2c0}">
+        <p14:section name="Processori superscalari" id="{9c047856-a03b-6c6b-6af6-c241e79816cc}">
           <p14:sldIdLst>
             <p14:sldId id="260"/>
             <p14:sldId id="261"/>
@@ -147,7 +147,7 @@
             <p14:sldId id="264"/>
           </p14:sldIdLst>
         </p14:section>
-        <p14:section name="Calcolo ad alte prestazioni" id="{0520913f-b555-b033-df54-d83f2fa83412}">
+        <p14:section name="Calcolo ad alte prestazioni" id="{d44b2e49-0ff3-0baf-a21d-81e1053bd3d1}">
           <p14:sldIdLst>
             <p14:sldId id="265"/>
             <p14:sldId id="266"/>
@@ -155,18 +155,18 @@
             <p14:sldId id="268"/>
           </p14:sldIdLst>
         </p14:section>
-        <p14:section name="Acceleratori GPU" id="{8f1ac134-ca88-dc7d-f92c-9e92b29632aa}">
+        <p14:section name="Acceleratori GPU" id="{7b53bf13-621b-edc8-479c-942defc4b0ec}">
           <p14:sldIdLst>
             <p14:sldId id="269"/>
           </p14:sldIdLst>
         </p14:section>
-        <p14:section name="Acceleratori FPGA" id="{6f39b6b9-8b57-62f3-40b4-fe4e844f28fa}">
+        <p14:section name="Acceleratori FPGA" id="{3b8847f0-40e4-5314-6294-8f63e2102269}">
           <p14:sldIdLst>
             <p14:sldId id="270"/>
             <p14:sldId id="271"/>
           </p14:sldIdLst>
         </p14:section>
-        <p14:section name="Ritorno alla macchina" id="{633779d7-3c29-2867-19f2-437bf2863081}">
+        <p14:section name="Ritorno alla macchina" id="{dcf27405-6b62-ee1f-4ef9-7a7a0d62411a}">
           <p14:sldIdLst>
             <p14:sldId id="272"/>
             <p14:sldId id="273"/>
@@ -581,6 +581,7 @@
               <a:t>L'ultima lezione guarda oltre il kit. Tutto ciò che si è imparato finora lo si è imparato su un piccolo processore che esegue un'istruzione alla volta. Le macchine che prevedono il tempo o addestrano una rete neurale eseguono istruzioni dello stesso tipo, in numero enorme e contemporaneamente. La lezione prende un piccolo ciclo di Verm1 e lo segue su quattro classi di macchine, così che l'intero panorama del calcolo ad alte prestazioni si veda attraverso un solo esempio familiare. La domanda di Seymour Cray su buoi e galline tornerà, e non ha una risposta unica. Questa lezione è uno sguardo d'insieme e non fa parte della prova intercorso.
 Stato di apprendimento: DA COMPRENDERE OGGI, alla fine di questa lezione lo spiegate, lo seguite passo passo e lo applicate da soli; DA UTILIZZARE OGGI, oggi seguite e usate la ricetta; come funziona dentro si spiega più avanti, o non fa parte del corso; DA COMPRENDERE PIÙ AVANTI, riconoscete il nome e lo scopo; lo spiega una lezione successiva. Una slide senza etichetta è contesto: una storia, un esempio, una domanda, un esercizio.
 Stato di apprendimento di questa lezione. DA COMPRENDERE OGGI: l'equazione delle prestazioni; i processori superscalari; le istruzioni vettoriali; HPC e legge di Amdahl; acceleratori GPU e FPGA. DA UTILIZZARE OGGI: il programma completo, gli strumenti di PRG32 (si usa, non si studia, in questo corso). DA COMPRENDERE PIÙ AVANTI: niente. Una slide senza etichetta è contesto: una storia, un esempio, una domanda, un esercizio.
+Percorso. I risultati di oggi: (1) usare l'equazione delle prestazioni per dire dove va il tempo; (2) spiegare esecuzione superscalare, vettori, GPU e FPGA come risposte a essa; (3) limitare l'accelerazione parallela con la legge di Amdahl. Si appoggia su: solo ciò che ha preparato la Lezione 01. È l'ultima lezione del corso.
 Per il docente: Lezione conclusiva e di prospettiva, nuova nel 2026/27: non ha una presentazione italiana di origine. Parte da un ciclo di Verm1 e lo segue su quattro tipi di macchina. Prepara la visita ai sistemi di supercalcolo del Dipartimento. Non fa parte della prova intercorso. I listati vettoriali RISC-V sono provati su QEMU (tools/tests/vector_qemu.S); i frammenti CUDA e Verilog sono forme standard da manuale, non compilate per queste slide. Le cifre sui supercalcolatori sono arrotondate e risalgono alle liste TOP500 dal 2022 al 2025: controllate la lista corrente prima della lezione.</a:t>
             </a:r>
             <a:endParaRPr lang="en-US" dirty="0"/>
@@ -1659,7 +1660,7 @@
             <a:r>
               <a:rPr lang="en-US" dirty="0"/>
               <a:t>Quattro conclusioni. Una sola equazione con tre fattori: ogni macchina veloce ne riduce uno, o moltiplica i processori. I core superscalari fuori ordine onorano il contratto dell'insieme di istruzioni pur eseguendo molte istruzioni insieme. Vettori, GPU e cluster sfruttano dati che si possono elaborare indipendentemente, e la legge di Amdahl dice fin dove arriva questo. Le FPGA trasformano una descrizione in un circuito. Il corso finisce qui: da un singolo bit a un supercalcolatore, con un solo insieme di istruzioni dall'inizio alla fine.
-Stato di apprendimento, riepilogo. DA COMPRENDERE OGGI: l'equazione delle prestazioni; i processori superscalari; le istruzioni vettoriali; HPC e legge di Amdahl; acceleratori GPU e FPGA. DA UTILIZZARE OGGI: il programma completo, gli strumenti di PRG32 (si usa, non si studia, in questo corso). DA COMPRENDERE PIÙ AVANTI: niente. Una slide senza etichetta è contesto: una storia, un esempio, una domanda, un esercizio.
+Stato di apprendimento, riepilogo. DA COMPRENDERE OGGI: l'equazione delle prestazioni; i processori superscalari; le istruzioni vettoriali; HPC e legge di Amdahl; acceleratori GPU e FPGA. DA UTILIZZARE OGGI: il programma completo, gli strumenti di PRG32 (si usa, non si studia, in questo corso). DA COMPRENDERE PIÙ AVANTI: niente. Una slide senza etichetta è contesto: una storia, un esempio, una domanda, un esercizio. Il filo della lezione: Il ciclo che svuota la mappa di Verm1 si può rendere più veloce in cinque modi, e ciascuno è una macchina a sé. La domanda dell'ingegnere non è quale macchina sia la più veloce, ma quale sia sufficiente. Biglietto d'uscita (da due a quattro minuti, da soli, su carta): 1. Il ciclo che svuota la mappa di Verm1 esegue 3.840 istruzioni a circa un ciclo ciascuna con un clock a 160 MHz. Quanto dura? Nominate un modo per ridurre ciascuno dei tre fattori. 2. Un programma è parallelo all'80%. Con tutti i processori che si vuole, qual è l'accelerazione massima, e perché?
 Per il docente: Il corso finisce qui: da un bit a un supercalcolatore, con un solo insieme di istruzioni. Poi: la visita ai sistemi di calcolo del Dipartimento, e la presentazione dei giochi degli studenti.</a:t>
             </a:r>
             <a:endParaRPr lang="en-US" dirty="0"/>
